--- a/PPT/머신러닝.pptx
+++ b/PPT/머신러닝.pptx
@@ -5,7 +5,7 @@
     <p:sldMasterId id="2147483648" r:id="rId1"/>
   </p:sldMasterIdLst>
   <p:notesMasterIdLst>
-    <p:notesMasterId r:id="rId34"/>
+    <p:notesMasterId r:id="rId38"/>
   </p:notesMasterIdLst>
   <p:sldIdLst>
     <p:sldId id="334" r:id="rId2"/>
@@ -15,31 +15,35 @@
     <p:sldId id="370" r:id="rId6"/>
     <p:sldId id="371" r:id="rId7"/>
     <p:sldId id="373" r:id="rId8"/>
-    <p:sldId id="384" r:id="rId9"/>
-    <p:sldId id="385" r:id="rId10"/>
-    <p:sldId id="383" r:id="rId11"/>
-    <p:sldId id="374" r:id="rId12"/>
-    <p:sldId id="375" r:id="rId13"/>
-    <p:sldId id="376" r:id="rId14"/>
-    <p:sldId id="377" r:id="rId15"/>
-    <p:sldId id="378" r:id="rId16"/>
-    <p:sldId id="380" r:id="rId17"/>
-    <p:sldId id="379" r:id="rId18"/>
-    <p:sldId id="381" r:id="rId19"/>
-    <p:sldId id="382" r:id="rId20"/>
-    <p:sldId id="386" r:id="rId21"/>
-    <p:sldId id="387" r:id="rId22"/>
-    <p:sldId id="388" r:id="rId23"/>
-    <p:sldId id="389" r:id="rId24"/>
-    <p:sldId id="390" r:id="rId25"/>
-    <p:sldId id="391" r:id="rId26"/>
-    <p:sldId id="392" r:id="rId27"/>
-    <p:sldId id="395" r:id="rId28"/>
-    <p:sldId id="396" r:id="rId29"/>
-    <p:sldId id="394" r:id="rId30"/>
-    <p:sldId id="393" r:id="rId31"/>
-    <p:sldId id="397" r:id="rId32"/>
-    <p:sldId id="321" r:id="rId33"/>
+    <p:sldId id="402" r:id="rId9"/>
+    <p:sldId id="384" r:id="rId10"/>
+    <p:sldId id="385" r:id="rId11"/>
+    <p:sldId id="383" r:id="rId12"/>
+    <p:sldId id="374" r:id="rId13"/>
+    <p:sldId id="398" r:id="rId14"/>
+    <p:sldId id="375" r:id="rId15"/>
+    <p:sldId id="399" r:id="rId16"/>
+    <p:sldId id="376" r:id="rId17"/>
+    <p:sldId id="401" r:id="rId18"/>
+    <p:sldId id="377" r:id="rId19"/>
+    <p:sldId id="400" r:id="rId20"/>
+    <p:sldId id="378" r:id="rId21"/>
+    <p:sldId id="380" r:id="rId22"/>
+    <p:sldId id="379" r:id="rId23"/>
+    <p:sldId id="381" r:id="rId24"/>
+    <p:sldId id="386" r:id="rId25"/>
+    <p:sldId id="387" r:id="rId26"/>
+    <p:sldId id="388" r:id="rId27"/>
+    <p:sldId id="389" r:id="rId28"/>
+    <p:sldId id="390" r:id="rId29"/>
+    <p:sldId id="391" r:id="rId30"/>
+    <p:sldId id="392" r:id="rId31"/>
+    <p:sldId id="395" r:id="rId32"/>
+    <p:sldId id="396" r:id="rId33"/>
+    <p:sldId id="394" r:id="rId34"/>
+    <p:sldId id="393" r:id="rId35"/>
+    <p:sldId id="397" r:id="rId36"/>
+    <p:sldId id="321" r:id="rId37"/>
   </p:sldIdLst>
   <p:sldSz cx="9144000" cy="6858000" type="screen4x3"/>
   <p:notesSz cx="6858000" cy="9144000"/>
@@ -243,7 +247,7 @@
             <a:fld id="{65771C21-3757-4199-83DE-22960358A2A5}" type="datetimeFigureOut">
               <a:rPr lang="ko-KR" altLang="en-US" smtClean="0"/>
               <a:pPr/>
-              <a:t>2025-10-17</a:t>
+              <a:t>2026-05-08</a:t>
             </a:fld>
             <a:endParaRPr lang="ko-KR" altLang="en-US"/>
           </a:p>
@@ -725,7 +729,7 @@
     </p:spTree>
     <p:extLst>
       <p:ext uri="{BB962C8B-B14F-4D97-AF65-F5344CB8AC3E}">
-        <p14:creationId xmlns:p14="http://schemas.microsoft.com/office/powerpoint/2010/main" val="2217623525"/>
+        <p14:creationId xmlns:p14="http://schemas.microsoft.com/office/powerpoint/2010/main" val="1624874548"/>
       </p:ext>
     </p:extLst>
   </p:cSld>
@@ -836,7 +840,7 @@
     </p:spTree>
     <p:extLst>
       <p:ext uri="{BB962C8B-B14F-4D97-AF65-F5344CB8AC3E}">
-        <p14:creationId xmlns:p14="http://schemas.microsoft.com/office/powerpoint/2010/main" val="866547110"/>
+        <p14:creationId xmlns:p14="http://schemas.microsoft.com/office/powerpoint/2010/main" val="2217623525"/>
       </p:ext>
     </p:extLst>
   </p:cSld>
@@ -947,7 +951,7 @@
     </p:spTree>
     <p:extLst>
       <p:ext uri="{BB962C8B-B14F-4D97-AF65-F5344CB8AC3E}">
-        <p14:creationId xmlns:p14="http://schemas.microsoft.com/office/powerpoint/2010/main" val="1034280110"/>
+        <p14:creationId xmlns:p14="http://schemas.microsoft.com/office/powerpoint/2010/main" val="3156041442"/>
       </p:ext>
     </p:extLst>
   </p:cSld>
@@ -1058,7 +1062,7 @@
     </p:spTree>
     <p:extLst>
       <p:ext uri="{BB962C8B-B14F-4D97-AF65-F5344CB8AC3E}">
-        <p14:creationId xmlns:p14="http://schemas.microsoft.com/office/powerpoint/2010/main" val="1940627111"/>
+        <p14:creationId xmlns:p14="http://schemas.microsoft.com/office/powerpoint/2010/main" val="866547110"/>
       </p:ext>
     </p:extLst>
   </p:cSld>
@@ -1169,7 +1173,7 @@
     </p:spTree>
     <p:extLst>
       <p:ext uri="{BB962C8B-B14F-4D97-AF65-F5344CB8AC3E}">
-        <p14:creationId xmlns:p14="http://schemas.microsoft.com/office/powerpoint/2010/main" val="4112940836"/>
+        <p14:creationId xmlns:p14="http://schemas.microsoft.com/office/powerpoint/2010/main" val="1694860854"/>
       </p:ext>
     </p:extLst>
   </p:cSld>
@@ -1280,7 +1284,7 @@
     </p:spTree>
     <p:extLst>
       <p:ext uri="{BB962C8B-B14F-4D97-AF65-F5344CB8AC3E}">
-        <p14:creationId xmlns:p14="http://schemas.microsoft.com/office/powerpoint/2010/main" val="1717717262"/>
+        <p14:creationId xmlns:p14="http://schemas.microsoft.com/office/powerpoint/2010/main" val="1034280110"/>
       </p:ext>
     </p:extLst>
   </p:cSld>
@@ -1391,7 +1395,7 @@
     </p:spTree>
     <p:extLst>
       <p:ext uri="{BB962C8B-B14F-4D97-AF65-F5344CB8AC3E}">
-        <p14:creationId xmlns:p14="http://schemas.microsoft.com/office/powerpoint/2010/main" val="3218844871"/>
+        <p14:creationId xmlns:p14="http://schemas.microsoft.com/office/powerpoint/2010/main" val="1538135345"/>
       </p:ext>
     </p:extLst>
   </p:cSld>
@@ -1502,7 +1506,7 @@
     </p:spTree>
     <p:extLst>
       <p:ext uri="{BB962C8B-B14F-4D97-AF65-F5344CB8AC3E}">
-        <p14:creationId xmlns:p14="http://schemas.microsoft.com/office/powerpoint/2010/main" val="2438719364"/>
+        <p14:creationId xmlns:p14="http://schemas.microsoft.com/office/powerpoint/2010/main" val="1940627111"/>
       </p:ext>
     </p:extLst>
   </p:cSld>
@@ -1613,7 +1617,7 @@
     </p:spTree>
     <p:extLst>
       <p:ext uri="{BB962C8B-B14F-4D97-AF65-F5344CB8AC3E}">
-        <p14:creationId xmlns:p14="http://schemas.microsoft.com/office/powerpoint/2010/main" val="1128584888"/>
+        <p14:creationId xmlns:p14="http://schemas.microsoft.com/office/powerpoint/2010/main" val="1648264634"/>
       </p:ext>
     </p:extLst>
   </p:cSld>
@@ -1724,7 +1728,7 @@
     </p:spTree>
     <p:extLst>
       <p:ext uri="{BB962C8B-B14F-4D97-AF65-F5344CB8AC3E}">
-        <p14:creationId xmlns:p14="http://schemas.microsoft.com/office/powerpoint/2010/main" val="3108347886"/>
+        <p14:creationId xmlns:p14="http://schemas.microsoft.com/office/powerpoint/2010/main" val="4112940836"/>
       </p:ext>
     </p:extLst>
   </p:cSld>
@@ -1946,7 +1950,7 @@
     </p:spTree>
     <p:extLst>
       <p:ext uri="{BB962C8B-B14F-4D97-AF65-F5344CB8AC3E}">
-        <p14:creationId xmlns:p14="http://schemas.microsoft.com/office/powerpoint/2010/main" val="3334310260"/>
+        <p14:creationId xmlns:p14="http://schemas.microsoft.com/office/powerpoint/2010/main" val="1717717262"/>
       </p:ext>
     </p:extLst>
   </p:cSld>
@@ -2057,7 +2061,7 @@
     </p:spTree>
     <p:extLst>
       <p:ext uri="{BB962C8B-B14F-4D97-AF65-F5344CB8AC3E}">
-        <p14:creationId xmlns:p14="http://schemas.microsoft.com/office/powerpoint/2010/main" val="1967041731"/>
+        <p14:creationId xmlns:p14="http://schemas.microsoft.com/office/powerpoint/2010/main" val="3218844871"/>
       </p:ext>
     </p:extLst>
   </p:cSld>
@@ -2168,7 +2172,7 @@
     </p:spTree>
     <p:extLst>
       <p:ext uri="{BB962C8B-B14F-4D97-AF65-F5344CB8AC3E}">
-        <p14:creationId xmlns:p14="http://schemas.microsoft.com/office/powerpoint/2010/main" val="1185048306"/>
+        <p14:creationId xmlns:p14="http://schemas.microsoft.com/office/powerpoint/2010/main" val="2438719364"/>
       </p:ext>
     </p:extLst>
   </p:cSld>
@@ -2279,7 +2283,7 @@
     </p:spTree>
     <p:extLst>
       <p:ext uri="{BB962C8B-B14F-4D97-AF65-F5344CB8AC3E}">
-        <p14:creationId xmlns:p14="http://schemas.microsoft.com/office/powerpoint/2010/main" val="2202493251"/>
+        <p14:creationId xmlns:p14="http://schemas.microsoft.com/office/powerpoint/2010/main" val="3108347886"/>
       </p:ext>
     </p:extLst>
   </p:cSld>
@@ -2390,7 +2394,7 @@
     </p:spTree>
     <p:extLst>
       <p:ext uri="{BB962C8B-B14F-4D97-AF65-F5344CB8AC3E}">
-        <p14:creationId xmlns:p14="http://schemas.microsoft.com/office/powerpoint/2010/main" val="2672299156"/>
+        <p14:creationId xmlns:p14="http://schemas.microsoft.com/office/powerpoint/2010/main" val="3334310260"/>
       </p:ext>
     </p:extLst>
   </p:cSld>
@@ -2501,7 +2505,7 @@
     </p:spTree>
     <p:extLst>
       <p:ext uri="{BB962C8B-B14F-4D97-AF65-F5344CB8AC3E}">
-        <p14:creationId xmlns:p14="http://schemas.microsoft.com/office/powerpoint/2010/main" val="1885565503"/>
+        <p14:creationId xmlns:p14="http://schemas.microsoft.com/office/powerpoint/2010/main" val="1967041731"/>
       </p:ext>
     </p:extLst>
   </p:cSld>
@@ -2612,7 +2616,7 @@
     </p:spTree>
     <p:extLst>
       <p:ext uri="{BB962C8B-B14F-4D97-AF65-F5344CB8AC3E}">
-        <p14:creationId xmlns:p14="http://schemas.microsoft.com/office/powerpoint/2010/main" val="1531423014"/>
+        <p14:creationId xmlns:p14="http://schemas.microsoft.com/office/powerpoint/2010/main" val="1185048306"/>
       </p:ext>
     </p:extLst>
   </p:cSld>
@@ -2723,7 +2727,7 @@
     </p:spTree>
     <p:extLst>
       <p:ext uri="{BB962C8B-B14F-4D97-AF65-F5344CB8AC3E}">
-        <p14:creationId xmlns:p14="http://schemas.microsoft.com/office/powerpoint/2010/main" val="3517562983"/>
+        <p14:creationId xmlns:p14="http://schemas.microsoft.com/office/powerpoint/2010/main" val="2202493251"/>
       </p:ext>
     </p:extLst>
   </p:cSld>
@@ -2834,7 +2838,7 @@
     </p:spTree>
     <p:extLst>
       <p:ext uri="{BB962C8B-B14F-4D97-AF65-F5344CB8AC3E}">
-        <p14:creationId xmlns:p14="http://schemas.microsoft.com/office/powerpoint/2010/main" val="524456945"/>
+        <p14:creationId xmlns:p14="http://schemas.microsoft.com/office/powerpoint/2010/main" val="2672299156"/>
       </p:ext>
     </p:extLst>
   </p:cSld>
@@ -2945,7 +2949,7 @@
     </p:spTree>
     <p:extLst>
       <p:ext uri="{BB962C8B-B14F-4D97-AF65-F5344CB8AC3E}">
-        <p14:creationId xmlns:p14="http://schemas.microsoft.com/office/powerpoint/2010/main" val="4187978868"/>
+        <p14:creationId xmlns:p14="http://schemas.microsoft.com/office/powerpoint/2010/main" val="1885565503"/>
       </p:ext>
     </p:extLst>
   </p:cSld>
@@ -3167,7 +3171,7 @@
     </p:spTree>
     <p:extLst>
       <p:ext uri="{BB962C8B-B14F-4D97-AF65-F5344CB8AC3E}">
-        <p14:creationId xmlns:p14="http://schemas.microsoft.com/office/powerpoint/2010/main" val="3214566500"/>
+        <p14:creationId xmlns:p14="http://schemas.microsoft.com/office/powerpoint/2010/main" val="1531423014"/>
       </p:ext>
     </p:extLst>
   </p:cSld>
@@ -3270,6 +3274,450 @@
               <a:rPr lang="ko-KR" altLang="en-US" smtClean="0"/>
               <a:pPr/>
               <a:t>32</a:t>
+            </a:fld>
+            <a:endParaRPr lang="ko-KR" altLang="en-US"/>
+          </a:p>
+        </p:txBody>
+      </p:sp>
+    </p:spTree>
+    <p:extLst>
+      <p:ext uri="{BB962C8B-B14F-4D97-AF65-F5344CB8AC3E}">
+        <p14:creationId xmlns:p14="http://schemas.microsoft.com/office/powerpoint/2010/main" val="3517562983"/>
+      </p:ext>
+    </p:extLst>
+  </p:cSld>
+  <p:clrMapOvr>
+    <a:masterClrMapping/>
+  </p:clrMapOvr>
+</p:notes>
+</file>
+
+<file path=ppt/notesSlides/notesSlide32.xml><?xml version="1.0" encoding="utf-8"?>
+<p:notes xmlns:a="http://schemas.openxmlformats.org/drawingml/2006/main" xmlns:r="http://schemas.openxmlformats.org/officeDocument/2006/relationships" xmlns:p="http://schemas.openxmlformats.org/presentationml/2006/main">
+  <p:cSld>
+    <p:spTree>
+      <p:nvGrpSpPr>
+        <p:cNvPr id="1" name=""/>
+        <p:cNvGrpSpPr/>
+        <p:nvPr/>
+      </p:nvGrpSpPr>
+      <p:grpSpPr>
+        <a:xfrm>
+          <a:off x="0" y="0"/>
+          <a:ext cx="0" cy="0"/>
+          <a:chOff x="0" y="0"/>
+          <a:chExt cx="0" cy="0"/>
+        </a:xfrm>
+      </p:grpSpPr>
+      <p:sp>
+        <p:nvSpPr>
+          <p:cNvPr id="2" name="슬라이드 이미지 개체 틀 1"/>
+          <p:cNvSpPr>
+            <a:spLocks noGrp="1" noRot="1" noChangeAspect="1"/>
+          </p:cNvSpPr>
+          <p:nvPr>
+            <p:ph type="sldImg"/>
+          </p:nvPr>
+        </p:nvSpPr>
+        <p:spPr/>
+      </p:sp>
+      <p:sp>
+        <p:nvSpPr>
+          <p:cNvPr id="3" name="슬라이드 노트 개체 틀 2"/>
+          <p:cNvSpPr>
+            <a:spLocks noGrp="1"/>
+          </p:cNvSpPr>
+          <p:nvPr>
+            <p:ph type="body" idx="1"/>
+          </p:nvPr>
+        </p:nvSpPr>
+        <p:spPr/>
+        <p:txBody>
+          <a:bodyPr>
+            <a:normAutofit/>
+          </a:bodyPr>
+          <a:lstStyle/>
+          <a:p>
+            <a:pPr marL="0" marR="0" indent="0" algn="l" defTabSz="914400" rtl="0" eaLnBrk="1" fontAlgn="auto" latinLnBrk="1" hangingPunct="1">
+              <a:lnSpc>
+                <a:spcPct val="100000"/>
+              </a:lnSpc>
+              <a:spcBef>
+                <a:spcPts val="0"/>
+              </a:spcBef>
+              <a:spcAft>
+                <a:spcPts val="0"/>
+              </a:spcAft>
+              <a:buClrTx/>
+              <a:buSzTx/>
+              <a:buFontTx/>
+              <a:buNone/>
+              <a:tabLst/>
+              <a:defRPr/>
+            </a:pPr>
+            <a:r>
+              <a:rPr lang="en-US" altLang="ko-KR" sz="1200" dirty="0"/>
+              <a:t>http://minheeblog.tistory.com/category/PPT</a:t>
+            </a:r>
+            <a:endParaRPr lang="ko-KR" altLang="en-US" sz="1200" dirty="0"/>
+          </a:p>
+          <a:p>
+            <a:endParaRPr lang="ko-KR" altLang="en-US" dirty="0"/>
+          </a:p>
+        </p:txBody>
+      </p:sp>
+      <p:sp>
+        <p:nvSpPr>
+          <p:cNvPr id="4" name="슬라이드 번호 개체 틀 3"/>
+          <p:cNvSpPr>
+            <a:spLocks noGrp="1"/>
+          </p:cNvSpPr>
+          <p:nvPr>
+            <p:ph type="sldNum" sz="quarter" idx="10"/>
+          </p:nvPr>
+        </p:nvSpPr>
+        <p:spPr/>
+        <p:txBody>
+          <a:bodyPr/>
+          <a:lstStyle/>
+          <a:p>
+            <a:fld id="{04A4E647-5A0F-41E6-A0EF-B58D8C1C6CD4}" type="slidenum">
+              <a:rPr lang="ko-KR" altLang="en-US" smtClean="0"/>
+              <a:pPr/>
+              <a:t>33</a:t>
+            </a:fld>
+            <a:endParaRPr lang="ko-KR" altLang="en-US"/>
+          </a:p>
+        </p:txBody>
+      </p:sp>
+    </p:spTree>
+    <p:extLst>
+      <p:ext uri="{BB962C8B-B14F-4D97-AF65-F5344CB8AC3E}">
+        <p14:creationId xmlns:p14="http://schemas.microsoft.com/office/powerpoint/2010/main" val="524456945"/>
+      </p:ext>
+    </p:extLst>
+  </p:cSld>
+  <p:clrMapOvr>
+    <a:masterClrMapping/>
+  </p:clrMapOvr>
+</p:notes>
+</file>
+
+<file path=ppt/notesSlides/notesSlide33.xml><?xml version="1.0" encoding="utf-8"?>
+<p:notes xmlns:a="http://schemas.openxmlformats.org/drawingml/2006/main" xmlns:r="http://schemas.openxmlformats.org/officeDocument/2006/relationships" xmlns:p="http://schemas.openxmlformats.org/presentationml/2006/main">
+  <p:cSld>
+    <p:spTree>
+      <p:nvGrpSpPr>
+        <p:cNvPr id="1" name=""/>
+        <p:cNvGrpSpPr/>
+        <p:nvPr/>
+      </p:nvGrpSpPr>
+      <p:grpSpPr>
+        <a:xfrm>
+          <a:off x="0" y="0"/>
+          <a:ext cx="0" cy="0"/>
+          <a:chOff x="0" y="0"/>
+          <a:chExt cx="0" cy="0"/>
+        </a:xfrm>
+      </p:grpSpPr>
+      <p:sp>
+        <p:nvSpPr>
+          <p:cNvPr id="2" name="슬라이드 이미지 개체 틀 1"/>
+          <p:cNvSpPr>
+            <a:spLocks noGrp="1" noRot="1" noChangeAspect="1"/>
+          </p:cNvSpPr>
+          <p:nvPr>
+            <p:ph type="sldImg"/>
+          </p:nvPr>
+        </p:nvSpPr>
+        <p:spPr/>
+      </p:sp>
+      <p:sp>
+        <p:nvSpPr>
+          <p:cNvPr id="3" name="슬라이드 노트 개체 틀 2"/>
+          <p:cNvSpPr>
+            <a:spLocks noGrp="1"/>
+          </p:cNvSpPr>
+          <p:nvPr>
+            <p:ph type="body" idx="1"/>
+          </p:nvPr>
+        </p:nvSpPr>
+        <p:spPr/>
+        <p:txBody>
+          <a:bodyPr>
+            <a:normAutofit/>
+          </a:bodyPr>
+          <a:lstStyle/>
+          <a:p>
+            <a:pPr marL="0" marR="0" indent="0" algn="l" defTabSz="914400" rtl="0" eaLnBrk="1" fontAlgn="auto" latinLnBrk="1" hangingPunct="1">
+              <a:lnSpc>
+                <a:spcPct val="100000"/>
+              </a:lnSpc>
+              <a:spcBef>
+                <a:spcPts val="0"/>
+              </a:spcBef>
+              <a:spcAft>
+                <a:spcPts val="0"/>
+              </a:spcAft>
+              <a:buClrTx/>
+              <a:buSzTx/>
+              <a:buFontTx/>
+              <a:buNone/>
+              <a:tabLst/>
+              <a:defRPr/>
+            </a:pPr>
+            <a:r>
+              <a:rPr lang="en-US" altLang="ko-KR" sz="1200" dirty="0"/>
+              <a:t>http://minheeblog.tistory.com/category/PPT</a:t>
+            </a:r>
+            <a:endParaRPr lang="ko-KR" altLang="en-US" sz="1200" dirty="0"/>
+          </a:p>
+          <a:p>
+            <a:endParaRPr lang="ko-KR" altLang="en-US" dirty="0"/>
+          </a:p>
+        </p:txBody>
+      </p:sp>
+      <p:sp>
+        <p:nvSpPr>
+          <p:cNvPr id="4" name="슬라이드 번호 개체 틀 3"/>
+          <p:cNvSpPr>
+            <a:spLocks noGrp="1"/>
+          </p:cNvSpPr>
+          <p:nvPr>
+            <p:ph type="sldNum" sz="quarter" idx="10"/>
+          </p:nvPr>
+        </p:nvSpPr>
+        <p:spPr/>
+        <p:txBody>
+          <a:bodyPr/>
+          <a:lstStyle/>
+          <a:p>
+            <a:fld id="{04A4E647-5A0F-41E6-A0EF-B58D8C1C6CD4}" type="slidenum">
+              <a:rPr lang="ko-KR" altLang="en-US" smtClean="0"/>
+              <a:pPr/>
+              <a:t>34</a:t>
+            </a:fld>
+            <a:endParaRPr lang="ko-KR" altLang="en-US"/>
+          </a:p>
+        </p:txBody>
+      </p:sp>
+    </p:spTree>
+    <p:extLst>
+      <p:ext uri="{BB962C8B-B14F-4D97-AF65-F5344CB8AC3E}">
+        <p14:creationId xmlns:p14="http://schemas.microsoft.com/office/powerpoint/2010/main" val="4187978868"/>
+      </p:ext>
+    </p:extLst>
+  </p:cSld>
+  <p:clrMapOvr>
+    <a:masterClrMapping/>
+  </p:clrMapOvr>
+</p:notes>
+</file>
+
+<file path=ppt/notesSlides/notesSlide34.xml><?xml version="1.0" encoding="utf-8"?>
+<p:notes xmlns:a="http://schemas.openxmlformats.org/drawingml/2006/main" xmlns:r="http://schemas.openxmlformats.org/officeDocument/2006/relationships" xmlns:p="http://schemas.openxmlformats.org/presentationml/2006/main">
+  <p:cSld>
+    <p:spTree>
+      <p:nvGrpSpPr>
+        <p:cNvPr id="1" name=""/>
+        <p:cNvGrpSpPr/>
+        <p:nvPr/>
+      </p:nvGrpSpPr>
+      <p:grpSpPr>
+        <a:xfrm>
+          <a:off x="0" y="0"/>
+          <a:ext cx="0" cy="0"/>
+          <a:chOff x="0" y="0"/>
+          <a:chExt cx="0" cy="0"/>
+        </a:xfrm>
+      </p:grpSpPr>
+      <p:sp>
+        <p:nvSpPr>
+          <p:cNvPr id="2" name="슬라이드 이미지 개체 틀 1"/>
+          <p:cNvSpPr>
+            <a:spLocks noGrp="1" noRot="1" noChangeAspect="1"/>
+          </p:cNvSpPr>
+          <p:nvPr>
+            <p:ph type="sldImg"/>
+          </p:nvPr>
+        </p:nvSpPr>
+        <p:spPr/>
+      </p:sp>
+      <p:sp>
+        <p:nvSpPr>
+          <p:cNvPr id="3" name="슬라이드 노트 개체 틀 2"/>
+          <p:cNvSpPr>
+            <a:spLocks noGrp="1"/>
+          </p:cNvSpPr>
+          <p:nvPr>
+            <p:ph type="body" idx="1"/>
+          </p:nvPr>
+        </p:nvSpPr>
+        <p:spPr/>
+        <p:txBody>
+          <a:bodyPr>
+            <a:normAutofit/>
+          </a:bodyPr>
+          <a:lstStyle/>
+          <a:p>
+            <a:pPr marL="0" marR="0" indent="0" algn="l" defTabSz="914400" rtl="0" eaLnBrk="1" fontAlgn="auto" latinLnBrk="1" hangingPunct="1">
+              <a:lnSpc>
+                <a:spcPct val="100000"/>
+              </a:lnSpc>
+              <a:spcBef>
+                <a:spcPts val="0"/>
+              </a:spcBef>
+              <a:spcAft>
+                <a:spcPts val="0"/>
+              </a:spcAft>
+              <a:buClrTx/>
+              <a:buSzTx/>
+              <a:buFontTx/>
+              <a:buNone/>
+              <a:tabLst/>
+              <a:defRPr/>
+            </a:pPr>
+            <a:r>
+              <a:rPr lang="en-US" altLang="ko-KR" sz="1200" dirty="0"/>
+              <a:t>http://minheeblog.tistory.com/category/PPT</a:t>
+            </a:r>
+            <a:endParaRPr lang="ko-KR" altLang="en-US" sz="1200" dirty="0"/>
+          </a:p>
+          <a:p>
+            <a:endParaRPr lang="ko-KR" altLang="en-US" dirty="0"/>
+          </a:p>
+        </p:txBody>
+      </p:sp>
+      <p:sp>
+        <p:nvSpPr>
+          <p:cNvPr id="4" name="슬라이드 번호 개체 틀 3"/>
+          <p:cNvSpPr>
+            <a:spLocks noGrp="1"/>
+          </p:cNvSpPr>
+          <p:nvPr>
+            <p:ph type="sldNum" sz="quarter" idx="10"/>
+          </p:nvPr>
+        </p:nvSpPr>
+        <p:spPr/>
+        <p:txBody>
+          <a:bodyPr/>
+          <a:lstStyle/>
+          <a:p>
+            <a:fld id="{04A4E647-5A0F-41E6-A0EF-B58D8C1C6CD4}" type="slidenum">
+              <a:rPr lang="ko-KR" altLang="en-US" smtClean="0"/>
+              <a:pPr/>
+              <a:t>35</a:t>
+            </a:fld>
+            <a:endParaRPr lang="ko-KR" altLang="en-US"/>
+          </a:p>
+        </p:txBody>
+      </p:sp>
+    </p:spTree>
+    <p:extLst>
+      <p:ext uri="{BB962C8B-B14F-4D97-AF65-F5344CB8AC3E}">
+        <p14:creationId xmlns:p14="http://schemas.microsoft.com/office/powerpoint/2010/main" val="3214566500"/>
+      </p:ext>
+    </p:extLst>
+  </p:cSld>
+  <p:clrMapOvr>
+    <a:masterClrMapping/>
+  </p:clrMapOvr>
+</p:notes>
+</file>
+
+<file path=ppt/notesSlides/notesSlide35.xml><?xml version="1.0" encoding="utf-8"?>
+<p:notes xmlns:a="http://schemas.openxmlformats.org/drawingml/2006/main" xmlns:r="http://schemas.openxmlformats.org/officeDocument/2006/relationships" xmlns:p="http://schemas.openxmlformats.org/presentationml/2006/main">
+  <p:cSld>
+    <p:spTree>
+      <p:nvGrpSpPr>
+        <p:cNvPr id="1" name=""/>
+        <p:cNvGrpSpPr/>
+        <p:nvPr/>
+      </p:nvGrpSpPr>
+      <p:grpSpPr>
+        <a:xfrm>
+          <a:off x="0" y="0"/>
+          <a:ext cx="0" cy="0"/>
+          <a:chOff x="0" y="0"/>
+          <a:chExt cx="0" cy="0"/>
+        </a:xfrm>
+      </p:grpSpPr>
+      <p:sp>
+        <p:nvSpPr>
+          <p:cNvPr id="2" name="슬라이드 이미지 개체 틀 1"/>
+          <p:cNvSpPr>
+            <a:spLocks noGrp="1" noRot="1" noChangeAspect="1"/>
+          </p:cNvSpPr>
+          <p:nvPr>
+            <p:ph type="sldImg"/>
+          </p:nvPr>
+        </p:nvSpPr>
+        <p:spPr/>
+      </p:sp>
+      <p:sp>
+        <p:nvSpPr>
+          <p:cNvPr id="3" name="슬라이드 노트 개체 틀 2"/>
+          <p:cNvSpPr>
+            <a:spLocks noGrp="1"/>
+          </p:cNvSpPr>
+          <p:nvPr>
+            <p:ph type="body" idx="1"/>
+          </p:nvPr>
+        </p:nvSpPr>
+        <p:spPr/>
+        <p:txBody>
+          <a:bodyPr>
+            <a:normAutofit/>
+          </a:bodyPr>
+          <a:lstStyle/>
+          <a:p>
+            <a:pPr marL="0" marR="0" indent="0" algn="l" defTabSz="914400" rtl="0" eaLnBrk="1" fontAlgn="auto" latinLnBrk="1" hangingPunct="1">
+              <a:lnSpc>
+                <a:spcPct val="100000"/>
+              </a:lnSpc>
+              <a:spcBef>
+                <a:spcPts val="0"/>
+              </a:spcBef>
+              <a:spcAft>
+                <a:spcPts val="0"/>
+              </a:spcAft>
+              <a:buClrTx/>
+              <a:buSzTx/>
+              <a:buFontTx/>
+              <a:buNone/>
+              <a:tabLst/>
+              <a:defRPr/>
+            </a:pPr>
+            <a:r>
+              <a:rPr lang="en-US" altLang="ko-KR" sz="1200" dirty="0"/>
+              <a:t>http://minheeblog.tistory.com/category/PPT</a:t>
+            </a:r>
+            <a:endParaRPr lang="ko-KR" altLang="en-US" sz="1200" dirty="0"/>
+          </a:p>
+          <a:p>
+            <a:endParaRPr lang="ko-KR" altLang="en-US" dirty="0"/>
+          </a:p>
+        </p:txBody>
+      </p:sp>
+      <p:sp>
+        <p:nvSpPr>
+          <p:cNvPr id="4" name="슬라이드 번호 개체 틀 3"/>
+          <p:cNvSpPr>
+            <a:spLocks noGrp="1"/>
+          </p:cNvSpPr>
+          <p:nvPr>
+            <p:ph type="sldNum" sz="quarter" idx="10"/>
+          </p:nvPr>
+        </p:nvSpPr>
+        <p:spPr/>
+        <p:txBody>
+          <a:bodyPr/>
+          <a:lstStyle/>
+          <a:p>
+            <a:fld id="{04A4E647-5A0F-41E6-A0EF-B58D8C1C6CD4}" type="slidenum">
+              <a:rPr lang="ko-KR" altLang="en-US" smtClean="0"/>
+              <a:pPr/>
+              <a:t>36</a:t>
             </a:fld>
             <a:endParaRPr lang="ko-KR" altLang="en-US"/>
           </a:p>
@@ -3722,7 +4170,7 @@
     </p:spTree>
     <p:extLst>
       <p:ext uri="{BB962C8B-B14F-4D97-AF65-F5344CB8AC3E}">
-        <p14:creationId xmlns:p14="http://schemas.microsoft.com/office/powerpoint/2010/main" val="3064537590"/>
+        <p14:creationId xmlns:p14="http://schemas.microsoft.com/office/powerpoint/2010/main" val="1495055779"/>
       </p:ext>
     </p:extLst>
   </p:cSld>
@@ -3833,7 +4281,7 @@
     </p:spTree>
     <p:extLst>
       <p:ext uri="{BB962C8B-B14F-4D97-AF65-F5344CB8AC3E}">
-        <p14:creationId xmlns:p14="http://schemas.microsoft.com/office/powerpoint/2010/main" val="901488405"/>
+        <p14:creationId xmlns:p14="http://schemas.microsoft.com/office/powerpoint/2010/main" val="3064537590"/>
       </p:ext>
     </p:extLst>
   </p:cSld>
@@ -3944,7 +4392,7 @@
     </p:spTree>
     <p:extLst>
       <p:ext uri="{BB962C8B-B14F-4D97-AF65-F5344CB8AC3E}">
-        <p14:creationId xmlns:p14="http://schemas.microsoft.com/office/powerpoint/2010/main" val="1624874548"/>
+        <p14:creationId xmlns:p14="http://schemas.microsoft.com/office/powerpoint/2010/main" val="901488405"/>
       </p:ext>
     </p:extLst>
   </p:cSld>
@@ -4134,7 +4582,7 @@
             <a:fld id="{A22FE722-38C7-4231-8BB5-7A27D4E5977D}" type="datetimeFigureOut">
               <a:rPr lang="ko-KR" altLang="en-US" smtClean="0"/>
               <a:pPr/>
-              <a:t>2025-10-17</a:t>
+              <a:t>2026-05-08</a:t>
             </a:fld>
             <a:endParaRPr lang="ko-KR" altLang="en-US"/>
           </a:p>
@@ -4299,7 +4747,7 @@
             <a:fld id="{A22FE722-38C7-4231-8BB5-7A27D4E5977D}" type="datetimeFigureOut">
               <a:rPr lang="ko-KR" altLang="en-US" smtClean="0"/>
               <a:pPr/>
-              <a:t>2025-10-17</a:t>
+              <a:t>2026-05-08</a:t>
             </a:fld>
             <a:endParaRPr lang="ko-KR" altLang="en-US"/>
           </a:p>
@@ -4474,7 +4922,7 @@
             <a:fld id="{A22FE722-38C7-4231-8BB5-7A27D4E5977D}" type="datetimeFigureOut">
               <a:rPr lang="ko-KR" altLang="en-US" smtClean="0"/>
               <a:pPr/>
-              <a:t>2025-10-17</a:t>
+              <a:t>2026-05-08</a:t>
             </a:fld>
             <a:endParaRPr lang="ko-KR" altLang="en-US"/>
           </a:p>
@@ -4639,7 +5087,7 @@
             <a:fld id="{A22FE722-38C7-4231-8BB5-7A27D4E5977D}" type="datetimeFigureOut">
               <a:rPr lang="ko-KR" altLang="en-US" smtClean="0"/>
               <a:pPr/>
-              <a:t>2025-10-17</a:t>
+              <a:t>2026-05-08</a:t>
             </a:fld>
             <a:endParaRPr lang="ko-KR" altLang="en-US"/>
           </a:p>
@@ -4881,7 +5329,7 @@
             <a:fld id="{A22FE722-38C7-4231-8BB5-7A27D4E5977D}" type="datetimeFigureOut">
               <a:rPr lang="ko-KR" altLang="en-US" smtClean="0"/>
               <a:pPr/>
-              <a:t>2025-10-17</a:t>
+              <a:t>2026-05-08</a:t>
             </a:fld>
             <a:endParaRPr lang="ko-KR" altLang="en-US"/>
           </a:p>
@@ -5163,7 +5611,7 @@
             <a:fld id="{A22FE722-38C7-4231-8BB5-7A27D4E5977D}" type="datetimeFigureOut">
               <a:rPr lang="ko-KR" altLang="en-US" smtClean="0"/>
               <a:pPr/>
-              <a:t>2025-10-17</a:t>
+              <a:t>2026-05-08</a:t>
             </a:fld>
             <a:endParaRPr lang="ko-KR" altLang="en-US"/>
           </a:p>
@@ -5579,7 +6027,7 @@
             <a:fld id="{A22FE722-38C7-4231-8BB5-7A27D4E5977D}" type="datetimeFigureOut">
               <a:rPr lang="ko-KR" altLang="en-US" smtClean="0"/>
               <a:pPr/>
-              <a:t>2025-10-17</a:t>
+              <a:t>2026-05-08</a:t>
             </a:fld>
             <a:endParaRPr lang="ko-KR" altLang="en-US"/>
           </a:p>
@@ -5693,7 +6141,7 @@
             <a:fld id="{A22FE722-38C7-4231-8BB5-7A27D4E5977D}" type="datetimeFigureOut">
               <a:rPr lang="ko-KR" altLang="en-US" smtClean="0"/>
               <a:pPr/>
-              <a:t>2025-10-17</a:t>
+              <a:t>2026-05-08</a:t>
             </a:fld>
             <a:endParaRPr lang="ko-KR" altLang="en-US"/>
           </a:p>
@@ -6084,7 +6532,7 @@
             <a:fld id="{A22FE722-38C7-4231-8BB5-7A27D4E5977D}" type="datetimeFigureOut">
               <a:rPr lang="ko-KR" altLang="en-US" smtClean="0"/>
               <a:pPr/>
-              <a:t>2025-10-17</a:t>
+              <a:t>2026-05-08</a:t>
             </a:fld>
             <a:endParaRPr lang="ko-KR" altLang="en-US"/>
           </a:p>
@@ -6333,7 +6781,7 @@
             <a:fld id="{A22FE722-38C7-4231-8BB5-7A27D4E5977D}" type="datetimeFigureOut">
               <a:rPr lang="ko-KR" altLang="en-US" smtClean="0"/>
               <a:pPr/>
-              <a:t>2025-10-17</a:t>
+              <a:t>2026-05-08</a:t>
             </a:fld>
             <a:endParaRPr lang="ko-KR" altLang="en-US"/>
           </a:p>
@@ -6546,7 +6994,7 @@
             <a:fld id="{A22FE722-38C7-4231-8BB5-7A27D4E5977D}" type="datetimeFigureOut">
               <a:rPr lang="ko-KR" altLang="en-US" smtClean="0"/>
               <a:pPr/>
-              <a:t>2025-10-17</a:t>
+              <a:t>2026-05-08</a:t>
             </a:fld>
             <a:endParaRPr lang="ko-KR" altLang="en-US"/>
           </a:p>
@@ -7210,9 +7658,10 @@
               <a:buChar char="-"/>
             </a:pPr>
             <a:r>
-              <a:rPr lang="en-US" altLang="ko-KR" dirty="0"/>
-              <a:t>MSLE</a:t>
-            </a:r>
+              <a:rPr lang="ko-KR" altLang="en-US" dirty="0" err="1"/>
+              <a:t>재현율</a:t>
+            </a:r>
+            <a:endParaRPr lang="en-US" altLang="ko-KR" dirty="0"/>
           </a:p>
           <a:p>
             <a:pPr marL="742950" lvl="1" indent="-285750">
@@ -7220,12 +7669,8 @@
               <a:buChar char="-"/>
             </a:pPr>
             <a:r>
-              <a:rPr lang="en-US" altLang="ko-KR" dirty="0"/>
-              <a:t>MSE</a:t>
-            </a:r>
-            <a:r>
               <a:rPr lang="ko-KR" altLang="en-US" dirty="0"/>
-              <a:t>에 로그를 적용한 값</a:t>
+              <a:t>실제 긍정인 것들 중 예측이 긍정인 경우</a:t>
             </a:r>
             <a:endParaRPr lang="en-US" altLang="ko-KR" dirty="0"/>
           </a:p>
@@ -7236,13 +7681,8 @@
             </a:pPr>
             <a:r>
               <a:rPr lang="en-US" altLang="ko-KR" dirty="0"/>
-              <a:t>RMSE</a:t>
-            </a:r>
-            <a:r>
-              <a:rPr lang="ko-KR" altLang="en-US" dirty="0"/>
-              <a:t>와 마찬가지로 손실이 기하급수적으로 증가하는 상황에서 실제 오류 평균보다 값이 커지는 현상을 상쇄하기 위해 사용</a:t>
-            </a:r>
-            <a:endParaRPr lang="en-US" altLang="ko-KR" dirty="0"/>
+              <a:t>TP / TP + FN</a:t>
+            </a:r>
           </a:p>
           <a:p>
             <a:pPr marL="285750" indent="-285750">
@@ -7251,7 +7691,15 @@
             </a:pPr>
             <a:r>
               <a:rPr lang="en-US" altLang="ko-KR" dirty="0"/>
-              <a:t>MAPE</a:t>
+              <a:t>F1</a:t>
+            </a:r>
+            <a:r>
+              <a:rPr lang="ko-KR" altLang="en-US" dirty="0"/>
+              <a:t> </a:t>
+            </a:r>
+            <a:r>
+              <a:rPr lang="en-US" altLang="ko-KR" dirty="0"/>
+              <a:t>score</a:t>
             </a:r>
           </a:p>
           <a:p>
@@ -7260,12 +7708,8 @@
               <a:buChar char="-"/>
             </a:pPr>
             <a:r>
-              <a:rPr lang="en-US" altLang="ko-KR" dirty="0"/>
-              <a:t>MAE</a:t>
-            </a:r>
-            <a:r>
               <a:rPr lang="ko-KR" altLang="en-US" dirty="0"/>
-              <a:t>를 퍼센트로 표시 </a:t>
+              <a:t>정밀도와 재현율을 결합한 분류 성능 지표</a:t>
             </a:r>
             <a:endParaRPr lang="en-US" altLang="ko-KR" dirty="0"/>
           </a:p>
@@ -7276,9 +7720,27 @@
             </a:pPr>
             <a:r>
               <a:rPr lang="ko-KR" altLang="en-US" dirty="0"/>
-              <a:t>오차가 예측 값에서 차지하는 정도를 나타냄</a:t>
+              <a:t>정밀도와 </a:t>
+            </a:r>
+            <a:r>
+              <a:rPr lang="ko-KR" altLang="en-US" dirty="0" err="1"/>
+              <a:t>재현율</a:t>
+            </a:r>
+            <a:r>
+              <a:rPr lang="ko-KR" altLang="en-US" dirty="0"/>
+              <a:t> 어느 한쪽으로 치우치지 않고 적절하게 조화를 이룬 경우 높은 수치를 나타냄</a:t>
             </a:r>
             <a:endParaRPr lang="en-US" altLang="ko-KR" dirty="0"/>
+          </a:p>
+          <a:p>
+            <a:pPr marL="742950" lvl="1" indent="-285750">
+              <a:buFontTx/>
+              <a:buChar char="-"/>
+            </a:pPr>
+            <a:r>
+              <a:rPr lang="en-US" altLang="ko-KR" dirty="0"/>
+              <a:t>2 * TP / 2 * TP + FP + FN</a:t>
+            </a:r>
           </a:p>
         </p:txBody>
       </p:sp>
@@ -7306,7 +7768,7 @@
           <a:p>
             <a:r>
               <a:rPr lang="ko-KR" altLang="en-US" sz="2300" dirty="0"/>
-              <a:t>회귀 분석의 성능 평가 지표</a:t>
+              <a:t>분류 분석의 성능 평가 지표</a:t>
             </a:r>
           </a:p>
         </p:txBody>
@@ -7314,7 +7776,7 @@
     </p:spTree>
     <p:extLst>
       <p:ext uri="{BB962C8B-B14F-4D97-AF65-F5344CB8AC3E}">
-        <p14:creationId xmlns:p14="http://schemas.microsoft.com/office/powerpoint/2010/main" val="2176266462"/>
+        <p14:creationId xmlns:p14="http://schemas.microsoft.com/office/powerpoint/2010/main" val="1646978234"/>
       </p:ext>
     </p:extLst>
   </p:cSld>
@@ -7479,7 +7941,7 @@
         <p:spPr>
           <a:xfrm>
             <a:off x="971600" y="1700955"/>
-            <a:ext cx="7200800" cy="1754326"/>
+            <a:ext cx="7200800" cy="2308324"/>
           </a:xfrm>
           <a:prstGeom prst="rect">
             <a:avLst/>
@@ -7497,8 +7959,37 @@
               <a:buChar char="-"/>
             </a:pPr>
             <a:r>
+              <a:rPr lang="en-US" altLang="ko-KR" dirty="0"/>
+              <a:t>MSLE</a:t>
+            </a:r>
+          </a:p>
+          <a:p>
+            <a:pPr marL="742950" lvl="1" indent="-285750">
+              <a:buFontTx/>
+              <a:buChar char="-"/>
+            </a:pPr>
+            <a:r>
+              <a:rPr lang="en-US" altLang="ko-KR" dirty="0"/>
+              <a:t>MSE</a:t>
+            </a:r>
+            <a:r>
               <a:rPr lang="ko-KR" altLang="en-US" dirty="0"/>
-              <a:t>단순 선형 회귀 모델</a:t>
+              <a:t>에 로그를 적용한 값</a:t>
+            </a:r>
+            <a:endParaRPr lang="en-US" altLang="ko-KR" dirty="0"/>
+          </a:p>
+          <a:p>
+            <a:pPr marL="742950" lvl="1" indent="-285750">
+              <a:buFontTx/>
+              <a:buChar char="-"/>
+            </a:pPr>
+            <a:r>
+              <a:rPr lang="en-US" altLang="ko-KR" dirty="0"/>
+              <a:t>RMSE</a:t>
+            </a:r>
+            <a:r>
+              <a:rPr lang="ko-KR" altLang="en-US" dirty="0"/>
+              <a:t>와 마찬가지로 손실이 기하급수적으로 증가하는 상황에서 실제 오류 평균보다 값이 커지는 현상을 상쇄하기 위해 사용</a:t>
             </a:r>
             <a:endParaRPr lang="en-US" altLang="ko-KR" dirty="0"/>
           </a:p>
@@ -7508,57 +7999,33 @@
               <a:buChar char="-"/>
             </a:pPr>
             <a:r>
-              <a:rPr lang="ko-KR" altLang="en-US" dirty="0"/>
-              <a:t>입력의 특성에 따라 선형 함수를 만들어서 예측을 하는 알고리즘</a:t>
-            </a:r>
-            <a:endParaRPr lang="en-US" altLang="ko-KR" dirty="0"/>
-          </a:p>
-          <a:p>
-            <a:pPr marL="285750" indent="-285750">
+              <a:rPr lang="en-US" altLang="ko-KR" dirty="0"/>
+              <a:t>MAPE</a:t>
+            </a:r>
+          </a:p>
+          <a:p>
+            <a:pPr marL="742950" lvl="1" indent="-285750">
               <a:buFontTx/>
               <a:buChar char="-"/>
             </a:pPr>
             <a:r>
+              <a:rPr lang="en-US" altLang="ko-KR" dirty="0"/>
+              <a:t>MAE</a:t>
+            </a:r>
+            <a:r>
               <a:rPr lang="ko-KR" altLang="en-US" dirty="0"/>
-              <a:t>독립 변수가 하나인 경우 특정 직선을 학습하는 방법</a:t>
+              <a:t>를 퍼센트로 표시 </a:t>
             </a:r>
             <a:endParaRPr lang="en-US" altLang="ko-KR" dirty="0"/>
           </a:p>
           <a:p>
-            <a:pPr marL="285750" indent="-285750">
+            <a:pPr marL="742950" lvl="1" indent="-285750">
               <a:buFontTx/>
               <a:buChar char="-"/>
             </a:pPr>
             <a:r>
               <a:rPr lang="ko-KR" altLang="en-US" dirty="0"/>
-              <a:t>선형 회귀 모델을 잘 학습하기 위해서는 </a:t>
-            </a:r>
-            <a:r>
-              <a:rPr lang="en-US" altLang="ko-KR" dirty="0"/>
-              <a:t>MSE </a:t>
-            </a:r>
-            <a:r>
-              <a:rPr lang="ko-KR" altLang="en-US" dirty="0"/>
-              <a:t>값을 최소화 할 수 있는 매개변수를 선택</a:t>
-            </a:r>
-            <a:endParaRPr lang="en-US" altLang="ko-KR" dirty="0"/>
-          </a:p>
-          <a:p>
-            <a:pPr marL="285750" indent="-285750">
-              <a:buFontTx/>
-              <a:buChar char="-"/>
-            </a:pPr>
-            <a:r>
-              <a:rPr lang="ko-KR" altLang="en-US" dirty="0"/>
-              <a:t>통계적 방식의 회귀 분석은 </a:t>
-            </a:r>
-            <a:r>
-              <a:rPr lang="ko-KR" altLang="en-US" dirty="0" err="1"/>
-              <a:t>정규화방식을</a:t>
-            </a:r>
-            <a:r>
-              <a:rPr lang="ko-KR" altLang="en-US" dirty="0"/>
-              <a:t> 사용하여 문제를 해결</a:t>
+              <a:t>오차가 예측 값에서 차지하는 정도를 나타냄</a:t>
             </a:r>
             <a:endParaRPr lang="en-US" altLang="ko-KR" dirty="0"/>
           </a:p>
@@ -7588,7 +8055,7 @@
           <a:p>
             <a:r>
               <a:rPr lang="ko-KR" altLang="en-US" sz="2300" dirty="0"/>
-              <a:t>단순 선형 회귀</a:t>
+              <a:t>회귀 분석의 성능 평가 지표</a:t>
             </a:r>
           </a:p>
         </p:txBody>
@@ -7596,7 +8063,7 @@
     </p:spTree>
     <p:extLst>
       <p:ext uri="{BB962C8B-B14F-4D97-AF65-F5344CB8AC3E}">
-        <p14:creationId xmlns:p14="http://schemas.microsoft.com/office/powerpoint/2010/main" val="2571822729"/>
+        <p14:creationId xmlns:p14="http://schemas.microsoft.com/office/powerpoint/2010/main" val="2176266462"/>
       </p:ext>
     </p:extLst>
   </p:cSld>
@@ -7752,178 +8219,278 @@
           </a:p>
         </p:txBody>
       </p:sp>
-      <p:sp>
-        <p:nvSpPr>
-          <p:cNvPr id="4" name="TextBox 3"/>
-          <p:cNvSpPr txBox="1"/>
-          <p:nvPr/>
-        </p:nvSpPr>
-        <p:spPr>
-          <a:xfrm>
-            <a:off x="971600" y="1700955"/>
-            <a:ext cx="7200800" cy="3139321"/>
-          </a:xfrm>
-          <a:prstGeom prst="rect">
-            <a:avLst/>
-          </a:prstGeom>
-          <a:noFill/>
-        </p:spPr>
-        <p:txBody>
-          <a:bodyPr wrap="square" rtlCol="0">
-            <a:spAutoFit/>
-          </a:bodyPr>
-          <a:lstStyle/>
-          <a:p>
-            <a:pPr marL="285750" indent="-285750">
-              <a:buFontTx/>
-              <a:buChar char="-"/>
-            </a:pPr>
-            <a:r>
-              <a:rPr lang="ko-KR" altLang="en-US" dirty="0"/>
-              <a:t>다중의 독립 변수가 존재하는 회귀 분석 </a:t>
-            </a:r>
-            <a:endParaRPr lang="en-US" altLang="ko-KR" dirty="0"/>
-          </a:p>
-          <a:p>
-            <a:pPr marL="285750" indent="-285750">
-              <a:buFontTx/>
-              <a:buChar char="-"/>
-            </a:pPr>
-            <a:r>
-              <a:rPr lang="ko-KR" altLang="en-US" dirty="0"/>
-              <a:t>여러 개의 독립 변수가 복합적으로 종속 변수에 영향을 미치는 경우 다중 회귀 모형으로 예측</a:t>
-            </a:r>
-            <a:endParaRPr lang="en-US" altLang="ko-KR" dirty="0"/>
-          </a:p>
-          <a:p>
-            <a:pPr marL="285750" indent="-285750">
-              <a:buFontTx/>
-              <a:buChar char="-"/>
-            </a:pPr>
-            <a:r>
-              <a:rPr lang="ko-KR" altLang="en-US" dirty="0"/>
-              <a:t>모델이 복잡해지면</a:t>
-            </a:r>
-            <a:r>
-              <a:rPr lang="en-US" altLang="ko-KR" dirty="0"/>
-              <a:t>(</a:t>
-            </a:r>
-            <a:r>
-              <a:rPr lang="ko-KR" altLang="en-US" dirty="0" err="1"/>
-              <a:t>피쳐의</a:t>
-            </a:r>
-            <a:r>
-              <a:rPr lang="ko-KR" altLang="en-US" dirty="0"/>
-              <a:t> 개수가 많은 경우</a:t>
-            </a:r>
-            <a:r>
-              <a:rPr lang="en-US" altLang="ko-KR" dirty="0"/>
-              <a:t>) </a:t>
-            </a:r>
-            <a:r>
-              <a:rPr lang="ko-KR" altLang="en-US" dirty="0"/>
-              <a:t>과대적합이 발생할 가능성이 있기 때문에 이를 방지하기 위해 다양한 규제 방식이 존재하고 이러한 규제 방식에 따른 모델들이 존재</a:t>
-            </a:r>
-            <a:endParaRPr lang="en-US" altLang="ko-KR" dirty="0"/>
-          </a:p>
-          <a:p>
-            <a:pPr marL="742950" lvl="1" indent="-285750">
-              <a:buFontTx/>
-              <a:buChar char="-"/>
-            </a:pPr>
-            <a:r>
-              <a:rPr lang="ko-KR" altLang="en-US" dirty="0"/>
-              <a:t>모델에서 규제 방식에 따라 가중치</a:t>
-            </a:r>
-            <a:r>
-              <a:rPr lang="en-US" altLang="ko-KR" dirty="0"/>
-              <a:t>(</a:t>
-            </a:r>
-            <a:r>
-              <a:rPr lang="ko-KR" altLang="en-US" dirty="0"/>
-              <a:t>규칙</a:t>
-            </a:r>
-            <a:r>
-              <a:rPr lang="en-US" altLang="ko-KR" dirty="0"/>
-              <a:t>)</a:t>
-            </a:r>
-            <a:r>
-              <a:rPr lang="ko-KR" altLang="en-US" dirty="0"/>
-              <a:t>의 제한</a:t>
-            </a:r>
-            <a:endParaRPr lang="en-US" altLang="ko-KR" dirty="0"/>
-          </a:p>
-          <a:p>
-            <a:pPr marL="742950" lvl="1" indent="-285750">
-              <a:buFontTx/>
-              <a:buChar char="-"/>
-            </a:pPr>
-            <a:r>
-              <a:rPr lang="ko-KR" altLang="en-US" dirty="0"/>
-              <a:t>규제를 강하게 거는 경우 가중치의 절대치가 줄어들고 </a:t>
-            </a:r>
-            <a:r>
-              <a:rPr lang="en-US" altLang="ko-KR" dirty="0"/>
-              <a:t>0</a:t>
-            </a:r>
-            <a:r>
-              <a:rPr lang="ko-KR" altLang="en-US" dirty="0"/>
-              <a:t>에 </a:t>
-            </a:r>
-            <a:r>
-              <a:rPr lang="ko-KR" altLang="en-US" dirty="0" err="1"/>
-              <a:t>가까워짐</a:t>
-            </a:r>
-            <a:endParaRPr lang="en-US" altLang="ko-KR" dirty="0"/>
-          </a:p>
-          <a:p>
-            <a:pPr marL="742950" lvl="1" indent="-285750">
-              <a:buFontTx/>
-              <a:buChar char="-"/>
-            </a:pPr>
-            <a:r>
-              <a:rPr lang="ko-KR" altLang="en-US" dirty="0"/>
-              <a:t>가중치가 </a:t>
-            </a:r>
-            <a:r>
-              <a:rPr lang="en-US" altLang="ko-KR" dirty="0"/>
-              <a:t>0</a:t>
-            </a:r>
-            <a:r>
-              <a:rPr lang="ko-KR" altLang="en-US" dirty="0"/>
-              <a:t>이 되는 </a:t>
-            </a:r>
-            <a:r>
-              <a:rPr lang="ko-KR" altLang="en-US" dirty="0" err="1"/>
-              <a:t>피쳐들이</a:t>
-            </a:r>
-            <a:r>
-              <a:rPr lang="ko-KR" altLang="en-US" dirty="0"/>
-              <a:t> 생성</a:t>
-            </a:r>
-            <a:r>
-              <a:rPr lang="en-US" altLang="ko-KR" dirty="0"/>
-              <a:t>(</a:t>
-            </a:r>
-            <a:r>
-              <a:rPr lang="ko-KR" altLang="en-US" dirty="0"/>
-              <a:t>해당 </a:t>
-            </a:r>
-            <a:r>
-              <a:rPr lang="ko-KR" altLang="en-US" dirty="0" err="1"/>
-              <a:t>피쳐는</a:t>
-            </a:r>
-            <a:r>
-              <a:rPr lang="ko-KR" altLang="en-US" dirty="0"/>
-              <a:t> 예측 값에 영향</a:t>
-            </a:r>
-            <a:r>
-              <a:rPr lang="en-US" altLang="ko-KR" dirty="0"/>
-              <a:t>X)</a:t>
-            </a:r>
-          </a:p>
-        </p:txBody>
-      </p:sp>
+      <mc:AlternateContent xmlns:mc="http://schemas.openxmlformats.org/markup-compatibility/2006" xmlns:a14="http://schemas.microsoft.com/office/drawing/2010/main">
+        <mc:Choice Requires="a14">
+          <p:sp>
+            <p:nvSpPr>
+              <p:cNvPr id="4" name="TextBox 3"/>
+              <p:cNvSpPr txBox="1"/>
+              <p:nvPr/>
+            </p:nvSpPr>
+            <p:spPr>
+              <a:xfrm>
+                <a:off x="971600" y="1700955"/>
+                <a:ext cx="7200800" cy="3139321"/>
+              </a:xfrm>
+              <a:prstGeom prst="rect">
+                <a:avLst/>
+              </a:prstGeom>
+              <a:noFill/>
+            </p:spPr>
+            <p:txBody>
+              <a:bodyPr wrap="square" rtlCol="0">
+                <a:spAutoFit/>
+              </a:bodyPr>
+              <a:lstStyle/>
+              <a:p>
+                <a:pPr marL="285750" indent="-285750">
+                  <a:buFontTx/>
+                  <a:buChar char="-"/>
+                </a:pPr>
+                <a:r>
+                  <a:rPr lang="ko-KR" altLang="en-US" dirty="0"/>
+                  <a:t>단순 선형 회귀 모델</a:t>
+                </a:r>
+                <a:endParaRPr lang="en-US" altLang="ko-KR" dirty="0"/>
+              </a:p>
+              <a:p>
+                <a:pPr marL="285750" indent="-285750">
+                  <a:buFontTx/>
+                  <a:buChar char="-"/>
+                </a:pPr>
+                <a:r>
+                  <a:rPr lang="ko-KR" altLang="en-US" dirty="0"/>
+                  <a:t>입력의 특성에 따라 선형 함수를 만들어서 예측을 하는 알고리즘</a:t>
+                </a:r>
+                <a:endParaRPr lang="en-US" altLang="ko-KR" dirty="0"/>
+              </a:p>
+              <a:p>
+                <a:pPr marL="285750" indent="-285750">
+                  <a:buFontTx/>
+                  <a:buChar char="-"/>
+                </a:pPr>
+                <a:r>
+                  <a:rPr lang="ko-KR" altLang="en-US" dirty="0"/>
+                  <a:t>독립 변수가 하나인 경우 특정 직선을 학습하는 방법</a:t>
+                </a:r>
+                <a:endParaRPr lang="en-US" altLang="ko-KR" dirty="0"/>
+              </a:p>
+              <a:p>
+                <a:pPr marL="285750" indent="-285750">
+                  <a:buFontTx/>
+                  <a:buChar char="-"/>
+                </a:pPr>
+                <a:endParaRPr lang="en-US" altLang="ko-KR" dirty="0"/>
+              </a:p>
+              <a:p>
+                <a:pPr marL="285750" indent="-285750">
+                  <a:buFontTx/>
+                  <a:buChar char="-"/>
+                </a:pPr>
+                <a:endParaRPr lang="en-US" altLang="ko-KR" dirty="0"/>
+              </a:p>
+              <a:p>
+                <a:pPr marL="285750" indent="-285750">
+                  <a:buFontTx/>
+                  <a:buChar char="-"/>
+                </a:pPr>
+                <a:endParaRPr lang="en-US" altLang="ko-KR" dirty="0"/>
+              </a:p>
+              <a:p>
+                <a:pPr marL="285750" indent="-285750">
+                  <a:buFontTx/>
+                  <a:buChar char="-"/>
+                </a:pPr>
+                <a14:m>
+                  <m:oMath xmlns:m="http://schemas.openxmlformats.org/officeDocument/2006/math">
+                    <m:r>
+                      <a:rPr lang="ko-KR" altLang="en-US" i="1" smtClean="0">
+                        <a:latin typeface="Cambria Math" panose="02040503050406030204" pitchFamily="18" charset="0"/>
+                      </a:rPr>
+                      <m:t>𝑥</m:t>
+                    </m:r>
+                  </m:oMath>
+                </a14:m>
+                <a:r>
+                  <a:rPr lang="en-US" altLang="ko-KR" dirty="0"/>
+                  <a:t> : </a:t>
+                </a:r>
+                <a:r>
+                  <a:rPr lang="ko-KR" altLang="en-US" dirty="0"/>
+                  <a:t>입력 데이터</a:t>
+                </a:r>
+                <a:r>
+                  <a:rPr lang="en-US" altLang="ko-KR" dirty="0"/>
+                  <a:t>(</a:t>
+                </a:r>
+                <a:r>
+                  <a:rPr lang="ko-KR" altLang="en-US" dirty="0"/>
+                  <a:t>독립 변수</a:t>
+                </a:r>
+                <a:r>
+                  <a:rPr lang="en-US" altLang="ko-KR" dirty="0"/>
+                  <a:t>)</a:t>
+                </a:r>
+              </a:p>
+              <a:p>
+                <a:pPr marL="285750" indent="-285750">
+                  <a:buFontTx/>
+                  <a:buChar char="-"/>
+                </a:pPr>
+                <a14:m>
+                  <m:oMath xmlns:m="http://schemas.openxmlformats.org/officeDocument/2006/math">
+                    <m:r>
+                      <a:rPr lang="ko-KR" altLang="en-US" i="1" smtClean="0">
+                        <a:latin typeface="Cambria Math" panose="02040503050406030204" pitchFamily="18" charset="0"/>
+                      </a:rPr>
+                      <m:t>𝑦</m:t>
+                    </m:r>
+                  </m:oMath>
+                </a14:m>
+                <a:r>
+                  <a:rPr lang="en-US" altLang="ko-KR" dirty="0"/>
+                  <a:t> : </a:t>
+                </a:r>
+                <a:r>
+                  <a:rPr lang="ko-KR" altLang="en-US" dirty="0"/>
+                  <a:t>예측하려는 정답</a:t>
+                </a:r>
+                <a:r>
+                  <a:rPr lang="en-US" altLang="ko-KR" dirty="0"/>
+                  <a:t>(</a:t>
+                </a:r>
+                <a:r>
+                  <a:rPr lang="ko-KR" altLang="en-US" dirty="0"/>
+                  <a:t>종속 변수</a:t>
+                </a:r>
+                <a:r>
+                  <a:rPr lang="en-US" altLang="ko-KR" dirty="0"/>
+                  <a:t>)</a:t>
+                </a:r>
+              </a:p>
+              <a:p>
+                <a:pPr marL="285750" indent="-285750">
+                  <a:buFontTx/>
+                  <a:buChar char="-"/>
+                </a:pPr>
+                <a14:m>
+                  <m:oMath xmlns:m="http://schemas.openxmlformats.org/officeDocument/2006/math">
+                    <m:r>
+                      <a:rPr lang="ko-KR" altLang="en-US" i="1" smtClean="0">
+                        <a:latin typeface="Cambria Math" panose="02040503050406030204" pitchFamily="18" charset="0"/>
+                      </a:rPr>
+                      <m:t>𝑤</m:t>
+                    </m:r>
+                  </m:oMath>
+                </a14:m>
+                <a:r>
+                  <a:rPr lang="en-US" altLang="ko-KR" dirty="0"/>
+                  <a:t> : </a:t>
+                </a:r>
+                <a:r>
+                  <a:rPr lang="ko-KR" altLang="en-US" dirty="0"/>
+                  <a:t>가중치</a:t>
+                </a:r>
+                <a:endParaRPr lang="en-US" altLang="ko-KR" dirty="0"/>
+              </a:p>
+              <a:p>
+                <a:pPr marL="285750" indent="-285750">
+                  <a:buFontTx/>
+                  <a:buChar char="-"/>
+                </a:pPr>
+                <a14:m>
+                  <m:oMath xmlns:m="http://schemas.openxmlformats.org/officeDocument/2006/math">
+                    <m:r>
+                      <a:rPr lang="ko-KR" altLang="en-US" i="1" smtClean="0">
+                        <a:latin typeface="Cambria Math" panose="02040503050406030204" pitchFamily="18" charset="0"/>
+                      </a:rPr>
+                      <m:t>𝑏</m:t>
+                    </m:r>
+                  </m:oMath>
+                </a14:m>
+                <a:r>
+                  <a:rPr lang="en-US" altLang="ko-KR" dirty="0"/>
+                  <a:t> : </a:t>
+                </a:r>
+                <a:r>
+                  <a:rPr lang="ko-KR" altLang="en-US" dirty="0"/>
+                  <a:t>직선의 </a:t>
+                </a:r>
+                <a:r>
+                  <a:rPr lang="en-US" altLang="ko-KR" dirty="0"/>
+                  <a:t>y </a:t>
+                </a:r>
+                <a:r>
+                  <a:rPr lang="ko-KR" altLang="en-US" dirty="0"/>
+                  <a:t>절편</a:t>
+                </a:r>
+                <a:r>
+                  <a:rPr lang="en-US" altLang="ko-KR" dirty="0"/>
+                  <a:t>. X</a:t>
+                </a:r>
+                <a:r>
+                  <a:rPr lang="ko-KR" altLang="en-US" dirty="0"/>
+                  <a:t>가 </a:t>
+                </a:r>
+                <a:r>
+                  <a:rPr lang="en-US" altLang="ko-KR" dirty="0"/>
+                  <a:t>0</a:t>
+                </a:r>
+                <a:r>
+                  <a:rPr lang="ko-KR" altLang="en-US" dirty="0"/>
+                  <a:t>인 경우 기본값</a:t>
+                </a:r>
+                <a:endParaRPr lang="en-US" altLang="ko-KR" dirty="0"/>
+              </a:p>
+              <a:p>
+                <a:pPr marL="285750" indent="-285750">
+                  <a:buFontTx/>
+                  <a:buChar char="-"/>
+                </a:pPr>
+                <a:endParaRPr lang="en-US" altLang="ko-KR" dirty="0"/>
+              </a:p>
+            </p:txBody>
+          </p:sp>
+        </mc:Choice>
+        <mc:Fallback xmlns="">
+          <p:sp>
+            <p:nvSpPr>
+              <p:cNvPr id="4" name="TextBox 3"/>
+              <p:cNvSpPr txBox="1">
+                <a:spLocks noRot="1" noChangeAspect="1" noMove="1" noResize="1" noEditPoints="1" noAdjustHandles="1" noChangeArrowheads="1" noChangeShapeType="1" noTextEdit="1"/>
+              </p:cNvSpPr>
+              <p:nvPr/>
+            </p:nvSpPr>
+            <p:spPr>
+              <a:xfrm>
+                <a:off x="971600" y="1700955"/>
+                <a:ext cx="7200800" cy="3139321"/>
+              </a:xfrm>
+              <a:prstGeom prst="rect">
+                <a:avLst/>
+              </a:prstGeom>
+              <a:blipFill>
+                <a:blip r:embed="rId3"/>
+                <a:stretch>
+                  <a:fillRect l="-846" t="-1748"/>
+                </a:stretch>
+              </a:blipFill>
+            </p:spPr>
+            <p:txBody>
+              <a:bodyPr/>
+              <a:lstStyle/>
+              <a:p>
+                <a:r>
+                  <a:rPr lang="ko-KR" altLang="en-US">
+                    <a:noFill/>
+                  </a:rPr>
+                  <a:t> </a:t>
+                </a:r>
+              </a:p>
+            </p:txBody>
+          </p:sp>
+        </mc:Fallback>
+      </mc:AlternateContent>
       <p:sp>
         <p:nvSpPr>
           <p:cNvPr id="6" name="TextBox 5"/>
@@ -7948,15 +8515,135 @@
           <a:p>
             <a:r>
               <a:rPr lang="ko-KR" altLang="en-US" sz="2300" dirty="0"/>
-              <a:t>다중 회귀</a:t>
-            </a:r>
-          </a:p>
-        </p:txBody>
-      </p:sp>
+              <a:t>단순 선형 회귀</a:t>
+            </a:r>
+          </a:p>
+        </p:txBody>
+      </p:sp>
+      <mc:AlternateContent xmlns:mc="http://schemas.openxmlformats.org/markup-compatibility/2006" xmlns:a14="http://schemas.microsoft.com/office/drawing/2010/main">
+        <mc:Choice Requires="a14">
+          <p:sp>
+            <p:nvSpPr>
+              <p:cNvPr id="12" name="TextBox 11">
+                <a:extLst>
+                  <a:ext uri="{FF2B5EF4-FFF2-40B4-BE49-F238E27FC236}">
+                    <a16:creationId xmlns:a16="http://schemas.microsoft.com/office/drawing/2014/main" id="{44F71470-8848-403B-AACD-99156C0E2A39}"/>
+                  </a:ext>
+                </a:extLst>
+              </p:cNvPr>
+              <p:cNvSpPr txBox="1"/>
+              <p:nvPr/>
+            </p:nvSpPr>
+            <p:spPr>
+              <a:xfrm>
+                <a:off x="3456398" y="2996952"/>
+                <a:ext cx="1907690" cy="276999"/>
+              </a:xfrm>
+              <a:prstGeom prst="rect">
+                <a:avLst/>
+              </a:prstGeom>
+              <a:noFill/>
+            </p:spPr>
+            <p:txBody>
+              <a:bodyPr wrap="square" lIns="0" tIns="0" rIns="0" bIns="0" rtlCol="0">
+                <a:spAutoFit/>
+              </a:bodyPr>
+              <a:lstStyle/>
+              <a:p>
+                <a:pPr/>
+                <a14:m>
+                  <m:oMathPara xmlns:m="http://schemas.openxmlformats.org/officeDocument/2006/math">
+                    <m:oMathParaPr>
+                      <m:jc m:val="centerGroup"/>
+                    </m:oMathParaPr>
+                    <m:oMath xmlns:m="http://schemas.openxmlformats.org/officeDocument/2006/math">
+                      <m:r>
+                        <a:rPr lang="ko-KR" altLang="en-US" i="1" smtClean="0">
+                          <a:latin typeface="Cambria Math" panose="02040503050406030204" pitchFamily="18" charset="0"/>
+                        </a:rPr>
+                        <m:t>𝑦</m:t>
+                      </m:r>
+                      <m:r>
+                        <a:rPr lang="ko-KR" altLang="en-US" i="0">
+                          <a:latin typeface="Cambria Math" panose="02040503050406030204" pitchFamily="18" charset="0"/>
+                        </a:rPr>
+                        <m:t>=</m:t>
+                      </m:r>
+                      <m:r>
+                        <a:rPr lang="ko-KR" altLang="en-US" i="1">
+                          <a:latin typeface="Cambria Math" panose="02040503050406030204" pitchFamily="18" charset="0"/>
+                        </a:rPr>
+                        <m:t>𝑤𝑥</m:t>
+                      </m:r>
+                      <m:r>
+                        <a:rPr lang="ko-KR" altLang="en-US" i="0">
+                          <a:latin typeface="Cambria Math" panose="02040503050406030204" pitchFamily="18" charset="0"/>
+                        </a:rPr>
+                        <m:t>+</m:t>
+                      </m:r>
+                      <m:r>
+                        <a:rPr lang="ko-KR" altLang="en-US" i="1">
+                          <a:latin typeface="Cambria Math" panose="02040503050406030204" pitchFamily="18" charset="0"/>
+                        </a:rPr>
+                        <m:t>𝑏</m:t>
+                      </m:r>
+                    </m:oMath>
+                  </m:oMathPara>
+                </a14:m>
+                <a:endParaRPr lang="ko-KR" altLang="en-US" dirty="0"/>
+              </a:p>
+            </p:txBody>
+          </p:sp>
+        </mc:Choice>
+        <mc:Fallback xmlns="">
+          <p:sp>
+            <p:nvSpPr>
+              <p:cNvPr id="12" name="TextBox 11">
+                <a:extLst>
+                  <a:ext uri="{FF2B5EF4-FFF2-40B4-BE49-F238E27FC236}">
+                    <a16:creationId xmlns:a16="http://schemas.microsoft.com/office/drawing/2014/main" id="{44F71470-8848-403B-AACD-99156C0E2A39}"/>
+                  </a:ext>
+                </a:extLst>
+              </p:cNvPr>
+              <p:cNvSpPr txBox="1">
+                <a:spLocks noRot="1" noChangeAspect="1" noMove="1" noResize="1" noEditPoints="1" noAdjustHandles="1" noChangeArrowheads="1" noChangeShapeType="1" noTextEdit="1"/>
+              </p:cNvSpPr>
+              <p:nvPr/>
+            </p:nvSpPr>
+            <p:spPr>
+              <a:xfrm>
+                <a:off x="3456398" y="2996952"/>
+                <a:ext cx="1907690" cy="276999"/>
+              </a:xfrm>
+              <a:prstGeom prst="rect">
+                <a:avLst/>
+              </a:prstGeom>
+              <a:blipFill>
+                <a:blip r:embed="rId4"/>
+                <a:stretch>
+                  <a:fillRect b="-31111"/>
+                </a:stretch>
+              </a:blipFill>
+            </p:spPr>
+            <p:txBody>
+              <a:bodyPr/>
+              <a:lstStyle/>
+              <a:p>
+                <a:r>
+                  <a:rPr lang="ko-KR" altLang="en-US">
+                    <a:noFill/>
+                  </a:rPr>
+                  <a:t> </a:t>
+                </a:r>
+              </a:p>
+            </p:txBody>
+          </p:sp>
+        </mc:Fallback>
+      </mc:AlternateContent>
     </p:spTree>
     <p:extLst>
       <p:ext uri="{BB962C8B-B14F-4D97-AF65-F5344CB8AC3E}">
-        <p14:creationId xmlns:p14="http://schemas.microsoft.com/office/powerpoint/2010/main" val="3848512309"/>
+        <p14:creationId xmlns:p14="http://schemas.microsoft.com/office/powerpoint/2010/main" val="2571822729"/>
       </p:ext>
     </p:extLst>
   </p:cSld>
@@ -8112,91 +8799,261 @@
           </a:p>
         </p:txBody>
       </p:sp>
-      <p:sp>
-        <p:nvSpPr>
-          <p:cNvPr id="4" name="TextBox 3"/>
-          <p:cNvSpPr txBox="1"/>
-          <p:nvPr/>
-        </p:nvSpPr>
-        <p:spPr>
-          <a:xfrm>
-            <a:off x="971600" y="1700955"/>
-            <a:ext cx="7200800" cy="2031325"/>
-          </a:xfrm>
-          <a:prstGeom prst="rect">
-            <a:avLst/>
-          </a:prstGeom>
-          <a:noFill/>
-        </p:spPr>
-        <p:txBody>
-          <a:bodyPr wrap="square" rtlCol="0">
-            <a:spAutoFit/>
-          </a:bodyPr>
-          <a:lstStyle/>
-          <a:p>
-            <a:pPr marL="285750" indent="-285750">
-              <a:buFontTx/>
-              <a:buChar char="-"/>
-            </a:pPr>
-            <a:r>
-              <a:rPr lang="ko-KR" altLang="en-US" dirty="0"/>
-              <a:t>선형 회귀 모델 </a:t>
-            </a:r>
-            <a:endParaRPr lang="en-US" altLang="ko-KR" dirty="0"/>
-          </a:p>
-          <a:p>
-            <a:pPr marL="285750" indent="-285750">
-              <a:buFontTx/>
-              <a:buChar char="-"/>
-            </a:pPr>
-            <a:r>
-              <a:rPr lang="ko-KR" altLang="en-US" dirty="0"/>
-              <a:t>데이터 사이의 관계를 직선으로 표현해서 예측을 하는 방법</a:t>
-            </a:r>
-            <a:endParaRPr lang="en-US" altLang="ko-KR" dirty="0"/>
-          </a:p>
-          <a:p>
-            <a:pPr marL="285750" indent="-285750">
-              <a:buFontTx/>
-              <a:buChar char="-"/>
-            </a:pPr>
-            <a:r>
-              <a:rPr lang="ko-KR" altLang="en-US" dirty="0"/>
-              <a:t>입력 데이터와 결과 데이터 사이에 일정한 비율로 변하는 관계가 있다고 가정</a:t>
-            </a:r>
-            <a:endParaRPr lang="en-US" altLang="ko-KR" dirty="0"/>
-          </a:p>
-          <a:p>
-            <a:pPr marL="285750" indent="-285750">
-              <a:buFontTx/>
-              <a:buChar char="-"/>
-            </a:pPr>
-            <a:r>
-              <a:rPr lang="ko-KR" altLang="en-US" dirty="0"/>
-              <a:t>해당 관계를 가장 설명을 잘 하는 직선을 찾는 과정 </a:t>
-            </a:r>
-            <a:endParaRPr lang="en-US" altLang="ko-KR" dirty="0"/>
-          </a:p>
-          <a:p>
-            <a:pPr marL="285750" indent="-285750">
-              <a:buFontTx/>
-              <a:buChar char="-"/>
-            </a:pPr>
-            <a:endParaRPr lang="en-US" altLang="ko-KR" dirty="0"/>
-          </a:p>
-          <a:p>
-            <a:pPr marL="285750" indent="-285750">
-              <a:buFontTx/>
-              <a:buChar char="-"/>
-            </a:pPr>
-            <a:r>
-              <a:rPr lang="ko-KR" altLang="en-US" dirty="0"/>
-              <a:t>공부의 시간이 늘어나는 경우 점수가 일정하게 증가할 것이다</a:t>
-            </a:r>
-            <a:endParaRPr lang="en-US" altLang="ko-KR" dirty="0"/>
-          </a:p>
-        </p:txBody>
-      </p:sp>
+      <mc:AlternateContent xmlns:mc="http://schemas.openxmlformats.org/markup-compatibility/2006" xmlns:a14="http://schemas.microsoft.com/office/drawing/2010/main">
+        <mc:Choice Requires="a14">
+          <p:sp>
+            <p:nvSpPr>
+              <p:cNvPr id="4" name="TextBox 3"/>
+              <p:cNvSpPr txBox="1"/>
+              <p:nvPr/>
+            </p:nvSpPr>
+            <p:spPr>
+              <a:xfrm>
+                <a:off x="971600" y="1700955"/>
+                <a:ext cx="7200800" cy="2862322"/>
+              </a:xfrm>
+              <a:prstGeom prst="rect">
+                <a:avLst/>
+              </a:prstGeom>
+              <a:noFill/>
+            </p:spPr>
+            <p:txBody>
+              <a:bodyPr wrap="square" rtlCol="0">
+                <a:spAutoFit/>
+              </a:bodyPr>
+              <a:lstStyle/>
+              <a:p>
+                <a:pPr marL="285750" indent="-285750">
+                  <a:buFontTx/>
+                  <a:buChar char="-"/>
+                </a:pPr>
+                <a:r>
+                  <a:rPr lang="ko-KR" altLang="en-US" dirty="0"/>
+                  <a:t>선형 회귀 모델을 잘 학습하기 위해서는 </a:t>
+                </a:r>
+                <a:r>
+                  <a:rPr lang="en-US" altLang="ko-KR" dirty="0"/>
+                  <a:t>MSE </a:t>
+                </a:r>
+                <a:r>
+                  <a:rPr lang="ko-KR" altLang="en-US" dirty="0"/>
+                  <a:t>값을 최소화 할 수 있는 매개변수를 선택</a:t>
+                </a:r>
+                <a:endParaRPr lang="en-US" altLang="ko-KR" dirty="0"/>
+              </a:p>
+              <a:p>
+                <a:pPr marL="285750" indent="-285750">
+                  <a:buFontTx/>
+                  <a:buChar char="-"/>
+                </a:pPr>
+                <a:r>
+                  <a:rPr lang="ko-KR" altLang="en-US" dirty="0"/>
+                  <a:t>통계적 방식의 회귀 분석은 </a:t>
+                </a:r>
+                <a:r>
+                  <a:rPr lang="ko-KR" altLang="en-US" dirty="0" err="1"/>
+                  <a:t>정규화방식을</a:t>
+                </a:r>
+                <a:r>
+                  <a:rPr lang="ko-KR" altLang="en-US" dirty="0"/>
+                  <a:t> 사용하여 문제를 해결</a:t>
+                </a:r>
+                <a:endParaRPr lang="en-US" altLang="ko-KR" dirty="0"/>
+              </a:p>
+              <a:p>
+                <a:pPr marL="285750" indent="-285750">
+                  <a:buFontTx/>
+                  <a:buChar char="-"/>
+                </a:pPr>
+                <a:endParaRPr lang="en-US" altLang="ko-KR" dirty="0"/>
+              </a:p>
+              <a:p>
+                <a:pPr marL="285750" indent="-285750">
+                  <a:buFontTx/>
+                  <a:buChar char="-"/>
+                </a:pPr>
+                <a:endParaRPr lang="en-US" altLang="ko-KR" dirty="0"/>
+              </a:p>
+              <a:p>
+                <a:pPr marL="285750" indent="-285750">
+                  <a:buFontTx/>
+                  <a:buChar char="-"/>
+                </a:pPr>
+                <a:endParaRPr lang="en-US" altLang="ko-KR" dirty="0"/>
+              </a:p>
+              <a:p>
+                <a:pPr marL="285750" indent="-285750">
+                  <a:buFontTx/>
+                  <a:buChar char="-"/>
+                </a:pPr>
+                <a:endParaRPr lang="en-US" altLang="ko-KR" dirty="0"/>
+              </a:p>
+              <a:p>
+                <a:pPr marL="285750" indent="-285750">
+                  <a:buFontTx/>
+                  <a:buChar char="-"/>
+                </a:pPr>
+                <a:endParaRPr lang="en-US" altLang="ko-KR" dirty="0"/>
+              </a:p>
+              <a:p>
+                <a:pPr marL="285750" indent="-285750">
+                  <a:buFontTx/>
+                  <a:buChar char="-"/>
+                </a:pPr>
+                <a14:m>
+                  <m:oMath xmlns:m="http://schemas.openxmlformats.org/officeDocument/2006/math">
+                    <m:sSub>
+                      <m:sSubPr>
+                        <m:ctrlPr>
+                          <a:rPr lang="ko-KR" altLang="en-US" i="1" smtClean="0">
+                            <a:solidFill>
+                              <a:srgbClr val="836967"/>
+                            </a:solidFill>
+                            <a:latin typeface="Cambria Math" panose="02040503050406030204" pitchFamily="18" charset="0"/>
+                          </a:rPr>
+                        </m:ctrlPr>
+                      </m:sSubPr>
+                      <m:e>
+                        <m:r>
+                          <a:rPr lang="ko-KR" altLang="en-US" i="1">
+                            <a:latin typeface="Cambria Math" panose="02040503050406030204" pitchFamily="18" charset="0"/>
+                          </a:rPr>
+                          <m:t>𝑦</m:t>
+                        </m:r>
+                      </m:e>
+                      <m:sub>
+                        <m:r>
+                          <a:rPr lang="ko-KR" altLang="en-US" i="1">
+                            <a:latin typeface="Cambria Math" panose="02040503050406030204" pitchFamily="18" charset="0"/>
+                          </a:rPr>
+                          <m:t>𝑖</m:t>
+                        </m:r>
+                      </m:sub>
+                    </m:sSub>
+                  </m:oMath>
+                </a14:m>
+                <a:r>
+                  <a:rPr lang="en-US" altLang="ko-KR" dirty="0"/>
+                  <a:t> : </a:t>
+                </a:r>
+                <a:r>
+                  <a:rPr lang="ko-KR" altLang="en-US" dirty="0"/>
+                  <a:t>실제 데이터</a:t>
+                </a:r>
+                <a:endParaRPr lang="en-US" altLang="ko-KR" dirty="0"/>
+              </a:p>
+              <a:p>
+                <a:pPr marL="285750" indent="-285750">
+                  <a:buFontTx/>
+                  <a:buChar char="-"/>
+                </a:pPr>
+                <a14:m>
+                  <m:oMath xmlns:m="http://schemas.openxmlformats.org/officeDocument/2006/math">
+                    <m:sSub>
+                      <m:sSubPr>
+                        <m:ctrlPr>
+                          <a:rPr lang="ko-KR" altLang="en-US" i="1" smtClean="0">
+                            <a:solidFill>
+                              <a:srgbClr val="836967"/>
+                            </a:solidFill>
+                            <a:latin typeface="Cambria Math" panose="02040503050406030204" pitchFamily="18" charset="0"/>
+                          </a:rPr>
+                        </m:ctrlPr>
+                      </m:sSubPr>
+                      <m:e>
+                        <m:acc>
+                          <m:accPr>
+                            <m:chr m:val="̂"/>
+                            <m:ctrlPr>
+                              <a:rPr lang="ko-KR" altLang="en-US" i="1">
+                                <a:solidFill>
+                                  <a:srgbClr val="836967"/>
+                                </a:solidFill>
+                                <a:latin typeface="Cambria Math" panose="02040503050406030204" pitchFamily="18" charset="0"/>
+                              </a:rPr>
+                            </m:ctrlPr>
+                          </m:accPr>
+                          <m:e>
+                            <m:r>
+                              <a:rPr lang="ko-KR" altLang="en-US" i="1">
+                                <a:latin typeface="Cambria Math" panose="02040503050406030204" pitchFamily="18" charset="0"/>
+                              </a:rPr>
+                              <m:t>𝑦</m:t>
+                            </m:r>
+                          </m:e>
+                        </m:acc>
+                      </m:e>
+                      <m:sub>
+                        <m:r>
+                          <a:rPr lang="ko-KR" altLang="en-US" i="1">
+                            <a:latin typeface="Cambria Math" panose="02040503050406030204" pitchFamily="18" charset="0"/>
+                          </a:rPr>
+                          <m:t>𝑖</m:t>
+                        </m:r>
+                      </m:sub>
+                    </m:sSub>
+                    <m:r>
+                      <a:rPr lang="en-US" altLang="ko-KR" b="0" i="0" smtClean="0">
+                        <a:latin typeface="Cambria Math" panose="02040503050406030204" pitchFamily="18" charset="0"/>
+                      </a:rPr>
+                      <m:t> :</m:t>
+                    </m:r>
+                    <m:r>
+                      <a:rPr lang="ko-KR" altLang="en-US" i="1">
+                        <a:latin typeface="Cambria Math" panose="02040503050406030204" pitchFamily="18" charset="0"/>
+                      </a:rPr>
+                      <m:t>모</m:t>
+                    </m:r>
+                  </m:oMath>
+                </a14:m>
+                <a:r>
+                  <a:rPr lang="ko-KR" altLang="en-US" dirty="0"/>
+                  <a:t>델이 예측한 값</a:t>
+                </a:r>
+                <a:endParaRPr lang="en-US" altLang="ko-KR" dirty="0"/>
+              </a:p>
+            </p:txBody>
+          </p:sp>
+        </mc:Choice>
+        <mc:Fallback xmlns="">
+          <p:sp>
+            <p:nvSpPr>
+              <p:cNvPr id="4" name="TextBox 3"/>
+              <p:cNvSpPr txBox="1">
+                <a:spLocks noRot="1" noChangeAspect="1" noMove="1" noResize="1" noEditPoints="1" noAdjustHandles="1" noChangeArrowheads="1" noChangeShapeType="1" noTextEdit="1"/>
+              </p:cNvSpPr>
+              <p:nvPr/>
+            </p:nvSpPr>
+            <p:spPr>
+              <a:xfrm>
+                <a:off x="971600" y="1700955"/>
+                <a:ext cx="7200800" cy="2862322"/>
+              </a:xfrm>
+              <a:prstGeom prst="rect">
+                <a:avLst/>
+              </a:prstGeom>
+              <a:blipFill>
+                <a:blip r:embed="rId3"/>
+                <a:stretch>
+                  <a:fillRect l="-846" t="-1915" b="-2340"/>
+                </a:stretch>
+              </a:blipFill>
+            </p:spPr>
+            <p:txBody>
+              <a:bodyPr/>
+              <a:lstStyle/>
+              <a:p>
+                <a:r>
+                  <a:rPr lang="ko-KR" altLang="en-US">
+                    <a:noFill/>
+                  </a:rPr>
+                  <a:t> </a:t>
+                </a:r>
+              </a:p>
+            </p:txBody>
+          </p:sp>
+        </mc:Fallback>
+      </mc:AlternateContent>
       <p:sp>
         <p:nvSpPr>
           <p:cNvPr id="6" name="TextBox 5"/>
@@ -8220,17 +9077,295 @@
           <a:lstStyle/>
           <a:p>
             <a:r>
-              <a:rPr lang="en-US" altLang="ko-KR" sz="2300" dirty="0" err="1"/>
-              <a:t>LinearRegression</a:t>
-            </a:r>
-            <a:endParaRPr lang="ko-KR" altLang="en-US" sz="2300" dirty="0"/>
-          </a:p>
-        </p:txBody>
-      </p:sp>
+              <a:rPr lang="ko-KR" altLang="en-US" sz="2300" dirty="0"/>
+              <a:t>단순 선형 회귀</a:t>
+            </a:r>
+          </a:p>
+        </p:txBody>
+      </p:sp>
+      <mc:AlternateContent xmlns:mc="http://schemas.openxmlformats.org/markup-compatibility/2006" xmlns:a14="http://schemas.microsoft.com/office/drawing/2010/main">
+        <mc:Choice Requires="a14">
+          <p:sp>
+            <p:nvSpPr>
+              <p:cNvPr id="2" name="TextBox 1">
+                <a:extLst>
+                  <a:ext uri="{FF2B5EF4-FFF2-40B4-BE49-F238E27FC236}">
+                    <a16:creationId xmlns:a16="http://schemas.microsoft.com/office/drawing/2014/main" id="{C84AA5AD-C144-4995-987C-4E4D29FA945E}"/>
+                  </a:ext>
+                </a:extLst>
+              </p:cNvPr>
+              <p:cNvSpPr txBox="1"/>
+              <p:nvPr/>
+            </p:nvSpPr>
+            <p:spPr>
+              <a:xfrm>
+                <a:off x="3382731" y="2996952"/>
+                <a:ext cx="2306529" cy="756233"/>
+              </a:xfrm>
+              <a:prstGeom prst="rect">
+                <a:avLst/>
+              </a:prstGeom>
+              <a:noFill/>
+            </p:spPr>
+            <p:txBody>
+              <a:bodyPr wrap="none" lIns="0" tIns="0" rIns="0" bIns="0" rtlCol="0">
+                <a:spAutoFit/>
+              </a:bodyPr>
+              <a:lstStyle/>
+              <a:p>
+                <a:pPr/>
+                <a14:m>
+                  <m:oMathPara xmlns:m="http://schemas.openxmlformats.org/officeDocument/2006/math">
+                    <m:oMathParaPr>
+                      <m:jc m:val="centerGroup"/>
+                    </m:oMathParaPr>
+                    <m:oMath xmlns:m="http://schemas.openxmlformats.org/officeDocument/2006/math">
+                      <m:r>
+                        <a:rPr lang="ko-KR" altLang="en-US" i="1" smtClean="0">
+                          <a:latin typeface="Cambria Math" panose="02040503050406030204" pitchFamily="18" charset="0"/>
+                        </a:rPr>
+                        <m:t>𝑀𝑆𝐸</m:t>
+                      </m:r>
+                      <m:r>
+                        <a:rPr lang="ko-KR" altLang="en-US" i="0">
+                          <a:latin typeface="Cambria Math" panose="02040503050406030204" pitchFamily="18" charset="0"/>
+                        </a:rPr>
+                        <m:t>=</m:t>
+                      </m:r>
+                      <m:f>
+                        <m:fPr>
+                          <m:ctrlPr>
+                            <a:rPr lang="ko-KR" altLang="en-US" i="1">
+                              <a:solidFill>
+                                <a:srgbClr val="836967"/>
+                              </a:solidFill>
+                              <a:latin typeface="Cambria Math" panose="02040503050406030204" pitchFamily="18" charset="0"/>
+                            </a:rPr>
+                          </m:ctrlPr>
+                        </m:fPr>
+                        <m:num>
+                          <m:r>
+                            <a:rPr lang="ko-KR" altLang="en-US" i="0">
+                              <a:latin typeface="Cambria Math" panose="02040503050406030204" pitchFamily="18" charset="0"/>
+                            </a:rPr>
+                            <m:t>1</m:t>
+                          </m:r>
+                        </m:num>
+                        <m:den>
+                          <m:r>
+                            <a:rPr lang="ko-KR" altLang="en-US" i="1">
+                              <a:latin typeface="Cambria Math" panose="02040503050406030204" pitchFamily="18" charset="0"/>
+                            </a:rPr>
+                            <m:t>𝑛</m:t>
+                          </m:r>
+                        </m:den>
+                      </m:f>
+                      <m:nary>
+                        <m:naryPr>
+                          <m:chr m:val="∑"/>
+                          <m:limLoc m:val="undOvr"/>
+                          <m:grow m:val="on"/>
+                          <m:ctrlPr>
+                            <a:rPr lang="ko-KR" altLang="en-US" i="1">
+                              <a:latin typeface="Cambria Math" panose="02040503050406030204" pitchFamily="18" charset="0"/>
+                            </a:rPr>
+                          </m:ctrlPr>
+                        </m:naryPr>
+                        <m:sub>
+                          <m:r>
+                            <a:rPr lang="ko-KR" altLang="en-US" i="1">
+                              <a:latin typeface="Cambria Math" panose="02040503050406030204" pitchFamily="18" charset="0"/>
+                            </a:rPr>
+                            <m:t>𝑖</m:t>
+                          </m:r>
+                          <m:r>
+                            <a:rPr lang="ko-KR" altLang="en-US" i="0">
+                              <a:latin typeface="Cambria Math" panose="02040503050406030204" pitchFamily="18" charset="0"/>
+                            </a:rPr>
+                            <m:t>=1</m:t>
+                          </m:r>
+                        </m:sub>
+                        <m:sup>
+                          <m:r>
+                            <a:rPr lang="ko-KR" altLang="en-US" i="1">
+                              <a:latin typeface="Cambria Math" panose="02040503050406030204" pitchFamily="18" charset="0"/>
+                            </a:rPr>
+                            <m:t>𝑛</m:t>
+                          </m:r>
+                        </m:sup>
+                        <m:e>
+                          <m:sSup>
+                            <m:sSupPr>
+                              <m:ctrlPr>
+                                <a:rPr lang="ko-KR" altLang="en-US" i="1">
+                                  <a:solidFill>
+                                    <a:srgbClr val="836967"/>
+                                  </a:solidFill>
+                                  <a:latin typeface="Cambria Math" panose="02040503050406030204" pitchFamily="18" charset="0"/>
+                                </a:rPr>
+                              </m:ctrlPr>
+                            </m:sSupPr>
+                            <m:e>
+                              <m:d>
+                                <m:dPr>
+                                  <m:ctrlPr>
+                                    <a:rPr lang="ko-KR" altLang="en-US" i="1">
+                                      <a:solidFill>
+                                        <a:srgbClr val="836967"/>
+                                      </a:solidFill>
+                                      <a:latin typeface="Cambria Math" panose="02040503050406030204" pitchFamily="18" charset="0"/>
+                                    </a:rPr>
+                                  </m:ctrlPr>
+                                </m:dPr>
+                                <m:e>
+                                  <m:sSub>
+                                    <m:sSubPr>
+                                      <m:ctrlPr>
+                                        <a:rPr lang="ko-KR" altLang="en-US" i="1">
+                                          <a:solidFill>
+                                            <a:srgbClr val="836967"/>
+                                          </a:solidFill>
+                                          <a:latin typeface="Cambria Math" panose="02040503050406030204" pitchFamily="18" charset="0"/>
+                                        </a:rPr>
+                                      </m:ctrlPr>
+                                    </m:sSubPr>
+                                    <m:e>
+                                      <m:r>
+                                        <a:rPr lang="ko-KR" altLang="en-US" i="1">
+                                          <a:latin typeface="Cambria Math" panose="02040503050406030204" pitchFamily="18" charset="0"/>
+                                        </a:rPr>
+                                        <m:t>𝑦</m:t>
+                                      </m:r>
+                                    </m:e>
+                                    <m:sub>
+                                      <m:r>
+                                        <a:rPr lang="ko-KR" altLang="en-US" i="1">
+                                          <a:latin typeface="Cambria Math" panose="02040503050406030204" pitchFamily="18" charset="0"/>
+                                        </a:rPr>
+                                        <m:t>𝑖</m:t>
+                                      </m:r>
+                                    </m:sub>
+                                  </m:sSub>
+                                  <m:r>
+                                    <a:rPr lang="ko-KR" altLang="en-US" i="0">
+                                      <a:latin typeface="Cambria Math" panose="02040503050406030204" pitchFamily="18" charset="0"/>
+                                    </a:rPr>
+                                    <m:t>−</m:t>
+                                  </m:r>
+                                  <m:sSub>
+                                    <m:sSubPr>
+                                      <m:ctrlPr>
+                                        <a:rPr lang="ko-KR" altLang="en-US" i="1">
+                                          <a:solidFill>
+                                            <a:srgbClr val="836967"/>
+                                          </a:solidFill>
+                                          <a:latin typeface="Cambria Math" panose="02040503050406030204" pitchFamily="18" charset="0"/>
+                                        </a:rPr>
+                                      </m:ctrlPr>
+                                    </m:sSubPr>
+                                    <m:e>
+                                      <m:acc>
+                                        <m:accPr>
+                                          <m:chr m:val="̂"/>
+                                          <m:ctrlPr>
+                                            <a:rPr lang="ko-KR" altLang="en-US" i="1">
+                                              <a:solidFill>
+                                                <a:srgbClr val="836967"/>
+                                              </a:solidFill>
+                                              <a:latin typeface="Cambria Math" panose="02040503050406030204" pitchFamily="18" charset="0"/>
+                                            </a:rPr>
+                                          </m:ctrlPr>
+                                        </m:accPr>
+                                        <m:e>
+                                          <m:r>
+                                            <a:rPr lang="ko-KR" altLang="en-US" i="1">
+                                              <a:latin typeface="Cambria Math" panose="02040503050406030204" pitchFamily="18" charset="0"/>
+                                            </a:rPr>
+                                            <m:t>𝑦</m:t>
+                                          </m:r>
+                                        </m:e>
+                                      </m:acc>
+                                    </m:e>
+                                    <m:sub>
+                                      <m:r>
+                                        <a:rPr lang="ko-KR" altLang="en-US" i="1">
+                                          <a:latin typeface="Cambria Math" panose="02040503050406030204" pitchFamily="18" charset="0"/>
+                                        </a:rPr>
+                                        <m:t>𝑖</m:t>
+                                      </m:r>
+                                    </m:sub>
+                                  </m:sSub>
+                                </m:e>
+                              </m:d>
+                            </m:e>
+                            <m:sup>
+                              <m:r>
+                                <a:rPr lang="ko-KR" altLang="en-US" i="0">
+                                  <a:latin typeface="Cambria Math" panose="02040503050406030204" pitchFamily="18" charset="0"/>
+                                </a:rPr>
+                                <m:t>2</m:t>
+                              </m:r>
+                            </m:sup>
+                          </m:sSup>
+                        </m:e>
+                      </m:nary>
+                    </m:oMath>
+                  </m:oMathPara>
+                </a14:m>
+                <a:endParaRPr lang="ko-KR" altLang="en-US" dirty="0"/>
+              </a:p>
+            </p:txBody>
+          </p:sp>
+        </mc:Choice>
+        <mc:Fallback xmlns="">
+          <p:sp>
+            <p:nvSpPr>
+              <p:cNvPr id="2" name="TextBox 1">
+                <a:extLst>
+                  <a:ext uri="{FF2B5EF4-FFF2-40B4-BE49-F238E27FC236}">
+                    <a16:creationId xmlns:a16="http://schemas.microsoft.com/office/drawing/2014/main" id="{C84AA5AD-C144-4995-987C-4E4D29FA945E}"/>
+                  </a:ext>
+                </a:extLst>
+              </p:cNvPr>
+              <p:cNvSpPr txBox="1">
+                <a:spLocks noRot="1" noChangeAspect="1" noMove="1" noResize="1" noEditPoints="1" noAdjustHandles="1" noChangeArrowheads="1" noChangeShapeType="1" noTextEdit="1"/>
+              </p:cNvSpPr>
+              <p:nvPr/>
+            </p:nvSpPr>
+            <p:spPr>
+              <a:xfrm>
+                <a:off x="3382731" y="2996952"/>
+                <a:ext cx="2306529" cy="756233"/>
+              </a:xfrm>
+              <a:prstGeom prst="rect">
+                <a:avLst/>
+              </a:prstGeom>
+              <a:blipFill>
+                <a:blip r:embed="rId4"/>
+                <a:stretch>
+                  <a:fillRect/>
+                </a:stretch>
+              </a:blipFill>
+            </p:spPr>
+            <p:txBody>
+              <a:bodyPr/>
+              <a:lstStyle/>
+              <a:p>
+                <a:r>
+                  <a:rPr lang="ko-KR" altLang="en-US">
+                    <a:noFill/>
+                  </a:rPr>
+                  <a:t> </a:t>
+                </a:r>
+              </a:p>
+            </p:txBody>
+          </p:sp>
+        </mc:Fallback>
+      </mc:AlternateContent>
     </p:spTree>
     <p:extLst>
       <p:ext uri="{BB962C8B-B14F-4D97-AF65-F5344CB8AC3E}">
-        <p14:creationId xmlns:p14="http://schemas.microsoft.com/office/powerpoint/2010/main" val="795767722"/>
+        <p14:creationId xmlns:p14="http://schemas.microsoft.com/office/powerpoint/2010/main" val="2186940061"/>
       </p:ext>
     </p:extLst>
   </p:cSld>
@@ -8395,7 +9530,7 @@
         <p:spPr>
           <a:xfrm>
             <a:off x="971600" y="1700955"/>
-            <a:ext cx="7200800" cy="2862322"/>
+            <a:ext cx="7200800" cy="923330"/>
           </a:xfrm>
           <a:prstGeom prst="rect">
             <a:avLst/>
@@ -8414,7 +9549,7 @@
             </a:pPr>
             <a:r>
               <a:rPr lang="ko-KR" altLang="en-US" dirty="0"/>
-              <a:t>선형 회귀 모델에서 규제를 포함한 모델 중 하나 </a:t>
+              <a:t>다중의 독립 변수가 존재하는 회귀 분석 </a:t>
             </a:r>
             <a:endParaRPr lang="en-US" altLang="ko-KR" dirty="0"/>
           </a:p>
@@ -8425,77 +9560,9 @@
             </a:pPr>
             <a:r>
               <a:rPr lang="ko-KR" altLang="en-US" dirty="0"/>
-              <a:t>너무 극단적인 가중치를 억제하여 모델의 과대적합이 되지 않도록 막는 방법</a:t>
+              <a:t>여러 개의 독립 변수가 복합적으로 종속 변수에 영향을 미치는 경우 다중 회귀 모형으로 예측</a:t>
             </a:r>
             <a:endParaRPr lang="en-US" altLang="ko-KR" dirty="0"/>
-          </a:p>
-          <a:p>
-            <a:pPr marL="285750" indent="-285750">
-              <a:buFontTx/>
-              <a:buChar char="-"/>
-            </a:pPr>
-            <a:r>
-              <a:rPr lang="ko-KR" altLang="en-US" dirty="0"/>
-              <a:t>선형 회귀에서는 데이터는 정확하게 맞추기 위해 가중치가 너무 높게 설정이 되는 문제가 발생</a:t>
-            </a:r>
-            <a:endParaRPr lang="en-US" altLang="ko-KR" dirty="0"/>
-          </a:p>
-          <a:p>
-            <a:pPr marL="285750" indent="-285750">
-              <a:buFontTx/>
-              <a:buChar char="-"/>
-            </a:pPr>
-            <a:r>
-              <a:rPr lang="ko-KR" altLang="en-US" dirty="0"/>
-              <a:t>이러한 경우 훈련 모델에서 </a:t>
-            </a:r>
-            <a:r>
-              <a:rPr lang="ko-KR" altLang="en-US" dirty="0" err="1"/>
-              <a:t>예측값이</a:t>
-            </a:r>
-            <a:r>
-              <a:rPr lang="ko-KR" altLang="en-US" dirty="0"/>
-              <a:t> 잘 맞지만 새로운 데이터에 대한 예측은 틀리는 경우가 발생</a:t>
-            </a:r>
-            <a:endParaRPr lang="en-US" altLang="ko-KR" dirty="0"/>
-          </a:p>
-          <a:p>
-            <a:pPr marL="285750" indent="-285750">
-              <a:buFontTx/>
-              <a:buChar char="-"/>
-            </a:pPr>
-            <a:r>
-              <a:rPr lang="ko-KR" altLang="en-US" dirty="0"/>
-              <a:t>이러한 문제를 해결하기 위한 </a:t>
-            </a:r>
-            <a:r>
-              <a:rPr lang="en-US" altLang="ko-KR" dirty="0"/>
-              <a:t>L2 </a:t>
-            </a:r>
-            <a:r>
-              <a:rPr lang="ko-KR" altLang="en-US" dirty="0" err="1"/>
-              <a:t>패널티를</a:t>
-            </a:r>
-            <a:r>
-              <a:rPr lang="ko-KR" altLang="en-US" dirty="0"/>
-              <a:t> 추가하여 높은 가중치를 줄여서 예측을 정확하지는 않지만 새로운 데이터에서 예측의 오차를 줄여가는 과정</a:t>
-            </a:r>
-            <a:r>
-              <a:rPr lang="en-US" altLang="ko-KR" dirty="0"/>
-              <a:t>(</a:t>
-            </a:r>
-            <a:r>
-              <a:rPr lang="ko-KR" altLang="en-US" dirty="0" err="1"/>
-              <a:t>피쳐들의</a:t>
-            </a:r>
-            <a:r>
-              <a:rPr lang="ko-KR" altLang="en-US" dirty="0"/>
-              <a:t> 일반화</a:t>
-            </a:r>
-            <a:r>
-              <a:rPr lang="en-US" altLang="ko-KR" dirty="0"/>
-              <a:t>)</a:t>
-            </a:r>
           </a:p>
         </p:txBody>
       </p:sp>
@@ -8522,17 +9589,434 @@
           <a:lstStyle/>
           <a:p>
             <a:r>
-              <a:rPr lang="en-US" altLang="ko-KR" sz="2300" dirty="0"/>
-              <a:t>Ridge</a:t>
-            </a:r>
-            <a:endParaRPr lang="ko-KR" altLang="en-US" sz="2300" dirty="0"/>
-          </a:p>
-        </p:txBody>
-      </p:sp>
+              <a:rPr lang="ko-KR" altLang="en-US" sz="2300" dirty="0"/>
+              <a:t>다중 회귀</a:t>
+            </a:r>
+          </a:p>
+        </p:txBody>
+      </p:sp>
+      <mc:AlternateContent xmlns:mc="http://schemas.openxmlformats.org/markup-compatibility/2006" xmlns:a14="http://schemas.microsoft.com/office/drawing/2010/main">
+        <mc:Choice Requires="a14">
+          <p:sp>
+            <p:nvSpPr>
+              <p:cNvPr id="16" name="TextBox 15">
+                <a:extLst>
+                  <a:ext uri="{FF2B5EF4-FFF2-40B4-BE49-F238E27FC236}">
+                    <a16:creationId xmlns:a16="http://schemas.microsoft.com/office/drawing/2014/main" id="{F4BB84D3-4EFA-451F-BF51-73BB9EAB3FCE}"/>
+                  </a:ext>
+                </a:extLst>
+              </p:cNvPr>
+              <p:cNvSpPr txBox="1"/>
+              <p:nvPr/>
+            </p:nvSpPr>
+            <p:spPr>
+              <a:xfrm>
+                <a:off x="2286000" y="3048809"/>
+                <a:ext cx="4572000" cy="763927"/>
+              </a:xfrm>
+              <a:prstGeom prst="rect">
+                <a:avLst/>
+              </a:prstGeom>
+              <a:noFill/>
+            </p:spPr>
+            <p:txBody>
+              <a:bodyPr wrap="square">
+                <a:spAutoFit/>
+              </a:bodyPr>
+              <a:lstStyle/>
+              <a:p>
+                <a:pPr algn="just" latinLnBrk="1">
+                  <a:lnSpc>
+                    <a:spcPct val="107000"/>
+                  </a:lnSpc>
+                  <a:spcAft>
+                    <a:spcPts val="800"/>
+                  </a:spcAft>
+                </a:pPr>
+                <a14:m>
+                  <m:oMathPara xmlns:m="http://schemas.openxmlformats.org/officeDocument/2006/math">
+                    <m:oMathParaPr>
+                      <m:jc m:val="centerGroup"/>
+                    </m:oMathParaPr>
+                    <m:oMath xmlns:m="http://schemas.openxmlformats.org/officeDocument/2006/math">
+                      <m:acc>
+                        <m:accPr>
+                          <m:chr m:val="̂"/>
+                          <m:ctrlPr>
+                            <a:rPr lang="ko-KR" altLang="ko-KR" sz="1800" i="1" kern="100" smtClean="0">
+                              <a:effectLst/>
+                              <a:latin typeface="Cambria Math" panose="02040503050406030204" pitchFamily="18" charset="0"/>
+                              <a:ea typeface="Cambria Math" panose="02040503050406030204" pitchFamily="18" charset="0"/>
+                              <a:cs typeface="Times New Roman" panose="02020603050405020304" pitchFamily="18" charset="0"/>
+                            </a:rPr>
+                          </m:ctrlPr>
+                        </m:accPr>
+                        <m:e>
+                          <m:r>
+                            <a:rPr lang="en-US" altLang="ko-KR" sz="1800" i="1" kern="100">
+                              <a:effectLst/>
+                              <a:latin typeface="Cambria Math" panose="02040503050406030204" pitchFamily="18" charset="0"/>
+                              <a:ea typeface="맑은 고딕" panose="020B0503020000020004" pitchFamily="50" charset="-127"/>
+                              <a:cs typeface="Times New Roman" panose="02020603050405020304" pitchFamily="18" charset="0"/>
+                            </a:rPr>
+                            <m:t>𝑦</m:t>
+                          </m:r>
+                        </m:e>
+                      </m:acc>
+                      <m:r>
+                        <a:rPr lang="en-US" altLang="ko-KR" sz="1800" i="1" kern="100">
+                          <a:effectLst/>
+                          <a:latin typeface="Cambria Math" panose="02040503050406030204" pitchFamily="18" charset="0"/>
+                          <a:ea typeface="맑은 고딕" panose="020B0503020000020004" pitchFamily="50" charset="-127"/>
+                          <a:cs typeface="Times New Roman" panose="02020603050405020304" pitchFamily="18" charset="0"/>
+                        </a:rPr>
+                        <m:t>=</m:t>
+                      </m:r>
+                      <m:sSub>
+                        <m:sSubPr>
+                          <m:ctrlPr>
+                            <a:rPr lang="ko-KR" altLang="ko-KR" sz="1800" i="1" kern="100">
+                              <a:effectLst/>
+                              <a:latin typeface="Cambria Math" panose="02040503050406030204" pitchFamily="18" charset="0"/>
+                              <a:ea typeface="Cambria Math" panose="02040503050406030204" pitchFamily="18" charset="0"/>
+                              <a:cs typeface="Times New Roman" panose="02020603050405020304" pitchFamily="18" charset="0"/>
+                            </a:rPr>
+                          </m:ctrlPr>
+                        </m:sSubPr>
+                        <m:e>
+                          <m:r>
+                            <a:rPr lang="en-US" altLang="ko-KR" sz="1800" i="1" kern="100">
+                              <a:effectLst/>
+                              <a:latin typeface="Cambria Math" panose="02040503050406030204" pitchFamily="18" charset="0"/>
+                              <a:ea typeface="맑은 고딕" panose="020B0503020000020004" pitchFamily="50" charset="-127"/>
+                              <a:cs typeface="Times New Roman" panose="02020603050405020304" pitchFamily="18" charset="0"/>
+                            </a:rPr>
+                            <m:t>𝑤</m:t>
+                          </m:r>
+                        </m:e>
+                        <m:sub>
+                          <m:r>
+                            <a:rPr lang="en-US" altLang="ko-KR" sz="1800" i="1" kern="100">
+                              <a:effectLst/>
+                              <a:latin typeface="Cambria Math" panose="02040503050406030204" pitchFamily="18" charset="0"/>
+                              <a:ea typeface="맑은 고딕" panose="020B0503020000020004" pitchFamily="50" charset="-127"/>
+                              <a:cs typeface="Times New Roman" panose="02020603050405020304" pitchFamily="18" charset="0"/>
+                            </a:rPr>
+                            <m:t>1</m:t>
+                          </m:r>
+                        </m:sub>
+                      </m:sSub>
+                      <m:sSub>
+                        <m:sSubPr>
+                          <m:ctrlPr>
+                            <a:rPr lang="ko-KR" altLang="ko-KR" sz="1800" i="1" kern="100">
+                              <a:effectLst/>
+                              <a:latin typeface="Cambria Math" panose="02040503050406030204" pitchFamily="18" charset="0"/>
+                              <a:ea typeface="Cambria Math" panose="02040503050406030204" pitchFamily="18" charset="0"/>
+                              <a:cs typeface="Times New Roman" panose="02020603050405020304" pitchFamily="18" charset="0"/>
+                            </a:rPr>
+                          </m:ctrlPr>
+                        </m:sSubPr>
+                        <m:e>
+                          <m:r>
+                            <a:rPr lang="en-US" altLang="ko-KR" sz="1800" i="1" kern="100">
+                              <a:effectLst/>
+                              <a:latin typeface="Cambria Math" panose="02040503050406030204" pitchFamily="18" charset="0"/>
+                              <a:ea typeface="맑은 고딕" panose="020B0503020000020004" pitchFamily="50" charset="-127"/>
+                              <a:cs typeface="Times New Roman" panose="02020603050405020304" pitchFamily="18" charset="0"/>
+                            </a:rPr>
+                            <m:t>𝑥</m:t>
+                          </m:r>
+                        </m:e>
+                        <m:sub>
+                          <m:r>
+                            <a:rPr lang="en-US" altLang="ko-KR" sz="1800" i="1" kern="100">
+                              <a:effectLst/>
+                              <a:latin typeface="Cambria Math" panose="02040503050406030204" pitchFamily="18" charset="0"/>
+                              <a:ea typeface="맑은 고딕" panose="020B0503020000020004" pitchFamily="50" charset="-127"/>
+                              <a:cs typeface="Times New Roman" panose="02020603050405020304" pitchFamily="18" charset="0"/>
+                            </a:rPr>
+                            <m:t>1</m:t>
+                          </m:r>
+                        </m:sub>
+                      </m:sSub>
+                      <m:r>
+                        <a:rPr lang="en-US" altLang="ko-KR" sz="1800" i="1" kern="100">
+                          <a:effectLst/>
+                          <a:latin typeface="Cambria Math" panose="02040503050406030204" pitchFamily="18" charset="0"/>
+                          <a:ea typeface="맑은 고딕" panose="020B0503020000020004" pitchFamily="50" charset="-127"/>
+                          <a:cs typeface="Times New Roman" panose="02020603050405020304" pitchFamily="18" charset="0"/>
+                        </a:rPr>
+                        <m:t>+</m:t>
+                      </m:r>
+                      <m:sSub>
+                        <m:sSubPr>
+                          <m:ctrlPr>
+                            <a:rPr lang="ko-KR" altLang="ko-KR" sz="1800" i="1" kern="100">
+                              <a:effectLst/>
+                              <a:latin typeface="Cambria Math" panose="02040503050406030204" pitchFamily="18" charset="0"/>
+                              <a:ea typeface="Cambria Math" panose="02040503050406030204" pitchFamily="18" charset="0"/>
+                              <a:cs typeface="Times New Roman" panose="02020603050405020304" pitchFamily="18" charset="0"/>
+                            </a:rPr>
+                          </m:ctrlPr>
+                        </m:sSubPr>
+                        <m:e>
+                          <m:r>
+                            <a:rPr lang="en-US" altLang="ko-KR" sz="1800" i="1" kern="100">
+                              <a:effectLst/>
+                              <a:latin typeface="Cambria Math" panose="02040503050406030204" pitchFamily="18" charset="0"/>
+                              <a:ea typeface="맑은 고딕" panose="020B0503020000020004" pitchFamily="50" charset="-127"/>
+                              <a:cs typeface="Times New Roman" panose="02020603050405020304" pitchFamily="18" charset="0"/>
+                            </a:rPr>
+                            <m:t>𝑤</m:t>
+                          </m:r>
+                        </m:e>
+                        <m:sub>
+                          <m:r>
+                            <a:rPr lang="en-US" altLang="ko-KR" sz="1800" i="1" kern="100">
+                              <a:effectLst/>
+                              <a:latin typeface="Cambria Math" panose="02040503050406030204" pitchFamily="18" charset="0"/>
+                              <a:ea typeface="맑은 고딕" panose="020B0503020000020004" pitchFamily="50" charset="-127"/>
+                              <a:cs typeface="Times New Roman" panose="02020603050405020304" pitchFamily="18" charset="0"/>
+                            </a:rPr>
+                            <m:t>2</m:t>
+                          </m:r>
+                        </m:sub>
+                      </m:sSub>
+                      <m:sSub>
+                        <m:sSubPr>
+                          <m:ctrlPr>
+                            <a:rPr lang="ko-KR" altLang="ko-KR" sz="1800" i="1" kern="100">
+                              <a:effectLst/>
+                              <a:latin typeface="Cambria Math" panose="02040503050406030204" pitchFamily="18" charset="0"/>
+                              <a:ea typeface="Cambria Math" panose="02040503050406030204" pitchFamily="18" charset="0"/>
+                              <a:cs typeface="Times New Roman" panose="02020603050405020304" pitchFamily="18" charset="0"/>
+                            </a:rPr>
+                          </m:ctrlPr>
+                        </m:sSubPr>
+                        <m:e>
+                          <m:r>
+                            <a:rPr lang="en-US" altLang="ko-KR" sz="1800" i="1" kern="100">
+                              <a:effectLst/>
+                              <a:latin typeface="Cambria Math" panose="02040503050406030204" pitchFamily="18" charset="0"/>
+                              <a:ea typeface="맑은 고딕" panose="020B0503020000020004" pitchFamily="50" charset="-127"/>
+                              <a:cs typeface="Times New Roman" panose="02020603050405020304" pitchFamily="18" charset="0"/>
+                            </a:rPr>
+                            <m:t>𝑥</m:t>
+                          </m:r>
+                        </m:e>
+                        <m:sub>
+                          <m:r>
+                            <a:rPr lang="en-US" altLang="ko-KR" sz="1800" i="1" kern="100">
+                              <a:effectLst/>
+                              <a:latin typeface="Cambria Math" panose="02040503050406030204" pitchFamily="18" charset="0"/>
+                              <a:ea typeface="맑은 고딕" panose="020B0503020000020004" pitchFamily="50" charset="-127"/>
+                              <a:cs typeface="Times New Roman" panose="02020603050405020304" pitchFamily="18" charset="0"/>
+                            </a:rPr>
+                            <m:t>2</m:t>
+                          </m:r>
+                        </m:sub>
+                      </m:sSub>
+                      <m:r>
+                        <a:rPr lang="en-US" altLang="ko-KR" sz="1800" i="1" kern="100">
+                          <a:effectLst/>
+                          <a:latin typeface="Cambria Math" panose="02040503050406030204" pitchFamily="18" charset="0"/>
+                          <a:ea typeface="맑은 고딕" panose="020B0503020000020004" pitchFamily="50" charset="-127"/>
+                          <a:cs typeface="Times New Roman" panose="02020603050405020304" pitchFamily="18" charset="0"/>
+                        </a:rPr>
+                        <m:t>+</m:t>
+                      </m:r>
+                      <m:r>
+                        <a:rPr lang="ko-KR" altLang="ko-KR" sz="1800" kern="100">
+                          <a:effectLst/>
+                          <a:latin typeface="Cambria Math" panose="02040503050406030204" pitchFamily="18" charset="0"/>
+                          <a:ea typeface="맑은 고딕" panose="020B0503020000020004" pitchFamily="50" charset="-127"/>
+                          <a:cs typeface="Times New Roman" panose="02020603050405020304" pitchFamily="18" charset="0"/>
+                        </a:rPr>
+                        <m:t>…</m:t>
+                      </m:r>
+                      <m:r>
+                        <a:rPr lang="en-US" altLang="ko-KR" sz="1800" i="1" kern="100">
+                          <a:effectLst/>
+                          <a:latin typeface="Cambria Math" panose="02040503050406030204" pitchFamily="18" charset="0"/>
+                          <a:ea typeface="맑은 고딕" panose="020B0503020000020004" pitchFamily="50" charset="-127"/>
+                          <a:cs typeface="Times New Roman" panose="02020603050405020304" pitchFamily="18" charset="0"/>
+                        </a:rPr>
+                        <m:t>+</m:t>
+                      </m:r>
+                      <m:sSub>
+                        <m:sSubPr>
+                          <m:ctrlPr>
+                            <a:rPr lang="ko-KR" altLang="ko-KR" sz="1800" i="1" kern="100">
+                              <a:effectLst/>
+                              <a:latin typeface="Cambria Math" panose="02040503050406030204" pitchFamily="18" charset="0"/>
+                              <a:ea typeface="Cambria Math" panose="02040503050406030204" pitchFamily="18" charset="0"/>
+                              <a:cs typeface="Times New Roman" panose="02020603050405020304" pitchFamily="18" charset="0"/>
+                            </a:rPr>
+                          </m:ctrlPr>
+                        </m:sSubPr>
+                        <m:e>
+                          <m:r>
+                            <a:rPr lang="en-US" altLang="ko-KR" sz="1800" i="1" kern="100">
+                              <a:effectLst/>
+                              <a:latin typeface="Cambria Math" panose="02040503050406030204" pitchFamily="18" charset="0"/>
+                              <a:ea typeface="맑은 고딕" panose="020B0503020000020004" pitchFamily="50" charset="-127"/>
+                              <a:cs typeface="Times New Roman" panose="02020603050405020304" pitchFamily="18" charset="0"/>
+                            </a:rPr>
+                            <m:t>𝑤</m:t>
+                          </m:r>
+                        </m:e>
+                        <m:sub>
+                          <m:r>
+                            <a:rPr lang="en-US" altLang="ko-KR" sz="1800" i="1" kern="100">
+                              <a:effectLst/>
+                              <a:latin typeface="Cambria Math" panose="02040503050406030204" pitchFamily="18" charset="0"/>
+                              <a:ea typeface="맑은 고딕" panose="020B0503020000020004" pitchFamily="50" charset="-127"/>
+                              <a:cs typeface="Times New Roman" panose="02020603050405020304" pitchFamily="18" charset="0"/>
+                            </a:rPr>
+                            <m:t>𝑛</m:t>
+                          </m:r>
+                        </m:sub>
+                      </m:sSub>
+                      <m:sSub>
+                        <m:sSubPr>
+                          <m:ctrlPr>
+                            <a:rPr lang="ko-KR" altLang="ko-KR" sz="1800" i="1" kern="100">
+                              <a:effectLst/>
+                              <a:latin typeface="Cambria Math" panose="02040503050406030204" pitchFamily="18" charset="0"/>
+                              <a:ea typeface="Cambria Math" panose="02040503050406030204" pitchFamily="18" charset="0"/>
+                              <a:cs typeface="Times New Roman" panose="02020603050405020304" pitchFamily="18" charset="0"/>
+                            </a:rPr>
+                          </m:ctrlPr>
+                        </m:sSubPr>
+                        <m:e>
+                          <m:r>
+                            <a:rPr lang="en-US" altLang="ko-KR" sz="1800" i="1" kern="100">
+                              <a:effectLst/>
+                              <a:latin typeface="Cambria Math" panose="02040503050406030204" pitchFamily="18" charset="0"/>
+                              <a:ea typeface="맑은 고딕" panose="020B0503020000020004" pitchFamily="50" charset="-127"/>
+                              <a:cs typeface="Times New Roman" panose="02020603050405020304" pitchFamily="18" charset="0"/>
+                            </a:rPr>
+                            <m:t>𝑥</m:t>
+                          </m:r>
+                        </m:e>
+                        <m:sub>
+                          <m:r>
+                            <a:rPr lang="en-US" altLang="ko-KR" sz="1800" i="1" kern="100">
+                              <a:effectLst/>
+                              <a:latin typeface="Cambria Math" panose="02040503050406030204" pitchFamily="18" charset="0"/>
+                              <a:ea typeface="맑은 고딕" panose="020B0503020000020004" pitchFamily="50" charset="-127"/>
+                              <a:cs typeface="Times New Roman" panose="02020603050405020304" pitchFamily="18" charset="0"/>
+                            </a:rPr>
+                            <m:t>𝑛</m:t>
+                          </m:r>
+                        </m:sub>
+                      </m:sSub>
+                      <m:r>
+                        <a:rPr lang="en-US" altLang="ko-KR" sz="1800" i="1" kern="100">
+                          <a:effectLst/>
+                          <a:latin typeface="Cambria Math" panose="02040503050406030204" pitchFamily="18" charset="0"/>
+                          <a:ea typeface="맑은 고딕" panose="020B0503020000020004" pitchFamily="50" charset="-127"/>
+                          <a:cs typeface="Times New Roman" panose="02020603050405020304" pitchFamily="18" charset="0"/>
+                        </a:rPr>
+                        <m:t>+</m:t>
+                      </m:r>
+                      <m:r>
+                        <a:rPr lang="en-US" altLang="ko-KR" sz="1800" i="1" kern="100">
+                          <a:effectLst/>
+                          <a:latin typeface="Cambria Math" panose="02040503050406030204" pitchFamily="18" charset="0"/>
+                          <a:ea typeface="맑은 고딕" panose="020B0503020000020004" pitchFamily="50" charset="-127"/>
+                          <a:cs typeface="Times New Roman" panose="02020603050405020304" pitchFamily="18" charset="0"/>
+                        </a:rPr>
+                        <m:t>𝑏</m:t>
+                      </m:r>
+                    </m:oMath>
+                  </m:oMathPara>
+                </a14:m>
+                <a:endParaRPr lang="ko-KR" altLang="ko-KR" sz="1800" kern="100" dirty="0">
+                  <a:effectLst/>
+                  <a:latin typeface="맑은 고딕" panose="020B0503020000020004" pitchFamily="50" charset="-127"/>
+                  <a:ea typeface="맑은 고딕" panose="020B0503020000020004" pitchFamily="50" charset="-127"/>
+                  <a:cs typeface="Times New Roman" panose="02020603050405020304" pitchFamily="18" charset="0"/>
+                </a:endParaRPr>
+              </a:p>
+              <a:p>
+                <a:pPr algn="just" latinLnBrk="1">
+                  <a:lnSpc>
+                    <a:spcPct val="107000"/>
+                  </a:lnSpc>
+                  <a:spcAft>
+                    <a:spcPts val="800"/>
+                  </a:spcAft>
+                </a:pPr>
+                <a:r>
+                  <a:rPr lang="en-US" altLang="ko-KR" sz="1800" kern="100" dirty="0">
+                    <a:effectLst/>
+                    <a:latin typeface="맑은 고딕" panose="020B0503020000020004" pitchFamily="50" charset="-127"/>
+                    <a:ea typeface="맑은 고딕" panose="020B0503020000020004" pitchFamily="50" charset="-127"/>
+                    <a:cs typeface="Times New Roman" panose="02020603050405020304" pitchFamily="18" charset="0"/>
+                  </a:rPr>
+                  <a:t> </a:t>
+                </a:r>
+                <a:endParaRPr lang="ko-KR" altLang="ko-KR" sz="1800" kern="100" dirty="0">
+                  <a:effectLst/>
+                  <a:latin typeface="맑은 고딕" panose="020B0503020000020004" pitchFamily="50" charset="-127"/>
+                  <a:ea typeface="맑은 고딕" panose="020B0503020000020004" pitchFamily="50" charset="-127"/>
+                  <a:cs typeface="Times New Roman" panose="02020603050405020304" pitchFamily="18" charset="0"/>
+                </a:endParaRPr>
+              </a:p>
+            </p:txBody>
+          </p:sp>
+        </mc:Choice>
+        <mc:Fallback xmlns="">
+          <p:sp>
+            <p:nvSpPr>
+              <p:cNvPr id="16" name="TextBox 15">
+                <a:extLst>
+                  <a:ext uri="{FF2B5EF4-FFF2-40B4-BE49-F238E27FC236}">
+                    <a16:creationId xmlns:a16="http://schemas.microsoft.com/office/drawing/2014/main" id="{F4BB84D3-4EFA-451F-BF51-73BB9EAB3FCE}"/>
+                  </a:ext>
+                </a:extLst>
+              </p:cNvPr>
+              <p:cNvSpPr txBox="1">
+                <a:spLocks noRot="1" noChangeAspect="1" noMove="1" noResize="1" noEditPoints="1" noAdjustHandles="1" noChangeArrowheads="1" noChangeShapeType="1" noTextEdit="1"/>
+              </p:cNvSpPr>
+              <p:nvPr/>
+            </p:nvSpPr>
+            <p:spPr>
+              <a:xfrm>
+                <a:off x="2286000" y="3048809"/>
+                <a:ext cx="4572000" cy="763927"/>
+              </a:xfrm>
+              <a:prstGeom prst="rect">
+                <a:avLst/>
+              </a:prstGeom>
+              <a:blipFill>
+                <a:blip r:embed="rId3"/>
+                <a:stretch>
+                  <a:fillRect/>
+                </a:stretch>
+              </a:blipFill>
+            </p:spPr>
+            <p:txBody>
+              <a:bodyPr/>
+              <a:lstStyle/>
+              <a:p>
+                <a:r>
+                  <a:rPr lang="ko-KR" altLang="en-US">
+                    <a:noFill/>
+                  </a:rPr>
+                  <a:t> </a:t>
+                </a:r>
+              </a:p>
+            </p:txBody>
+          </p:sp>
+        </mc:Fallback>
+      </mc:AlternateContent>
     </p:spTree>
     <p:extLst>
       <p:ext uri="{BB962C8B-B14F-4D97-AF65-F5344CB8AC3E}">
-        <p14:creationId xmlns:p14="http://schemas.microsoft.com/office/powerpoint/2010/main" val="3100642414"/>
+        <p14:creationId xmlns:p14="http://schemas.microsoft.com/office/powerpoint/2010/main" val="3848512309"/>
       </p:ext>
     </p:extLst>
   </p:cSld>
@@ -8697,7 +10181,7 @@
         <p:spPr>
           <a:xfrm>
             <a:off x="971600" y="1700955"/>
-            <a:ext cx="7200800" cy="2031325"/>
+            <a:ext cx="7200800" cy="2308324"/>
           </a:xfrm>
           <a:prstGeom prst="rect">
             <a:avLst/>
@@ -8716,60 +10200,88 @@
             </a:pPr>
             <a:r>
               <a:rPr lang="ko-KR" altLang="en-US" dirty="0"/>
-              <a:t>선형 회귀 모델에서 규제를 포함한 모델 중 하나 </a:t>
+              <a:t>모델이 복잡해지면</a:t>
+            </a:r>
+            <a:r>
+              <a:rPr lang="en-US" altLang="ko-KR" dirty="0"/>
+              <a:t>(</a:t>
+            </a:r>
+            <a:r>
+              <a:rPr lang="ko-KR" altLang="en-US" dirty="0" err="1"/>
+              <a:t>피쳐의</a:t>
+            </a:r>
+            <a:r>
+              <a:rPr lang="ko-KR" altLang="en-US" dirty="0"/>
+              <a:t> 개수가 많은 경우</a:t>
+            </a:r>
+            <a:r>
+              <a:rPr lang="en-US" altLang="ko-KR" dirty="0"/>
+              <a:t>) </a:t>
+            </a:r>
+            <a:r>
+              <a:rPr lang="ko-KR" altLang="en-US" dirty="0"/>
+              <a:t>과대적합이 발생할 가능성이 있기 때문에 이를 방지하기 위해 다양한 규제 방식이 존재하고 이러한 규제 방식에 따른 모델들이 존재</a:t>
             </a:r>
             <a:endParaRPr lang="en-US" altLang="ko-KR" dirty="0"/>
           </a:p>
           <a:p>
-            <a:pPr marL="285750" indent="-285750">
+            <a:pPr marL="742950" lvl="1" indent="-285750">
               <a:buFontTx/>
               <a:buChar char="-"/>
             </a:pPr>
             <a:r>
+              <a:rPr lang="ko-KR" altLang="en-US" dirty="0"/>
+              <a:t>모델에서 규제 방식에 따라 가중치</a:t>
+            </a:r>
+            <a:r>
               <a:rPr lang="en-US" altLang="ko-KR" dirty="0"/>
-              <a:t>Ridge</a:t>
+              <a:t>(</a:t>
             </a:r>
             <a:r>
               <a:rPr lang="ko-KR" altLang="en-US" dirty="0"/>
-              <a:t>와 비슷하게 규제를 하고 있지만 </a:t>
+              <a:t>규칙</a:t>
             </a:r>
             <a:r>
               <a:rPr lang="en-US" altLang="ko-KR" dirty="0"/>
-              <a:t>L1</a:t>
-            </a:r>
-            <a:r>
-              <a:rPr lang="ko-KR" altLang="en-US" dirty="0" err="1"/>
-              <a:t>패널티를</a:t>
+              <a:t>)</a:t>
             </a:r>
             <a:r>
               <a:rPr lang="ko-KR" altLang="en-US" dirty="0"/>
-              <a:t> 이용하여 가중치를 제어 </a:t>
+              <a:t>의 제한</a:t>
             </a:r>
             <a:endParaRPr lang="en-US" altLang="ko-KR" dirty="0"/>
           </a:p>
           <a:p>
-            <a:pPr marL="285750" indent="-285750">
+            <a:pPr marL="742950" lvl="1" indent="-285750">
               <a:buFontTx/>
               <a:buChar char="-"/>
             </a:pPr>
             <a:r>
               <a:rPr lang="ko-KR" altLang="en-US" dirty="0"/>
-              <a:t>불필요한 특징들을 자동으로 제거함으로써 과적합의 문제를 해결</a:t>
+              <a:t>규제를 강하게 거는 경우 가중치의 절대치가 줄어들고 </a:t>
+            </a:r>
+            <a:r>
+              <a:rPr lang="en-US" altLang="ko-KR" dirty="0"/>
+              <a:t>0</a:t>
+            </a:r>
+            <a:r>
+              <a:rPr lang="ko-KR" altLang="en-US" dirty="0"/>
+              <a:t>에 </a:t>
+            </a:r>
+            <a:r>
+              <a:rPr lang="ko-KR" altLang="en-US" dirty="0" err="1"/>
+              <a:t>가까워짐</a:t>
             </a:r>
             <a:endParaRPr lang="en-US" altLang="ko-KR" dirty="0"/>
           </a:p>
           <a:p>
-            <a:pPr marL="285750" indent="-285750">
+            <a:pPr marL="742950" lvl="1" indent="-285750">
               <a:buFontTx/>
               <a:buChar char="-"/>
             </a:pPr>
             <a:r>
-              <a:rPr lang="ko-KR" altLang="en-US" dirty="0" err="1"/>
-              <a:t>릿지에서는</a:t>
-            </a:r>
-            <a:r>
               <a:rPr lang="ko-KR" altLang="en-US" dirty="0"/>
-              <a:t> 가중치를 </a:t>
+              <a:t>가중치가 </a:t>
             </a:r>
             <a:r>
               <a:rPr lang="en-US" altLang="ko-KR" dirty="0"/>
@@ -8777,36 +10289,36 @@
             </a:r>
             <a:r>
               <a:rPr lang="ko-KR" altLang="en-US" dirty="0"/>
-              <a:t>에 가까운 값으로 크기를 조절하고 </a:t>
+              <a:t>이 되는 </a:t>
             </a:r>
             <a:r>
               <a:rPr lang="ko-KR" altLang="en-US" dirty="0" err="1"/>
-              <a:t>라쏘에서는</a:t>
+              <a:t>피쳐들이</a:t>
             </a:r>
             <a:r>
               <a:rPr lang="ko-KR" altLang="en-US" dirty="0"/>
-              <a:t> 가중치를 </a:t>
+              <a:t> 생성</a:t>
             </a:r>
             <a:r>
               <a:rPr lang="en-US" altLang="ko-KR" dirty="0"/>
-              <a:t>0</a:t>
+              <a:t>(</a:t>
             </a:r>
             <a:r>
               <a:rPr lang="ko-KR" altLang="en-US" dirty="0"/>
-              <a:t>으로 만들어서 해당 특징을 제거하는 방법</a:t>
-            </a:r>
-            <a:endParaRPr lang="en-US" altLang="ko-KR" dirty="0"/>
-          </a:p>
-          <a:p>
-            <a:pPr marL="285750" indent="-285750">
-              <a:buFontTx/>
-              <a:buChar char="-"/>
-            </a:pPr>
+              <a:t>해당 </a:t>
+            </a:r>
+            <a:r>
+              <a:rPr lang="ko-KR" altLang="en-US" dirty="0" err="1"/>
+              <a:t>피쳐는</a:t>
+            </a:r>
             <a:r>
               <a:rPr lang="ko-KR" altLang="en-US" dirty="0"/>
-              <a:t>모델을 단순하고 해석이 가능한 모델로 만드는 회귀 방법</a:t>
-            </a:r>
-            <a:endParaRPr lang="en-US" altLang="ko-KR" dirty="0"/>
+              <a:t> 예측 값에 영향</a:t>
+            </a:r>
+            <a:r>
+              <a:rPr lang="en-US" altLang="ko-KR" dirty="0"/>
+              <a:t>X)</a:t>
+            </a:r>
           </a:p>
         </p:txBody>
       </p:sp>
@@ -8833,17 +10345,16 @@
           <a:lstStyle/>
           <a:p>
             <a:r>
-              <a:rPr lang="en-US" altLang="ko-KR" sz="2300" dirty="0"/>
-              <a:t>Lasso</a:t>
-            </a:r>
-            <a:endParaRPr lang="ko-KR" altLang="en-US" sz="2300" dirty="0"/>
+              <a:rPr lang="ko-KR" altLang="en-US" sz="2300" dirty="0"/>
+              <a:t>다중 회귀</a:t>
+            </a:r>
           </a:p>
         </p:txBody>
       </p:sp>
     </p:spTree>
     <p:extLst>
       <p:ext uri="{BB962C8B-B14F-4D97-AF65-F5344CB8AC3E}">
-        <p14:creationId xmlns:p14="http://schemas.microsoft.com/office/powerpoint/2010/main" val="1602641789"/>
+        <p14:creationId xmlns:p14="http://schemas.microsoft.com/office/powerpoint/2010/main" val="4136636380"/>
       </p:ext>
     </p:extLst>
   </p:cSld>
@@ -9026,20 +10537,8 @@
               <a:buChar char="-"/>
             </a:pPr>
             <a:r>
-              <a:rPr lang="ko-KR" altLang="en-US" dirty="0" err="1"/>
-              <a:t>릿지와</a:t>
-            </a:r>
-            <a:r>
               <a:rPr lang="ko-KR" altLang="en-US" dirty="0"/>
-              <a:t> </a:t>
-            </a:r>
-            <a:r>
-              <a:rPr lang="ko-KR" altLang="en-US" dirty="0" err="1"/>
-              <a:t>라쏘의</a:t>
-            </a:r>
-            <a:r>
-              <a:rPr lang="ko-KR" altLang="en-US" dirty="0"/>
-              <a:t> 장점을 모아서 합친 모델 </a:t>
+              <a:t>선형 회귀 모델 </a:t>
             </a:r>
             <a:endParaRPr lang="en-US" altLang="ko-KR" dirty="0"/>
           </a:p>
@@ -9049,28 +10548,8 @@
               <a:buChar char="-"/>
             </a:pPr>
             <a:r>
-              <a:rPr lang="en-US" altLang="ko-KR" dirty="0"/>
-              <a:t>L1 </a:t>
-            </a:r>
-            <a:r>
-              <a:rPr lang="ko-KR" altLang="en-US" dirty="0" err="1"/>
-              <a:t>패널티를</a:t>
-            </a:r>
-            <a:r>
               <a:rPr lang="ko-KR" altLang="en-US" dirty="0"/>
-              <a:t> 이용한 특징을 선택하는 부분과 </a:t>
-            </a:r>
-            <a:r>
-              <a:rPr lang="en-US" altLang="ko-KR" dirty="0"/>
-              <a:t>L2 </a:t>
-            </a:r>
-            <a:r>
-              <a:rPr lang="ko-KR" altLang="en-US" dirty="0" err="1"/>
-              <a:t>패널티의</a:t>
-            </a:r>
-            <a:r>
-              <a:rPr lang="ko-KR" altLang="en-US" dirty="0"/>
-              <a:t> 전체적인 특징들을 일반화하는 부분을 결합한 모델 </a:t>
+              <a:t>데이터 사이의 관계를 직선으로 표현해서 예측을 하는 방법</a:t>
             </a:r>
             <a:endParaRPr lang="en-US" altLang="ko-KR" dirty="0"/>
           </a:p>
@@ -9080,20 +10559,8 @@
               <a:buChar char="-"/>
             </a:pPr>
             <a:r>
-              <a:rPr lang="en-US" altLang="ko-KR" dirty="0"/>
-              <a:t>L1_ratio </a:t>
-            </a:r>
-            <a:r>
               <a:rPr lang="ko-KR" altLang="en-US" dirty="0"/>
-              <a:t>매개변수를 이용하여 </a:t>
-            </a:r>
-            <a:r>
-              <a:rPr lang="en-US" altLang="ko-KR" dirty="0"/>
-              <a:t>L1, L2</a:t>
-            </a:r>
-            <a:r>
-              <a:rPr lang="ko-KR" altLang="en-US" dirty="0"/>
-              <a:t>의 비율을 설정 가능</a:t>
+              <a:t>입력 데이터와 결과 데이터 사이에 일정한 비율로 변하는 관계가 있다고 가정</a:t>
             </a:r>
             <a:endParaRPr lang="en-US" altLang="ko-KR" dirty="0"/>
           </a:p>
@@ -9103,20 +10570,26 @@
               <a:buChar char="-"/>
             </a:pPr>
             <a:r>
-              <a:rPr lang="ko-KR" altLang="en-US" dirty="0" err="1"/>
-              <a:t>라쏘의</a:t>
-            </a:r>
-            <a:r>
               <a:rPr lang="ko-KR" altLang="en-US" dirty="0"/>
-              <a:t> 경우 특징을 선택하여 모델이 단순화가 되는 과정이 발생 할 수 있고 </a:t>
-            </a:r>
-            <a:r>
-              <a:rPr lang="ko-KR" altLang="en-US" dirty="0" err="1"/>
-              <a:t>릿지의</a:t>
-            </a:r>
+              <a:t>해당 관계를 가장 설명을 잘 하는 직선을 찾는 과정 </a:t>
+            </a:r>
+            <a:endParaRPr lang="en-US" altLang="ko-KR" dirty="0"/>
+          </a:p>
+          <a:p>
+            <a:pPr marL="285750" indent="-285750">
+              <a:buFontTx/>
+              <a:buChar char="-"/>
+            </a:pPr>
+            <a:endParaRPr lang="en-US" altLang="ko-KR" dirty="0"/>
+          </a:p>
+          <a:p>
+            <a:pPr marL="285750" indent="-285750">
+              <a:buFontTx/>
+              <a:buChar char="-"/>
+            </a:pPr>
             <a:r>
               <a:rPr lang="ko-KR" altLang="en-US" dirty="0"/>
-              <a:t> 경우 특징들이 일반화 됨으로 모델이 복잡해질 수 있기 때문에 서로의 단점을 보완하기 위해 만들어진 모델</a:t>
+              <a:t>공부의 시간이 늘어나는 경우 점수가 일정하게 증가할 것이다</a:t>
             </a:r>
             <a:endParaRPr lang="en-US" altLang="ko-KR" dirty="0"/>
           </a:p>
@@ -9146,7 +10619,7 @@
           <a:p>
             <a:r>
               <a:rPr lang="en-US" altLang="ko-KR" sz="2300" dirty="0" err="1"/>
-              <a:t>ElasticNet</a:t>
+              <a:t>LinearRegression</a:t>
             </a:r>
             <a:endParaRPr lang="ko-KR" altLang="en-US" sz="2300" dirty="0"/>
           </a:p>
@@ -9155,7 +10628,7 @@
     </p:spTree>
     <p:extLst>
       <p:ext uri="{BB962C8B-B14F-4D97-AF65-F5344CB8AC3E}">
-        <p14:creationId xmlns:p14="http://schemas.microsoft.com/office/powerpoint/2010/main" val="4223299694"/>
+        <p14:creationId xmlns:p14="http://schemas.microsoft.com/office/powerpoint/2010/main" val="795767722"/>
       </p:ext>
     </p:extLst>
   </p:cSld>
@@ -9311,114 +10784,609 @@
           </a:p>
         </p:txBody>
       </p:sp>
-      <p:sp>
-        <p:nvSpPr>
-          <p:cNvPr id="4" name="TextBox 3"/>
-          <p:cNvSpPr txBox="1"/>
-          <p:nvPr/>
-        </p:nvSpPr>
-        <p:spPr>
-          <a:xfrm>
-            <a:off x="971600" y="1700955"/>
-            <a:ext cx="7200800" cy="1477328"/>
-          </a:xfrm>
-          <a:prstGeom prst="rect">
-            <a:avLst/>
-          </a:prstGeom>
-          <a:noFill/>
-        </p:spPr>
-        <p:txBody>
-          <a:bodyPr wrap="square" rtlCol="0">
-            <a:spAutoFit/>
-          </a:bodyPr>
-          <a:lstStyle/>
-          <a:p>
-            <a:pPr marL="285750" indent="-285750">
-              <a:buFontTx/>
-              <a:buChar char="-"/>
-            </a:pPr>
-            <a:r>
-              <a:rPr lang="ko-KR" altLang="en-US" dirty="0"/>
-              <a:t>로지스틱 회귀는 이름은 회귀지만 실제로는 분류에서 사용이 되는 모델 </a:t>
-            </a:r>
-            <a:endParaRPr lang="en-US" altLang="ko-KR" dirty="0"/>
-          </a:p>
-          <a:p>
-            <a:pPr marL="285750" indent="-285750">
-              <a:buFontTx/>
-              <a:buChar char="-"/>
-            </a:pPr>
-            <a:r>
-              <a:rPr lang="ko-KR" altLang="en-US" dirty="0"/>
-              <a:t>예측의 값이 연속성을 가지는 경우 해당하는 값은 </a:t>
-            </a:r>
-            <a:r>
-              <a:rPr lang="en-US" altLang="ko-KR" dirty="0"/>
-              <a:t>0</a:t>
-            </a:r>
-            <a:r>
-              <a:rPr lang="ko-KR" altLang="en-US" dirty="0"/>
-              <a:t>과 </a:t>
-            </a:r>
-            <a:r>
-              <a:rPr lang="en-US" altLang="ko-KR" dirty="0"/>
-              <a:t>1</a:t>
-            </a:r>
-            <a:r>
-              <a:rPr lang="ko-KR" altLang="en-US" dirty="0"/>
-              <a:t>사의 확률 값으로 변환 </a:t>
-            </a:r>
-            <a:endParaRPr lang="en-US" altLang="ko-KR" dirty="0"/>
-          </a:p>
-          <a:p>
-            <a:pPr marL="285750" indent="-285750">
-              <a:buFontTx/>
-              <a:buChar char="-"/>
-            </a:pPr>
-            <a:r>
-              <a:rPr lang="en-US" altLang="ko-KR" dirty="0"/>
-              <a:t>0.5</a:t>
-            </a:r>
-            <a:r>
-              <a:rPr lang="ko-KR" altLang="en-US" dirty="0"/>
-              <a:t>보다 크다면 </a:t>
-            </a:r>
-            <a:r>
-              <a:rPr lang="en-US" altLang="ko-KR" dirty="0"/>
-              <a:t>1(</a:t>
-            </a:r>
-            <a:r>
-              <a:rPr lang="ko-KR" altLang="en-US" dirty="0"/>
-              <a:t>긍정</a:t>
-            </a:r>
-            <a:r>
-              <a:rPr lang="en-US" altLang="ko-KR" dirty="0"/>
-              <a:t>) </a:t>
-            </a:r>
-            <a:r>
-              <a:rPr lang="ko-KR" altLang="en-US" dirty="0"/>
-              <a:t>작으면 </a:t>
-            </a:r>
-            <a:r>
-              <a:rPr lang="en-US" altLang="ko-KR" dirty="0"/>
-              <a:t>0(</a:t>
-            </a:r>
-            <a:r>
-              <a:rPr lang="ko-KR" altLang="en-US" dirty="0"/>
-              <a:t>부정</a:t>
-            </a:r>
-            <a:r>
-              <a:rPr lang="en-US" altLang="ko-KR" dirty="0"/>
-              <a:t>)</a:t>
-            </a:r>
-            <a:r>
-              <a:rPr lang="ko-KR" altLang="en-US" dirty="0"/>
-              <a:t>으로 판단</a:t>
-            </a:r>
-            <a:endParaRPr lang="en-US" altLang="ko-KR" dirty="0"/>
-          </a:p>
-        </p:txBody>
-      </p:sp>
+      <mc:AlternateContent xmlns:mc="http://schemas.openxmlformats.org/markup-compatibility/2006">
+        <mc:Choice xmlns:a14="http://schemas.microsoft.com/office/drawing/2010/main" Requires="a14">
+          <p:sp>
+            <p:nvSpPr>
+              <p:cNvPr id="4" name="TextBox 3"/>
+              <p:cNvSpPr txBox="1"/>
+              <p:nvPr/>
+            </p:nvSpPr>
+            <p:spPr>
+              <a:xfrm>
+                <a:off x="971600" y="1700955"/>
+                <a:ext cx="7200800" cy="4194674"/>
+              </a:xfrm>
+              <a:prstGeom prst="rect">
+                <a:avLst/>
+              </a:prstGeom>
+              <a:noFill/>
+            </p:spPr>
+            <p:txBody>
+              <a:bodyPr wrap="square" rtlCol="0">
+                <a:spAutoFit/>
+              </a:bodyPr>
+              <a:lstStyle/>
+              <a:p>
+                <a:pPr marL="285750" indent="-285750">
+                  <a:buFontTx/>
+                  <a:buChar char="-"/>
+                </a:pPr>
+                <a:r>
+                  <a:rPr lang="ko-KR" altLang="en-US" b="0" i="0" dirty="0">
+                    <a:solidFill>
+                      <a:srgbClr val="141414"/>
+                    </a:solidFill>
+                    <a:effectLst/>
+                    <a:latin typeface="Noto Sans KR" panose="020B0200000000000000" pitchFamily="50" charset="-127"/>
+                    <a:ea typeface="Noto Sans KR" panose="020B0200000000000000" pitchFamily="50" charset="-127"/>
+                  </a:rPr>
+                  <a:t>나무 구조로 </a:t>
+                </a:r>
+                <a:r>
+                  <a:rPr lang="ko-KR" altLang="en-US" b="0" i="0" dirty="0" err="1">
+                    <a:solidFill>
+                      <a:srgbClr val="141414"/>
+                    </a:solidFill>
+                    <a:effectLst/>
+                    <a:latin typeface="Noto Sans KR" panose="020B0200000000000000" pitchFamily="50" charset="-127"/>
+                    <a:ea typeface="Noto Sans KR" panose="020B0200000000000000" pitchFamily="50" charset="-127"/>
+                  </a:rPr>
+                  <a:t>도표화하여</a:t>
+                </a:r>
+                <a:r>
+                  <a:rPr lang="ko-KR" altLang="en-US" b="0" i="0" dirty="0">
+                    <a:solidFill>
+                      <a:srgbClr val="141414"/>
+                    </a:solidFill>
+                    <a:effectLst/>
+                    <a:latin typeface="Noto Sans KR" panose="020B0200000000000000" pitchFamily="50" charset="-127"/>
+                    <a:ea typeface="Noto Sans KR" panose="020B0200000000000000" pitchFamily="50" charset="-127"/>
+                  </a:rPr>
+                  <a:t> 분류</a:t>
+                </a:r>
+                <a:r>
+                  <a:rPr lang="en-US" altLang="ko-KR" b="0" i="0" dirty="0">
+                    <a:solidFill>
+                      <a:srgbClr val="141414"/>
+                    </a:solidFill>
+                    <a:effectLst/>
+                    <a:latin typeface="Noto Sans KR" panose="020B0200000000000000" pitchFamily="50" charset="-127"/>
+                    <a:ea typeface="Noto Sans KR" panose="020B0200000000000000" pitchFamily="50" charset="-127"/>
+                  </a:rPr>
+                  <a:t>(Classification)</a:t>
+                </a:r>
+                <a:r>
+                  <a:rPr lang="ko-KR" altLang="en-US" b="0" i="0" dirty="0">
+                    <a:solidFill>
+                      <a:srgbClr val="141414"/>
+                    </a:solidFill>
+                    <a:effectLst/>
+                    <a:latin typeface="Noto Sans KR" panose="020B0200000000000000" pitchFamily="50" charset="-127"/>
+                    <a:ea typeface="Noto Sans KR" panose="020B0200000000000000" pitchFamily="50" charset="-127"/>
+                  </a:rPr>
+                  <a:t>와 예측</a:t>
+                </a:r>
+                <a:r>
+                  <a:rPr lang="en-US" altLang="ko-KR" b="0" i="0" dirty="0">
+                    <a:solidFill>
+                      <a:srgbClr val="141414"/>
+                    </a:solidFill>
+                    <a:effectLst/>
+                    <a:latin typeface="Noto Sans KR" panose="020B0200000000000000" pitchFamily="50" charset="-127"/>
+                    <a:ea typeface="Noto Sans KR" panose="020B0200000000000000" pitchFamily="50" charset="-127"/>
+                  </a:rPr>
+                  <a:t>(Prediction)</a:t>
+                </a:r>
+                <a:r>
+                  <a:rPr lang="ko-KR" altLang="en-US" b="0" i="0" dirty="0">
+                    <a:solidFill>
+                      <a:srgbClr val="141414"/>
+                    </a:solidFill>
+                    <a:effectLst/>
+                    <a:latin typeface="Noto Sans KR" panose="020B0200000000000000" pitchFamily="50" charset="-127"/>
+                    <a:ea typeface="Noto Sans KR" panose="020B0200000000000000" pitchFamily="50" charset="-127"/>
+                  </a:rPr>
+                  <a:t>을 수행하는 분석 방법</a:t>
+                </a:r>
+                <a:endParaRPr lang="en-US" altLang="ko-KR" b="0" i="0" dirty="0">
+                  <a:solidFill>
+                    <a:srgbClr val="141414"/>
+                  </a:solidFill>
+                  <a:effectLst/>
+                  <a:latin typeface="Noto Sans KR" panose="020B0200000000000000" pitchFamily="50" charset="-127"/>
+                  <a:ea typeface="Noto Sans KR" panose="020B0200000000000000" pitchFamily="50" charset="-127"/>
+                </a:endParaRPr>
+              </a:p>
+              <a:p>
+                <a:pPr marL="285750" indent="-285750">
+                  <a:buFontTx/>
+                  <a:buChar char="-"/>
+                </a:pPr>
+                <a:r>
+                  <a:rPr lang="ko-KR" altLang="en-US" b="0" i="0" dirty="0">
+                    <a:solidFill>
+                      <a:srgbClr val="141414"/>
+                    </a:solidFill>
+                    <a:effectLst/>
+                    <a:latin typeface="Noto Sans KR" panose="020B0200000000000000" pitchFamily="50" charset="-127"/>
+                    <a:ea typeface="Noto Sans KR" panose="020B0200000000000000" pitchFamily="50" charset="-127"/>
+                  </a:rPr>
+                  <a:t>분석 목적에 따라 적절한 분리 규칙</a:t>
+                </a:r>
+                <a:r>
+                  <a:rPr lang="en-US" altLang="ko-KR" b="0" i="0" dirty="0">
+                    <a:solidFill>
+                      <a:srgbClr val="141414"/>
+                    </a:solidFill>
+                    <a:effectLst/>
+                    <a:latin typeface="Noto Sans KR" panose="020B0200000000000000" pitchFamily="50" charset="-127"/>
+                    <a:ea typeface="Noto Sans KR" panose="020B0200000000000000" pitchFamily="50" charset="-127"/>
+                  </a:rPr>
+                  <a:t>(Splitting rule)</a:t>
+                </a:r>
+                <a:r>
+                  <a:rPr lang="ko-KR" altLang="en-US" b="0" i="0" dirty="0">
+                    <a:solidFill>
+                      <a:srgbClr val="141414"/>
+                    </a:solidFill>
+                    <a:effectLst/>
+                    <a:latin typeface="Noto Sans KR" panose="020B0200000000000000" pitchFamily="50" charset="-127"/>
+                    <a:ea typeface="Noto Sans KR" panose="020B0200000000000000" pitchFamily="50" charset="-127"/>
+                  </a:rPr>
+                  <a:t>을 찾아 나무를 성장시키는 과정</a:t>
+                </a:r>
+                <a:endParaRPr lang="en-US" altLang="ko-KR" dirty="0">
+                  <a:solidFill>
+                    <a:srgbClr val="141414"/>
+                  </a:solidFill>
+                  <a:latin typeface="Noto Sans KR" panose="020B0200000000000000" pitchFamily="50" charset="-127"/>
+                  <a:ea typeface="Noto Sans KR" panose="020B0200000000000000" pitchFamily="50" charset="-127"/>
+                </a:endParaRPr>
+              </a:p>
+              <a:p>
+                <a:pPr marL="285750" indent="-285750">
+                  <a:buFontTx/>
+                  <a:buChar char="-"/>
+                </a:pPr>
+                <a:r>
+                  <a:rPr lang="ko-KR" altLang="en-US" dirty="0"/>
+                  <a:t>목표 변수 </a:t>
+                </a:r>
+                <a:r>
+                  <a:rPr lang="en-US" altLang="ko-KR" dirty="0"/>
+                  <a:t>(y)</a:t>
+                </a:r>
+                <a:r>
+                  <a:rPr lang="ko-KR" altLang="en-US" dirty="0"/>
+                  <a:t>가 범주형 변수인 경우 불순도를 측정하여 불순도가 적은 방향으로 자식 가지를 형성</a:t>
+                </a:r>
+                <a:endParaRPr lang="en-US" altLang="ko-KR" dirty="0"/>
+              </a:p>
+              <a:p>
+                <a:pPr marL="285750" indent="-285750">
+                  <a:buFontTx/>
+                  <a:buChar char="-"/>
+                </a:pPr>
+                <a:r>
+                  <a:rPr lang="ko-KR" altLang="en-US" dirty="0"/>
+                  <a:t>의사결정나무에서 불순도를 측정할 수 있는 지표로는 지니 지수</a:t>
+                </a:r>
+                <a:r>
+                  <a:rPr lang="en-US" altLang="ko-KR" dirty="0"/>
+                  <a:t>, </a:t>
+                </a:r>
+                <a:r>
+                  <a:rPr lang="ko-KR" altLang="en-US" dirty="0"/>
+                  <a:t>엔트로피 지수</a:t>
+                </a:r>
+                <a:r>
+                  <a:rPr lang="en-US" altLang="ko-KR" dirty="0"/>
+                  <a:t>, </a:t>
+                </a:r>
+                <a:r>
+                  <a:rPr lang="ko-KR" altLang="en-US" dirty="0" err="1"/>
+                  <a:t>카이제곱</a:t>
+                </a:r>
+                <a:r>
+                  <a:rPr lang="ko-KR" altLang="en-US" dirty="0"/>
+                  <a:t> 통계량</a:t>
+                </a:r>
+                <a:endParaRPr lang="en-US" altLang="ko-KR" dirty="0"/>
+              </a:p>
+              <a:p>
+                <a:pPr marL="285750" indent="-285750">
+                  <a:buFontTx/>
+                  <a:buChar char="-"/>
+                </a:pPr>
+                <a:endParaRPr lang="en-US" altLang="ko-KR" dirty="0"/>
+              </a:p>
+              <a:p>
+                <a:pPr algn="just" latinLnBrk="1">
+                  <a:lnSpc>
+                    <a:spcPct val="107000"/>
+                  </a:lnSpc>
+                  <a:spcAft>
+                    <a:spcPts val="800"/>
+                  </a:spcAft>
+                </a:pPr>
+                <a14:m>
+                  <m:oMathPara xmlns:m="http://schemas.openxmlformats.org/officeDocument/2006/math">
+                    <m:oMathParaPr>
+                      <m:jc m:val="centerGroup"/>
+                    </m:oMathParaPr>
+                    <m:oMath xmlns:m="http://schemas.openxmlformats.org/officeDocument/2006/math">
+                      <m:r>
+                        <a:rPr lang="en-US" altLang="ko-KR" sz="1800" i="1" kern="100" smtClean="0">
+                          <a:effectLst/>
+                          <a:latin typeface="Cambria Math" panose="02040503050406030204" pitchFamily="18" charset="0"/>
+                          <a:ea typeface="맑은 고딕" panose="020B0503020000020004" pitchFamily="50" charset="-127"/>
+                          <a:cs typeface="Times New Roman" panose="02020603050405020304" pitchFamily="18" charset="0"/>
+                        </a:rPr>
+                        <m:t>𝐺𝑖𝑛𝑖</m:t>
+                      </m:r>
+                      <m:r>
+                        <a:rPr lang="en-US" altLang="ko-KR" sz="1800" i="1" kern="100" smtClean="0">
+                          <a:effectLst/>
+                          <a:latin typeface="Cambria Math" panose="02040503050406030204" pitchFamily="18" charset="0"/>
+                          <a:ea typeface="맑은 고딕" panose="020B0503020000020004" pitchFamily="50" charset="-127"/>
+                          <a:cs typeface="Times New Roman" panose="02020603050405020304" pitchFamily="18" charset="0"/>
+                        </a:rPr>
+                        <m:t>=1−</m:t>
+                      </m:r>
+                      <m:nary>
+                        <m:naryPr>
+                          <m:chr m:val="∑"/>
+                          <m:ctrlPr>
+                            <a:rPr lang="ko-KR" altLang="ko-KR" sz="1800" i="1" kern="100">
+                              <a:effectLst/>
+                              <a:latin typeface="Cambria Math" panose="02040503050406030204" pitchFamily="18" charset="0"/>
+                              <a:ea typeface="Cambria Math" panose="02040503050406030204" pitchFamily="18" charset="0"/>
+                              <a:cs typeface="Times New Roman" panose="02020603050405020304" pitchFamily="18" charset="0"/>
+                            </a:rPr>
+                          </m:ctrlPr>
+                        </m:naryPr>
+                        <m:sub>
+                          <m:r>
+                            <a:rPr lang="en-US" altLang="ko-KR" sz="1800" i="1" kern="100">
+                              <a:effectLst/>
+                              <a:latin typeface="Cambria Math" panose="02040503050406030204" pitchFamily="18" charset="0"/>
+                              <a:ea typeface="맑은 고딕" panose="020B0503020000020004" pitchFamily="50" charset="-127"/>
+                              <a:cs typeface="Times New Roman" panose="02020603050405020304" pitchFamily="18" charset="0"/>
+                            </a:rPr>
+                            <m:t>𝑖</m:t>
+                          </m:r>
+                          <m:r>
+                            <a:rPr lang="en-US" altLang="ko-KR" sz="1800" i="1" kern="100">
+                              <a:effectLst/>
+                              <a:latin typeface="Cambria Math" panose="02040503050406030204" pitchFamily="18" charset="0"/>
+                              <a:ea typeface="맑은 고딕" panose="020B0503020000020004" pitchFamily="50" charset="-127"/>
+                              <a:cs typeface="Times New Roman" panose="02020603050405020304" pitchFamily="18" charset="0"/>
+                            </a:rPr>
+                            <m:t>=1</m:t>
+                          </m:r>
+                        </m:sub>
+                        <m:sup>
+                          <m:r>
+                            <a:rPr lang="en-US" altLang="ko-KR" sz="1800" i="1" kern="100">
+                              <a:effectLst/>
+                              <a:latin typeface="Cambria Math" panose="02040503050406030204" pitchFamily="18" charset="0"/>
+                              <a:ea typeface="맑은 고딕" panose="020B0503020000020004" pitchFamily="50" charset="-127"/>
+                              <a:cs typeface="Times New Roman" panose="02020603050405020304" pitchFamily="18" charset="0"/>
+                            </a:rPr>
+                            <m:t>𝐶</m:t>
+                          </m:r>
+                        </m:sup>
+                        <m:e>
+                          <m:sSubSup>
+                            <m:sSubSupPr>
+                              <m:ctrlPr>
+                                <a:rPr lang="ko-KR" altLang="ko-KR" sz="1800" i="1" kern="100">
+                                  <a:effectLst/>
+                                  <a:latin typeface="Cambria Math" panose="02040503050406030204" pitchFamily="18" charset="0"/>
+                                  <a:ea typeface="Cambria Math" panose="02040503050406030204" pitchFamily="18" charset="0"/>
+                                  <a:cs typeface="Times New Roman" panose="02020603050405020304" pitchFamily="18" charset="0"/>
+                                </a:rPr>
+                              </m:ctrlPr>
+                            </m:sSubSupPr>
+                            <m:e>
+                              <m:r>
+                                <a:rPr lang="en-US" altLang="ko-KR" sz="1800" i="1" kern="100">
+                                  <a:effectLst/>
+                                  <a:latin typeface="Cambria Math" panose="02040503050406030204" pitchFamily="18" charset="0"/>
+                                  <a:ea typeface="맑은 고딕" panose="020B0503020000020004" pitchFamily="50" charset="-127"/>
+                                  <a:cs typeface="Times New Roman" panose="02020603050405020304" pitchFamily="18" charset="0"/>
+                                </a:rPr>
+                                <m:t>𝑝</m:t>
+                              </m:r>
+                            </m:e>
+                            <m:sub>
+                              <m:r>
+                                <a:rPr lang="en-US" altLang="ko-KR" sz="1800" i="1" kern="100">
+                                  <a:effectLst/>
+                                  <a:latin typeface="Cambria Math" panose="02040503050406030204" pitchFamily="18" charset="0"/>
+                                  <a:ea typeface="맑은 고딕" panose="020B0503020000020004" pitchFamily="50" charset="-127"/>
+                                  <a:cs typeface="Times New Roman" panose="02020603050405020304" pitchFamily="18" charset="0"/>
+                                </a:rPr>
+                                <m:t>𝑖</m:t>
+                              </m:r>
+                            </m:sub>
+                            <m:sup>
+                              <m:r>
+                                <a:rPr lang="en-US" altLang="ko-KR" sz="1800" i="1" kern="100">
+                                  <a:effectLst/>
+                                  <a:latin typeface="Cambria Math" panose="02040503050406030204" pitchFamily="18" charset="0"/>
+                                  <a:ea typeface="맑은 고딕" panose="020B0503020000020004" pitchFamily="50" charset="-127"/>
+                                  <a:cs typeface="Times New Roman" panose="02020603050405020304" pitchFamily="18" charset="0"/>
+                                </a:rPr>
+                                <m:t>2</m:t>
+                              </m:r>
+                            </m:sup>
+                          </m:sSubSup>
+                        </m:e>
+                      </m:nary>
+                    </m:oMath>
+                  </m:oMathPara>
+                </a14:m>
+                <a:endParaRPr lang="ko-KR" altLang="ko-KR" sz="1800" kern="100" dirty="0">
+                  <a:effectLst/>
+                  <a:latin typeface="맑은 고딕" panose="020B0503020000020004" pitchFamily="50" charset="-127"/>
+                  <a:ea typeface="맑은 고딕" panose="020B0503020000020004" pitchFamily="50" charset="-127"/>
+                  <a:cs typeface="Times New Roman" panose="02020603050405020304" pitchFamily="18" charset="0"/>
+                </a:endParaRPr>
+              </a:p>
+              <a:p>
+                <a:pPr algn="just">
+                  <a:lnSpc>
+                    <a:spcPct val="107000"/>
+                  </a:lnSpc>
+                  <a:spcAft>
+                    <a:spcPts val="800"/>
+                  </a:spcAft>
+                </a:pPr>
+                <a:r>
+                  <a:rPr lang="en-US" altLang="ko-KR" sz="1800" kern="100" dirty="0">
+                    <a:effectLst/>
+                    <a:latin typeface="맑은 고딕" panose="020B0503020000020004" pitchFamily="50" charset="-127"/>
+                    <a:ea typeface="맑은 고딕" panose="020B0503020000020004" pitchFamily="50" charset="-127"/>
+                    <a:cs typeface="Times New Roman" panose="02020603050405020304" pitchFamily="18" charset="0"/>
+                  </a:rPr>
+                  <a:t>- </a:t>
+                </a:r>
+                <a14:m>
+                  <m:oMath xmlns:m="http://schemas.openxmlformats.org/officeDocument/2006/math">
+                    <m:r>
+                      <a:rPr lang="en-US" altLang="ko-KR" sz="1800" i="1" smtClean="0">
+                        <a:effectLst/>
+                        <a:latin typeface="Cambria Math" panose="02040503050406030204" pitchFamily="18" charset="0"/>
+                        <a:ea typeface="맑은 고딕" panose="020B0503020000020004" pitchFamily="50" charset="-127"/>
+                        <a:cs typeface="Times New Roman" panose="02020603050405020304" pitchFamily="18" charset="0"/>
+                      </a:rPr>
+                      <m:t>𝐶</m:t>
+                    </m:r>
+                  </m:oMath>
+                </a14:m>
+                <a:r>
+                  <a:rPr lang="en-US" altLang="ko-KR" sz="1800" kern="100" dirty="0">
+                    <a:effectLst/>
+                    <a:latin typeface="맑은 고딕" panose="020B0503020000020004" pitchFamily="50" charset="-127"/>
+                    <a:ea typeface="맑은 고딕" panose="020B0503020000020004" pitchFamily="50" charset="-127"/>
+                    <a:cs typeface="Times New Roman" panose="02020603050405020304" pitchFamily="18" charset="0"/>
+                  </a:rPr>
+                  <a:t> : </a:t>
+                </a:r>
+                <a:r>
+                  <a:rPr lang="ko-KR" altLang="en-US" sz="1800" kern="100" dirty="0">
+                    <a:effectLst/>
+                    <a:latin typeface="맑은 고딕" panose="020B0503020000020004" pitchFamily="50" charset="-127"/>
+                    <a:ea typeface="맑은 고딕" panose="020B0503020000020004" pitchFamily="50" charset="-127"/>
+                    <a:cs typeface="Times New Roman" panose="02020603050405020304" pitchFamily="18" charset="0"/>
+                  </a:rPr>
+                  <a:t>분류해야 할 종속변수의 개수 </a:t>
+                </a:r>
+                <a:r>
+                  <a:rPr lang="en-US" altLang="ko-KR" kern="100" dirty="0">
+                    <a:latin typeface="맑은 고딕" panose="020B0503020000020004" pitchFamily="50" charset="-127"/>
+                    <a:cs typeface="Times New Roman" panose="02020603050405020304" pitchFamily="18" charset="0"/>
+                  </a:rPr>
+                  <a:t>(</a:t>
+                </a:r>
+                <a:r>
+                  <a:rPr lang="ko-KR" altLang="en-US" kern="100" dirty="0">
+                    <a:latin typeface="맑은 고딕" panose="020B0503020000020004" pitchFamily="50" charset="-127"/>
+                    <a:cs typeface="Times New Roman" panose="02020603050405020304" pitchFamily="18" charset="0"/>
+                  </a:rPr>
+                  <a:t>예</a:t>
+                </a:r>
+                <a:r>
+                  <a:rPr lang="en-US" altLang="ko-KR" kern="100" dirty="0">
+                    <a:latin typeface="맑은 고딕" panose="020B0503020000020004" pitchFamily="50" charset="-127"/>
+                    <a:cs typeface="Times New Roman" panose="02020603050405020304" pitchFamily="18" charset="0"/>
+                  </a:rPr>
+                  <a:t>: </a:t>
+                </a:r>
+                <a:r>
+                  <a:rPr lang="ko-KR" altLang="en-US" kern="100" dirty="0">
+                    <a:latin typeface="맑은 고딕" panose="020B0503020000020004" pitchFamily="50" charset="-127"/>
+                    <a:cs typeface="Times New Roman" panose="02020603050405020304" pitchFamily="18" charset="0"/>
+                  </a:rPr>
+                  <a:t>합격</a:t>
+                </a:r>
+                <a:r>
+                  <a:rPr lang="en-US" altLang="ko-KR" kern="100" dirty="0">
+                    <a:latin typeface="맑은 고딕" panose="020B0503020000020004" pitchFamily="50" charset="-127"/>
+                    <a:cs typeface="Times New Roman" panose="02020603050405020304" pitchFamily="18" charset="0"/>
+                  </a:rPr>
+                  <a:t>/</a:t>
+                </a:r>
+                <a:r>
+                  <a:rPr lang="ko-KR" altLang="en-US" kern="100" dirty="0">
+                    <a:latin typeface="맑은 고딕" panose="020B0503020000020004" pitchFamily="50" charset="-127"/>
+                    <a:cs typeface="Times New Roman" panose="02020603050405020304" pitchFamily="18" charset="0"/>
+                  </a:rPr>
+                  <a:t>불합격이면 </a:t>
+                </a:r>
+                <a:r>
+                  <a:rPr lang="en-US" altLang="ko-KR" kern="100" dirty="0">
+                    <a:latin typeface="맑은 고딕" panose="020B0503020000020004" pitchFamily="50" charset="-127"/>
+                    <a:cs typeface="Times New Roman" panose="02020603050405020304" pitchFamily="18" charset="0"/>
+                  </a:rPr>
+                  <a:t>2)</a:t>
+                </a:r>
+                <a:endParaRPr lang="en-US" altLang="ko-KR" sz="1800" kern="100" dirty="0">
+                  <a:effectLst/>
+                  <a:latin typeface="맑은 고딕" panose="020B0503020000020004" pitchFamily="50" charset="-127"/>
+                  <a:ea typeface="맑은 고딕" panose="020B0503020000020004" pitchFamily="50" charset="-127"/>
+                  <a:cs typeface="Times New Roman" panose="02020603050405020304" pitchFamily="18" charset="0"/>
+                </a:endParaRPr>
+              </a:p>
+              <a:p>
+                <a:pPr algn="just" latinLnBrk="1">
+                  <a:lnSpc>
+                    <a:spcPct val="107000"/>
+                  </a:lnSpc>
+                  <a:spcAft>
+                    <a:spcPts val="800"/>
+                  </a:spcAft>
+                </a:pPr>
+                <a:r>
+                  <a:rPr lang="en-US" altLang="ko-KR" kern="100" dirty="0">
+                    <a:latin typeface="맑은 고딕" panose="020B0503020000020004" pitchFamily="50" charset="-127"/>
+                    <a:ea typeface="맑은 고딕" panose="020B0503020000020004" pitchFamily="50" charset="-127"/>
+                    <a:cs typeface="Times New Roman" panose="02020603050405020304" pitchFamily="18" charset="0"/>
+                  </a:rPr>
+                  <a:t>-</a:t>
+                </a:r>
+                <a14:m>
+                  <m:oMath xmlns:m="http://schemas.openxmlformats.org/officeDocument/2006/math">
+                    <m:sSub>
+                      <m:sSubPr>
+                        <m:ctrlPr>
+                          <a:rPr lang="ko-KR" altLang="ko-KR" i="1" smtClean="0">
+                            <a:effectLst/>
+                            <a:latin typeface="Cambria Math" panose="02040503050406030204" pitchFamily="18" charset="0"/>
+                            <a:ea typeface="Cambria Math" panose="02040503050406030204" pitchFamily="18" charset="0"/>
+                          </a:rPr>
+                        </m:ctrlPr>
+                      </m:sSubPr>
+                      <m:e>
+                        <m:r>
+                          <a:rPr lang="en-US" altLang="ko-KR" b="0" i="1" smtClean="0">
+                            <a:effectLst/>
+                            <a:latin typeface="Cambria Math" panose="02040503050406030204" pitchFamily="18" charset="0"/>
+                            <a:ea typeface="Cambria Math" panose="02040503050406030204" pitchFamily="18" charset="0"/>
+                          </a:rPr>
+                          <m:t> </m:t>
+                        </m:r>
+                        <m:r>
+                          <a:rPr lang="en-US" altLang="ko-KR" sz="1800" i="1">
+                            <a:effectLst/>
+                            <a:latin typeface="Cambria Math" panose="02040503050406030204" pitchFamily="18" charset="0"/>
+                            <a:ea typeface="맑은 고딕" panose="020B0503020000020004" pitchFamily="50" charset="-127"/>
+                            <a:cs typeface="Times New Roman" panose="02020603050405020304" pitchFamily="18" charset="0"/>
+                          </a:rPr>
+                          <m:t>𝑝</m:t>
+                        </m:r>
+                      </m:e>
+                      <m:sub>
+                        <m:r>
+                          <a:rPr lang="en-US" altLang="ko-KR" sz="1800" i="1">
+                            <a:effectLst/>
+                            <a:latin typeface="Cambria Math" panose="02040503050406030204" pitchFamily="18" charset="0"/>
+                            <a:ea typeface="맑은 고딕" panose="020B0503020000020004" pitchFamily="50" charset="-127"/>
+                            <a:cs typeface="Times New Roman" panose="02020603050405020304" pitchFamily="18" charset="0"/>
+                          </a:rPr>
+                          <m:t>𝑖</m:t>
+                        </m:r>
+                      </m:sub>
+                    </m:sSub>
+                  </m:oMath>
+                </a14:m>
+                <a:r>
+                  <a:rPr lang="en-US" altLang="ko-KR" sz="1800" kern="100" dirty="0">
+                    <a:effectLst/>
+                    <a:latin typeface="맑은 고딕" panose="020B0503020000020004" pitchFamily="50" charset="-127"/>
+                    <a:ea typeface="맑은 고딕" panose="020B0503020000020004" pitchFamily="50" charset="-127"/>
+                    <a:cs typeface="Times New Roman" panose="02020603050405020304" pitchFamily="18" charset="0"/>
+                  </a:rPr>
+                  <a:t> : </a:t>
+                </a:r>
+                <a:r>
+                  <a:rPr lang="ko-KR" altLang="en-US" sz="1800" kern="100" dirty="0">
+                    <a:effectLst/>
+                    <a:latin typeface="맑은 고딕" panose="020B0503020000020004" pitchFamily="50" charset="-127"/>
+                    <a:ea typeface="맑은 고딕" panose="020B0503020000020004" pitchFamily="50" charset="-127"/>
+                    <a:cs typeface="Times New Roman" panose="02020603050405020304" pitchFamily="18" charset="0"/>
+                  </a:rPr>
+                  <a:t>특정 구역 안에 </a:t>
+                </a:r>
+                <a:r>
+                  <a:rPr lang="en-US" altLang="ko-KR" sz="1800" kern="100" dirty="0" err="1">
+                    <a:effectLst/>
+                    <a:latin typeface="맑은 고딕" panose="020B0503020000020004" pitchFamily="50" charset="-127"/>
+                    <a:ea typeface="맑은 고딕" panose="020B0503020000020004" pitchFamily="50" charset="-127"/>
+                    <a:cs typeface="Times New Roman" panose="02020603050405020304" pitchFamily="18" charset="0"/>
+                  </a:rPr>
+                  <a:t>i</a:t>
+                </a:r>
+                <a:r>
+                  <a:rPr lang="ko-KR" altLang="en-US" sz="1800" kern="100" dirty="0">
+                    <a:effectLst/>
+                    <a:latin typeface="맑은 고딕" panose="020B0503020000020004" pitchFamily="50" charset="-127"/>
+                    <a:ea typeface="맑은 고딕" panose="020B0503020000020004" pitchFamily="50" charset="-127"/>
+                    <a:cs typeface="Times New Roman" panose="02020603050405020304" pitchFamily="18" charset="0"/>
+                  </a:rPr>
+                  <a:t>번째 정답이 차지하는 비율</a:t>
+                </a:r>
+                <a:endParaRPr lang="ko-KR" altLang="ko-KR" sz="1800" kern="100" dirty="0">
+                  <a:effectLst/>
+                  <a:latin typeface="맑은 고딕" panose="020B0503020000020004" pitchFamily="50" charset="-127"/>
+                  <a:ea typeface="맑은 고딕" panose="020B0503020000020004" pitchFamily="50" charset="-127"/>
+                  <a:cs typeface="Times New Roman" panose="02020603050405020304" pitchFamily="18" charset="0"/>
+                </a:endParaRPr>
+              </a:p>
+            </p:txBody>
+          </p:sp>
+        </mc:Choice>
+        <mc:Fallback>
+          <p:sp>
+            <p:nvSpPr>
+              <p:cNvPr id="4" name="TextBox 3"/>
+              <p:cNvSpPr txBox="1">
+                <a:spLocks noRot="1" noChangeAspect="1" noMove="1" noResize="1" noEditPoints="1" noAdjustHandles="1" noChangeArrowheads="1" noChangeShapeType="1" noTextEdit="1"/>
+              </p:cNvSpPr>
+              <p:nvPr/>
+            </p:nvSpPr>
+            <p:spPr>
+              <a:xfrm>
+                <a:off x="971600" y="1700955"/>
+                <a:ext cx="7200800" cy="4194674"/>
+              </a:xfrm>
+              <a:prstGeom prst="rect">
+                <a:avLst/>
+              </a:prstGeom>
+              <a:blipFill>
+                <a:blip r:embed="rId3"/>
+                <a:stretch>
+                  <a:fillRect l="-1100" t="-2180" b="-1308"/>
+                </a:stretch>
+              </a:blipFill>
+            </p:spPr>
+            <p:txBody>
+              <a:bodyPr/>
+              <a:lstStyle/>
+              <a:p>
+                <a:r>
+                  <a:rPr lang="ko-KR" altLang="en-US">
+                    <a:noFill/>
+                  </a:rPr>
+                  <a:t> </a:t>
+                </a:r>
+              </a:p>
+            </p:txBody>
+          </p:sp>
+        </mc:Fallback>
+      </mc:AlternateContent>
       <p:sp>
         <p:nvSpPr>
           <p:cNvPr id="6" name="TextBox 5"/>
@@ -9443,7 +11411,7 @@
           <a:p>
             <a:r>
               <a:rPr lang="en-US" altLang="ko-KR" sz="2300" dirty="0"/>
-              <a:t>Logistic Regression</a:t>
+              <a:t>Decision Tree</a:t>
             </a:r>
             <a:endParaRPr lang="ko-KR" altLang="en-US" sz="2300" dirty="0"/>
           </a:p>
@@ -9452,7 +11420,7 @@
     </p:spTree>
     <p:extLst>
       <p:ext uri="{BB962C8B-B14F-4D97-AF65-F5344CB8AC3E}">
-        <p14:creationId xmlns:p14="http://schemas.microsoft.com/office/powerpoint/2010/main" val="3565837906"/>
+        <p14:creationId xmlns:p14="http://schemas.microsoft.com/office/powerpoint/2010/main" val="2184680569"/>
       </p:ext>
     </p:extLst>
   </p:cSld>
@@ -9636,39 +11604,7 @@
             </a:pPr>
             <a:r>
               <a:rPr lang="ko-KR" altLang="en-US" dirty="0"/>
-              <a:t>데이터를 분리하는 최적의 경계선</a:t>
-            </a:r>
-            <a:r>
-              <a:rPr lang="en-US" altLang="ko-KR" dirty="0"/>
-              <a:t>( </a:t>
-            </a:r>
-            <a:r>
-              <a:rPr lang="ko-KR" altLang="en-US" dirty="0"/>
-              <a:t>결정 경계 </a:t>
-            </a:r>
-            <a:r>
-              <a:rPr lang="en-US" altLang="ko-KR" dirty="0"/>
-              <a:t>)</a:t>
-            </a:r>
-            <a:r>
-              <a:rPr lang="ko-KR" altLang="en-US" dirty="0"/>
-              <a:t>을 찾고 해당 경계선에서 어느 정도의 여유공간</a:t>
-            </a:r>
-            <a:r>
-              <a:rPr lang="en-US" altLang="ko-KR" dirty="0"/>
-              <a:t>(</a:t>
-            </a:r>
-            <a:r>
-              <a:rPr lang="ko-KR" altLang="en-US" dirty="0"/>
-              <a:t>마진</a:t>
-            </a:r>
-            <a:r>
-              <a:rPr lang="en-US" altLang="ko-KR" dirty="0"/>
-              <a:t>)</a:t>
-            </a:r>
-            <a:r>
-              <a:rPr lang="ko-KR" altLang="en-US" dirty="0"/>
-              <a:t>을 생성</a:t>
+              <a:t>선형 회귀 모델에서 규제를 포함한 모델 중 하나 </a:t>
             </a:r>
             <a:endParaRPr lang="en-US" altLang="ko-KR" dirty="0"/>
           </a:p>
@@ -9679,15 +11615,7 @@
             </a:pPr>
             <a:r>
               <a:rPr lang="ko-KR" altLang="en-US" dirty="0"/>
-              <a:t>마진의 영역을 벗어나는 데이터에 대해서는 가중치 </a:t>
-            </a:r>
-            <a:r>
-              <a:rPr lang="ko-KR" altLang="en-US" dirty="0" err="1"/>
-              <a:t>패널티를</a:t>
-            </a:r>
-            <a:r>
-              <a:rPr lang="ko-KR" altLang="en-US" dirty="0"/>
-              <a:t> 적용하여 학습을 하는 방식 </a:t>
+              <a:t>너무 극단적인 가중치를 억제하여 모델의 과대적합이 되지 않도록 막는 방법</a:t>
             </a:r>
             <a:endParaRPr lang="en-US" altLang="ko-KR" dirty="0"/>
           </a:p>
@@ -9697,12 +11625,8 @@
               <a:buChar char="-"/>
             </a:pPr>
             <a:r>
-              <a:rPr lang="ko-KR" altLang="en-US" dirty="0" err="1"/>
-              <a:t>패널티를</a:t>
-            </a:r>
-            <a:r>
               <a:rPr lang="ko-KR" altLang="en-US" dirty="0"/>
-              <a:t> 이용하여 마진 영역 밖의 데이터를 마진 영역 안쪽으로 들어 오게 할 수 있도록 매개변수를 수정</a:t>
+              <a:t>선형 회귀에서는 데이터는 정확하게 맞추기 위해 가중치가 너무 높게 설정이 되는 문제가 발생</a:t>
             </a:r>
             <a:endParaRPr lang="en-US" altLang="ko-KR" dirty="0"/>
           </a:p>
@@ -9713,15 +11637,15 @@
             </a:pPr>
             <a:r>
               <a:rPr lang="ko-KR" altLang="en-US" dirty="0"/>
-              <a:t>회귀</a:t>
-            </a:r>
-            <a:r>
-              <a:rPr lang="en-US" altLang="ko-KR" dirty="0"/>
-              <a:t>, </a:t>
+              <a:t>이러한 경우 훈련 모델에서 </a:t>
+            </a:r>
+            <a:r>
+              <a:rPr lang="ko-KR" altLang="en-US" dirty="0" err="1"/>
+              <a:t>예측값이</a:t>
             </a:r>
             <a:r>
               <a:rPr lang="ko-KR" altLang="en-US" dirty="0"/>
-              <a:t>분류에서 모두 사용이 가능</a:t>
+              <a:t> 잘 맞지만 새로운 데이터에 대한 예측은 틀리는 경우가 발생</a:t>
             </a:r>
             <a:endParaRPr lang="en-US" altLang="ko-KR" dirty="0"/>
           </a:p>
@@ -9751,7 +11675,7 @@
           <a:p>
             <a:r>
               <a:rPr lang="en-US" altLang="ko-KR" sz="2300" dirty="0"/>
-              <a:t>Support Vector Machine</a:t>
+              <a:t>Ridge</a:t>
             </a:r>
             <a:endParaRPr lang="ko-KR" altLang="en-US" sz="2300" dirty="0"/>
           </a:p>
@@ -9760,7 +11684,7 @@
     </p:spTree>
     <p:extLst>
       <p:ext uri="{BB962C8B-B14F-4D97-AF65-F5344CB8AC3E}">
-        <p14:creationId xmlns:p14="http://schemas.microsoft.com/office/powerpoint/2010/main" val="637760614"/>
+        <p14:creationId xmlns:p14="http://schemas.microsoft.com/office/powerpoint/2010/main" val="3100642414"/>
       </p:ext>
     </p:extLst>
   </p:cSld>
@@ -9916,125 +11840,553 @@
           </a:p>
         </p:txBody>
       </p:sp>
-      <p:sp>
-        <p:nvSpPr>
-          <p:cNvPr id="4" name="TextBox 3"/>
-          <p:cNvSpPr txBox="1"/>
-          <p:nvPr/>
-        </p:nvSpPr>
-        <p:spPr>
-          <a:xfrm>
-            <a:off x="971600" y="1700955"/>
-            <a:ext cx="7200800" cy="2031325"/>
-          </a:xfrm>
-          <a:prstGeom prst="rect">
-            <a:avLst/>
-          </a:prstGeom>
-          <a:noFill/>
-        </p:spPr>
-        <p:txBody>
-          <a:bodyPr wrap="square" rtlCol="0">
-            <a:spAutoFit/>
-          </a:bodyPr>
-          <a:lstStyle/>
-          <a:p>
-            <a:pPr marL="285750" indent="-285750">
-              <a:buFontTx/>
-              <a:buChar char="-"/>
-            </a:pPr>
-            <a:r>
-              <a:rPr lang="ko-KR" altLang="en-US" dirty="0"/>
-              <a:t>데이터를 분리하는 최적의 경계선</a:t>
-            </a:r>
-            <a:r>
-              <a:rPr lang="en-US" altLang="ko-KR" dirty="0"/>
-              <a:t>( </a:t>
-            </a:r>
-            <a:r>
-              <a:rPr lang="ko-KR" altLang="en-US" dirty="0"/>
-              <a:t>결정 경계 </a:t>
-            </a:r>
-            <a:r>
-              <a:rPr lang="en-US" altLang="ko-KR" dirty="0"/>
-              <a:t>)</a:t>
-            </a:r>
-            <a:r>
-              <a:rPr lang="ko-KR" altLang="en-US" dirty="0"/>
-              <a:t>을 찾고 해당 경계선에서 어느 정도의 여유공간</a:t>
-            </a:r>
-            <a:r>
-              <a:rPr lang="en-US" altLang="ko-KR" dirty="0"/>
-              <a:t>(</a:t>
-            </a:r>
-            <a:r>
-              <a:rPr lang="ko-KR" altLang="en-US" dirty="0"/>
-              <a:t>마진</a:t>
-            </a:r>
-            <a:r>
-              <a:rPr lang="en-US" altLang="ko-KR" dirty="0"/>
-              <a:t>)</a:t>
-            </a:r>
-            <a:r>
-              <a:rPr lang="ko-KR" altLang="en-US" dirty="0"/>
-              <a:t>을 생성</a:t>
-            </a:r>
-            <a:endParaRPr lang="en-US" altLang="ko-KR" dirty="0"/>
-          </a:p>
-          <a:p>
-            <a:pPr marL="285750" indent="-285750">
-              <a:buFontTx/>
-              <a:buChar char="-"/>
-            </a:pPr>
-            <a:r>
-              <a:rPr lang="ko-KR" altLang="en-US" dirty="0"/>
-              <a:t>마진의 영역을 벗어나는 데이터에 대해서는 가중치 </a:t>
-            </a:r>
-            <a:r>
-              <a:rPr lang="ko-KR" altLang="en-US" dirty="0" err="1"/>
-              <a:t>패널티를</a:t>
-            </a:r>
-            <a:r>
-              <a:rPr lang="ko-KR" altLang="en-US" dirty="0"/>
-              <a:t> 적용하여 학습을 하는 방식 </a:t>
-            </a:r>
-            <a:endParaRPr lang="en-US" altLang="ko-KR" dirty="0"/>
-          </a:p>
-          <a:p>
-            <a:pPr marL="285750" indent="-285750">
-              <a:buFontTx/>
-              <a:buChar char="-"/>
-            </a:pPr>
-            <a:r>
-              <a:rPr lang="ko-KR" altLang="en-US" dirty="0" err="1"/>
-              <a:t>패널티를</a:t>
-            </a:r>
-            <a:r>
-              <a:rPr lang="ko-KR" altLang="en-US" dirty="0"/>
-              <a:t> 이용하여 마진 영역 밖의 데이터를 마진 영역 안쪽으로 들어 오게 할 수 있도록 매개변수를 수정</a:t>
-            </a:r>
-            <a:endParaRPr lang="en-US" altLang="ko-KR" dirty="0"/>
-          </a:p>
-          <a:p>
-            <a:pPr marL="285750" indent="-285750">
-              <a:buFontTx/>
-              <a:buChar char="-"/>
-            </a:pPr>
-            <a:r>
-              <a:rPr lang="ko-KR" altLang="en-US" dirty="0"/>
-              <a:t>회귀</a:t>
-            </a:r>
-            <a:r>
-              <a:rPr lang="en-US" altLang="ko-KR" dirty="0"/>
-              <a:t>, </a:t>
-            </a:r>
-            <a:r>
-              <a:rPr lang="ko-KR" altLang="en-US" dirty="0"/>
-              <a:t>분류에서 모두 사용이 가능</a:t>
-            </a:r>
-            <a:endParaRPr lang="en-US" altLang="ko-KR" dirty="0"/>
-          </a:p>
-        </p:txBody>
-      </p:sp>
+      <mc:AlternateContent xmlns:mc="http://schemas.openxmlformats.org/markup-compatibility/2006">
+        <mc:Choice xmlns:a14="http://schemas.microsoft.com/office/drawing/2010/main" Requires="a14">
+          <p:sp>
+            <p:nvSpPr>
+              <p:cNvPr id="4" name="TextBox 3"/>
+              <p:cNvSpPr txBox="1"/>
+              <p:nvPr/>
+            </p:nvSpPr>
+            <p:spPr>
+              <a:xfrm>
+                <a:off x="971600" y="1700955"/>
+                <a:ext cx="7200800" cy="3122843"/>
+              </a:xfrm>
+              <a:prstGeom prst="rect">
+                <a:avLst/>
+              </a:prstGeom>
+              <a:noFill/>
+            </p:spPr>
+            <p:txBody>
+              <a:bodyPr wrap="square" rtlCol="0">
+                <a:spAutoFit/>
+              </a:bodyPr>
+              <a:lstStyle/>
+              <a:p>
+                <a:pPr marL="285750" indent="-285750">
+                  <a:buFontTx/>
+                  <a:buChar char="-"/>
+                </a:pPr>
+                <a:r>
+                  <a:rPr lang="ko-KR" altLang="en-US" dirty="0"/>
+                  <a:t>이러한 문제를 해결하기 위한 </a:t>
+                </a:r>
+                <a:r>
+                  <a:rPr lang="en-US" altLang="ko-KR" dirty="0"/>
+                  <a:t>L2 </a:t>
+                </a:r>
+                <a:r>
+                  <a:rPr lang="ko-KR" altLang="en-US" dirty="0" err="1"/>
+                  <a:t>패널티를</a:t>
+                </a:r>
+                <a:r>
+                  <a:rPr lang="ko-KR" altLang="en-US" dirty="0"/>
+                  <a:t> 추가하여 높은 가중치를 줄여서 예측을 정확하지는 않지만 새로운 데이터에서 예측의 오차를 줄여가는 과정</a:t>
+                </a:r>
+                <a:r>
+                  <a:rPr lang="en-US" altLang="ko-KR" dirty="0"/>
+                  <a:t>(</a:t>
+                </a:r>
+                <a:r>
+                  <a:rPr lang="ko-KR" altLang="en-US" dirty="0" err="1"/>
+                  <a:t>피쳐들의</a:t>
+                </a:r>
+                <a:r>
+                  <a:rPr lang="ko-KR" altLang="en-US" dirty="0"/>
+                  <a:t> 일반화</a:t>
+                </a:r>
+                <a:r>
+                  <a:rPr lang="en-US" altLang="ko-KR" dirty="0"/>
+                  <a:t>)</a:t>
+                </a:r>
+              </a:p>
+              <a:p>
+                <a:pPr marL="285750" indent="-285750">
+                  <a:buFontTx/>
+                  <a:buChar char="-"/>
+                </a:pPr>
+                <a:endParaRPr lang="en-US" altLang="ko-KR" dirty="0"/>
+              </a:p>
+              <a:p>
+                <a:pPr algn="just" latinLnBrk="1">
+                  <a:lnSpc>
+                    <a:spcPct val="107000"/>
+                  </a:lnSpc>
+                  <a:spcAft>
+                    <a:spcPts val="800"/>
+                  </a:spcAft>
+                </a:pPr>
+                <a14:m>
+                  <m:oMathPara xmlns:m="http://schemas.openxmlformats.org/officeDocument/2006/math">
+                    <m:oMathParaPr>
+                      <m:jc m:val="centerGroup"/>
+                    </m:oMathParaPr>
+                    <m:oMath xmlns:m="http://schemas.openxmlformats.org/officeDocument/2006/math">
+                      <m:r>
+                        <a:rPr lang="en-US" altLang="ko-KR" sz="1800" i="1" kern="100" smtClean="0">
+                          <a:effectLst/>
+                          <a:latin typeface="Cambria Math" panose="02040503050406030204" pitchFamily="18" charset="0"/>
+                          <a:ea typeface="맑은 고딕" panose="020B0503020000020004" pitchFamily="50" charset="-127"/>
+                          <a:cs typeface="Times New Roman" panose="02020603050405020304" pitchFamily="18" charset="0"/>
+                        </a:rPr>
+                        <m:t>𝐶𝑜𝑠𝑡</m:t>
+                      </m:r>
+                      <m:r>
+                        <a:rPr lang="en-US" altLang="ko-KR" sz="1800" i="1" kern="100" smtClean="0">
+                          <a:effectLst/>
+                          <a:latin typeface="Cambria Math" panose="02040503050406030204" pitchFamily="18" charset="0"/>
+                          <a:ea typeface="맑은 고딕" panose="020B0503020000020004" pitchFamily="50" charset="-127"/>
+                          <a:cs typeface="Times New Roman" panose="02020603050405020304" pitchFamily="18" charset="0"/>
+                        </a:rPr>
+                        <m:t>=</m:t>
+                      </m:r>
+                      <m:f>
+                        <m:fPr>
+                          <m:ctrlPr>
+                            <a:rPr lang="ko-KR" altLang="ko-KR" sz="1800" i="1" kern="100">
+                              <a:effectLst/>
+                              <a:latin typeface="Cambria Math" panose="02040503050406030204" pitchFamily="18" charset="0"/>
+                              <a:ea typeface="Cambria Math" panose="02040503050406030204" pitchFamily="18" charset="0"/>
+                              <a:cs typeface="Times New Roman" panose="02020603050405020304" pitchFamily="18" charset="0"/>
+                            </a:rPr>
+                          </m:ctrlPr>
+                        </m:fPr>
+                        <m:num>
+                          <m:r>
+                            <a:rPr lang="en-US" altLang="ko-KR" sz="1800" i="1" kern="100">
+                              <a:effectLst/>
+                              <a:latin typeface="Cambria Math" panose="02040503050406030204" pitchFamily="18" charset="0"/>
+                              <a:ea typeface="맑은 고딕" panose="020B0503020000020004" pitchFamily="50" charset="-127"/>
+                              <a:cs typeface="Times New Roman" panose="02020603050405020304" pitchFamily="18" charset="0"/>
+                            </a:rPr>
+                            <m:t>1</m:t>
+                          </m:r>
+                        </m:num>
+                        <m:den>
+                          <m:r>
+                            <a:rPr lang="en-US" altLang="ko-KR" sz="1800" i="1" kern="100">
+                              <a:effectLst/>
+                              <a:latin typeface="Cambria Math" panose="02040503050406030204" pitchFamily="18" charset="0"/>
+                              <a:ea typeface="맑은 고딕" panose="020B0503020000020004" pitchFamily="50" charset="-127"/>
+                              <a:cs typeface="Times New Roman" panose="02020603050405020304" pitchFamily="18" charset="0"/>
+                            </a:rPr>
+                            <m:t>𝑁</m:t>
+                          </m:r>
+                        </m:den>
+                      </m:f>
+                      <m:nary>
+                        <m:naryPr>
+                          <m:chr m:val="∑"/>
+                          <m:ctrlPr>
+                            <a:rPr lang="ko-KR" altLang="ko-KR" sz="1800" i="1" kern="100">
+                              <a:effectLst/>
+                              <a:latin typeface="Cambria Math" panose="02040503050406030204" pitchFamily="18" charset="0"/>
+                              <a:ea typeface="Cambria Math" panose="02040503050406030204" pitchFamily="18" charset="0"/>
+                              <a:cs typeface="Times New Roman" panose="02020603050405020304" pitchFamily="18" charset="0"/>
+                            </a:rPr>
+                          </m:ctrlPr>
+                        </m:naryPr>
+                        <m:sub>
+                          <m:r>
+                            <a:rPr lang="en-US" altLang="ko-KR" sz="1800" i="1" kern="100">
+                              <a:effectLst/>
+                              <a:latin typeface="Cambria Math" panose="02040503050406030204" pitchFamily="18" charset="0"/>
+                              <a:ea typeface="맑은 고딕" panose="020B0503020000020004" pitchFamily="50" charset="-127"/>
+                              <a:cs typeface="Times New Roman" panose="02020603050405020304" pitchFamily="18" charset="0"/>
+                            </a:rPr>
+                            <m:t>𝑖</m:t>
+                          </m:r>
+                          <m:r>
+                            <a:rPr lang="en-US" altLang="ko-KR" sz="1800" i="1" kern="100">
+                              <a:effectLst/>
+                              <a:latin typeface="Cambria Math" panose="02040503050406030204" pitchFamily="18" charset="0"/>
+                              <a:ea typeface="맑은 고딕" panose="020B0503020000020004" pitchFamily="50" charset="-127"/>
+                              <a:cs typeface="Times New Roman" panose="02020603050405020304" pitchFamily="18" charset="0"/>
+                            </a:rPr>
+                            <m:t>=1</m:t>
+                          </m:r>
+                        </m:sub>
+                        <m:sup>
+                          <m:r>
+                            <a:rPr lang="en-US" altLang="ko-KR" sz="1800" i="1" kern="100">
+                              <a:effectLst/>
+                              <a:latin typeface="Cambria Math" panose="02040503050406030204" pitchFamily="18" charset="0"/>
+                              <a:ea typeface="맑은 고딕" panose="020B0503020000020004" pitchFamily="50" charset="-127"/>
+                              <a:cs typeface="Times New Roman" panose="02020603050405020304" pitchFamily="18" charset="0"/>
+                            </a:rPr>
+                            <m:t>𝑁</m:t>
+                          </m:r>
+                        </m:sup>
+                        <m:e>
+                          <m:sSup>
+                            <m:sSupPr>
+                              <m:ctrlPr>
+                                <a:rPr lang="ko-KR" altLang="ko-KR" sz="1800" i="1" kern="100">
+                                  <a:effectLst/>
+                                  <a:latin typeface="Cambria Math" panose="02040503050406030204" pitchFamily="18" charset="0"/>
+                                  <a:ea typeface="Cambria Math" panose="02040503050406030204" pitchFamily="18" charset="0"/>
+                                  <a:cs typeface="Times New Roman" panose="02020603050405020304" pitchFamily="18" charset="0"/>
+                                </a:rPr>
+                              </m:ctrlPr>
+                            </m:sSupPr>
+                            <m:e>
+                              <m:d>
+                                <m:dPr>
+                                  <m:ctrlPr>
+                                    <a:rPr lang="ko-KR" altLang="ko-KR" sz="1800" i="1" kern="100">
+                                      <a:effectLst/>
+                                      <a:latin typeface="Cambria Math" panose="02040503050406030204" pitchFamily="18" charset="0"/>
+                                      <a:ea typeface="Cambria Math" panose="02040503050406030204" pitchFamily="18" charset="0"/>
+                                      <a:cs typeface="Times New Roman" panose="02020603050405020304" pitchFamily="18" charset="0"/>
+                                    </a:rPr>
+                                  </m:ctrlPr>
+                                </m:dPr>
+                                <m:e>
+                                  <m:sSub>
+                                    <m:sSubPr>
+                                      <m:ctrlPr>
+                                        <a:rPr lang="ko-KR" altLang="ko-KR" sz="1800" i="1" kern="100">
+                                          <a:effectLst/>
+                                          <a:latin typeface="Cambria Math" panose="02040503050406030204" pitchFamily="18" charset="0"/>
+                                          <a:ea typeface="Cambria Math" panose="02040503050406030204" pitchFamily="18" charset="0"/>
+                                          <a:cs typeface="Times New Roman" panose="02020603050405020304" pitchFamily="18" charset="0"/>
+                                        </a:rPr>
+                                      </m:ctrlPr>
+                                    </m:sSubPr>
+                                    <m:e>
+                                      <m:r>
+                                        <a:rPr lang="en-US" altLang="ko-KR" sz="1800" i="1" kern="100">
+                                          <a:effectLst/>
+                                          <a:latin typeface="Cambria Math" panose="02040503050406030204" pitchFamily="18" charset="0"/>
+                                          <a:ea typeface="맑은 고딕" panose="020B0503020000020004" pitchFamily="50" charset="-127"/>
+                                          <a:cs typeface="Times New Roman" panose="02020603050405020304" pitchFamily="18" charset="0"/>
+                                        </a:rPr>
+                                        <m:t>𝑦</m:t>
+                                      </m:r>
+                                    </m:e>
+                                    <m:sub>
+                                      <m:r>
+                                        <a:rPr lang="en-US" altLang="ko-KR" sz="1800" i="1" kern="100">
+                                          <a:effectLst/>
+                                          <a:latin typeface="Cambria Math" panose="02040503050406030204" pitchFamily="18" charset="0"/>
+                                          <a:ea typeface="맑은 고딕" panose="020B0503020000020004" pitchFamily="50" charset="-127"/>
+                                          <a:cs typeface="Times New Roman" panose="02020603050405020304" pitchFamily="18" charset="0"/>
+                                        </a:rPr>
+                                        <m:t>𝑖</m:t>
+                                      </m:r>
+                                    </m:sub>
+                                  </m:sSub>
+                                  <m:r>
+                                    <a:rPr lang="en-US" altLang="ko-KR" sz="1800" i="1" kern="100">
+                                      <a:effectLst/>
+                                      <a:latin typeface="Cambria Math" panose="02040503050406030204" pitchFamily="18" charset="0"/>
+                                      <a:ea typeface="맑은 고딕" panose="020B0503020000020004" pitchFamily="50" charset="-127"/>
+                                      <a:cs typeface="Times New Roman" panose="02020603050405020304" pitchFamily="18" charset="0"/>
+                                    </a:rPr>
+                                    <m:t>−</m:t>
+                                  </m:r>
+                                  <m:acc>
+                                    <m:accPr>
+                                      <m:chr m:val="̂"/>
+                                      <m:ctrlPr>
+                                        <a:rPr lang="ko-KR" altLang="ko-KR" sz="1800" i="1" kern="100">
+                                          <a:effectLst/>
+                                          <a:latin typeface="Cambria Math" panose="02040503050406030204" pitchFamily="18" charset="0"/>
+                                          <a:ea typeface="Cambria Math" panose="02040503050406030204" pitchFamily="18" charset="0"/>
+                                          <a:cs typeface="Times New Roman" panose="02020603050405020304" pitchFamily="18" charset="0"/>
+                                        </a:rPr>
+                                      </m:ctrlPr>
+                                    </m:accPr>
+                                    <m:e>
+                                      <m:sSub>
+                                        <m:sSubPr>
+                                          <m:ctrlPr>
+                                            <a:rPr lang="ko-KR" altLang="ko-KR" sz="1800" i="1" kern="100">
+                                              <a:effectLst/>
+                                              <a:latin typeface="Cambria Math" panose="02040503050406030204" pitchFamily="18" charset="0"/>
+                                              <a:ea typeface="Cambria Math" panose="02040503050406030204" pitchFamily="18" charset="0"/>
+                                              <a:cs typeface="Times New Roman" panose="02020603050405020304" pitchFamily="18" charset="0"/>
+                                            </a:rPr>
+                                          </m:ctrlPr>
+                                        </m:sSubPr>
+                                        <m:e>
+                                          <m:r>
+                                            <a:rPr lang="en-US" altLang="ko-KR" sz="1800" i="1" kern="100">
+                                              <a:effectLst/>
+                                              <a:latin typeface="Cambria Math" panose="02040503050406030204" pitchFamily="18" charset="0"/>
+                                              <a:ea typeface="맑은 고딕" panose="020B0503020000020004" pitchFamily="50" charset="-127"/>
+                                              <a:cs typeface="Times New Roman" panose="02020603050405020304" pitchFamily="18" charset="0"/>
+                                            </a:rPr>
+                                            <m:t>𝑦</m:t>
+                                          </m:r>
+                                        </m:e>
+                                        <m:sub>
+                                          <m:r>
+                                            <a:rPr lang="en-US" altLang="ko-KR" sz="1800" i="1" kern="100">
+                                              <a:effectLst/>
+                                              <a:latin typeface="Cambria Math" panose="02040503050406030204" pitchFamily="18" charset="0"/>
+                                              <a:ea typeface="맑은 고딕" panose="020B0503020000020004" pitchFamily="50" charset="-127"/>
+                                              <a:cs typeface="Times New Roman" panose="02020603050405020304" pitchFamily="18" charset="0"/>
+                                            </a:rPr>
+                                            <m:t>𝑖</m:t>
+                                          </m:r>
+                                        </m:sub>
+                                      </m:sSub>
+                                    </m:e>
+                                  </m:acc>
+                                </m:e>
+                              </m:d>
+                            </m:e>
+                            <m:sup>
+                              <m:r>
+                                <a:rPr lang="en-US" altLang="ko-KR" sz="1800" i="1" kern="100">
+                                  <a:effectLst/>
+                                  <a:latin typeface="Cambria Math" panose="02040503050406030204" pitchFamily="18" charset="0"/>
+                                  <a:ea typeface="맑은 고딕" panose="020B0503020000020004" pitchFamily="50" charset="-127"/>
+                                  <a:cs typeface="Times New Roman" panose="02020603050405020304" pitchFamily="18" charset="0"/>
+                                </a:rPr>
+                                <m:t>2</m:t>
+                              </m:r>
+                            </m:sup>
+                          </m:sSup>
+                        </m:e>
+                      </m:nary>
+                      <m:r>
+                        <a:rPr lang="en-US" altLang="ko-KR" sz="1800" i="1" kern="100">
+                          <a:effectLst/>
+                          <a:latin typeface="Cambria Math" panose="02040503050406030204" pitchFamily="18" charset="0"/>
+                          <a:ea typeface="맑은 고딕" panose="020B0503020000020004" pitchFamily="50" charset="-127"/>
+                          <a:cs typeface="Times New Roman" panose="02020603050405020304" pitchFamily="18" charset="0"/>
+                        </a:rPr>
+                        <m:t>+</m:t>
+                      </m:r>
+                      <m:r>
+                        <m:rPr>
+                          <m:sty m:val="p"/>
+                        </m:rPr>
+                        <a:rPr lang="en-US" altLang="ko-KR" sz="1800" kern="100">
+                          <a:effectLst/>
+                          <a:latin typeface="Cambria Math" panose="02040503050406030204" pitchFamily="18" charset="0"/>
+                          <a:ea typeface="맑은 고딕" panose="020B0503020000020004" pitchFamily="50" charset="-127"/>
+                          <a:cs typeface="Times New Roman" panose="02020603050405020304" pitchFamily="18" charset="0"/>
+                        </a:rPr>
+                        <m:t>α</m:t>
+                      </m:r>
+                      <m:nary>
+                        <m:naryPr>
+                          <m:chr m:val="∑"/>
+                          <m:ctrlPr>
+                            <a:rPr lang="ko-KR" altLang="ko-KR" sz="1800" i="1" kern="100">
+                              <a:effectLst/>
+                              <a:latin typeface="Cambria Math" panose="02040503050406030204" pitchFamily="18" charset="0"/>
+                              <a:ea typeface="Cambria Math" panose="02040503050406030204" pitchFamily="18" charset="0"/>
+                              <a:cs typeface="Times New Roman" panose="02020603050405020304" pitchFamily="18" charset="0"/>
+                            </a:rPr>
+                          </m:ctrlPr>
+                        </m:naryPr>
+                        <m:sub>
+                          <m:r>
+                            <a:rPr lang="en-US" altLang="ko-KR" sz="1800" i="1" kern="100">
+                              <a:effectLst/>
+                              <a:latin typeface="Cambria Math" panose="02040503050406030204" pitchFamily="18" charset="0"/>
+                              <a:ea typeface="맑은 고딕" panose="020B0503020000020004" pitchFamily="50" charset="-127"/>
+                              <a:cs typeface="Times New Roman" panose="02020603050405020304" pitchFamily="18" charset="0"/>
+                            </a:rPr>
+                            <m:t>𝑗</m:t>
+                          </m:r>
+                          <m:r>
+                            <a:rPr lang="en-US" altLang="ko-KR" sz="1800" i="1" kern="100">
+                              <a:effectLst/>
+                              <a:latin typeface="Cambria Math" panose="02040503050406030204" pitchFamily="18" charset="0"/>
+                              <a:ea typeface="맑은 고딕" panose="020B0503020000020004" pitchFamily="50" charset="-127"/>
+                              <a:cs typeface="Times New Roman" panose="02020603050405020304" pitchFamily="18" charset="0"/>
+                            </a:rPr>
+                            <m:t>=1</m:t>
+                          </m:r>
+                        </m:sub>
+                        <m:sup>
+                          <m:r>
+                            <a:rPr lang="en-US" altLang="ko-KR" sz="1800" i="1" kern="100">
+                              <a:effectLst/>
+                              <a:latin typeface="Cambria Math" panose="02040503050406030204" pitchFamily="18" charset="0"/>
+                              <a:ea typeface="맑은 고딕" panose="020B0503020000020004" pitchFamily="50" charset="-127"/>
+                              <a:cs typeface="Times New Roman" panose="02020603050405020304" pitchFamily="18" charset="0"/>
+                            </a:rPr>
+                            <m:t>𝑝</m:t>
+                          </m:r>
+                        </m:sup>
+                        <m:e>
+                          <m:sSubSup>
+                            <m:sSubSupPr>
+                              <m:ctrlPr>
+                                <a:rPr lang="ko-KR" altLang="ko-KR" sz="1800" i="1" kern="100">
+                                  <a:effectLst/>
+                                  <a:latin typeface="Cambria Math" panose="02040503050406030204" pitchFamily="18" charset="0"/>
+                                  <a:ea typeface="Cambria Math" panose="02040503050406030204" pitchFamily="18" charset="0"/>
+                                  <a:cs typeface="Times New Roman" panose="02020603050405020304" pitchFamily="18" charset="0"/>
+                                </a:rPr>
+                              </m:ctrlPr>
+                            </m:sSubSupPr>
+                            <m:e>
+                              <m:r>
+                                <a:rPr lang="en-US" altLang="ko-KR" sz="1800" i="1" kern="100">
+                                  <a:effectLst/>
+                                  <a:latin typeface="Cambria Math" panose="02040503050406030204" pitchFamily="18" charset="0"/>
+                                  <a:ea typeface="맑은 고딕" panose="020B0503020000020004" pitchFamily="50" charset="-127"/>
+                                  <a:cs typeface="Times New Roman" panose="02020603050405020304" pitchFamily="18" charset="0"/>
+                                </a:rPr>
+                                <m:t>𝑤</m:t>
+                              </m:r>
+                            </m:e>
+                            <m:sub>
+                              <m:r>
+                                <a:rPr lang="en-US" altLang="ko-KR" sz="1800" i="1" kern="100">
+                                  <a:effectLst/>
+                                  <a:latin typeface="Cambria Math" panose="02040503050406030204" pitchFamily="18" charset="0"/>
+                                  <a:ea typeface="맑은 고딕" panose="020B0503020000020004" pitchFamily="50" charset="-127"/>
+                                  <a:cs typeface="Times New Roman" panose="02020603050405020304" pitchFamily="18" charset="0"/>
+                                </a:rPr>
+                                <m:t>𝑗</m:t>
+                              </m:r>
+                            </m:sub>
+                            <m:sup>
+                              <m:r>
+                                <a:rPr lang="en-US" altLang="ko-KR" sz="1800" i="1" kern="100">
+                                  <a:effectLst/>
+                                  <a:latin typeface="Cambria Math" panose="02040503050406030204" pitchFamily="18" charset="0"/>
+                                  <a:ea typeface="맑은 고딕" panose="020B0503020000020004" pitchFamily="50" charset="-127"/>
+                                  <a:cs typeface="Times New Roman" panose="02020603050405020304" pitchFamily="18" charset="0"/>
+                                </a:rPr>
+                                <m:t>2</m:t>
+                              </m:r>
+                            </m:sup>
+                          </m:sSubSup>
+                        </m:e>
+                      </m:nary>
+                    </m:oMath>
+                  </m:oMathPara>
+                </a14:m>
+                <a:endParaRPr lang="ko-KR" altLang="ko-KR" sz="1800" kern="100" dirty="0">
+                  <a:effectLst/>
+                  <a:latin typeface="맑은 고딕" panose="020B0503020000020004" pitchFamily="50" charset="-127"/>
+                  <a:ea typeface="맑은 고딕" panose="020B0503020000020004" pitchFamily="50" charset="-127"/>
+                  <a:cs typeface="Times New Roman" panose="02020603050405020304" pitchFamily="18" charset="0"/>
+                </a:endParaRPr>
+              </a:p>
+              <a:p>
+                <a:pPr algn="just" latinLnBrk="1">
+                  <a:lnSpc>
+                    <a:spcPct val="107000"/>
+                  </a:lnSpc>
+                  <a:spcAft>
+                    <a:spcPts val="800"/>
+                  </a:spcAft>
+                </a:pPr>
+                <a:r>
+                  <a:rPr lang="en-US" altLang="ko-KR" sz="1800" kern="100" dirty="0">
+                    <a:effectLst/>
+                    <a:latin typeface="맑은 고딕" panose="020B0503020000020004" pitchFamily="50" charset="-127"/>
+                    <a:ea typeface="맑은 고딕" panose="020B0503020000020004" pitchFamily="50" charset="-127"/>
+                    <a:cs typeface="Times New Roman" panose="02020603050405020304" pitchFamily="18" charset="0"/>
+                  </a:rPr>
+                  <a:t> </a:t>
+                </a:r>
+                <a:endParaRPr lang="ko-KR" altLang="ko-KR" sz="1800" kern="100" dirty="0">
+                  <a:effectLst/>
+                  <a:latin typeface="맑은 고딕" panose="020B0503020000020004" pitchFamily="50" charset="-127"/>
+                  <a:ea typeface="맑은 고딕" panose="020B0503020000020004" pitchFamily="50" charset="-127"/>
+                  <a:cs typeface="Times New Roman" panose="02020603050405020304" pitchFamily="18" charset="0"/>
+                </a:endParaRPr>
+              </a:p>
+              <a:p>
+                <a:pPr marL="285750" indent="-285750">
+                  <a:buFontTx/>
+                  <a:buChar char="-"/>
+                </a:pPr>
+                <a14:m>
+                  <m:oMath xmlns:m="http://schemas.openxmlformats.org/officeDocument/2006/math">
+                    <m:r>
+                      <m:rPr>
+                        <m:sty m:val="p"/>
+                      </m:rPr>
+                      <a:rPr lang="en-US" altLang="ko-KR"/>
+                      <m:t>α</m:t>
+                    </m:r>
+                  </m:oMath>
+                </a14:m>
+                <a:r>
+                  <a:rPr lang="en-US" altLang="ko-KR" dirty="0"/>
+                  <a:t> : </a:t>
+                </a:r>
+                <a:r>
+                  <a:rPr lang="ko-KR" altLang="en-US" dirty="0"/>
+                  <a:t>규제 강도</a:t>
+                </a:r>
+                <a:r>
+                  <a:rPr lang="en-US" altLang="ko-KR" dirty="0"/>
+                  <a:t>, </a:t>
+                </a:r>
+                <a:r>
+                  <a:rPr lang="ko-KR" altLang="en-US" dirty="0"/>
+                  <a:t>이 값이 커질수록 벌칙이 커져서 가중치가 </a:t>
+                </a:r>
+                <a:r>
+                  <a:rPr lang="en-US" altLang="ko-KR" dirty="0"/>
+                  <a:t>0</a:t>
+                </a:r>
+                <a:r>
+                  <a:rPr lang="ko-KR" altLang="en-US" dirty="0"/>
+                  <a:t>에 </a:t>
+                </a:r>
+                <a:r>
+                  <a:rPr lang="ko-KR" altLang="en-US" dirty="0" err="1"/>
+                  <a:t>가까워짐</a:t>
+                </a:r>
+                <a:endParaRPr lang="en-US" altLang="ko-KR" dirty="0"/>
+              </a:p>
+            </p:txBody>
+          </p:sp>
+        </mc:Choice>
+        <mc:Fallback>
+          <p:sp>
+            <p:nvSpPr>
+              <p:cNvPr id="4" name="TextBox 3"/>
+              <p:cNvSpPr txBox="1">
+                <a:spLocks noRot="1" noChangeAspect="1" noMove="1" noResize="1" noEditPoints="1" noAdjustHandles="1" noChangeArrowheads="1" noChangeShapeType="1" noTextEdit="1"/>
+              </p:cNvSpPr>
+              <p:nvPr/>
+            </p:nvSpPr>
+            <p:spPr>
+              <a:xfrm>
+                <a:off x="971600" y="1700955"/>
+                <a:ext cx="7200800" cy="3122843"/>
+              </a:xfrm>
+              <a:prstGeom prst="rect">
+                <a:avLst/>
+              </a:prstGeom>
+              <a:blipFill>
+                <a:blip r:embed="rId3"/>
+                <a:stretch>
+                  <a:fillRect l="-846" t="-1758" b="-2148"/>
+                </a:stretch>
+              </a:blipFill>
+            </p:spPr>
+            <p:txBody>
+              <a:bodyPr/>
+              <a:lstStyle/>
+              <a:p>
+                <a:r>
+                  <a:rPr lang="ko-KR" altLang="en-US">
+                    <a:noFill/>
+                  </a:rPr>
+                  <a:t> </a:t>
+                </a:r>
+              </a:p>
+            </p:txBody>
+          </p:sp>
+        </mc:Fallback>
+      </mc:AlternateContent>
       <p:sp>
         <p:nvSpPr>
           <p:cNvPr id="6" name="TextBox 5"/>
@@ -10059,7 +12411,7 @@
           <a:p>
             <a:r>
               <a:rPr lang="en-US" altLang="ko-KR" sz="2300" dirty="0"/>
-              <a:t>Support Vector Machine</a:t>
+              <a:t>Ridge</a:t>
             </a:r>
             <a:endParaRPr lang="ko-KR" altLang="en-US" sz="2300" dirty="0"/>
           </a:p>
@@ -10068,7 +12420,7 @@
     </p:spTree>
     <p:extLst>
       <p:ext uri="{BB962C8B-B14F-4D97-AF65-F5344CB8AC3E}">
-        <p14:creationId xmlns:p14="http://schemas.microsoft.com/office/powerpoint/2010/main" val="802421215"/>
+        <p14:creationId xmlns:p14="http://schemas.microsoft.com/office/powerpoint/2010/main" val="4255718482"/>
       </p:ext>
     </p:extLst>
   </p:cSld>
@@ -10395,74 +12747,617 @@
           </a:p>
         </p:txBody>
       </p:sp>
-      <p:sp>
-        <p:nvSpPr>
-          <p:cNvPr id="4" name="TextBox 3"/>
-          <p:cNvSpPr txBox="1"/>
-          <p:nvPr/>
-        </p:nvSpPr>
-        <p:spPr>
-          <a:xfrm>
-            <a:off x="971600" y="1700955"/>
-            <a:ext cx="7200800" cy="1477328"/>
-          </a:xfrm>
-          <a:prstGeom prst="rect">
-            <a:avLst/>
-          </a:prstGeom>
-          <a:noFill/>
-        </p:spPr>
-        <p:txBody>
-          <a:bodyPr wrap="square" rtlCol="0">
-            <a:spAutoFit/>
-          </a:bodyPr>
-          <a:lstStyle/>
-          <a:p>
-            <a:pPr marL="285750" indent="-285750">
-              <a:buFontTx/>
-              <a:buChar char="-"/>
-            </a:pPr>
-            <a:r>
-              <a:rPr lang="ko-KR" altLang="en-US" dirty="0"/>
-              <a:t>단일 결정 트리의 단점을 극복하기 위해 여러 머신 러닝 모델을 연결하여 더 강력한 모델을 만드는 방법 </a:t>
-            </a:r>
-            <a:endParaRPr lang="en-US" altLang="ko-KR" dirty="0"/>
-          </a:p>
-          <a:p>
-            <a:pPr marL="285750" indent="-285750">
-              <a:buFontTx/>
-              <a:buChar char="-"/>
-            </a:pPr>
-            <a:r>
-              <a:rPr lang="ko-KR" altLang="en-US" dirty="0"/>
-              <a:t>입력 자료로부터 여러 개의 예측 모형을 만든 후 예측 모형을 조합하여 하나의 예측을 만들어 내는 과정 </a:t>
-            </a:r>
-            <a:endParaRPr lang="en-US" altLang="ko-KR" dirty="0"/>
-          </a:p>
-          <a:p>
-            <a:pPr marL="285750" indent="-285750">
-              <a:buFontTx/>
-              <a:buChar char="-"/>
-            </a:pPr>
-            <a:r>
-              <a:rPr lang="ko-KR" altLang="en-US" dirty="0"/>
-              <a:t>대표적인 방법으로는 </a:t>
-            </a:r>
-            <a:r>
-              <a:rPr lang="ko-KR" altLang="en-US" dirty="0" err="1"/>
-              <a:t>배깅</a:t>
-            </a:r>
-            <a:r>
-              <a:rPr lang="en-US" altLang="ko-KR" dirty="0"/>
-              <a:t>, </a:t>
-            </a:r>
-            <a:r>
-              <a:rPr lang="ko-KR" altLang="en-US" dirty="0" err="1"/>
-              <a:t>부스팅</a:t>
-            </a:r>
-            <a:endParaRPr lang="en-US" altLang="ko-KR" dirty="0"/>
-          </a:p>
-        </p:txBody>
-      </p:sp>
+      <mc:AlternateContent xmlns:mc="http://schemas.openxmlformats.org/markup-compatibility/2006">
+        <mc:Choice xmlns:a14="http://schemas.microsoft.com/office/drawing/2010/main" Requires="a14">
+          <p:sp>
+            <p:nvSpPr>
+              <p:cNvPr id="4" name="TextBox 3"/>
+              <p:cNvSpPr txBox="1"/>
+              <p:nvPr/>
+            </p:nvSpPr>
+            <p:spPr>
+              <a:xfrm>
+                <a:off x="971600" y="1700955"/>
+                <a:ext cx="7200800" cy="4230838"/>
+              </a:xfrm>
+              <a:prstGeom prst="rect">
+                <a:avLst/>
+              </a:prstGeom>
+              <a:noFill/>
+            </p:spPr>
+            <p:txBody>
+              <a:bodyPr wrap="square" rtlCol="0">
+                <a:spAutoFit/>
+              </a:bodyPr>
+              <a:lstStyle/>
+              <a:p>
+                <a:pPr marL="285750" indent="-285750">
+                  <a:buFontTx/>
+                  <a:buChar char="-"/>
+                </a:pPr>
+                <a:r>
+                  <a:rPr lang="ko-KR" altLang="en-US" dirty="0"/>
+                  <a:t>선형 회귀 모델에서 규제를 포함한 모델 중 하나 </a:t>
+                </a:r>
+                <a:endParaRPr lang="en-US" altLang="ko-KR" dirty="0"/>
+              </a:p>
+              <a:p>
+                <a:pPr marL="285750" indent="-285750">
+                  <a:buFontTx/>
+                  <a:buChar char="-"/>
+                </a:pPr>
+                <a:r>
+                  <a:rPr lang="en-US" altLang="ko-KR" dirty="0"/>
+                  <a:t>Ridge</a:t>
+                </a:r>
+                <a:r>
+                  <a:rPr lang="ko-KR" altLang="en-US" dirty="0"/>
+                  <a:t>와 비슷하게 규제를 하고 있지만 </a:t>
+                </a:r>
+                <a:r>
+                  <a:rPr lang="en-US" altLang="ko-KR" dirty="0"/>
+                  <a:t>L1</a:t>
+                </a:r>
+                <a:r>
+                  <a:rPr lang="ko-KR" altLang="en-US" dirty="0" err="1"/>
+                  <a:t>패널티를</a:t>
+                </a:r>
+                <a:r>
+                  <a:rPr lang="ko-KR" altLang="en-US" dirty="0"/>
+                  <a:t> 이용하여 가중치를 제어 </a:t>
+                </a:r>
+                <a:endParaRPr lang="en-US" altLang="ko-KR" dirty="0"/>
+              </a:p>
+              <a:p>
+                <a:pPr marL="285750" indent="-285750">
+                  <a:buFontTx/>
+                  <a:buChar char="-"/>
+                </a:pPr>
+                <a:r>
+                  <a:rPr lang="ko-KR" altLang="en-US" dirty="0"/>
+                  <a:t>불필요한 특징들을 자동으로 제거함으로써 과적합의 문제를 해결</a:t>
+                </a:r>
+                <a:endParaRPr lang="en-US" altLang="ko-KR" dirty="0"/>
+              </a:p>
+              <a:p>
+                <a:pPr marL="285750" indent="-285750">
+                  <a:buFontTx/>
+                  <a:buChar char="-"/>
+                </a:pPr>
+                <a:r>
+                  <a:rPr lang="ko-KR" altLang="en-US" dirty="0" err="1"/>
+                  <a:t>릿지에서는</a:t>
+                </a:r>
+                <a:r>
+                  <a:rPr lang="ko-KR" altLang="en-US" dirty="0"/>
+                  <a:t> 가중치를 </a:t>
+                </a:r>
+                <a:r>
+                  <a:rPr lang="en-US" altLang="ko-KR" dirty="0"/>
+                  <a:t>0</a:t>
+                </a:r>
+                <a:r>
+                  <a:rPr lang="ko-KR" altLang="en-US" dirty="0"/>
+                  <a:t>에 가까운 값으로 크기를 조절하고 </a:t>
+                </a:r>
+                <a:r>
+                  <a:rPr lang="ko-KR" altLang="en-US" dirty="0" err="1"/>
+                  <a:t>라쏘에서는</a:t>
+                </a:r>
+                <a:r>
+                  <a:rPr lang="ko-KR" altLang="en-US" dirty="0"/>
+                  <a:t> 가중치를 </a:t>
+                </a:r>
+                <a:r>
+                  <a:rPr lang="en-US" altLang="ko-KR" dirty="0"/>
+                  <a:t>0</a:t>
+                </a:r>
+                <a:r>
+                  <a:rPr lang="ko-KR" altLang="en-US" dirty="0"/>
+                  <a:t>으로 만들어서 해당 특징을 제거하는 방법</a:t>
+                </a:r>
+                <a:endParaRPr lang="en-US" altLang="ko-KR" dirty="0"/>
+              </a:p>
+              <a:p>
+                <a:pPr marL="285750" indent="-285750">
+                  <a:buFontTx/>
+                  <a:buChar char="-"/>
+                </a:pPr>
+                <a:r>
+                  <a:rPr lang="ko-KR" altLang="en-US" dirty="0"/>
+                  <a:t>모델을 단순하고 해석이 가능한 모델로 만드는 회귀 방법</a:t>
+                </a:r>
+                <a:endParaRPr lang="en-US" altLang="ko-KR" dirty="0"/>
+              </a:p>
+              <a:p>
+                <a:pPr marL="285750" indent="-285750">
+                  <a:buFontTx/>
+                  <a:buChar char="-"/>
+                </a:pPr>
+                <a:endParaRPr lang="en-US" altLang="ko-KR" dirty="0"/>
+              </a:p>
+              <a:p>
+                <a:pPr algn="just" latinLnBrk="1">
+                  <a:lnSpc>
+                    <a:spcPct val="107000"/>
+                  </a:lnSpc>
+                  <a:spcAft>
+                    <a:spcPts val="800"/>
+                  </a:spcAft>
+                </a:pPr>
+                <a14:m>
+                  <m:oMathPara xmlns:m="http://schemas.openxmlformats.org/officeDocument/2006/math">
+                    <m:oMathParaPr>
+                      <m:jc m:val="centerGroup"/>
+                    </m:oMathParaPr>
+                    <m:oMath xmlns:m="http://schemas.openxmlformats.org/officeDocument/2006/math">
+                      <m:r>
+                        <a:rPr lang="en-US" altLang="ko-KR" sz="1800" i="1" kern="100" smtClean="0">
+                          <a:effectLst/>
+                          <a:latin typeface="Cambria Math" panose="02040503050406030204" pitchFamily="18" charset="0"/>
+                          <a:ea typeface="맑은 고딕" panose="020B0503020000020004" pitchFamily="50" charset="-127"/>
+                          <a:cs typeface="Times New Roman" panose="02020603050405020304" pitchFamily="18" charset="0"/>
+                        </a:rPr>
+                        <m:t>𝐶𝑜𝑠𝑡</m:t>
+                      </m:r>
+                      <m:r>
+                        <a:rPr lang="en-US" altLang="ko-KR" sz="1800" i="1" kern="100" smtClean="0">
+                          <a:effectLst/>
+                          <a:latin typeface="Cambria Math" panose="02040503050406030204" pitchFamily="18" charset="0"/>
+                          <a:ea typeface="맑은 고딕" panose="020B0503020000020004" pitchFamily="50" charset="-127"/>
+                          <a:cs typeface="Times New Roman" panose="02020603050405020304" pitchFamily="18" charset="0"/>
+                        </a:rPr>
+                        <m:t>=</m:t>
+                      </m:r>
+                      <m:f>
+                        <m:fPr>
+                          <m:ctrlPr>
+                            <a:rPr lang="ko-KR" altLang="ko-KR" sz="1800" i="1" kern="100">
+                              <a:effectLst/>
+                              <a:latin typeface="Cambria Math" panose="02040503050406030204" pitchFamily="18" charset="0"/>
+                              <a:ea typeface="Cambria Math" panose="02040503050406030204" pitchFamily="18" charset="0"/>
+                              <a:cs typeface="Times New Roman" panose="02020603050405020304" pitchFamily="18" charset="0"/>
+                            </a:rPr>
+                          </m:ctrlPr>
+                        </m:fPr>
+                        <m:num>
+                          <m:r>
+                            <a:rPr lang="en-US" altLang="ko-KR" sz="1800" i="1" kern="100">
+                              <a:effectLst/>
+                              <a:latin typeface="Cambria Math" panose="02040503050406030204" pitchFamily="18" charset="0"/>
+                              <a:ea typeface="맑은 고딕" panose="020B0503020000020004" pitchFamily="50" charset="-127"/>
+                              <a:cs typeface="Times New Roman" panose="02020603050405020304" pitchFamily="18" charset="0"/>
+                            </a:rPr>
+                            <m:t>1</m:t>
+                          </m:r>
+                        </m:num>
+                        <m:den>
+                          <m:r>
+                            <a:rPr lang="en-US" altLang="ko-KR" sz="1800" i="1" kern="100">
+                              <a:effectLst/>
+                              <a:latin typeface="Cambria Math" panose="02040503050406030204" pitchFamily="18" charset="0"/>
+                              <a:ea typeface="맑은 고딕" panose="020B0503020000020004" pitchFamily="50" charset="-127"/>
+                              <a:cs typeface="Times New Roman" panose="02020603050405020304" pitchFamily="18" charset="0"/>
+                            </a:rPr>
+                            <m:t>𝑁</m:t>
+                          </m:r>
+                        </m:den>
+                      </m:f>
+                      <m:nary>
+                        <m:naryPr>
+                          <m:chr m:val="∑"/>
+                          <m:ctrlPr>
+                            <a:rPr lang="ko-KR" altLang="ko-KR" sz="1800" i="1" kern="100">
+                              <a:effectLst/>
+                              <a:latin typeface="Cambria Math" panose="02040503050406030204" pitchFamily="18" charset="0"/>
+                              <a:ea typeface="Cambria Math" panose="02040503050406030204" pitchFamily="18" charset="0"/>
+                              <a:cs typeface="Times New Roman" panose="02020603050405020304" pitchFamily="18" charset="0"/>
+                            </a:rPr>
+                          </m:ctrlPr>
+                        </m:naryPr>
+                        <m:sub>
+                          <m:r>
+                            <a:rPr lang="en-US" altLang="ko-KR" sz="1800" i="1" kern="100">
+                              <a:effectLst/>
+                              <a:latin typeface="Cambria Math" panose="02040503050406030204" pitchFamily="18" charset="0"/>
+                              <a:ea typeface="맑은 고딕" panose="020B0503020000020004" pitchFamily="50" charset="-127"/>
+                              <a:cs typeface="Times New Roman" panose="02020603050405020304" pitchFamily="18" charset="0"/>
+                            </a:rPr>
+                            <m:t>𝑖</m:t>
+                          </m:r>
+                          <m:r>
+                            <a:rPr lang="en-US" altLang="ko-KR" sz="1800" i="1" kern="100">
+                              <a:effectLst/>
+                              <a:latin typeface="Cambria Math" panose="02040503050406030204" pitchFamily="18" charset="0"/>
+                              <a:ea typeface="맑은 고딕" panose="020B0503020000020004" pitchFamily="50" charset="-127"/>
+                              <a:cs typeface="Times New Roman" panose="02020603050405020304" pitchFamily="18" charset="0"/>
+                            </a:rPr>
+                            <m:t>=1</m:t>
+                          </m:r>
+                        </m:sub>
+                        <m:sup>
+                          <m:r>
+                            <a:rPr lang="en-US" altLang="ko-KR" sz="1800" i="1" kern="100">
+                              <a:effectLst/>
+                              <a:latin typeface="Cambria Math" panose="02040503050406030204" pitchFamily="18" charset="0"/>
+                              <a:ea typeface="맑은 고딕" panose="020B0503020000020004" pitchFamily="50" charset="-127"/>
+                              <a:cs typeface="Times New Roman" panose="02020603050405020304" pitchFamily="18" charset="0"/>
+                            </a:rPr>
+                            <m:t>𝑁</m:t>
+                          </m:r>
+                        </m:sup>
+                        <m:e>
+                          <m:sSup>
+                            <m:sSupPr>
+                              <m:ctrlPr>
+                                <a:rPr lang="ko-KR" altLang="ko-KR" sz="1800" i="1" kern="100">
+                                  <a:effectLst/>
+                                  <a:latin typeface="Cambria Math" panose="02040503050406030204" pitchFamily="18" charset="0"/>
+                                  <a:ea typeface="Cambria Math" panose="02040503050406030204" pitchFamily="18" charset="0"/>
+                                  <a:cs typeface="Times New Roman" panose="02020603050405020304" pitchFamily="18" charset="0"/>
+                                </a:rPr>
+                              </m:ctrlPr>
+                            </m:sSupPr>
+                            <m:e>
+                              <m:d>
+                                <m:dPr>
+                                  <m:ctrlPr>
+                                    <a:rPr lang="ko-KR" altLang="ko-KR" sz="1800" i="1" kern="100">
+                                      <a:effectLst/>
+                                      <a:latin typeface="Cambria Math" panose="02040503050406030204" pitchFamily="18" charset="0"/>
+                                      <a:ea typeface="Cambria Math" panose="02040503050406030204" pitchFamily="18" charset="0"/>
+                                      <a:cs typeface="Times New Roman" panose="02020603050405020304" pitchFamily="18" charset="0"/>
+                                    </a:rPr>
+                                  </m:ctrlPr>
+                                </m:dPr>
+                                <m:e>
+                                  <m:sSub>
+                                    <m:sSubPr>
+                                      <m:ctrlPr>
+                                        <a:rPr lang="ko-KR" altLang="ko-KR" sz="1800" i="1" kern="100">
+                                          <a:effectLst/>
+                                          <a:latin typeface="Cambria Math" panose="02040503050406030204" pitchFamily="18" charset="0"/>
+                                          <a:ea typeface="Cambria Math" panose="02040503050406030204" pitchFamily="18" charset="0"/>
+                                          <a:cs typeface="Times New Roman" panose="02020603050405020304" pitchFamily="18" charset="0"/>
+                                        </a:rPr>
+                                      </m:ctrlPr>
+                                    </m:sSubPr>
+                                    <m:e>
+                                      <m:r>
+                                        <a:rPr lang="en-US" altLang="ko-KR" sz="1800" i="1" kern="100">
+                                          <a:effectLst/>
+                                          <a:latin typeface="Cambria Math" panose="02040503050406030204" pitchFamily="18" charset="0"/>
+                                          <a:ea typeface="맑은 고딕" panose="020B0503020000020004" pitchFamily="50" charset="-127"/>
+                                          <a:cs typeface="Times New Roman" panose="02020603050405020304" pitchFamily="18" charset="0"/>
+                                        </a:rPr>
+                                        <m:t>𝑦</m:t>
+                                      </m:r>
+                                    </m:e>
+                                    <m:sub>
+                                      <m:r>
+                                        <a:rPr lang="en-US" altLang="ko-KR" sz="1800" i="1" kern="100">
+                                          <a:effectLst/>
+                                          <a:latin typeface="Cambria Math" panose="02040503050406030204" pitchFamily="18" charset="0"/>
+                                          <a:ea typeface="맑은 고딕" panose="020B0503020000020004" pitchFamily="50" charset="-127"/>
+                                          <a:cs typeface="Times New Roman" panose="02020603050405020304" pitchFamily="18" charset="0"/>
+                                        </a:rPr>
+                                        <m:t>𝑖</m:t>
+                                      </m:r>
+                                    </m:sub>
+                                  </m:sSub>
+                                  <m:r>
+                                    <a:rPr lang="en-US" altLang="ko-KR" sz="1800" i="1" kern="100">
+                                      <a:effectLst/>
+                                      <a:latin typeface="Cambria Math" panose="02040503050406030204" pitchFamily="18" charset="0"/>
+                                      <a:ea typeface="맑은 고딕" panose="020B0503020000020004" pitchFamily="50" charset="-127"/>
+                                      <a:cs typeface="Times New Roman" panose="02020603050405020304" pitchFamily="18" charset="0"/>
+                                    </a:rPr>
+                                    <m:t>−</m:t>
+                                  </m:r>
+                                  <m:acc>
+                                    <m:accPr>
+                                      <m:chr m:val="̂"/>
+                                      <m:ctrlPr>
+                                        <a:rPr lang="ko-KR" altLang="ko-KR" sz="1800" i="1" kern="100">
+                                          <a:effectLst/>
+                                          <a:latin typeface="Cambria Math" panose="02040503050406030204" pitchFamily="18" charset="0"/>
+                                          <a:ea typeface="Cambria Math" panose="02040503050406030204" pitchFamily="18" charset="0"/>
+                                          <a:cs typeface="Times New Roman" panose="02020603050405020304" pitchFamily="18" charset="0"/>
+                                        </a:rPr>
+                                      </m:ctrlPr>
+                                    </m:accPr>
+                                    <m:e>
+                                      <m:sSub>
+                                        <m:sSubPr>
+                                          <m:ctrlPr>
+                                            <a:rPr lang="ko-KR" altLang="ko-KR" sz="1800" i="1" kern="100">
+                                              <a:effectLst/>
+                                              <a:latin typeface="Cambria Math" panose="02040503050406030204" pitchFamily="18" charset="0"/>
+                                              <a:ea typeface="Cambria Math" panose="02040503050406030204" pitchFamily="18" charset="0"/>
+                                              <a:cs typeface="Times New Roman" panose="02020603050405020304" pitchFamily="18" charset="0"/>
+                                            </a:rPr>
+                                          </m:ctrlPr>
+                                        </m:sSubPr>
+                                        <m:e>
+                                          <m:r>
+                                            <a:rPr lang="en-US" altLang="ko-KR" sz="1800" i="1" kern="100">
+                                              <a:effectLst/>
+                                              <a:latin typeface="Cambria Math" panose="02040503050406030204" pitchFamily="18" charset="0"/>
+                                              <a:ea typeface="맑은 고딕" panose="020B0503020000020004" pitchFamily="50" charset="-127"/>
+                                              <a:cs typeface="Times New Roman" panose="02020603050405020304" pitchFamily="18" charset="0"/>
+                                            </a:rPr>
+                                            <m:t>𝑦</m:t>
+                                          </m:r>
+                                        </m:e>
+                                        <m:sub>
+                                          <m:r>
+                                            <a:rPr lang="en-US" altLang="ko-KR" sz="1800" i="1" kern="100">
+                                              <a:effectLst/>
+                                              <a:latin typeface="Cambria Math" panose="02040503050406030204" pitchFamily="18" charset="0"/>
+                                              <a:ea typeface="맑은 고딕" panose="020B0503020000020004" pitchFamily="50" charset="-127"/>
+                                              <a:cs typeface="Times New Roman" panose="02020603050405020304" pitchFamily="18" charset="0"/>
+                                            </a:rPr>
+                                            <m:t>𝑖</m:t>
+                                          </m:r>
+                                        </m:sub>
+                                      </m:sSub>
+                                    </m:e>
+                                  </m:acc>
+                                </m:e>
+                              </m:d>
+                            </m:e>
+                            <m:sup>
+                              <m:r>
+                                <a:rPr lang="en-US" altLang="ko-KR" sz="1800" i="1" kern="100">
+                                  <a:effectLst/>
+                                  <a:latin typeface="Cambria Math" panose="02040503050406030204" pitchFamily="18" charset="0"/>
+                                  <a:ea typeface="맑은 고딕" panose="020B0503020000020004" pitchFamily="50" charset="-127"/>
+                                  <a:cs typeface="Times New Roman" panose="02020603050405020304" pitchFamily="18" charset="0"/>
+                                </a:rPr>
+                                <m:t>2</m:t>
+                              </m:r>
+                            </m:sup>
+                          </m:sSup>
+                        </m:e>
+                      </m:nary>
+                      <m:r>
+                        <a:rPr lang="en-US" altLang="ko-KR" sz="1800" i="1" kern="100">
+                          <a:effectLst/>
+                          <a:latin typeface="Cambria Math" panose="02040503050406030204" pitchFamily="18" charset="0"/>
+                          <a:ea typeface="맑은 고딕" panose="020B0503020000020004" pitchFamily="50" charset="-127"/>
+                          <a:cs typeface="Times New Roman" panose="02020603050405020304" pitchFamily="18" charset="0"/>
+                        </a:rPr>
+                        <m:t>+</m:t>
+                      </m:r>
+                      <m:r>
+                        <m:rPr>
+                          <m:sty m:val="p"/>
+                        </m:rPr>
+                        <a:rPr lang="en-US" altLang="ko-KR" sz="1800" kern="100">
+                          <a:effectLst/>
+                          <a:latin typeface="Cambria Math" panose="02040503050406030204" pitchFamily="18" charset="0"/>
+                          <a:ea typeface="맑은 고딕" panose="020B0503020000020004" pitchFamily="50" charset="-127"/>
+                          <a:cs typeface="Times New Roman" panose="02020603050405020304" pitchFamily="18" charset="0"/>
+                        </a:rPr>
+                        <m:t>α</m:t>
+                      </m:r>
+                      <m:nary>
+                        <m:naryPr>
+                          <m:chr m:val="∑"/>
+                          <m:ctrlPr>
+                            <a:rPr lang="ko-KR" altLang="ko-KR" sz="1800" i="1" kern="100">
+                              <a:effectLst/>
+                              <a:latin typeface="Cambria Math" panose="02040503050406030204" pitchFamily="18" charset="0"/>
+                              <a:ea typeface="Cambria Math" panose="02040503050406030204" pitchFamily="18" charset="0"/>
+                              <a:cs typeface="Times New Roman" panose="02020603050405020304" pitchFamily="18" charset="0"/>
+                            </a:rPr>
+                          </m:ctrlPr>
+                        </m:naryPr>
+                        <m:sub>
+                          <m:r>
+                            <a:rPr lang="en-US" altLang="ko-KR" sz="1800" i="1" kern="100">
+                              <a:effectLst/>
+                              <a:latin typeface="Cambria Math" panose="02040503050406030204" pitchFamily="18" charset="0"/>
+                              <a:ea typeface="맑은 고딕" panose="020B0503020000020004" pitchFamily="50" charset="-127"/>
+                              <a:cs typeface="Times New Roman" panose="02020603050405020304" pitchFamily="18" charset="0"/>
+                            </a:rPr>
+                            <m:t>𝑗</m:t>
+                          </m:r>
+                          <m:r>
+                            <a:rPr lang="en-US" altLang="ko-KR" sz="1800" i="1" kern="100">
+                              <a:effectLst/>
+                              <a:latin typeface="Cambria Math" panose="02040503050406030204" pitchFamily="18" charset="0"/>
+                              <a:ea typeface="맑은 고딕" panose="020B0503020000020004" pitchFamily="50" charset="-127"/>
+                              <a:cs typeface="Times New Roman" panose="02020603050405020304" pitchFamily="18" charset="0"/>
+                            </a:rPr>
+                            <m:t>=1</m:t>
+                          </m:r>
+                        </m:sub>
+                        <m:sup>
+                          <m:r>
+                            <a:rPr lang="en-US" altLang="ko-KR" sz="1800" i="1" kern="100">
+                              <a:effectLst/>
+                              <a:latin typeface="Cambria Math" panose="02040503050406030204" pitchFamily="18" charset="0"/>
+                              <a:ea typeface="맑은 고딕" panose="020B0503020000020004" pitchFamily="50" charset="-127"/>
+                              <a:cs typeface="Times New Roman" panose="02020603050405020304" pitchFamily="18" charset="0"/>
+                            </a:rPr>
+                            <m:t>𝑝</m:t>
+                          </m:r>
+                        </m:sup>
+                        <m:e>
+                          <m:d>
+                            <m:dPr>
+                              <m:begChr m:val="|"/>
+                              <m:endChr m:val="|"/>
+                              <m:ctrlPr>
+                                <a:rPr lang="ko-KR" altLang="ko-KR" sz="1800" i="1" kern="100">
+                                  <a:effectLst/>
+                                  <a:latin typeface="Cambria Math" panose="02040503050406030204" pitchFamily="18" charset="0"/>
+                                  <a:ea typeface="Cambria Math" panose="02040503050406030204" pitchFamily="18" charset="0"/>
+                                  <a:cs typeface="Times New Roman" panose="02020603050405020304" pitchFamily="18" charset="0"/>
+                                </a:rPr>
+                              </m:ctrlPr>
+                            </m:dPr>
+                            <m:e>
+                              <m:sSub>
+                                <m:sSubPr>
+                                  <m:ctrlPr>
+                                    <a:rPr lang="ko-KR" altLang="ko-KR" sz="1800" i="1" kern="100">
+                                      <a:effectLst/>
+                                      <a:latin typeface="Cambria Math" panose="02040503050406030204" pitchFamily="18" charset="0"/>
+                                      <a:ea typeface="Cambria Math" panose="02040503050406030204" pitchFamily="18" charset="0"/>
+                                      <a:cs typeface="Times New Roman" panose="02020603050405020304" pitchFamily="18" charset="0"/>
+                                    </a:rPr>
+                                  </m:ctrlPr>
+                                </m:sSubPr>
+                                <m:e>
+                                  <m:r>
+                                    <a:rPr lang="en-US" altLang="ko-KR" sz="1800" i="1" kern="100">
+                                      <a:effectLst/>
+                                      <a:latin typeface="Cambria Math" panose="02040503050406030204" pitchFamily="18" charset="0"/>
+                                      <a:ea typeface="맑은 고딕" panose="020B0503020000020004" pitchFamily="50" charset="-127"/>
+                                      <a:cs typeface="Times New Roman" panose="02020603050405020304" pitchFamily="18" charset="0"/>
+                                    </a:rPr>
+                                    <m:t>𝑤</m:t>
+                                  </m:r>
+                                </m:e>
+                                <m:sub>
+                                  <m:r>
+                                    <a:rPr lang="en-US" altLang="ko-KR" sz="1800" i="1" kern="100">
+                                      <a:effectLst/>
+                                      <a:latin typeface="Cambria Math" panose="02040503050406030204" pitchFamily="18" charset="0"/>
+                                      <a:ea typeface="맑은 고딕" panose="020B0503020000020004" pitchFamily="50" charset="-127"/>
+                                      <a:cs typeface="Times New Roman" panose="02020603050405020304" pitchFamily="18" charset="0"/>
+                                    </a:rPr>
+                                    <m:t>𝑗</m:t>
+                                  </m:r>
+                                </m:sub>
+                              </m:sSub>
+                            </m:e>
+                          </m:d>
+                        </m:e>
+                      </m:nary>
+                    </m:oMath>
+                  </m:oMathPara>
+                </a14:m>
+                <a:endParaRPr lang="ko-KR" altLang="ko-KR" sz="1800" kern="100" dirty="0">
+                  <a:effectLst/>
+                  <a:latin typeface="맑은 고딕" panose="020B0503020000020004" pitchFamily="50" charset="-127"/>
+                  <a:ea typeface="맑은 고딕" panose="020B0503020000020004" pitchFamily="50" charset="-127"/>
+                  <a:cs typeface="Times New Roman" panose="02020603050405020304" pitchFamily="18" charset="0"/>
+                </a:endParaRPr>
+              </a:p>
+              <a:p>
+                <a:pPr algn="just" latinLnBrk="1">
+                  <a:lnSpc>
+                    <a:spcPct val="107000"/>
+                  </a:lnSpc>
+                  <a:spcAft>
+                    <a:spcPts val="800"/>
+                  </a:spcAft>
+                </a:pPr>
+                <a:r>
+                  <a:rPr lang="en-US" altLang="ko-KR" sz="1800" kern="100" dirty="0">
+                    <a:effectLst/>
+                    <a:latin typeface="맑은 고딕" panose="020B0503020000020004" pitchFamily="50" charset="-127"/>
+                    <a:ea typeface="맑은 고딕" panose="020B0503020000020004" pitchFamily="50" charset="-127"/>
+                    <a:cs typeface="Times New Roman" panose="02020603050405020304" pitchFamily="18" charset="0"/>
+                  </a:rPr>
+                  <a:t> </a:t>
+                </a:r>
+                <a:endParaRPr lang="ko-KR" altLang="ko-KR" sz="1800" kern="100" dirty="0">
+                  <a:effectLst/>
+                  <a:latin typeface="맑은 고딕" panose="020B0503020000020004" pitchFamily="50" charset="-127"/>
+                  <a:ea typeface="맑은 고딕" panose="020B0503020000020004" pitchFamily="50" charset="-127"/>
+                  <a:cs typeface="Times New Roman" panose="02020603050405020304" pitchFamily="18" charset="0"/>
+                </a:endParaRPr>
+              </a:p>
+              <a:p>
+                <a:pPr marL="285750" indent="-285750">
+                  <a:buFontTx/>
+                  <a:buChar char="-"/>
+                </a:pPr>
+                <a14:m>
+                  <m:oMath xmlns:m="http://schemas.openxmlformats.org/officeDocument/2006/math">
+                    <m:r>
+                      <m:rPr>
+                        <m:sty m:val="p"/>
+                      </m:rPr>
+                      <a:rPr lang="en-US" altLang="ko-KR" smtClean="0">
+                        <a:latin typeface="Cambria Math" panose="02040503050406030204" pitchFamily="18" charset="0"/>
+                      </a:rPr>
+                      <m:t>α</m:t>
+                    </m:r>
+                  </m:oMath>
+                </a14:m>
+                <a:r>
+                  <a:rPr lang="en-US" altLang="ko-KR" dirty="0"/>
+                  <a:t> : </a:t>
+                </a:r>
+                <a:r>
+                  <a:rPr lang="ko-KR" altLang="en-US" dirty="0"/>
+                  <a:t>규제 강도</a:t>
+                </a:r>
+                <a:r>
+                  <a:rPr lang="en-US" altLang="ko-KR" dirty="0"/>
+                  <a:t>, </a:t>
+                </a:r>
+                <a:r>
+                  <a:rPr lang="ko-KR" altLang="en-US" dirty="0"/>
+                  <a:t>이 값이 커질수록 벌칙이 커져서 가중치가 </a:t>
+                </a:r>
+                <a:r>
+                  <a:rPr lang="en-US" altLang="ko-KR" dirty="0"/>
+                  <a:t>0</a:t>
+                </a:r>
+                <a:r>
+                  <a:rPr lang="ko-KR" altLang="en-US" dirty="0"/>
+                  <a:t>으로 변환</a:t>
+                </a:r>
+                <a:endParaRPr lang="en-US" altLang="ko-KR" dirty="0"/>
+              </a:p>
+            </p:txBody>
+          </p:sp>
+        </mc:Choice>
+        <mc:Fallback>
+          <p:sp>
+            <p:nvSpPr>
+              <p:cNvPr id="4" name="TextBox 3"/>
+              <p:cNvSpPr txBox="1">
+                <a:spLocks noRot="1" noChangeAspect="1" noMove="1" noResize="1" noEditPoints="1" noAdjustHandles="1" noChangeArrowheads="1" noChangeShapeType="1" noTextEdit="1"/>
+              </p:cNvSpPr>
+              <p:nvPr/>
+            </p:nvSpPr>
+            <p:spPr>
+              <a:xfrm>
+                <a:off x="971600" y="1700955"/>
+                <a:ext cx="7200800" cy="4230838"/>
+              </a:xfrm>
+              <a:prstGeom prst="rect">
+                <a:avLst/>
+              </a:prstGeom>
+              <a:blipFill>
+                <a:blip r:embed="rId3"/>
+                <a:stretch>
+                  <a:fillRect l="-846" t="-1297" b="-1297"/>
+                </a:stretch>
+              </a:blipFill>
+            </p:spPr>
+            <p:txBody>
+              <a:bodyPr/>
+              <a:lstStyle/>
+              <a:p>
+                <a:r>
+                  <a:rPr lang="ko-KR" altLang="en-US">
+                    <a:noFill/>
+                  </a:rPr>
+                  <a:t> </a:t>
+                </a:r>
+              </a:p>
+            </p:txBody>
+          </p:sp>
+        </mc:Fallback>
+      </mc:AlternateContent>
       <p:sp>
         <p:nvSpPr>
           <p:cNvPr id="6" name="TextBox 5"/>
@@ -10487,7 +13382,7 @@
           <a:p>
             <a:r>
               <a:rPr lang="en-US" altLang="ko-KR" sz="2300" dirty="0"/>
-              <a:t>ensemble</a:t>
+              <a:t>Lasso</a:t>
             </a:r>
             <a:endParaRPr lang="ko-KR" altLang="en-US" sz="2300" dirty="0"/>
           </a:p>
@@ -10496,7 +13391,7 @@
     </p:spTree>
     <p:extLst>
       <p:ext uri="{BB962C8B-B14F-4D97-AF65-F5344CB8AC3E}">
-        <p14:creationId xmlns:p14="http://schemas.microsoft.com/office/powerpoint/2010/main" val="3490015133"/>
+        <p14:creationId xmlns:p14="http://schemas.microsoft.com/office/powerpoint/2010/main" val="1602641789"/>
       </p:ext>
     </p:extLst>
   </p:cSld>
@@ -10661,7 +13556,7 @@
         <p:spPr>
           <a:xfrm>
             <a:off x="971600" y="1700955"/>
-            <a:ext cx="7200800" cy="2862322"/>
+            <a:ext cx="7200800" cy="2031325"/>
           </a:xfrm>
           <a:prstGeom prst="rect">
             <a:avLst/>
@@ -10679,8 +13574,20 @@
               <a:buChar char="-"/>
             </a:pPr>
             <a:r>
+              <a:rPr lang="ko-KR" altLang="en-US" dirty="0" err="1"/>
+              <a:t>릿지와</a:t>
+            </a:r>
+            <a:r>
               <a:rPr lang="ko-KR" altLang="en-US" dirty="0"/>
-              <a:t>주어진 자료를 모집단으로 간주하고 주어진 자료에 여러 개의 부트스트랩 자료를 생성</a:t>
+              <a:t> </a:t>
+            </a:r>
+            <a:r>
+              <a:rPr lang="ko-KR" altLang="en-US" dirty="0" err="1"/>
+              <a:t>라쏘의</a:t>
+            </a:r>
+            <a:r>
+              <a:rPr lang="ko-KR" altLang="en-US" dirty="0"/>
+              <a:t> 장점을 모아서 합친 모델 </a:t>
             </a:r>
             <a:endParaRPr lang="en-US" altLang="ko-KR" dirty="0"/>
           </a:p>
@@ -10690,21 +13597,30 @@
               <a:buChar char="-"/>
             </a:pPr>
             <a:r>
+              <a:rPr lang="en-US" altLang="ko-KR" dirty="0"/>
+              <a:t>L1 </a:t>
+            </a:r>
+            <a:r>
+              <a:rPr lang="ko-KR" altLang="en-US" dirty="0" err="1"/>
+              <a:t>패널티를</a:t>
+            </a:r>
+            <a:r>
               <a:rPr lang="ko-KR" altLang="en-US" dirty="0"/>
-              <a:t>만들어진 부트스트랩 자료를 이용하여 여러 모델에서 독립적으로 학습 </a:t>
+              <a:t> 이용한 특징을 선택하는 부분과 </a:t>
             </a:r>
             <a:r>
               <a:rPr lang="en-US" altLang="ko-KR" dirty="0"/>
-              <a:t>(</a:t>
+              <a:t>L2 </a:t>
+            </a:r>
+            <a:r>
+              <a:rPr lang="ko-KR" altLang="en-US" dirty="0" err="1"/>
+              <a:t>패널티의</a:t>
             </a:r>
             <a:r>
               <a:rPr lang="ko-KR" altLang="en-US" dirty="0"/>
-              <a:t>병렬식 구조</a:t>
-            </a:r>
-            <a:r>
-              <a:rPr lang="en-US" altLang="ko-KR" dirty="0"/>
-              <a:t>)</a:t>
-            </a:r>
+              <a:t> 전체적인 특징들을 일반화하는 부분을 결합한 모델 </a:t>
+            </a:r>
+            <a:endParaRPr lang="en-US" altLang="ko-KR" dirty="0"/>
           </a:p>
           <a:p>
             <a:pPr marL="285750" indent="-285750">
@@ -10712,8 +13628,20 @@
               <a:buChar char="-"/>
             </a:pPr>
             <a:r>
+              <a:rPr lang="en-US" altLang="ko-KR" dirty="0"/>
+              <a:t>L1_ratio </a:t>
+            </a:r>
+            <a:r>
               <a:rPr lang="ko-KR" altLang="en-US" dirty="0"/>
-              <a:t>여러 모델에서 만들어진 결과를 결합하여 하나의 결과로 출력 </a:t>
+              <a:t>매개변수를 이용하여 </a:t>
+            </a:r>
+            <a:r>
+              <a:rPr lang="en-US" altLang="ko-KR" dirty="0"/>
+              <a:t>L1, L2</a:t>
+            </a:r>
+            <a:r>
+              <a:rPr lang="ko-KR" altLang="en-US" dirty="0"/>
+              <a:t>의 비율을 설정 가능</a:t>
             </a:r>
             <a:endParaRPr lang="en-US" altLang="ko-KR" dirty="0"/>
           </a:p>
@@ -10723,56 +13651,20 @@
               <a:buChar char="-"/>
             </a:pPr>
             <a:r>
+              <a:rPr lang="ko-KR" altLang="en-US" dirty="0" err="1"/>
+              <a:t>라쏘의</a:t>
+            </a:r>
+            <a:r>
               <a:rPr lang="ko-KR" altLang="en-US" dirty="0"/>
-              <a:t>장점</a:t>
-            </a:r>
-            <a:endParaRPr lang="en-US" altLang="ko-KR" dirty="0"/>
-          </a:p>
-          <a:p>
-            <a:pPr marL="742950" lvl="1" indent="-285750">
-              <a:buFontTx/>
-              <a:buChar char="-"/>
-            </a:pPr>
+              <a:t> 경우 특징을 선택하여 모델이 단순화가 되는 과정이 발생 할 수 있고 </a:t>
+            </a:r>
+            <a:r>
+              <a:rPr lang="ko-KR" altLang="en-US" dirty="0" err="1"/>
+              <a:t>릿지의</a:t>
+            </a:r>
             <a:r>
               <a:rPr lang="ko-KR" altLang="en-US" dirty="0"/>
-              <a:t>모델의 불안정성이 줄어들고 분산이 감소</a:t>
-            </a:r>
-            <a:endParaRPr lang="en-US" altLang="ko-KR" dirty="0"/>
-          </a:p>
-          <a:p>
-            <a:pPr marL="285750" indent="-285750">
-              <a:buFontTx/>
-              <a:buChar char="-"/>
-            </a:pPr>
-            <a:r>
-              <a:rPr lang="ko-KR" altLang="en-US" dirty="0"/>
-              <a:t>단점</a:t>
-            </a:r>
-            <a:endParaRPr lang="en-US" altLang="ko-KR" dirty="0"/>
-          </a:p>
-          <a:p>
-            <a:pPr marL="742950" lvl="1" indent="-285750">
-              <a:buFontTx/>
-              <a:buChar char="-"/>
-            </a:pPr>
-            <a:r>
-              <a:rPr lang="ko-KR" altLang="en-US" dirty="0"/>
-              <a:t>편향은 그대로 유지 </a:t>
-            </a:r>
-            <a:endParaRPr lang="en-US" altLang="ko-KR" dirty="0"/>
-          </a:p>
-          <a:p>
-            <a:pPr marL="285750" indent="-285750">
-              <a:buFontTx/>
-              <a:buChar char="-"/>
-            </a:pPr>
-            <a:r>
-              <a:rPr lang="ko-KR" altLang="en-US" dirty="0"/>
-              <a:t>대표적인 모델은 </a:t>
-            </a:r>
-            <a:r>
-              <a:rPr lang="ko-KR" altLang="en-US" dirty="0" err="1"/>
-              <a:t>랜덤포레스트</a:t>
+              <a:t> 경우 특징들이 일반화 됨으로 모델이 복잡해질 수 있기 때문에 서로의 단점을 보완하기 위해 만들어진 모델</a:t>
             </a:r>
             <a:endParaRPr lang="en-US" altLang="ko-KR" dirty="0"/>
           </a:p>
@@ -10801,8 +13693,8 @@
           <a:lstStyle/>
           <a:p>
             <a:r>
-              <a:rPr lang="en-US" altLang="ko-KR" sz="2300" dirty="0"/>
-              <a:t>Bagging</a:t>
+              <a:rPr lang="en-US" altLang="ko-KR" sz="2300" dirty="0" err="1"/>
+              <a:t>ElasticNet</a:t>
             </a:r>
             <a:endParaRPr lang="ko-KR" altLang="en-US" sz="2300" dirty="0"/>
           </a:p>
@@ -10811,7 +13703,7 @@
     </p:spTree>
     <p:extLst>
       <p:ext uri="{BB962C8B-B14F-4D97-AF65-F5344CB8AC3E}">
-        <p14:creationId xmlns:p14="http://schemas.microsoft.com/office/powerpoint/2010/main" val="3521997325"/>
+        <p14:creationId xmlns:p14="http://schemas.microsoft.com/office/powerpoint/2010/main" val="4223299694"/>
       </p:ext>
     </p:extLst>
   </p:cSld>
@@ -10967,132 +13859,420 @@
           </a:p>
         </p:txBody>
       </p:sp>
-      <p:sp>
-        <p:nvSpPr>
-          <p:cNvPr id="4" name="TextBox 3"/>
-          <p:cNvSpPr txBox="1"/>
-          <p:nvPr/>
-        </p:nvSpPr>
-        <p:spPr>
-          <a:xfrm>
-            <a:off x="971600" y="1700955"/>
-            <a:ext cx="7200800" cy="2862322"/>
-          </a:xfrm>
-          <a:prstGeom prst="rect">
-            <a:avLst/>
-          </a:prstGeom>
-          <a:noFill/>
-        </p:spPr>
-        <p:txBody>
-          <a:bodyPr wrap="square" rtlCol="0">
-            <a:spAutoFit/>
-          </a:bodyPr>
-          <a:lstStyle/>
-          <a:p>
-            <a:pPr marL="285750" indent="-285750">
-              <a:buFontTx/>
-              <a:buChar char="-"/>
-            </a:pPr>
-            <a:r>
-              <a:rPr lang="ko-KR" altLang="en-US" dirty="0"/>
-              <a:t>여러 개의 약한 모델을 순자척으로 학습 시키면서 이전 모델에서의 오류를 점점 보완해가는 방식</a:t>
-            </a:r>
-            <a:endParaRPr lang="en-US" altLang="ko-KR" dirty="0"/>
-          </a:p>
-          <a:p>
-            <a:pPr marL="285750" indent="-285750">
-              <a:buFontTx/>
-              <a:buChar char="-"/>
-            </a:pPr>
-            <a:r>
-              <a:rPr lang="ko-KR" altLang="en-US" dirty="0"/>
-              <a:t>단순 모델을 반복적으로 사용하면서 강함 모델로 생성</a:t>
-            </a:r>
-            <a:endParaRPr lang="en-US" altLang="ko-KR" dirty="0"/>
-          </a:p>
-          <a:p>
-            <a:pPr marL="285750" indent="-285750">
-              <a:buFontTx/>
-              <a:buChar char="-"/>
-            </a:pPr>
-            <a:r>
-              <a:rPr lang="ko-KR" altLang="en-US" dirty="0"/>
-              <a:t>장점</a:t>
-            </a:r>
-            <a:endParaRPr lang="en-US" altLang="ko-KR" dirty="0"/>
-          </a:p>
-          <a:p>
-            <a:pPr marL="742950" lvl="1" indent="-285750">
-              <a:buFontTx/>
-              <a:buChar char="-"/>
-            </a:pPr>
-            <a:r>
-              <a:rPr lang="ko-KR" altLang="en-US" dirty="0"/>
-              <a:t>편향 감소</a:t>
-            </a:r>
-            <a:endParaRPr lang="en-US" altLang="ko-KR" dirty="0"/>
-          </a:p>
-          <a:p>
-            <a:pPr marL="285750" indent="-285750">
-              <a:buFontTx/>
-              <a:buChar char="-"/>
-            </a:pPr>
-            <a:r>
-              <a:rPr lang="ko-KR" altLang="en-US" dirty="0"/>
-              <a:t>단점</a:t>
-            </a:r>
-            <a:endParaRPr lang="en-US" altLang="ko-KR" dirty="0"/>
-          </a:p>
-          <a:p>
-            <a:pPr marL="742950" lvl="1" indent="-285750">
-              <a:buFontTx/>
-              <a:buChar char="-"/>
-            </a:pPr>
-            <a:r>
-              <a:rPr lang="ko-KR" altLang="en-US" dirty="0"/>
-              <a:t>순차적인 학습으로 병렬화가 어려워 속도가 느려짐</a:t>
-            </a:r>
-            <a:endParaRPr lang="en-US" altLang="ko-KR" dirty="0"/>
-          </a:p>
-          <a:p>
-            <a:pPr marL="742950" lvl="1" indent="-285750">
-              <a:buFontTx/>
-              <a:buChar char="-"/>
-            </a:pPr>
-            <a:r>
-              <a:rPr lang="ko-KR" altLang="en-US" dirty="0"/>
-              <a:t>학습의 횟수가 너무 많은 경우 과적합의 위험</a:t>
-            </a:r>
-            <a:endParaRPr lang="en-US" altLang="ko-KR" dirty="0"/>
-          </a:p>
-          <a:p>
-            <a:pPr marL="742950" lvl="1" indent="-285750">
-              <a:buFontTx/>
-              <a:buChar char="-"/>
-            </a:pPr>
-            <a:r>
-              <a:rPr lang="ko-KR" altLang="en-US" dirty="0"/>
-              <a:t>매개변수의 튜닝이 매우 중요</a:t>
-            </a:r>
-            <a:endParaRPr lang="en-US" altLang="ko-KR" dirty="0"/>
-          </a:p>
-          <a:p>
-            <a:pPr marL="285750" indent="-285750">
-              <a:buFontTx/>
-              <a:buChar char="-"/>
-            </a:pPr>
-            <a:r>
-              <a:rPr lang="ko-KR" altLang="en-US" dirty="0"/>
-              <a:t>대표적인 모델은 </a:t>
-            </a:r>
-            <a:r>
-              <a:rPr lang="en-US" altLang="ko-KR" dirty="0" err="1"/>
-              <a:t>XGboost</a:t>
-            </a:r>
-            <a:endParaRPr lang="en-US" altLang="ko-KR" dirty="0"/>
-          </a:p>
-        </p:txBody>
-      </p:sp>
+      <mc:AlternateContent xmlns:mc="http://schemas.openxmlformats.org/markup-compatibility/2006">
+        <mc:Choice xmlns:a14="http://schemas.microsoft.com/office/drawing/2010/main" Requires="a14">
+          <p:sp>
+            <p:nvSpPr>
+              <p:cNvPr id="4" name="TextBox 3"/>
+              <p:cNvSpPr txBox="1"/>
+              <p:nvPr/>
+            </p:nvSpPr>
+            <p:spPr>
+              <a:xfrm>
+                <a:off x="971600" y="1700955"/>
+                <a:ext cx="7200800" cy="3371629"/>
+              </a:xfrm>
+              <a:prstGeom prst="rect">
+                <a:avLst/>
+              </a:prstGeom>
+              <a:noFill/>
+            </p:spPr>
+            <p:txBody>
+              <a:bodyPr wrap="square" rtlCol="0">
+                <a:spAutoFit/>
+              </a:bodyPr>
+              <a:lstStyle/>
+              <a:p>
+                <a:pPr marL="285750" indent="-285750">
+                  <a:buFontTx/>
+                  <a:buChar char="-"/>
+                </a:pPr>
+                <a:r>
+                  <a:rPr lang="ko-KR" altLang="en-US" dirty="0"/>
+                  <a:t>로지스틱 회귀는 이름은 회귀지만 실제로는 분류에서 사용이 되는 모델 </a:t>
+                </a:r>
+                <a:endParaRPr lang="en-US" altLang="ko-KR" dirty="0"/>
+              </a:p>
+              <a:p>
+                <a:pPr marL="285750" indent="-285750">
+                  <a:buFontTx/>
+                  <a:buChar char="-"/>
+                </a:pPr>
+                <a:r>
+                  <a:rPr lang="ko-KR" altLang="en-US" dirty="0"/>
+                  <a:t>예측의 값이 연속성을 가지는 경우 해당하는 값은 </a:t>
+                </a:r>
+                <a:r>
+                  <a:rPr lang="en-US" altLang="ko-KR" dirty="0"/>
+                  <a:t>0</a:t>
+                </a:r>
+                <a:r>
+                  <a:rPr lang="ko-KR" altLang="en-US" dirty="0"/>
+                  <a:t>과 </a:t>
+                </a:r>
+                <a:r>
+                  <a:rPr lang="en-US" altLang="ko-KR" dirty="0"/>
+                  <a:t>1</a:t>
+                </a:r>
+                <a:r>
+                  <a:rPr lang="ko-KR" altLang="en-US" dirty="0"/>
+                  <a:t>사의 확률 값으로 변환 </a:t>
+                </a:r>
+                <a:endParaRPr lang="en-US" altLang="ko-KR" dirty="0"/>
+              </a:p>
+              <a:p>
+                <a:pPr marL="285750" indent="-285750">
+                  <a:buFontTx/>
+                  <a:buChar char="-"/>
+                </a:pPr>
+                <a:r>
+                  <a:rPr lang="en-US" altLang="ko-KR" dirty="0"/>
+                  <a:t>0.5</a:t>
+                </a:r>
+                <a:r>
+                  <a:rPr lang="ko-KR" altLang="en-US" dirty="0"/>
+                  <a:t>보다 크다면 </a:t>
+                </a:r>
+                <a:r>
+                  <a:rPr lang="en-US" altLang="ko-KR" dirty="0"/>
+                  <a:t>1(</a:t>
+                </a:r>
+                <a:r>
+                  <a:rPr lang="ko-KR" altLang="en-US" dirty="0"/>
+                  <a:t>긍정</a:t>
+                </a:r>
+                <a:r>
+                  <a:rPr lang="en-US" altLang="ko-KR" dirty="0"/>
+                  <a:t>) </a:t>
+                </a:r>
+                <a:r>
+                  <a:rPr lang="ko-KR" altLang="en-US" dirty="0"/>
+                  <a:t>작으면 </a:t>
+                </a:r>
+                <a:r>
+                  <a:rPr lang="en-US" altLang="ko-KR" dirty="0"/>
+                  <a:t>0(</a:t>
+                </a:r>
+                <a:r>
+                  <a:rPr lang="ko-KR" altLang="en-US" dirty="0"/>
+                  <a:t>부정</a:t>
+                </a:r>
+                <a:r>
+                  <a:rPr lang="en-US" altLang="ko-KR" dirty="0"/>
+                  <a:t>)</a:t>
+                </a:r>
+                <a:r>
+                  <a:rPr lang="ko-KR" altLang="en-US" dirty="0"/>
+                  <a:t>으로 판단</a:t>
+                </a:r>
+                <a:endParaRPr lang="en-US" altLang="ko-KR" dirty="0"/>
+              </a:p>
+              <a:p>
+                <a:pPr marL="285750" indent="-285750">
+                  <a:buFontTx/>
+                  <a:buChar char="-"/>
+                </a:pPr>
+                <a:endParaRPr lang="en-US" altLang="ko-KR" dirty="0"/>
+              </a:p>
+              <a:p>
+                <a:pPr algn="just" latinLnBrk="1">
+                  <a:lnSpc>
+                    <a:spcPct val="107000"/>
+                  </a:lnSpc>
+                  <a:spcAft>
+                    <a:spcPts val="800"/>
+                  </a:spcAft>
+                </a:pPr>
+                <a14:m>
+                  <m:oMathPara xmlns:m="http://schemas.openxmlformats.org/officeDocument/2006/math">
+                    <m:oMathParaPr>
+                      <m:jc m:val="centerGroup"/>
+                    </m:oMathParaPr>
+                    <m:oMath xmlns:m="http://schemas.openxmlformats.org/officeDocument/2006/math">
+                      <m:r>
+                        <m:rPr>
+                          <m:sty m:val="p"/>
+                        </m:rPr>
+                        <a:rPr lang="en-US" altLang="ko-KR" sz="1800" kern="100" smtClean="0">
+                          <a:effectLst/>
+                          <a:latin typeface="Cambria Math" panose="02040503050406030204" pitchFamily="18" charset="0"/>
+                          <a:ea typeface="맑은 고딕" panose="020B0503020000020004" pitchFamily="50" charset="-127"/>
+                          <a:cs typeface="Times New Roman" panose="02020603050405020304" pitchFamily="18" charset="0"/>
+                        </a:rPr>
+                        <m:t>σ</m:t>
+                      </m:r>
+                      <m:d>
+                        <m:dPr>
+                          <m:ctrlPr>
+                            <a:rPr lang="ko-KR" altLang="ko-KR" sz="1800" i="1" kern="100">
+                              <a:effectLst/>
+                              <a:latin typeface="Cambria Math" panose="02040503050406030204" pitchFamily="18" charset="0"/>
+                              <a:ea typeface="Cambria Math" panose="02040503050406030204" pitchFamily="18" charset="0"/>
+                              <a:cs typeface="Times New Roman" panose="02020603050405020304" pitchFamily="18" charset="0"/>
+                            </a:rPr>
+                          </m:ctrlPr>
+                        </m:dPr>
+                        <m:e>
+                          <m:r>
+                            <a:rPr lang="en-US" altLang="ko-KR" sz="1800" i="1" kern="100">
+                              <a:effectLst/>
+                              <a:latin typeface="Cambria Math" panose="02040503050406030204" pitchFamily="18" charset="0"/>
+                              <a:ea typeface="맑은 고딕" panose="020B0503020000020004" pitchFamily="50" charset="-127"/>
+                              <a:cs typeface="Times New Roman" panose="02020603050405020304" pitchFamily="18" charset="0"/>
+                            </a:rPr>
+                            <m:t>𝑦</m:t>
+                          </m:r>
+                        </m:e>
+                      </m:d>
+                      <m:r>
+                        <a:rPr lang="en-US" altLang="ko-KR" sz="1800" i="1" kern="100">
+                          <a:effectLst/>
+                          <a:latin typeface="Cambria Math" panose="02040503050406030204" pitchFamily="18" charset="0"/>
+                          <a:ea typeface="맑은 고딕" panose="020B0503020000020004" pitchFamily="50" charset="-127"/>
+                          <a:cs typeface="Times New Roman" panose="02020603050405020304" pitchFamily="18" charset="0"/>
+                        </a:rPr>
+                        <m:t>=</m:t>
+                      </m:r>
+                      <m:f>
+                        <m:fPr>
+                          <m:ctrlPr>
+                            <a:rPr lang="ko-KR" altLang="ko-KR" sz="1800" i="1" kern="100">
+                              <a:effectLst/>
+                              <a:latin typeface="Cambria Math" panose="02040503050406030204" pitchFamily="18" charset="0"/>
+                              <a:ea typeface="Cambria Math" panose="02040503050406030204" pitchFamily="18" charset="0"/>
+                              <a:cs typeface="Times New Roman" panose="02020603050405020304" pitchFamily="18" charset="0"/>
+                            </a:rPr>
+                          </m:ctrlPr>
+                        </m:fPr>
+                        <m:num>
+                          <m:r>
+                            <a:rPr lang="en-US" altLang="ko-KR" sz="1800" i="1" kern="100">
+                              <a:effectLst/>
+                              <a:latin typeface="Cambria Math" panose="02040503050406030204" pitchFamily="18" charset="0"/>
+                              <a:ea typeface="맑은 고딕" panose="020B0503020000020004" pitchFamily="50" charset="-127"/>
+                              <a:cs typeface="Times New Roman" panose="02020603050405020304" pitchFamily="18" charset="0"/>
+                            </a:rPr>
+                            <m:t>1</m:t>
+                          </m:r>
+                        </m:num>
+                        <m:den>
+                          <m:r>
+                            <a:rPr lang="en-US" altLang="ko-KR" sz="1800" i="1" kern="100">
+                              <a:effectLst/>
+                              <a:latin typeface="Cambria Math" panose="02040503050406030204" pitchFamily="18" charset="0"/>
+                              <a:ea typeface="맑은 고딕" panose="020B0503020000020004" pitchFamily="50" charset="-127"/>
+                              <a:cs typeface="Times New Roman" panose="02020603050405020304" pitchFamily="18" charset="0"/>
+                            </a:rPr>
+                            <m:t>1+</m:t>
+                          </m:r>
+                          <m:sSup>
+                            <m:sSupPr>
+                              <m:ctrlPr>
+                                <a:rPr lang="ko-KR" altLang="ko-KR" sz="1800" i="1" kern="100">
+                                  <a:effectLst/>
+                                  <a:latin typeface="Cambria Math" panose="02040503050406030204" pitchFamily="18" charset="0"/>
+                                  <a:ea typeface="Cambria Math" panose="02040503050406030204" pitchFamily="18" charset="0"/>
+                                  <a:cs typeface="Times New Roman" panose="02020603050405020304" pitchFamily="18" charset="0"/>
+                                </a:rPr>
+                              </m:ctrlPr>
+                            </m:sSupPr>
+                            <m:e>
+                              <m:r>
+                                <a:rPr lang="en-US" altLang="ko-KR" sz="1800" i="1" kern="100">
+                                  <a:effectLst/>
+                                  <a:latin typeface="Cambria Math" panose="02040503050406030204" pitchFamily="18" charset="0"/>
+                                  <a:ea typeface="맑은 고딕" panose="020B0503020000020004" pitchFamily="50" charset="-127"/>
+                                  <a:cs typeface="Times New Roman" panose="02020603050405020304" pitchFamily="18" charset="0"/>
+                                </a:rPr>
+                                <m:t>𝑒</m:t>
+                              </m:r>
+                            </m:e>
+                            <m:sup>
+                              <m:r>
+                                <a:rPr lang="en-US" altLang="ko-KR" sz="1800" i="1" kern="100">
+                                  <a:effectLst/>
+                                  <a:latin typeface="Cambria Math" panose="02040503050406030204" pitchFamily="18" charset="0"/>
+                                  <a:ea typeface="맑은 고딕" panose="020B0503020000020004" pitchFamily="50" charset="-127"/>
+                                  <a:cs typeface="Times New Roman" panose="02020603050405020304" pitchFamily="18" charset="0"/>
+                                </a:rPr>
+                                <m:t>−</m:t>
+                              </m:r>
+                              <m:r>
+                                <a:rPr lang="en-US" altLang="ko-KR" sz="1800" i="1" kern="100">
+                                  <a:effectLst/>
+                                  <a:latin typeface="Cambria Math" panose="02040503050406030204" pitchFamily="18" charset="0"/>
+                                  <a:ea typeface="맑은 고딕" panose="020B0503020000020004" pitchFamily="50" charset="-127"/>
+                                  <a:cs typeface="Times New Roman" panose="02020603050405020304" pitchFamily="18" charset="0"/>
+                                </a:rPr>
+                                <m:t>𝑦</m:t>
+                              </m:r>
+                            </m:sup>
+                          </m:sSup>
+                        </m:den>
+                      </m:f>
+                    </m:oMath>
+                  </m:oMathPara>
+                </a14:m>
+                <a:endParaRPr lang="ko-KR" altLang="ko-KR" sz="1800" kern="100" dirty="0">
+                  <a:effectLst/>
+                  <a:latin typeface="맑은 고딕" panose="020B0503020000020004" pitchFamily="50" charset="-127"/>
+                  <a:ea typeface="맑은 고딕" panose="020B0503020000020004" pitchFamily="50" charset="-127"/>
+                  <a:cs typeface="Times New Roman" panose="02020603050405020304" pitchFamily="18" charset="0"/>
+                </a:endParaRPr>
+              </a:p>
+              <a:p>
+                <a:pPr algn="just" latinLnBrk="1">
+                  <a:lnSpc>
+                    <a:spcPct val="107000"/>
+                  </a:lnSpc>
+                  <a:spcAft>
+                    <a:spcPts val="800"/>
+                  </a:spcAft>
+                </a:pPr>
+                <a:r>
+                  <a:rPr lang="en-US" altLang="ko-KR" sz="1800" kern="100" dirty="0">
+                    <a:effectLst/>
+                    <a:latin typeface="맑은 고딕" panose="020B0503020000020004" pitchFamily="50" charset="-127"/>
+                    <a:ea typeface="맑은 고딕" panose="020B0503020000020004" pitchFamily="50" charset="-127"/>
+                    <a:cs typeface="Times New Roman" panose="02020603050405020304" pitchFamily="18" charset="0"/>
+                  </a:rPr>
+                  <a:t>  			(</a:t>
+                </a:r>
+                <a:r>
+                  <a:rPr lang="ko-KR" altLang="en-US" sz="1800" kern="100" dirty="0" err="1">
+                    <a:effectLst/>
+                    <a:latin typeface="맑은 고딕" panose="020B0503020000020004" pitchFamily="50" charset="-127"/>
+                    <a:ea typeface="맑은 고딕" panose="020B0503020000020004" pitchFamily="50" charset="-127"/>
+                    <a:cs typeface="Times New Roman" panose="02020603050405020304" pitchFamily="18" charset="0"/>
+                  </a:rPr>
+                  <a:t>시그모이드</a:t>
+                </a:r>
+                <a:r>
+                  <a:rPr lang="ko-KR" altLang="en-US" sz="1800" kern="100" dirty="0">
+                    <a:effectLst/>
+                    <a:latin typeface="맑은 고딕" panose="020B0503020000020004" pitchFamily="50" charset="-127"/>
+                    <a:ea typeface="맑은 고딕" panose="020B0503020000020004" pitchFamily="50" charset="-127"/>
+                    <a:cs typeface="Times New Roman" panose="02020603050405020304" pitchFamily="18" charset="0"/>
+                  </a:rPr>
+                  <a:t> 함수</a:t>
+                </a:r>
+                <a:r>
+                  <a:rPr lang="en-US" altLang="ko-KR" sz="1800" kern="100" dirty="0">
+                    <a:effectLst/>
+                    <a:latin typeface="맑은 고딕" panose="020B0503020000020004" pitchFamily="50" charset="-127"/>
+                    <a:ea typeface="맑은 고딕" panose="020B0503020000020004" pitchFamily="50" charset="-127"/>
+                    <a:cs typeface="Times New Roman" panose="02020603050405020304" pitchFamily="18" charset="0"/>
+                  </a:rPr>
+                  <a:t>)</a:t>
+                </a:r>
+                <a:endParaRPr lang="ko-KR" altLang="ko-KR" sz="1800" kern="100" dirty="0">
+                  <a:effectLst/>
+                  <a:latin typeface="맑은 고딕" panose="020B0503020000020004" pitchFamily="50" charset="-127"/>
+                  <a:ea typeface="맑은 고딕" panose="020B0503020000020004" pitchFamily="50" charset="-127"/>
+                  <a:cs typeface="Times New Roman" panose="02020603050405020304" pitchFamily="18" charset="0"/>
+                </a:endParaRPr>
+              </a:p>
+              <a:p>
+                <a:pPr marL="285750" indent="-285750">
+                  <a:buFontTx/>
+                  <a:buChar char="-"/>
+                </a:pPr>
+                <a14:m>
+                  <m:oMath xmlns:m="http://schemas.openxmlformats.org/officeDocument/2006/math">
+                    <m:r>
+                      <a:rPr lang="en-US" altLang="ko-KR" sz="1800" i="1" smtClean="0">
+                        <a:effectLst/>
+                        <a:latin typeface="Cambria Math" panose="02040503050406030204" pitchFamily="18" charset="0"/>
+                        <a:ea typeface="맑은 고딕" panose="020B0503020000020004" pitchFamily="50" charset="-127"/>
+                        <a:cs typeface="Times New Roman" panose="02020603050405020304" pitchFamily="18" charset="0"/>
+                      </a:rPr>
+                      <m:t>𝑒</m:t>
+                    </m:r>
+                  </m:oMath>
+                </a14:m>
+                <a:r>
+                  <a:rPr lang="en-US" altLang="ko-KR" dirty="0"/>
+                  <a:t> : </a:t>
+                </a:r>
+                <a:r>
+                  <a:rPr lang="ko-KR" altLang="en-US" dirty="0"/>
+                  <a:t>자연상수</a:t>
+                </a:r>
+                <a:r>
+                  <a:rPr lang="en-US" altLang="ko-KR" dirty="0"/>
+                  <a:t>(2.71828….)</a:t>
+                </a:r>
+              </a:p>
+              <a:p>
+                <a:pPr marL="285750" indent="-285750">
+                  <a:buFontTx/>
+                  <a:buChar char="-"/>
+                </a:pPr>
+                <a14:m>
+                  <m:oMath xmlns:m="http://schemas.openxmlformats.org/officeDocument/2006/math">
+                    <m:r>
+                      <a:rPr lang="en-US" altLang="ko-KR" sz="1800" i="1" smtClean="0">
+                        <a:effectLst/>
+                        <a:latin typeface="Cambria Math" panose="02040503050406030204" pitchFamily="18" charset="0"/>
+                        <a:ea typeface="맑은 고딕" panose="020B0503020000020004" pitchFamily="50" charset="-127"/>
+                        <a:cs typeface="Times New Roman" panose="02020603050405020304" pitchFamily="18" charset="0"/>
+                      </a:rPr>
+                      <m:t>𝑦</m:t>
+                    </m:r>
+                  </m:oMath>
+                </a14:m>
+                <a:r>
+                  <a:rPr lang="en-US" altLang="ko-KR" dirty="0"/>
+                  <a:t> : </a:t>
+                </a:r>
+                <a:r>
+                  <a:rPr lang="ko-KR" altLang="en-US" dirty="0"/>
+                  <a:t>선형 회귀의 결과 값</a:t>
+                </a:r>
+                <a:endParaRPr lang="en-US" altLang="ko-KR" dirty="0"/>
+              </a:p>
+            </p:txBody>
+          </p:sp>
+        </mc:Choice>
+        <mc:Fallback>
+          <p:sp>
+            <p:nvSpPr>
+              <p:cNvPr id="4" name="TextBox 3"/>
+              <p:cNvSpPr txBox="1">
+                <a:spLocks noRot="1" noChangeAspect="1" noMove="1" noResize="1" noEditPoints="1" noAdjustHandles="1" noChangeArrowheads="1" noChangeShapeType="1" noTextEdit="1"/>
+              </p:cNvSpPr>
+              <p:nvPr/>
+            </p:nvSpPr>
+            <p:spPr>
+              <a:xfrm>
+                <a:off x="971600" y="1700955"/>
+                <a:ext cx="7200800" cy="3371629"/>
+              </a:xfrm>
+              <a:prstGeom prst="rect">
+                <a:avLst/>
+              </a:prstGeom>
+              <a:blipFill>
+                <a:blip r:embed="rId3"/>
+                <a:stretch>
+                  <a:fillRect l="-846" t="-1627" r="-254" b="-1808"/>
+                </a:stretch>
+              </a:blipFill>
+            </p:spPr>
+            <p:txBody>
+              <a:bodyPr/>
+              <a:lstStyle/>
+              <a:p>
+                <a:r>
+                  <a:rPr lang="ko-KR" altLang="en-US">
+                    <a:noFill/>
+                  </a:rPr>
+                  <a:t> </a:t>
+                </a:r>
+              </a:p>
+            </p:txBody>
+          </p:sp>
+        </mc:Fallback>
+      </mc:AlternateContent>
       <p:sp>
         <p:nvSpPr>
           <p:cNvPr id="6" name="TextBox 5"/>
@@ -11117,7 +14297,7 @@
           <a:p>
             <a:r>
               <a:rPr lang="en-US" altLang="ko-KR" sz="2300" dirty="0"/>
-              <a:t>Boosting</a:t>
+              <a:t>Logistic Regression</a:t>
             </a:r>
             <a:endParaRPr lang="ko-KR" altLang="en-US" sz="2300" dirty="0"/>
           </a:p>
@@ -11126,7 +14306,7 @@
     </p:spTree>
     <p:extLst>
       <p:ext uri="{BB962C8B-B14F-4D97-AF65-F5344CB8AC3E}">
-        <p14:creationId xmlns:p14="http://schemas.microsoft.com/office/powerpoint/2010/main" val="2312816576"/>
+        <p14:creationId xmlns:p14="http://schemas.microsoft.com/office/powerpoint/2010/main" val="3565837906"/>
       </p:ext>
     </p:extLst>
   </p:cSld>
@@ -11291,7 +14471,7 @@
         <p:spPr>
           <a:xfrm>
             <a:off x="971600" y="1700955"/>
-            <a:ext cx="7200800" cy="2308324"/>
+            <a:ext cx="7200800" cy="2031325"/>
           </a:xfrm>
           <a:prstGeom prst="rect">
             <a:avLst/>
@@ -11310,15 +14490,39 @@
             </a:pPr>
             <a:r>
               <a:rPr lang="ko-KR" altLang="en-US" dirty="0"/>
-              <a:t>대표적인 </a:t>
-            </a:r>
-            <a:r>
-              <a:rPr lang="ko-KR" altLang="en-US" dirty="0" err="1"/>
-              <a:t>배깅</a:t>
+              <a:t>데이터를 분리하는 최적의 경계선</a:t>
+            </a:r>
+            <a:r>
+              <a:rPr lang="en-US" altLang="ko-KR" dirty="0"/>
+              <a:t>( </a:t>
             </a:r>
             <a:r>
               <a:rPr lang="ko-KR" altLang="en-US" dirty="0"/>
-              <a:t> 방식 모델 </a:t>
+              <a:t>결정 경계 </a:t>
+            </a:r>
+            <a:r>
+              <a:rPr lang="en-US" altLang="ko-KR" dirty="0"/>
+              <a:t>)</a:t>
+            </a:r>
+            <a:r>
+              <a:rPr lang="ko-KR" altLang="en-US" dirty="0"/>
+              <a:t>을 찾고 해당 경계선에서 어느 정도의 여유공간</a:t>
+            </a:r>
+            <a:r>
+              <a:rPr lang="en-US" altLang="ko-KR" dirty="0"/>
+              <a:t>(</a:t>
+            </a:r>
+            <a:r>
+              <a:rPr lang="ko-KR" altLang="en-US" dirty="0"/>
+              <a:t>마진</a:t>
+            </a:r>
+            <a:r>
+              <a:rPr lang="en-US" altLang="ko-KR" dirty="0"/>
+              <a:t>)</a:t>
+            </a:r>
+            <a:r>
+              <a:rPr lang="ko-KR" altLang="en-US" dirty="0"/>
+              <a:t>을 생성</a:t>
             </a:r>
             <a:endParaRPr lang="en-US" altLang="ko-KR" dirty="0"/>
           </a:p>
@@ -11329,15 +14533,15 @@
             </a:pPr>
             <a:r>
               <a:rPr lang="ko-KR" altLang="en-US" dirty="0"/>
-              <a:t>여러 개의 결정 트리를 </a:t>
+              <a:t>마진의 영역을 벗어나는 데이터에 대해서는 가중치 </a:t>
             </a:r>
             <a:r>
               <a:rPr lang="ko-KR" altLang="en-US" dirty="0" err="1"/>
-              <a:t>배깅의</a:t>
+              <a:t>패널티를</a:t>
             </a:r>
             <a:r>
               <a:rPr lang="ko-KR" altLang="en-US" dirty="0"/>
-              <a:t> 방식으로 학습시켜 예측의 결과를 결합하여 하나의 결과로 만들어내는 방식</a:t>
+              <a:t> 적용하여 학습을 하는 방식 </a:t>
             </a:r>
             <a:endParaRPr lang="en-US" altLang="ko-KR" dirty="0"/>
           </a:p>
@@ -11347,8 +14551,12 @@
               <a:buChar char="-"/>
             </a:pPr>
             <a:r>
+              <a:rPr lang="ko-KR" altLang="en-US" dirty="0" err="1"/>
+              <a:t>패널티를</a:t>
+            </a:r>
+            <a:r>
               <a:rPr lang="ko-KR" altLang="en-US" dirty="0"/>
-              <a:t>데이터들을 중복성을 허용하여 여러 개의 데이터 조합을 생성</a:t>
+              <a:t> 이용하여 마진 영역 밖의 데이터를 마진 영역 안쪽으로 들어 오게 할 수 있도록 매개변수를 수정</a:t>
             </a:r>
             <a:endParaRPr lang="en-US" altLang="ko-KR" dirty="0"/>
           </a:p>
@@ -11358,50 +14566,17 @@
               <a:buChar char="-"/>
             </a:pPr>
             <a:r>
-              <a:rPr lang="ko-KR" altLang="en-US" dirty="0" err="1"/>
-              <a:t>무작위하게</a:t>
-            </a:r>
-            <a:r>
               <a:rPr lang="ko-KR" altLang="en-US" dirty="0"/>
-              <a:t> 특성을 선택하여 트리 간의 상관성을 줄임</a:t>
-            </a:r>
-            <a:endParaRPr lang="en-US" altLang="ko-KR" dirty="0"/>
-          </a:p>
-          <a:p>
-            <a:pPr marL="285750" indent="-285750">
-              <a:buFontTx/>
-              <a:buChar char="-"/>
-            </a:pPr>
+              <a:t>회귀</a:t>
+            </a:r>
+            <a:r>
+              <a:rPr lang="en-US" altLang="ko-KR" dirty="0"/>
+              <a:t>, </a:t>
+            </a:r>
             <a:r>
               <a:rPr lang="ko-KR" altLang="en-US" dirty="0"/>
-              <a:t>각 트리는 독립적으로 학습하여 각각의 </a:t>
-            </a:r>
-            <a:r>
-              <a:rPr lang="ko-KR" altLang="en-US" dirty="0" err="1"/>
-              <a:t>예측값을</a:t>
-            </a:r>
-            <a:r>
-              <a:rPr lang="ko-KR" altLang="en-US" dirty="0"/>
-              <a:t> 생성 </a:t>
-            </a:r>
-            <a:endParaRPr lang="en-US" altLang="ko-KR" dirty="0"/>
-          </a:p>
-          <a:p>
-            <a:pPr marL="285750" indent="-285750">
-              <a:buFontTx/>
-              <a:buChar char="-"/>
-            </a:pPr>
-            <a:r>
-              <a:rPr lang="ko-KR" altLang="en-US" dirty="0"/>
-              <a:t>생성된 예측 값들을 이용하여 최종의 예측을 생성</a:t>
-            </a:r>
-            <a:endParaRPr lang="en-US" altLang="ko-KR" dirty="0"/>
-          </a:p>
-          <a:p>
-            <a:pPr marL="285750" indent="-285750">
-              <a:buFontTx/>
-              <a:buChar char="-"/>
-            </a:pPr>
+              <a:t>분류에서 모두 사용이 가능</a:t>
+            </a:r>
             <a:endParaRPr lang="en-US" altLang="ko-KR" dirty="0"/>
           </a:p>
         </p:txBody>
@@ -11415,7 +14590,7 @@
         <p:spPr>
           <a:xfrm>
             <a:off x="539552" y="1065096"/>
-            <a:ext cx="7992888" cy="461665"/>
+            <a:ext cx="7992888" cy="446276"/>
           </a:xfrm>
           <a:prstGeom prst="rect">
             <a:avLst/>
@@ -11429,8 +14604,8 @@
           <a:lstStyle/>
           <a:p>
             <a:r>
-              <a:rPr lang="en-US" altLang="ko-KR" sz="2400" dirty="0"/>
-              <a:t>Random Forest</a:t>
+              <a:rPr lang="en-US" altLang="ko-KR" sz="2300" dirty="0"/>
+              <a:t>Support Vector Machine</a:t>
             </a:r>
             <a:endParaRPr lang="ko-KR" altLang="en-US" sz="2300" dirty="0"/>
           </a:p>
@@ -11439,7 +14614,7 @@
     </p:spTree>
     <p:extLst>
       <p:ext uri="{BB962C8B-B14F-4D97-AF65-F5344CB8AC3E}">
-        <p14:creationId xmlns:p14="http://schemas.microsoft.com/office/powerpoint/2010/main" val="1483388609"/>
+        <p14:creationId xmlns:p14="http://schemas.microsoft.com/office/powerpoint/2010/main" val="637760614"/>
       </p:ext>
     </p:extLst>
   </p:cSld>
@@ -11623,15 +14798,7 @@
             </a:pPr>
             <a:r>
               <a:rPr lang="ko-KR" altLang="en-US" dirty="0"/>
-              <a:t>대표적인 </a:t>
-            </a:r>
-            <a:r>
-              <a:rPr lang="ko-KR" altLang="en-US" dirty="0" err="1"/>
-              <a:t>부스팅</a:t>
-            </a:r>
-            <a:r>
-              <a:rPr lang="ko-KR" altLang="en-US" dirty="0"/>
-              <a:t> 모델</a:t>
+              <a:t>단일 결정 트리의 단점을 극복하기 위해 여러 머신 러닝 모델을 연결하여 더 강력한 모델을 만드는 방법 </a:t>
             </a:r>
             <a:endParaRPr lang="en-US" altLang="ko-KR" dirty="0"/>
           </a:p>
@@ -11642,15 +14809,7 @@
             </a:pPr>
             <a:r>
               <a:rPr lang="ko-KR" altLang="en-US" dirty="0"/>
-              <a:t>기존에 존재하는 </a:t>
-            </a:r>
-            <a:r>
-              <a:rPr lang="en-US" altLang="ko-KR" dirty="0"/>
-              <a:t>Gradient Boosting </a:t>
-            </a:r>
-            <a:r>
-              <a:rPr lang="ko-KR" altLang="en-US" dirty="0"/>
-              <a:t>알고리즘을 고도화한 모델</a:t>
+              <a:t>입력 자료로부터 여러 개의 예측 모형을 만든 후 예측 모형을 조합하여 하나의 예측을 만들어 내는 과정 </a:t>
             </a:r>
             <a:endParaRPr lang="en-US" altLang="ko-KR" dirty="0"/>
           </a:p>
@@ -11661,29 +14820,19 @@
             </a:pPr>
             <a:r>
               <a:rPr lang="ko-KR" altLang="en-US" dirty="0"/>
-              <a:t>첫번째 약한 모델을 통한 학습을 하고 해당 모델에서 오차를 계산</a:t>
-            </a:r>
-            <a:endParaRPr lang="en-US" altLang="ko-KR" dirty="0"/>
-          </a:p>
-          <a:p>
-            <a:pPr marL="285750" indent="-285750">
-              <a:buFontTx/>
-              <a:buChar char="-"/>
-            </a:pPr>
-            <a:r>
-              <a:rPr lang="ko-KR" altLang="en-US" dirty="0"/>
-              <a:t>두번째 모델은 오차의 데이터를 다시 재 학습</a:t>
-            </a:r>
-            <a:endParaRPr lang="en-US" altLang="ko-KR" dirty="0"/>
-          </a:p>
-          <a:p>
-            <a:pPr marL="285750" indent="-285750">
-              <a:buFontTx/>
-              <a:buChar char="-"/>
-            </a:pPr>
-            <a:r>
-              <a:rPr lang="ko-KR" altLang="en-US" dirty="0"/>
-              <a:t>이러한 과정을 통해 모델의 성능 향상</a:t>
+              <a:t>대표적인 방법으로는 </a:t>
+            </a:r>
+            <a:r>
+              <a:rPr lang="ko-KR" altLang="en-US" dirty="0" err="1"/>
+              <a:t>배깅</a:t>
+            </a:r>
+            <a:r>
+              <a:rPr lang="en-US" altLang="ko-KR" dirty="0"/>
+              <a:t>, </a:t>
+            </a:r>
+            <a:r>
+              <a:rPr lang="ko-KR" altLang="en-US" dirty="0" err="1"/>
+              <a:t>부스팅</a:t>
             </a:r>
             <a:endParaRPr lang="en-US" altLang="ko-KR" dirty="0"/>
           </a:p>
@@ -11698,7 +14847,7 @@
         <p:spPr>
           <a:xfrm>
             <a:off x="539552" y="1065096"/>
-            <a:ext cx="7992888" cy="461665"/>
+            <a:ext cx="7992888" cy="446276"/>
           </a:xfrm>
           <a:prstGeom prst="rect">
             <a:avLst/>
@@ -11712,8 +14861,8 @@
           <a:lstStyle/>
           <a:p>
             <a:r>
-              <a:rPr lang="en-US" altLang="ko-KR" sz="2400" dirty="0" err="1"/>
-              <a:t>XGBoost</a:t>
+              <a:rPr lang="en-US" altLang="ko-KR" sz="2300" dirty="0"/>
+              <a:t>ensemble</a:t>
             </a:r>
             <a:endParaRPr lang="ko-KR" altLang="en-US" sz="2300" dirty="0"/>
           </a:p>
@@ -11722,7 +14871,7 @@
     </p:spTree>
     <p:extLst>
       <p:ext uri="{BB962C8B-B14F-4D97-AF65-F5344CB8AC3E}">
-        <p14:creationId xmlns:p14="http://schemas.microsoft.com/office/powerpoint/2010/main" val="2118996364"/>
+        <p14:creationId xmlns:p14="http://schemas.microsoft.com/office/powerpoint/2010/main" val="3490015133"/>
       </p:ext>
     </p:extLst>
   </p:cSld>
@@ -11887,7 +15036,7 @@
         <p:spPr>
           <a:xfrm>
             <a:off x="971600" y="1700955"/>
-            <a:ext cx="7200800" cy="2308324"/>
+            <a:ext cx="7200800" cy="2862322"/>
           </a:xfrm>
           <a:prstGeom prst="rect">
             <a:avLst/>
@@ -11905,12 +15054,8 @@
               <a:buChar char="-"/>
             </a:pPr>
             <a:r>
-              <a:rPr lang="en-US" altLang="ko-KR" dirty="0"/>
-              <a:t>K</a:t>
-            </a:r>
-            <a:r>
               <a:rPr lang="ko-KR" altLang="en-US" dirty="0"/>
-              <a:t>개의 그룹으로 자동 분류하는 비지도 학습 알고리즘</a:t>
+              <a:t>주어진 자료를 모집단으로 간주하고 주어진 자료에 여러 개의 부트스트랩 자료를 생성</a:t>
             </a:r>
             <a:endParaRPr lang="en-US" altLang="ko-KR" dirty="0"/>
           </a:p>
@@ -11921,9 +15066,20 @@
             </a:pPr>
             <a:r>
               <a:rPr lang="ko-KR" altLang="en-US" dirty="0"/>
-              <a:t>서로 가까운 데이터를 같은 그룹으로 묶어서 하나의 그룹을 생성</a:t>
-            </a:r>
-            <a:endParaRPr lang="en-US" altLang="ko-KR" dirty="0"/>
+              <a:t>만들어진 부트스트랩 자료를 이용하여 여러 모델에서 독립적으로 학습 </a:t>
+            </a:r>
+            <a:r>
+              <a:rPr lang="en-US" altLang="ko-KR" dirty="0"/>
+              <a:t>(</a:t>
+            </a:r>
+            <a:r>
+              <a:rPr lang="ko-KR" altLang="en-US" dirty="0"/>
+              <a:t>병렬식 구조</a:t>
+            </a:r>
+            <a:r>
+              <a:rPr lang="en-US" altLang="ko-KR" dirty="0"/>
+              <a:t>)</a:t>
+            </a:r>
           </a:p>
           <a:p>
             <a:pPr marL="285750" indent="-285750">
@@ -11932,7 +15088,7 @@
             </a:pPr>
             <a:r>
               <a:rPr lang="ko-KR" altLang="en-US" dirty="0"/>
-              <a:t>그룹의 중신점을 반복적으로 계산하여 군집을 생성</a:t>
+              <a:t>여러 모델에서 만들어진 결과를 결합하여 하나의 결과로 출력 </a:t>
             </a:r>
             <a:endParaRPr lang="en-US" altLang="ko-KR" dirty="0"/>
           </a:p>
@@ -11954,7 +15110,7 @@
             </a:pPr>
             <a:r>
               <a:rPr lang="ko-KR" altLang="en-US" dirty="0"/>
-              <a:t>빠르고 단순하여 대용량의 데이터에서 적합</a:t>
+              <a:t>모델의 불안정성이 줄어들고 분산이 감소</a:t>
             </a:r>
             <a:endParaRPr lang="en-US" altLang="ko-KR" dirty="0"/>
           </a:p>
@@ -11976,18 +15132,22 @@
             </a:pPr>
             <a:r>
               <a:rPr lang="ko-KR" altLang="en-US" dirty="0"/>
-              <a:t>군집의 수를 미리 알고 작성</a:t>
+              <a:t>편향은 그대로 유지 </a:t>
             </a:r>
             <a:endParaRPr lang="en-US" altLang="ko-KR" dirty="0"/>
           </a:p>
           <a:p>
-            <a:pPr marL="742950" lvl="1" indent="-285750">
+            <a:pPr marL="285750" indent="-285750">
               <a:buFontTx/>
               <a:buChar char="-"/>
             </a:pPr>
             <a:r>
               <a:rPr lang="ko-KR" altLang="en-US" dirty="0"/>
-              <a:t>이상치에 민감</a:t>
+              <a:t>대표적인 모델은 </a:t>
+            </a:r>
+            <a:r>
+              <a:rPr lang="ko-KR" altLang="en-US" dirty="0" err="1"/>
+              <a:t>랜덤포레스트</a:t>
             </a:r>
             <a:endParaRPr lang="en-US" altLang="ko-KR" dirty="0"/>
           </a:p>
@@ -12002,7 +15162,7 @@
         <p:spPr>
           <a:xfrm>
             <a:off x="539552" y="1065096"/>
-            <a:ext cx="7992888" cy="461665"/>
+            <a:ext cx="7992888" cy="446276"/>
           </a:xfrm>
           <a:prstGeom prst="rect">
             <a:avLst/>
@@ -12016,8 +15176,8 @@
           <a:lstStyle/>
           <a:p>
             <a:r>
-              <a:rPr lang="en-US" altLang="ko-KR" sz="2400" dirty="0"/>
-              <a:t>K-Means</a:t>
+              <a:rPr lang="en-US" altLang="ko-KR" sz="2300" dirty="0"/>
+              <a:t>Bagging</a:t>
             </a:r>
             <a:endParaRPr lang="ko-KR" altLang="en-US" sz="2300" dirty="0"/>
           </a:p>
@@ -12026,7 +15186,7 @@
     </p:spTree>
     <p:extLst>
       <p:ext uri="{BB962C8B-B14F-4D97-AF65-F5344CB8AC3E}">
-        <p14:creationId xmlns:p14="http://schemas.microsoft.com/office/powerpoint/2010/main" val="1054204446"/>
+        <p14:creationId xmlns:p14="http://schemas.microsoft.com/office/powerpoint/2010/main" val="3521997325"/>
       </p:ext>
     </p:extLst>
   </p:cSld>
@@ -12191,7 +15351,7 @@
         <p:spPr>
           <a:xfrm>
             <a:off x="971600" y="1700955"/>
-            <a:ext cx="7200800" cy="2031325"/>
+            <a:ext cx="7200800" cy="2862322"/>
           </a:xfrm>
           <a:prstGeom prst="rect">
             <a:avLst/>
@@ -12210,7 +15370,7 @@
             </a:pPr>
             <a:r>
               <a:rPr lang="ko-KR" altLang="en-US" dirty="0"/>
-              <a:t>밀도 기반의 클러스터링 알고리즘</a:t>
+              <a:t>여러 개의 약한 모델을 순자척으로 학습 시키면서 이전 모델에서의 오류를 점점 보완해가는 방식</a:t>
             </a:r>
             <a:endParaRPr lang="en-US" altLang="ko-KR" dirty="0"/>
           </a:p>
@@ -12221,7 +15381,7 @@
             </a:pPr>
             <a:r>
               <a:rPr lang="ko-KR" altLang="en-US" dirty="0"/>
-              <a:t>데이터의 밀도를 이용하여 군집을 생성</a:t>
+              <a:t>단순 모델을 반복적으로 사용하면서 강함 모델로 생성</a:t>
             </a:r>
             <a:endParaRPr lang="en-US" altLang="ko-KR" dirty="0"/>
           </a:p>
@@ -12232,7 +15392,18 @@
             </a:pPr>
             <a:r>
               <a:rPr lang="ko-KR" altLang="en-US" dirty="0"/>
-              <a:t>데이터의 밀도가 높은 지역을 하나의 군집으로 생성</a:t>
+              <a:t>장점</a:t>
+            </a:r>
+            <a:endParaRPr lang="en-US" altLang="ko-KR" dirty="0"/>
+          </a:p>
+          <a:p>
+            <a:pPr marL="742950" lvl="1" indent="-285750">
+              <a:buFontTx/>
+              <a:buChar char="-"/>
+            </a:pPr>
+            <a:r>
+              <a:rPr lang="ko-KR" altLang="en-US" dirty="0"/>
+              <a:t>편향 감소</a:t>
             </a:r>
             <a:endParaRPr lang="en-US" altLang="ko-KR" dirty="0"/>
           </a:p>
@@ -12243,7 +15414,40 @@
             </a:pPr>
             <a:r>
               <a:rPr lang="ko-KR" altLang="en-US" dirty="0"/>
-              <a:t>밀도가 낮은 지역을 노이즈로 판단</a:t>
+              <a:t>단점</a:t>
+            </a:r>
+            <a:endParaRPr lang="en-US" altLang="ko-KR" dirty="0"/>
+          </a:p>
+          <a:p>
+            <a:pPr marL="742950" lvl="1" indent="-285750">
+              <a:buFontTx/>
+              <a:buChar char="-"/>
+            </a:pPr>
+            <a:r>
+              <a:rPr lang="ko-KR" altLang="en-US" dirty="0"/>
+              <a:t>순차적인 학습으로 병렬화가 어려워 속도가 느려짐</a:t>
+            </a:r>
+            <a:endParaRPr lang="en-US" altLang="ko-KR" dirty="0"/>
+          </a:p>
+          <a:p>
+            <a:pPr marL="742950" lvl="1" indent="-285750">
+              <a:buFontTx/>
+              <a:buChar char="-"/>
+            </a:pPr>
+            <a:r>
+              <a:rPr lang="ko-KR" altLang="en-US" dirty="0"/>
+              <a:t>학습의 횟수가 너무 많은 경우 과적합의 위험</a:t>
+            </a:r>
+            <a:endParaRPr lang="en-US" altLang="ko-KR" dirty="0"/>
+          </a:p>
+          <a:p>
+            <a:pPr marL="742950" lvl="1" indent="-285750">
+              <a:buFontTx/>
+              <a:buChar char="-"/>
+            </a:pPr>
+            <a:r>
+              <a:rPr lang="ko-KR" altLang="en-US" dirty="0"/>
+              <a:t>매개변수의 튜닝이 매우 중요</a:t>
             </a:r>
             <a:endParaRPr lang="en-US" altLang="ko-KR" dirty="0"/>
           </a:p>
@@ -12253,38 +15457,12 @@
               <a:buChar char="-"/>
             </a:pPr>
             <a:r>
-              <a:rPr lang="en-US" altLang="ko-KR" dirty="0"/>
-              <a:t>K-</a:t>
+              <a:rPr lang="ko-KR" altLang="en-US" dirty="0"/>
+              <a:t>대표적인 모델은 </a:t>
             </a:r>
             <a:r>
               <a:rPr lang="en-US" altLang="ko-KR" dirty="0" err="1"/>
-              <a:t>Meas</a:t>
-            </a:r>
-            <a:r>
-              <a:rPr lang="ko-KR" altLang="en-US" dirty="0"/>
-              <a:t>와의 다르게 군집의 개수를 지정 하지 않아도 됨</a:t>
-            </a:r>
-            <a:endParaRPr lang="en-US" altLang="ko-KR" dirty="0"/>
-          </a:p>
-          <a:p>
-            <a:pPr marL="285750" indent="-285750">
-              <a:buFontTx/>
-              <a:buChar char="-"/>
-            </a:pPr>
-            <a:r>
-              <a:rPr lang="ko-KR" altLang="en-US" dirty="0"/>
-              <a:t>비선형 구조의 데이터에서도 군집이 형성이 가능</a:t>
-            </a:r>
-            <a:endParaRPr lang="en-US" altLang="ko-KR" dirty="0"/>
-          </a:p>
-          <a:p>
-            <a:pPr marL="285750" indent="-285750">
-              <a:buFontTx/>
-              <a:buChar char="-"/>
-            </a:pPr>
-            <a:r>
-              <a:rPr lang="ko-KR" altLang="en-US" dirty="0"/>
-              <a:t>노이즈를 판단함으로 이상치 자동 감지</a:t>
+              <a:t>XGboost</a:t>
             </a:r>
             <a:endParaRPr lang="en-US" altLang="ko-KR" dirty="0"/>
           </a:p>
@@ -12299,7 +15477,7 @@
         <p:spPr>
           <a:xfrm>
             <a:off x="539552" y="1065096"/>
-            <a:ext cx="7992888" cy="461665"/>
+            <a:ext cx="7992888" cy="446276"/>
           </a:xfrm>
           <a:prstGeom prst="rect">
             <a:avLst/>
@@ -12313,8 +15491,8 @@
           <a:lstStyle/>
           <a:p>
             <a:r>
-              <a:rPr lang="en-US" altLang="ko-KR" sz="2400" dirty="0"/>
-              <a:t>DBSCAN</a:t>
+              <a:rPr lang="en-US" altLang="ko-KR" sz="2300" dirty="0"/>
+              <a:t>Boosting</a:t>
             </a:r>
             <a:endParaRPr lang="ko-KR" altLang="en-US" sz="2300" dirty="0"/>
           </a:p>
@@ -12323,7 +15501,7 @@
     </p:spTree>
     <p:extLst>
       <p:ext uri="{BB962C8B-B14F-4D97-AF65-F5344CB8AC3E}">
-        <p14:creationId xmlns:p14="http://schemas.microsoft.com/office/powerpoint/2010/main" val="3713074351"/>
+        <p14:creationId xmlns:p14="http://schemas.microsoft.com/office/powerpoint/2010/main" val="2312816576"/>
       </p:ext>
     </p:extLst>
   </p:cSld>
@@ -12488,7 +15666,7 @@
         <p:spPr>
           <a:xfrm>
             <a:off x="971600" y="1700955"/>
-            <a:ext cx="7200800" cy="2862322"/>
+            <a:ext cx="7200800" cy="2308324"/>
           </a:xfrm>
           <a:prstGeom prst="rect">
             <a:avLst/>
@@ -12507,7 +15685,15 @@
             </a:pPr>
             <a:r>
               <a:rPr lang="ko-KR" altLang="en-US" dirty="0"/>
-              <a:t>차원 축소 기법</a:t>
+              <a:t>대표적인 </a:t>
+            </a:r>
+            <a:r>
+              <a:rPr lang="ko-KR" altLang="en-US" dirty="0" err="1"/>
+              <a:t>배깅</a:t>
+            </a:r>
+            <a:r>
+              <a:rPr lang="ko-KR" altLang="en-US" dirty="0"/>
+              <a:t> 방식 모델 </a:t>
             </a:r>
             <a:endParaRPr lang="en-US" altLang="ko-KR" dirty="0"/>
           </a:p>
@@ -12518,7 +15704,15 @@
             </a:pPr>
             <a:r>
               <a:rPr lang="ko-KR" altLang="en-US" dirty="0"/>
-              <a:t>고차원의 데이터에서 상관 관계가 없는 새로운 축으로 변환 </a:t>
+              <a:t>여러 개의 결정 트리를 </a:t>
+            </a:r>
+            <a:r>
+              <a:rPr lang="ko-KR" altLang="en-US" dirty="0" err="1"/>
+              <a:t>배깅의</a:t>
+            </a:r>
+            <a:r>
+              <a:rPr lang="ko-KR" altLang="en-US" dirty="0"/>
+              <a:t> 방식으로 학습시켜 예측의 결과를 결합하여 하나의 결과로 만들어내는 방식</a:t>
             </a:r>
             <a:endParaRPr lang="en-US" altLang="ko-KR" dirty="0"/>
           </a:p>
@@ -12529,7 +15723,7 @@
             </a:pPr>
             <a:r>
               <a:rPr lang="ko-KR" altLang="en-US" dirty="0"/>
-              <a:t>데이터의 분산을 최대한 보존하면서 차원을 줄여서 시각화에서 주로 사용</a:t>
+              <a:t>데이터들을 중복성을 허용하여 여러 개의 데이터 조합을 생성</a:t>
             </a:r>
             <a:endParaRPr lang="en-US" altLang="ko-KR" dirty="0"/>
           </a:p>
@@ -12539,30 +15733,12 @@
               <a:buChar char="-"/>
             </a:pPr>
             <a:r>
+              <a:rPr lang="ko-KR" altLang="en-US" dirty="0" err="1"/>
+              <a:t>무작위하게</a:t>
+            </a:r>
+            <a:r>
               <a:rPr lang="ko-KR" altLang="en-US" dirty="0"/>
-              <a:t>장점</a:t>
-            </a:r>
-            <a:endParaRPr lang="en-US" altLang="ko-KR" dirty="0"/>
-          </a:p>
-          <a:p>
-            <a:pPr marL="742950" lvl="1" indent="-285750">
-              <a:buFontTx/>
-              <a:buChar char="-"/>
-            </a:pPr>
-            <a:r>
-              <a:rPr lang="ko-KR" altLang="en-US" dirty="0"/>
-              <a:t>차원 축소로 계산의 속도 향상</a:t>
-            </a:r>
-            <a:endParaRPr lang="en-US" altLang="ko-KR" dirty="0"/>
-          </a:p>
-          <a:p>
-            <a:pPr marL="742950" lvl="1" indent="-285750">
-              <a:buFontTx/>
-              <a:buChar char="-"/>
-            </a:pPr>
-            <a:r>
-              <a:rPr lang="ko-KR" altLang="en-US" dirty="0"/>
-              <a:t>노이즈 제거 효과</a:t>
+              <a:t> 특성을 선택하여 트리 간의 상관성을 줄임</a:t>
             </a:r>
             <a:endParaRPr lang="en-US" altLang="ko-KR" dirty="0"/>
           </a:p>
@@ -12573,34 +15749,34 @@
             </a:pPr>
             <a:r>
               <a:rPr lang="ko-KR" altLang="en-US" dirty="0"/>
-              <a:t>단점</a:t>
+              <a:t>각 트리는 독립적으로 학습하여 각각의 </a:t>
+            </a:r>
+            <a:r>
+              <a:rPr lang="ko-KR" altLang="en-US" dirty="0" err="1"/>
+              <a:t>예측값을</a:t>
+            </a:r>
+            <a:r>
+              <a:rPr lang="ko-KR" altLang="en-US" dirty="0"/>
+              <a:t> 생성 </a:t>
             </a:r>
             <a:endParaRPr lang="en-US" altLang="ko-KR" dirty="0"/>
           </a:p>
           <a:p>
-            <a:pPr marL="742950" lvl="1" indent="-285750">
+            <a:pPr marL="285750" indent="-285750">
               <a:buFontTx/>
               <a:buChar char="-"/>
             </a:pPr>
             <a:r>
               <a:rPr lang="ko-KR" altLang="en-US" dirty="0"/>
-              <a:t>해석이 </a:t>
-            </a:r>
-            <a:r>
-              <a:rPr lang="ko-KR" altLang="en-US" dirty="0" err="1"/>
-              <a:t>어려워짐</a:t>
+              <a:t>생성된 예측 값들을 이용하여 최종의 예측을 생성</a:t>
             </a:r>
             <a:endParaRPr lang="en-US" altLang="ko-KR" dirty="0"/>
           </a:p>
           <a:p>
-            <a:pPr marL="742950" lvl="1" indent="-285750">
+            <a:pPr marL="285750" indent="-285750">
               <a:buFontTx/>
               <a:buChar char="-"/>
             </a:pPr>
-            <a:r>
-              <a:rPr lang="ko-KR" altLang="en-US" dirty="0"/>
-              <a:t>비선형 구조에서는 부적합</a:t>
-            </a:r>
             <a:endParaRPr lang="en-US" altLang="ko-KR" dirty="0"/>
           </a:p>
         </p:txBody>
@@ -12629,7 +15805,7 @@
           <a:p>
             <a:r>
               <a:rPr lang="en-US" altLang="ko-KR" sz="2400" dirty="0"/>
-              <a:t>PCA</a:t>
+              <a:t>Random Forest</a:t>
             </a:r>
             <a:endParaRPr lang="ko-KR" altLang="en-US" sz="2300" dirty="0"/>
           </a:p>
@@ -12638,7 +15814,7 @@
     </p:spTree>
     <p:extLst>
       <p:ext uri="{BB962C8B-B14F-4D97-AF65-F5344CB8AC3E}">
-        <p14:creationId xmlns:p14="http://schemas.microsoft.com/office/powerpoint/2010/main" val="1106478625"/>
+        <p14:creationId xmlns:p14="http://schemas.microsoft.com/office/powerpoint/2010/main" val="1483388609"/>
       </p:ext>
     </p:extLst>
   </p:cSld>
@@ -12803,7 +15979,7 @@
         <p:spPr>
           <a:xfrm>
             <a:off x="971600" y="1700955"/>
-            <a:ext cx="7200800" cy="3139321"/>
+            <a:ext cx="7200800" cy="1477328"/>
           </a:xfrm>
           <a:prstGeom prst="rect">
             <a:avLst/>
@@ -12822,7 +15998,15 @@
             </a:pPr>
             <a:r>
               <a:rPr lang="ko-KR" altLang="en-US" dirty="0"/>
-              <a:t>차원 축소 기법</a:t>
+              <a:t>대표적인 </a:t>
+            </a:r>
+            <a:r>
+              <a:rPr lang="ko-KR" altLang="en-US" dirty="0" err="1"/>
+              <a:t>부스팅</a:t>
+            </a:r>
+            <a:r>
+              <a:rPr lang="ko-KR" altLang="en-US" dirty="0"/>
+              <a:t> 모델</a:t>
             </a:r>
             <a:endParaRPr lang="en-US" altLang="ko-KR" dirty="0"/>
           </a:p>
@@ -12833,23 +16017,15 @@
             </a:pPr>
             <a:r>
               <a:rPr lang="ko-KR" altLang="en-US" dirty="0"/>
-              <a:t>고차원의 데이터를</a:t>
+              <a:t>기존에 존재하는 </a:t>
             </a:r>
             <a:r>
               <a:rPr lang="en-US" altLang="ko-KR" dirty="0"/>
-              <a:t> 2</a:t>
+              <a:t>Gradient Boosting </a:t>
             </a:r>
             <a:r>
               <a:rPr lang="ko-KR" altLang="en-US" dirty="0"/>
-              <a:t>차원이나 </a:t>
-            </a:r>
-            <a:r>
-              <a:rPr lang="en-US" altLang="ko-KR" dirty="0"/>
-              <a:t>3</a:t>
-            </a:r>
-            <a:r>
-              <a:rPr lang="ko-KR" altLang="en-US" dirty="0"/>
-              <a:t>차원으로 시각화 하기 위한 비선형 차원 축소 기법</a:t>
+              <a:t>알고리즘을 고도화한 모델</a:t>
             </a:r>
             <a:endParaRPr lang="en-US" altLang="ko-KR" dirty="0"/>
           </a:p>
@@ -12860,23 +16036,7 @@
             </a:pPr>
             <a:r>
               <a:rPr lang="ko-KR" altLang="en-US" dirty="0"/>
-              <a:t>데이터 간의 거리 유사도를 최대한 유지하면서 </a:t>
-            </a:r>
-            <a:r>
-              <a:rPr lang="en-US" altLang="ko-KR" dirty="0"/>
-              <a:t>2</a:t>
-            </a:r>
-            <a:r>
-              <a:rPr lang="ko-KR" altLang="en-US" dirty="0"/>
-              <a:t>차원이나 </a:t>
-            </a:r>
-            <a:r>
-              <a:rPr lang="en-US" altLang="ko-KR" dirty="0"/>
-              <a:t>3</a:t>
-            </a:r>
-            <a:r>
-              <a:rPr lang="ko-KR" altLang="en-US" dirty="0"/>
-              <a:t>차원 공간으로 표현</a:t>
+              <a:t>첫번째 약한 모델을 통한 학습을 하고 해당 모델에서 오차를 계산</a:t>
             </a:r>
             <a:endParaRPr lang="en-US" altLang="ko-KR" dirty="0"/>
           </a:p>
@@ -12887,29 +16047,7 @@
             </a:pPr>
             <a:r>
               <a:rPr lang="ko-KR" altLang="en-US" dirty="0"/>
-              <a:t>장점</a:t>
-            </a:r>
-            <a:endParaRPr lang="en-US" altLang="ko-KR" dirty="0"/>
-          </a:p>
-          <a:p>
-            <a:pPr marL="742950" lvl="1" indent="-285750">
-              <a:buFontTx/>
-              <a:buChar char="-"/>
-            </a:pPr>
-            <a:r>
-              <a:rPr lang="ko-KR" altLang="en-US" dirty="0"/>
-              <a:t>고차원 데이터의 구조를 시각적으로 이해 가능</a:t>
-            </a:r>
-            <a:endParaRPr lang="en-US" altLang="ko-KR" dirty="0"/>
-          </a:p>
-          <a:p>
-            <a:pPr marL="742950" lvl="1" indent="-285750">
-              <a:buFontTx/>
-              <a:buChar char="-"/>
-            </a:pPr>
-            <a:r>
-              <a:rPr lang="ko-KR" altLang="en-US" dirty="0"/>
-              <a:t>비선형 관계 표현력 높음 </a:t>
+              <a:t>두번째 모델은 오차의 데이터를 다시 재 학습</a:t>
             </a:r>
             <a:endParaRPr lang="en-US" altLang="ko-KR" dirty="0"/>
           </a:p>
@@ -12920,33 +16058,7 @@
             </a:pPr>
             <a:r>
               <a:rPr lang="ko-KR" altLang="en-US" dirty="0"/>
-              <a:t>단점</a:t>
-            </a:r>
-            <a:endParaRPr lang="en-US" altLang="ko-KR" dirty="0"/>
-          </a:p>
-          <a:p>
-            <a:pPr marL="742950" lvl="1" indent="-285750">
-              <a:buFontTx/>
-              <a:buChar char="-"/>
-            </a:pPr>
-            <a:r>
-              <a:rPr lang="ko-KR" altLang="en-US" dirty="0" err="1"/>
-              <a:t>계산량이</a:t>
-            </a:r>
-            <a:r>
-              <a:rPr lang="ko-KR" altLang="en-US" dirty="0"/>
-              <a:t> 많기 때문에 느림</a:t>
-            </a:r>
-            <a:endParaRPr lang="en-US" altLang="ko-KR" dirty="0"/>
-          </a:p>
-          <a:p>
-            <a:pPr marL="742950" lvl="1" indent="-285750">
-              <a:buFontTx/>
-              <a:buChar char="-"/>
-            </a:pPr>
-            <a:r>
-              <a:rPr lang="ko-KR" altLang="en-US" dirty="0"/>
-              <a:t>축소된 좌표 자체는 해석이 불가능</a:t>
+              <a:t>이러한 과정을 통해 모델의 성능 향상</a:t>
             </a:r>
             <a:endParaRPr lang="en-US" altLang="ko-KR" dirty="0"/>
           </a:p>
@@ -12975,8 +16087,8 @@
           <a:lstStyle/>
           <a:p>
             <a:r>
-              <a:rPr lang="en-US" altLang="ko-KR" sz="2400" dirty="0"/>
-              <a:t>t-SNE</a:t>
+              <a:rPr lang="en-US" altLang="ko-KR" sz="2400" dirty="0" err="1"/>
+              <a:t>XGBoost</a:t>
             </a:r>
             <a:endParaRPr lang="ko-KR" altLang="en-US" sz="2300" dirty="0"/>
           </a:p>
@@ -12985,7 +16097,7 @@
     </p:spTree>
     <p:extLst>
       <p:ext uri="{BB962C8B-B14F-4D97-AF65-F5344CB8AC3E}">
-        <p14:creationId xmlns:p14="http://schemas.microsoft.com/office/powerpoint/2010/main" val="2741370986"/>
+        <p14:creationId xmlns:p14="http://schemas.microsoft.com/office/powerpoint/2010/main" val="2118996364"/>
       </p:ext>
     </p:extLst>
   </p:cSld>
@@ -13150,7 +16262,7 @@
         <p:spPr>
           <a:xfrm>
             <a:off x="971600" y="1700955"/>
-            <a:ext cx="7200800" cy="1754326"/>
+            <a:ext cx="7200800" cy="2308324"/>
           </a:xfrm>
           <a:prstGeom prst="rect">
             <a:avLst/>
@@ -13168,29 +16280,14 @@
               <a:buChar char="-"/>
             </a:pPr>
             <a:r>
-              <a:rPr lang="ko-KR" altLang="en-US" dirty="0"/>
-              <a:t>데이터를 </a:t>
-            </a:r>
-            <a:r>
               <a:rPr lang="en-US" altLang="ko-KR" dirty="0"/>
               <a:t>K</a:t>
             </a:r>
             <a:r>
               <a:rPr lang="ko-KR" altLang="en-US" dirty="0"/>
-              <a:t>개의 동일 크기로 나눔</a:t>
-            </a:r>
-            <a:r>
-              <a:rPr lang="en-US" altLang="ko-KR" dirty="0"/>
-              <a:t>(</a:t>
-            </a:r>
-            <a:r>
-              <a:rPr lang="ko-KR" altLang="en-US" dirty="0" err="1"/>
-              <a:t>폴드화</a:t>
-            </a:r>
-            <a:r>
-              <a:rPr lang="en-US" altLang="ko-KR" dirty="0"/>
-              <a:t>)</a:t>
-            </a:r>
+              <a:t>개의 그룹으로 자동 분류하는 비지도 학습 알고리즘</a:t>
+            </a:r>
+            <a:endParaRPr lang="en-US" altLang="ko-KR" dirty="0"/>
           </a:p>
           <a:p>
             <a:pPr marL="285750" indent="-285750">
@@ -13198,28 +16295,8 @@
               <a:buChar char="-"/>
             </a:pPr>
             <a:r>
-              <a:rPr lang="en-US" altLang="ko-KR" dirty="0"/>
-              <a:t>K</a:t>
-            </a:r>
-            <a:r>
               <a:rPr lang="ko-KR" altLang="en-US" dirty="0"/>
-              <a:t>번 반복하여 하나의 </a:t>
-            </a:r>
-            <a:r>
-              <a:rPr lang="ko-KR" altLang="en-US" dirty="0" err="1"/>
-              <a:t>폴드는</a:t>
-            </a:r>
-            <a:r>
-              <a:rPr lang="ko-KR" altLang="en-US" dirty="0"/>
-              <a:t> 검증용으로 사용하고 나머지 </a:t>
-            </a:r>
-            <a:r>
-              <a:rPr lang="ko-KR" altLang="en-US" dirty="0" err="1"/>
-              <a:t>폴드는</a:t>
-            </a:r>
-            <a:r>
-              <a:rPr lang="ko-KR" altLang="en-US" dirty="0"/>
-              <a:t> 학습용으로 사용</a:t>
+              <a:t>서로 가까운 데이터를 같은 그룹으로 묶어서 하나의 그룹을 생성</a:t>
             </a:r>
             <a:endParaRPr lang="en-US" altLang="ko-KR" dirty="0"/>
           </a:p>
@@ -13230,15 +16307,7 @@
             </a:pPr>
             <a:r>
               <a:rPr lang="ko-KR" altLang="en-US" dirty="0"/>
-              <a:t>모든 </a:t>
-            </a:r>
-            <a:r>
-              <a:rPr lang="ko-KR" altLang="en-US" dirty="0" err="1"/>
-              <a:t>폴드는</a:t>
-            </a:r>
-            <a:r>
-              <a:rPr lang="ko-KR" altLang="en-US" dirty="0"/>
-              <a:t> 한번은 검증용으로 사용</a:t>
+              <a:t>그룹의 중신점을 반복적으로 계산하여 군집을 생성</a:t>
             </a:r>
             <a:endParaRPr lang="en-US" altLang="ko-KR" dirty="0"/>
           </a:p>
@@ -13249,7 +16318,51 @@
             </a:pPr>
             <a:r>
               <a:rPr lang="ko-KR" altLang="en-US" dirty="0"/>
-              <a:t>데이터의 수가 적을 때 모델의 성능을 안정적으로 평가 할 수 있는 방법</a:t>
+              <a:t>장점</a:t>
+            </a:r>
+            <a:endParaRPr lang="en-US" altLang="ko-KR" dirty="0"/>
+          </a:p>
+          <a:p>
+            <a:pPr marL="742950" lvl="1" indent="-285750">
+              <a:buFontTx/>
+              <a:buChar char="-"/>
+            </a:pPr>
+            <a:r>
+              <a:rPr lang="ko-KR" altLang="en-US" dirty="0"/>
+              <a:t>빠르고 단순하여 대용량의 데이터에서 적합</a:t>
+            </a:r>
+            <a:endParaRPr lang="en-US" altLang="ko-KR" dirty="0"/>
+          </a:p>
+          <a:p>
+            <a:pPr marL="285750" indent="-285750">
+              <a:buFontTx/>
+              <a:buChar char="-"/>
+            </a:pPr>
+            <a:r>
+              <a:rPr lang="ko-KR" altLang="en-US" dirty="0"/>
+              <a:t>단점</a:t>
+            </a:r>
+            <a:endParaRPr lang="en-US" altLang="ko-KR" dirty="0"/>
+          </a:p>
+          <a:p>
+            <a:pPr marL="742950" lvl="1" indent="-285750">
+              <a:buFontTx/>
+              <a:buChar char="-"/>
+            </a:pPr>
+            <a:r>
+              <a:rPr lang="ko-KR" altLang="en-US" dirty="0"/>
+              <a:t>군집의 수를 미리 알고 작성</a:t>
+            </a:r>
+            <a:endParaRPr lang="en-US" altLang="ko-KR" dirty="0"/>
+          </a:p>
+          <a:p>
+            <a:pPr marL="742950" lvl="1" indent="-285750">
+              <a:buFontTx/>
+              <a:buChar char="-"/>
+            </a:pPr>
+            <a:r>
+              <a:rPr lang="ko-KR" altLang="en-US" dirty="0"/>
+              <a:t>이상치에 민감</a:t>
             </a:r>
             <a:endParaRPr lang="en-US" altLang="ko-KR" dirty="0"/>
           </a:p>
@@ -13279,7 +16392,7 @@
           <a:p>
             <a:r>
               <a:rPr lang="en-US" altLang="ko-KR" sz="2400" dirty="0"/>
-              <a:t>K-fold</a:t>
+              <a:t>K-Means</a:t>
             </a:r>
             <a:endParaRPr lang="ko-KR" altLang="en-US" sz="2300" dirty="0"/>
           </a:p>
@@ -13288,7 +16401,7 @@
     </p:spTree>
     <p:extLst>
       <p:ext uri="{BB962C8B-B14F-4D97-AF65-F5344CB8AC3E}">
-        <p14:creationId xmlns:p14="http://schemas.microsoft.com/office/powerpoint/2010/main" val="2763876966"/>
+        <p14:creationId xmlns:p14="http://schemas.microsoft.com/office/powerpoint/2010/main" val="1054204446"/>
       </p:ext>
     </p:extLst>
   </p:cSld>
@@ -13681,7 +16794,7 @@
         <p:spPr>
           <a:xfrm>
             <a:off x="971600" y="1700955"/>
-            <a:ext cx="7200800" cy="1200329"/>
+            <a:ext cx="7200800" cy="2031325"/>
           </a:xfrm>
           <a:prstGeom prst="rect">
             <a:avLst/>
@@ -13700,7 +16813,7 @@
             </a:pPr>
             <a:r>
               <a:rPr lang="ko-KR" altLang="en-US" dirty="0"/>
-              <a:t>매개변수의 조합을 탐색하여 최적의 조합을 찾는 방법</a:t>
+              <a:t>밀도 기반의 클러스터링 알고리즘</a:t>
             </a:r>
             <a:endParaRPr lang="en-US" altLang="ko-KR" dirty="0"/>
           </a:p>
@@ -13711,15 +16824,7 @@
             </a:pPr>
             <a:r>
               <a:rPr lang="ko-KR" altLang="en-US" dirty="0"/>
-              <a:t>각각의 매개변수 조합 별로 학습</a:t>
-            </a:r>
-            <a:r>
-              <a:rPr lang="en-US" altLang="ko-KR" dirty="0"/>
-              <a:t>, </a:t>
-            </a:r>
-            <a:r>
-              <a:rPr lang="ko-KR" altLang="en-US" dirty="0"/>
-              <a:t>검증을 진행</a:t>
+              <a:t>데이터의 밀도를 이용하여 군집을 생성</a:t>
             </a:r>
             <a:endParaRPr lang="en-US" altLang="ko-KR" dirty="0"/>
           </a:p>
@@ -13730,7 +16835,59 @@
             </a:pPr>
             <a:r>
               <a:rPr lang="ko-KR" altLang="en-US" dirty="0"/>
-              <a:t>매개변수 별 성능을 체크하여 최적의 매개변수의 값을 확인하는 교차 검증</a:t>
+              <a:t>데이터의 밀도가 높은 지역을 하나의 군집으로 생성</a:t>
+            </a:r>
+            <a:endParaRPr lang="en-US" altLang="ko-KR" dirty="0"/>
+          </a:p>
+          <a:p>
+            <a:pPr marL="285750" indent="-285750">
+              <a:buFontTx/>
+              <a:buChar char="-"/>
+            </a:pPr>
+            <a:r>
+              <a:rPr lang="ko-KR" altLang="en-US" dirty="0"/>
+              <a:t>밀도가 낮은 지역을 노이즈로 판단</a:t>
+            </a:r>
+            <a:endParaRPr lang="en-US" altLang="ko-KR" dirty="0"/>
+          </a:p>
+          <a:p>
+            <a:pPr marL="285750" indent="-285750">
+              <a:buFontTx/>
+              <a:buChar char="-"/>
+            </a:pPr>
+            <a:r>
+              <a:rPr lang="en-US" altLang="ko-KR" dirty="0"/>
+              <a:t>K-</a:t>
+            </a:r>
+            <a:r>
+              <a:rPr lang="en-US" altLang="ko-KR" dirty="0" err="1"/>
+              <a:t>Meas</a:t>
+            </a:r>
+            <a:r>
+              <a:rPr lang="ko-KR" altLang="en-US" dirty="0"/>
+              <a:t>와의 다르게 군집의 개수를 지정 하지 않아도 됨</a:t>
+            </a:r>
+            <a:endParaRPr lang="en-US" altLang="ko-KR" dirty="0"/>
+          </a:p>
+          <a:p>
+            <a:pPr marL="285750" indent="-285750">
+              <a:buFontTx/>
+              <a:buChar char="-"/>
+            </a:pPr>
+            <a:r>
+              <a:rPr lang="ko-KR" altLang="en-US" dirty="0"/>
+              <a:t>비선형 구조의 데이터에서도 군집이 형성이 가능</a:t>
+            </a:r>
+            <a:endParaRPr lang="en-US" altLang="ko-KR" dirty="0"/>
+          </a:p>
+          <a:p>
+            <a:pPr marL="285750" indent="-285750">
+              <a:buFontTx/>
+              <a:buChar char="-"/>
+            </a:pPr>
+            <a:r>
+              <a:rPr lang="ko-KR" altLang="en-US" dirty="0"/>
+              <a:t>노이즈를 판단함으로 이상치 자동 감지</a:t>
             </a:r>
             <a:endParaRPr lang="en-US" altLang="ko-KR" dirty="0"/>
           </a:p>
@@ -13759,8 +16916,8 @@
           <a:lstStyle/>
           <a:p>
             <a:r>
-              <a:rPr lang="en-US" altLang="ko-KR" sz="2400" dirty="0" err="1"/>
-              <a:t>GridSerachCV</a:t>
+              <a:rPr lang="en-US" altLang="ko-KR" sz="2400" dirty="0"/>
+              <a:t>DBSCAN</a:t>
             </a:r>
             <a:endParaRPr lang="ko-KR" altLang="en-US" sz="2300" dirty="0"/>
           </a:p>
@@ -13769,7 +16926,7 @@
     </p:spTree>
     <p:extLst>
       <p:ext uri="{BB962C8B-B14F-4D97-AF65-F5344CB8AC3E}">
-        <p14:creationId xmlns:p14="http://schemas.microsoft.com/office/powerpoint/2010/main" val="2956039162"/>
+        <p14:creationId xmlns:p14="http://schemas.microsoft.com/office/powerpoint/2010/main" val="3713074351"/>
       </p:ext>
     </p:extLst>
   </p:cSld>
@@ -13934,6 +17091,1224 @@
         <p:spPr>
           <a:xfrm>
             <a:off x="971600" y="1700955"/>
+            <a:ext cx="7200800" cy="2862322"/>
+          </a:xfrm>
+          <a:prstGeom prst="rect">
+            <a:avLst/>
+          </a:prstGeom>
+          <a:noFill/>
+        </p:spPr>
+        <p:txBody>
+          <a:bodyPr wrap="square" rtlCol="0">
+            <a:spAutoFit/>
+          </a:bodyPr>
+          <a:lstStyle/>
+          <a:p>
+            <a:pPr marL="285750" indent="-285750">
+              <a:buFontTx/>
+              <a:buChar char="-"/>
+            </a:pPr>
+            <a:r>
+              <a:rPr lang="ko-KR" altLang="en-US" dirty="0"/>
+              <a:t>차원 축소 기법</a:t>
+            </a:r>
+            <a:endParaRPr lang="en-US" altLang="ko-KR" dirty="0"/>
+          </a:p>
+          <a:p>
+            <a:pPr marL="285750" indent="-285750">
+              <a:buFontTx/>
+              <a:buChar char="-"/>
+            </a:pPr>
+            <a:r>
+              <a:rPr lang="ko-KR" altLang="en-US" dirty="0"/>
+              <a:t>고차원의 데이터에서 상관 관계가 없는 새로운 축으로 변환 </a:t>
+            </a:r>
+            <a:endParaRPr lang="en-US" altLang="ko-KR" dirty="0"/>
+          </a:p>
+          <a:p>
+            <a:pPr marL="285750" indent="-285750">
+              <a:buFontTx/>
+              <a:buChar char="-"/>
+            </a:pPr>
+            <a:r>
+              <a:rPr lang="ko-KR" altLang="en-US" dirty="0"/>
+              <a:t>데이터의 분산을 최대한 보존하면서 차원을 줄여서 시각화에서 주로 사용</a:t>
+            </a:r>
+            <a:endParaRPr lang="en-US" altLang="ko-KR" dirty="0"/>
+          </a:p>
+          <a:p>
+            <a:pPr marL="285750" indent="-285750">
+              <a:buFontTx/>
+              <a:buChar char="-"/>
+            </a:pPr>
+            <a:r>
+              <a:rPr lang="ko-KR" altLang="en-US" dirty="0"/>
+              <a:t>장점</a:t>
+            </a:r>
+            <a:endParaRPr lang="en-US" altLang="ko-KR" dirty="0"/>
+          </a:p>
+          <a:p>
+            <a:pPr marL="742950" lvl="1" indent="-285750">
+              <a:buFontTx/>
+              <a:buChar char="-"/>
+            </a:pPr>
+            <a:r>
+              <a:rPr lang="ko-KR" altLang="en-US" dirty="0"/>
+              <a:t>차원 축소로 계산의 속도 향상</a:t>
+            </a:r>
+            <a:endParaRPr lang="en-US" altLang="ko-KR" dirty="0"/>
+          </a:p>
+          <a:p>
+            <a:pPr marL="742950" lvl="1" indent="-285750">
+              <a:buFontTx/>
+              <a:buChar char="-"/>
+            </a:pPr>
+            <a:r>
+              <a:rPr lang="ko-KR" altLang="en-US" dirty="0"/>
+              <a:t>노이즈 제거 효과</a:t>
+            </a:r>
+            <a:endParaRPr lang="en-US" altLang="ko-KR" dirty="0"/>
+          </a:p>
+          <a:p>
+            <a:pPr marL="285750" indent="-285750">
+              <a:buFontTx/>
+              <a:buChar char="-"/>
+            </a:pPr>
+            <a:r>
+              <a:rPr lang="ko-KR" altLang="en-US" dirty="0"/>
+              <a:t>단점</a:t>
+            </a:r>
+            <a:endParaRPr lang="en-US" altLang="ko-KR" dirty="0"/>
+          </a:p>
+          <a:p>
+            <a:pPr marL="742950" lvl="1" indent="-285750">
+              <a:buFontTx/>
+              <a:buChar char="-"/>
+            </a:pPr>
+            <a:r>
+              <a:rPr lang="ko-KR" altLang="en-US" dirty="0"/>
+              <a:t>해석이 </a:t>
+            </a:r>
+            <a:r>
+              <a:rPr lang="ko-KR" altLang="en-US" dirty="0" err="1"/>
+              <a:t>어려워짐</a:t>
+            </a:r>
+            <a:endParaRPr lang="en-US" altLang="ko-KR" dirty="0"/>
+          </a:p>
+          <a:p>
+            <a:pPr marL="742950" lvl="1" indent="-285750">
+              <a:buFontTx/>
+              <a:buChar char="-"/>
+            </a:pPr>
+            <a:r>
+              <a:rPr lang="ko-KR" altLang="en-US" dirty="0"/>
+              <a:t>비선형 구조에서는 부적합</a:t>
+            </a:r>
+            <a:endParaRPr lang="en-US" altLang="ko-KR" dirty="0"/>
+          </a:p>
+        </p:txBody>
+      </p:sp>
+      <p:sp>
+        <p:nvSpPr>
+          <p:cNvPr id="6" name="TextBox 5"/>
+          <p:cNvSpPr txBox="1"/>
+          <p:nvPr/>
+        </p:nvSpPr>
+        <p:spPr>
+          <a:xfrm>
+            <a:off x="539552" y="1065096"/>
+            <a:ext cx="7992888" cy="461665"/>
+          </a:xfrm>
+          <a:prstGeom prst="rect">
+            <a:avLst/>
+          </a:prstGeom>
+          <a:noFill/>
+        </p:spPr>
+        <p:txBody>
+          <a:bodyPr wrap="square" rtlCol="0">
+            <a:spAutoFit/>
+          </a:bodyPr>
+          <a:lstStyle/>
+          <a:p>
+            <a:r>
+              <a:rPr lang="en-US" altLang="ko-KR" sz="2400" dirty="0"/>
+              <a:t>PCA</a:t>
+            </a:r>
+            <a:endParaRPr lang="ko-KR" altLang="en-US" sz="2300" dirty="0"/>
+          </a:p>
+        </p:txBody>
+      </p:sp>
+    </p:spTree>
+    <p:extLst>
+      <p:ext uri="{BB962C8B-B14F-4D97-AF65-F5344CB8AC3E}">
+        <p14:creationId xmlns:p14="http://schemas.microsoft.com/office/powerpoint/2010/main" val="1106478625"/>
+      </p:ext>
+    </p:extLst>
+  </p:cSld>
+  <p:clrMapOvr>
+    <a:masterClrMapping/>
+  </p:clrMapOvr>
+</p:sld>
+</file>
+
+<file path=ppt/slides/slide32.xml><?xml version="1.0" encoding="utf-8"?>
+<p:sld xmlns:a="http://schemas.openxmlformats.org/drawingml/2006/main" xmlns:r="http://schemas.openxmlformats.org/officeDocument/2006/relationships" xmlns:p="http://schemas.openxmlformats.org/presentationml/2006/main">
+  <p:cSld>
+    <p:spTree>
+      <p:nvGrpSpPr>
+        <p:cNvPr id="1" name=""/>
+        <p:cNvGrpSpPr/>
+        <p:nvPr/>
+      </p:nvGrpSpPr>
+      <p:grpSpPr>
+        <a:xfrm>
+          <a:off x="0" y="0"/>
+          <a:ext cx="0" cy="0"/>
+          <a:chOff x="0" y="0"/>
+          <a:chExt cx="0" cy="0"/>
+        </a:xfrm>
+      </p:grpSpPr>
+      <p:sp>
+        <p:nvSpPr>
+          <p:cNvPr id="3" name="타원 2"/>
+          <p:cNvSpPr/>
+          <p:nvPr/>
+        </p:nvSpPr>
+        <p:spPr>
+          <a:xfrm>
+            <a:off x="4067944" y="74100"/>
+            <a:ext cx="936104" cy="936104"/>
+          </a:xfrm>
+          <a:prstGeom prst="ellipse">
+            <a:avLst/>
+          </a:prstGeom>
+          <a:solidFill>
+            <a:schemeClr val="tx2">
+              <a:lumMod val="75000"/>
+            </a:schemeClr>
+          </a:solidFill>
+          <a:ln>
+            <a:noFill/>
+          </a:ln>
+        </p:spPr>
+        <p:style>
+          <a:lnRef idx="2">
+            <a:schemeClr val="accent1">
+              <a:shade val="50000"/>
+            </a:schemeClr>
+          </a:lnRef>
+          <a:fillRef idx="1">
+            <a:schemeClr val="accent1"/>
+          </a:fillRef>
+          <a:effectRef idx="0">
+            <a:schemeClr val="accent1"/>
+          </a:effectRef>
+          <a:fontRef idx="minor">
+            <a:schemeClr val="lt1"/>
+          </a:fontRef>
+        </p:style>
+        <p:txBody>
+          <a:bodyPr rtlCol="0" anchor="ctr"/>
+          <a:lstStyle/>
+          <a:p>
+            <a:pPr algn="ctr"/>
+            <a:endParaRPr lang="ko-KR" altLang="en-US"/>
+          </a:p>
+        </p:txBody>
+      </p:sp>
+      <p:sp>
+        <p:nvSpPr>
+          <p:cNvPr id="8" name="직사각형 7"/>
+          <p:cNvSpPr/>
+          <p:nvPr/>
+        </p:nvSpPr>
+        <p:spPr>
+          <a:xfrm>
+            <a:off x="775704" y="271681"/>
+            <a:ext cx="723275" cy="276999"/>
+          </a:xfrm>
+          <a:prstGeom prst="rect">
+            <a:avLst/>
+          </a:prstGeom>
+        </p:spPr>
+        <p:txBody>
+          <a:bodyPr wrap="none">
+            <a:spAutoFit/>
+          </a:bodyPr>
+          <a:lstStyle/>
+          <a:p>
+            <a:pPr algn="ctr"/>
+            <a:r>
+              <a:rPr lang="ko-KR" altLang="en-US" sz="1200" b="1" spc="-150" dirty="0" err="1">
+                <a:solidFill>
+                  <a:schemeClr val="bg1"/>
+                </a:solidFill>
+              </a:rPr>
+              <a:t>머신러닝</a:t>
+            </a:r>
+            <a:endParaRPr lang="ko-KR" altLang="en-US" sz="1200" b="1" spc="-150" dirty="0">
+              <a:solidFill>
+                <a:schemeClr val="bg1"/>
+              </a:solidFill>
+            </a:endParaRPr>
+          </a:p>
+        </p:txBody>
+      </p:sp>
+      <p:sp>
+        <p:nvSpPr>
+          <p:cNvPr id="9" name="TextBox 8"/>
+          <p:cNvSpPr txBox="1"/>
+          <p:nvPr/>
+        </p:nvSpPr>
+        <p:spPr>
+          <a:xfrm>
+            <a:off x="3995936" y="479095"/>
+            <a:ext cx="1080120" cy="461665"/>
+          </a:xfrm>
+          <a:prstGeom prst="rect">
+            <a:avLst/>
+          </a:prstGeom>
+          <a:noFill/>
+        </p:spPr>
+        <p:txBody>
+          <a:bodyPr wrap="square" rtlCol="0">
+            <a:spAutoFit/>
+          </a:bodyPr>
+          <a:lstStyle/>
+          <a:p>
+            <a:pPr algn="ctr"/>
+            <a:r>
+              <a:rPr lang="en-US" altLang="ko-KR" sz="2400" dirty="0">
+                <a:solidFill>
+                  <a:schemeClr val="bg1"/>
+                </a:solidFill>
+                <a:latin typeface="HY헤드라인M" pitchFamily="18" charset="-127"/>
+                <a:ea typeface="HY헤드라인M" pitchFamily="18" charset="-127"/>
+              </a:rPr>
+              <a:t>01</a:t>
+            </a:r>
+            <a:endParaRPr lang="ko-KR" altLang="en-US" sz="2400" dirty="0">
+              <a:solidFill>
+                <a:schemeClr val="bg1"/>
+              </a:solidFill>
+              <a:latin typeface="HY헤드라인M" pitchFamily="18" charset="-127"/>
+              <a:ea typeface="HY헤드라인M" pitchFamily="18" charset="-127"/>
+            </a:endParaRPr>
+          </a:p>
+        </p:txBody>
+      </p:sp>
+      <p:sp>
+        <p:nvSpPr>
+          <p:cNvPr id="4" name="TextBox 3"/>
+          <p:cNvSpPr txBox="1"/>
+          <p:nvPr/>
+        </p:nvSpPr>
+        <p:spPr>
+          <a:xfrm>
+            <a:off x="971600" y="1700955"/>
+            <a:ext cx="7200800" cy="3139321"/>
+          </a:xfrm>
+          <a:prstGeom prst="rect">
+            <a:avLst/>
+          </a:prstGeom>
+          <a:noFill/>
+        </p:spPr>
+        <p:txBody>
+          <a:bodyPr wrap="square" rtlCol="0">
+            <a:spAutoFit/>
+          </a:bodyPr>
+          <a:lstStyle/>
+          <a:p>
+            <a:pPr marL="285750" indent="-285750">
+              <a:buFontTx/>
+              <a:buChar char="-"/>
+            </a:pPr>
+            <a:r>
+              <a:rPr lang="ko-KR" altLang="en-US" dirty="0"/>
+              <a:t>차원 축소 기법</a:t>
+            </a:r>
+            <a:endParaRPr lang="en-US" altLang="ko-KR" dirty="0"/>
+          </a:p>
+          <a:p>
+            <a:pPr marL="285750" indent="-285750">
+              <a:buFontTx/>
+              <a:buChar char="-"/>
+            </a:pPr>
+            <a:r>
+              <a:rPr lang="ko-KR" altLang="en-US" dirty="0"/>
+              <a:t>고차원의 데이터를</a:t>
+            </a:r>
+            <a:r>
+              <a:rPr lang="en-US" altLang="ko-KR" dirty="0"/>
+              <a:t> 2</a:t>
+            </a:r>
+            <a:r>
+              <a:rPr lang="ko-KR" altLang="en-US" dirty="0"/>
+              <a:t>차원이나 </a:t>
+            </a:r>
+            <a:r>
+              <a:rPr lang="en-US" altLang="ko-KR" dirty="0"/>
+              <a:t>3</a:t>
+            </a:r>
+            <a:r>
+              <a:rPr lang="ko-KR" altLang="en-US" dirty="0"/>
+              <a:t>차원으로 시각화 하기 위한 비선형 차원 축소 기법</a:t>
+            </a:r>
+            <a:endParaRPr lang="en-US" altLang="ko-KR" dirty="0"/>
+          </a:p>
+          <a:p>
+            <a:pPr marL="285750" indent="-285750">
+              <a:buFontTx/>
+              <a:buChar char="-"/>
+            </a:pPr>
+            <a:r>
+              <a:rPr lang="ko-KR" altLang="en-US" dirty="0"/>
+              <a:t>데이터 간의 거리 유사도를 최대한 유지하면서 </a:t>
+            </a:r>
+            <a:r>
+              <a:rPr lang="en-US" altLang="ko-KR" dirty="0"/>
+              <a:t>2</a:t>
+            </a:r>
+            <a:r>
+              <a:rPr lang="ko-KR" altLang="en-US" dirty="0"/>
+              <a:t>차원이나 </a:t>
+            </a:r>
+            <a:r>
+              <a:rPr lang="en-US" altLang="ko-KR" dirty="0"/>
+              <a:t>3</a:t>
+            </a:r>
+            <a:r>
+              <a:rPr lang="ko-KR" altLang="en-US" dirty="0"/>
+              <a:t>차원 공간으로 표현</a:t>
+            </a:r>
+            <a:endParaRPr lang="en-US" altLang="ko-KR" dirty="0"/>
+          </a:p>
+          <a:p>
+            <a:pPr marL="285750" indent="-285750">
+              <a:buFontTx/>
+              <a:buChar char="-"/>
+            </a:pPr>
+            <a:r>
+              <a:rPr lang="ko-KR" altLang="en-US" dirty="0"/>
+              <a:t>장점</a:t>
+            </a:r>
+            <a:endParaRPr lang="en-US" altLang="ko-KR" dirty="0"/>
+          </a:p>
+          <a:p>
+            <a:pPr marL="742950" lvl="1" indent="-285750">
+              <a:buFontTx/>
+              <a:buChar char="-"/>
+            </a:pPr>
+            <a:r>
+              <a:rPr lang="ko-KR" altLang="en-US" dirty="0"/>
+              <a:t>고차원 데이터의 구조를 시각적으로 이해 가능</a:t>
+            </a:r>
+            <a:endParaRPr lang="en-US" altLang="ko-KR" dirty="0"/>
+          </a:p>
+          <a:p>
+            <a:pPr marL="742950" lvl="1" indent="-285750">
+              <a:buFontTx/>
+              <a:buChar char="-"/>
+            </a:pPr>
+            <a:r>
+              <a:rPr lang="ko-KR" altLang="en-US" dirty="0"/>
+              <a:t>비선형 관계 표현력 높음 </a:t>
+            </a:r>
+            <a:endParaRPr lang="en-US" altLang="ko-KR" dirty="0"/>
+          </a:p>
+          <a:p>
+            <a:pPr marL="285750" indent="-285750">
+              <a:buFontTx/>
+              <a:buChar char="-"/>
+            </a:pPr>
+            <a:r>
+              <a:rPr lang="ko-KR" altLang="en-US" dirty="0"/>
+              <a:t>단점</a:t>
+            </a:r>
+            <a:endParaRPr lang="en-US" altLang="ko-KR" dirty="0"/>
+          </a:p>
+          <a:p>
+            <a:pPr marL="742950" lvl="1" indent="-285750">
+              <a:buFontTx/>
+              <a:buChar char="-"/>
+            </a:pPr>
+            <a:r>
+              <a:rPr lang="ko-KR" altLang="en-US" dirty="0" err="1"/>
+              <a:t>계산량이</a:t>
+            </a:r>
+            <a:r>
+              <a:rPr lang="ko-KR" altLang="en-US" dirty="0"/>
+              <a:t> 많기 때문에 느림</a:t>
+            </a:r>
+            <a:endParaRPr lang="en-US" altLang="ko-KR" dirty="0"/>
+          </a:p>
+          <a:p>
+            <a:pPr marL="742950" lvl="1" indent="-285750">
+              <a:buFontTx/>
+              <a:buChar char="-"/>
+            </a:pPr>
+            <a:r>
+              <a:rPr lang="ko-KR" altLang="en-US" dirty="0"/>
+              <a:t>축소된 좌표 자체는 해석이 불가능</a:t>
+            </a:r>
+            <a:endParaRPr lang="en-US" altLang="ko-KR" dirty="0"/>
+          </a:p>
+        </p:txBody>
+      </p:sp>
+      <p:sp>
+        <p:nvSpPr>
+          <p:cNvPr id="6" name="TextBox 5"/>
+          <p:cNvSpPr txBox="1"/>
+          <p:nvPr/>
+        </p:nvSpPr>
+        <p:spPr>
+          <a:xfrm>
+            <a:off x="539552" y="1065096"/>
+            <a:ext cx="7992888" cy="461665"/>
+          </a:xfrm>
+          <a:prstGeom prst="rect">
+            <a:avLst/>
+          </a:prstGeom>
+          <a:noFill/>
+        </p:spPr>
+        <p:txBody>
+          <a:bodyPr wrap="square" rtlCol="0">
+            <a:spAutoFit/>
+          </a:bodyPr>
+          <a:lstStyle/>
+          <a:p>
+            <a:r>
+              <a:rPr lang="en-US" altLang="ko-KR" sz="2400" dirty="0"/>
+              <a:t>t-SNE</a:t>
+            </a:r>
+            <a:endParaRPr lang="ko-KR" altLang="en-US" sz="2300" dirty="0"/>
+          </a:p>
+        </p:txBody>
+      </p:sp>
+    </p:spTree>
+    <p:extLst>
+      <p:ext uri="{BB962C8B-B14F-4D97-AF65-F5344CB8AC3E}">
+        <p14:creationId xmlns:p14="http://schemas.microsoft.com/office/powerpoint/2010/main" val="2741370986"/>
+      </p:ext>
+    </p:extLst>
+  </p:cSld>
+  <p:clrMapOvr>
+    <a:masterClrMapping/>
+  </p:clrMapOvr>
+</p:sld>
+</file>
+
+<file path=ppt/slides/slide33.xml><?xml version="1.0" encoding="utf-8"?>
+<p:sld xmlns:a="http://schemas.openxmlformats.org/drawingml/2006/main" xmlns:r="http://schemas.openxmlformats.org/officeDocument/2006/relationships" xmlns:p="http://schemas.openxmlformats.org/presentationml/2006/main">
+  <p:cSld>
+    <p:spTree>
+      <p:nvGrpSpPr>
+        <p:cNvPr id="1" name=""/>
+        <p:cNvGrpSpPr/>
+        <p:nvPr/>
+      </p:nvGrpSpPr>
+      <p:grpSpPr>
+        <a:xfrm>
+          <a:off x="0" y="0"/>
+          <a:ext cx="0" cy="0"/>
+          <a:chOff x="0" y="0"/>
+          <a:chExt cx="0" cy="0"/>
+        </a:xfrm>
+      </p:grpSpPr>
+      <p:sp>
+        <p:nvSpPr>
+          <p:cNvPr id="3" name="타원 2"/>
+          <p:cNvSpPr/>
+          <p:nvPr/>
+        </p:nvSpPr>
+        <p:spPr>
+          <a:xfrm>
+            <a:off x="4067944" y="74100"/>
+            <a:ext cx="936104" cy="936104"/>
+          </a:xfrm>
+          <a:prstGeom prst="ellipse">
+            <a:avLst/>
+          </a:prstGeom>
+          <a:solidFill>
+            <a:schemeClr val="tx2">
+              <a:lumMod val="75000"/>
+            </a:schemeClr>
+          </a:solidFill>
+          <a:ln>
+            <a:noFill/>
+          </a:ln>
+        </p:spPr>
+        <p:style>
+          <a:lnRef idx="2">
+            <a:schemeClr val="accent1">
+              <a:shade val="50000"/>
+            </a:schemeClr>
+          </a:lnRef>
+          <a:fillRef idx="1">
+            <a:schemeClr val="accent1"/>
+          </a:fillRef>
+          <a:effectRef idx="0">
+            <a:schemeClr val="accent1"/>
+          </a:effectRef>
+          <a:fontRef idx="minor">
+            <a:schemeClr val="lt1"/>
+          </a:fontRef>
+        </p:style>
+        <p:txBody>
+          <a:bodyPr rtlCol="0" anchor="ctr"/>
+          <a:lstStyle/>
+          <a:p>
+            <a:pPr algn="ctr"/>
+            <a:endParaRPr lang="ko-KR" altLang="en-US"/>
+          </a:p>
+        </p:txBody>
+      </p:sp>
+      <p:sp>
+        <p:nvSpPr>
+          <p:cNvPr id="8" name="직사각형 7"/>
+          <p:cNvSpPr/>
+          <p:nvPr/>
+        </p:nvSpPr>
+        <p:spPr>
+          <a:xfrm>
+            <a:off x="775704" y="271681"/>
+            <a:ext cx="723275" cy="276999"/>
+          </a:xfrm>
+          <a:prstGeom prst="rect">
+            <a:avLst/>
+          </a:prstGeom>
+        </p:spPr>
+        <p:txBody>
+          <a:bodyPr wrap="none">
+            <a:spAutoFit/>
+          </a:bodyPr>
+          <a:lstStyle/>
+          <a:p>
+            <a:pPr algn="ctr"/>
+            <a:r>
+              <a:rPr lang="ko-KR" altLang="en-US" sz="1200" b="1" spc="-150" dirty="0" err="1">
+                <a:solidFill>
+                  <a:schemeClr val="bg1"/>
+                </a:solidFill>
+              </a:rPr>
+              <a:t>머신러닝</a:t>
+            </a:r>
+            <a:endParaRPr lang="ko-KR" altLang="en-US" sz="1200" b="1" spc="-150" dirty="0">
+              <a:solidFill>
+                <a:schemeClr val="bg1"/>
+              </a:solidFill>
+            </a:endParaRPr>
+          </a:p>
+        </p:txBody>
+      </p:sp>
+      <p:sp>
+        <p:nvSpPr>
+          <p:cNvPr id="9" name="TextBox 8"/>
+          <p:cNvSpPr txBox="1"/>
+          <p:nvPr/>
+        </p:nvSpPr>
+        <p:spPr>
+          <a:xfrm>
+            <a:off x="3995936" y="479095"/>
+            <a:ext cx="1080120" cy="461665"/>
+          </a:xfrm>
+          <a:prstGeom prst="rect">
+            <a:avLst/>
+          </a:prstGeom>
+          <a:noFill/>
+        </p:spPr>
+        <p:txBody>
+          <a:bodyPr wrap="square" rtlCol="0">
+            <a:spAutoFit/>
+          </a:bodyPr>
+          <a:lstStyle/>
+          <a:p>
+            <a:pPr algn="ctr"/>
+            <a:r>
+              <a:rPr lang="en-US" altLang="ko-KR" sz="2400" dirty="0">
+                <a:solidFill>
+                  <a:schemeClr val="bg1"/>
+                </a:solidFill>
+                <a:latin typeface="HY헤드라인M" pitchFamily="18" charset="-127"/>
+                <a:ea typeface="HY헤드라인M" pitchFamily="18" charset="-127"/>
+              </a:rPr>
+              <a:t>01</a:t>
+            </a:r>
+            <a:endParaRPr lang="ko-KR" altLang="en-US" sz="2400" dirty="0">
+              <a:solidFill>
+                <a:schemeClr val="bg1"/>
+              </a:solidFill>
+              <a:latin typeface="HY헤드라인M" pitchFamily="18" charset="-127"/>
+              <a:ea typeface="HY헤드라인M" pitchFamily="18" charset="-127"/>
+            </a:endParaRPr>
+          </a:p>
+        </p:txBody>
+      </p:sp>
+      <p:sp>
+        <p:nvSpPr>
+          <p:cNvPr id="4" name="TextBox 3"/>
+          <p:cNvSpPr txBox="1"/>
+          <p:nvPr/>
+        </p:nvSpPr>
+        <p:spPr>
+          <a:xfrm>
+            <a:off x="971600" y="1700955"/>
+            <a:ext cx="7200800" cy="1754326"/>
+          </a:xfrm>
+          <a:prstGeom prst="rect">
+            <a:avLst/>
+          </a:prstGeom>
+          <a:noFill/>
+        </p:spPr>
+        <p:txBody>
+          <a:bodyPr wrap="square" rtlCol="0">
+            <a:spAutoFit/>
+          </a:bodyPr>
+          <a:lstStyle/>
+          <a:p>
+            <a:pPr marL="285750" indent="-285750">
+              <a:buFontTx/>
+              <a:buChar char="-"/>
+            </a:pPr>
+            <a:r>
+              <a:rPr lang="ko-KR" altLang="en-US" dirty="0"/>
+              <a:t>데이터를 </a:t>
+            </a:r>
+            <a:r>
+              <a:rPr lang="en-US" altLang="ko-KR" dirty="0"/>
+              <a:t>K</a:t>
+            </a:r>
+            <a:r>
+              <a:rPr lang="ko-KR" altLang="en-US" dirty="0"/>
+              <a:t>개의 동일 크기로 나눔</a:t>
+            </a:r>
+            <a:r>
+              <a:rPr lang="en-US" altLang="ko-KR" dirty="0"/>
+              <a:t>(</a:t>
+            </a:r>
+            <a:r>
+              <a:rPr lang="ko-KR" altLang="en-US" dirty="0" err="1"/>
+              <a:t>폴드화</a:t>
+            </a:r>
+            <a:r>
+              <a:rPr lang="en-US" altLang="ko-KR" dirty="0"/>
+              <a:t>)</a:t>
+            </a:r>
+          </a:p>
+          <a:p>
+            <a:pPr marL="285750" indent="-285750">
+              <a:buFontTx/>
+              <a:buChar char="-"/>
+            </a:pPr>
+            <a:r>
+              <a:rPr lang="en-US" altLang="ko-KR" dirty="0"/>
+              <a:t>K</a:t>
+            </a:r>
+            <a:r>
+              <a:rPr lang="ko-KR" altLang="en-US" dirty="0"/>
+              <a:t>번 반복하여 하나의 </a:t>
+            </a:r>
+            <a:r>
+              <a:rPr lang="ko-KR" altLang="en-US" dirty="0" err="1"/>
+              <a:t>폴드는</a:t>
+            </a:r>
+            <a:r>
+              <a:rPr lang="ko-KR" altLang="en-US" dirty="0"/>
+              <a:t> 검증용으로 사용하고 나머지 </a:t>
+            </a:r>
+            <a:r>
+              <a:rPr lang="ko-KR" altLang="en-US" dirty="0" err="1"/>
+              <a:t>폴드는</a:t>
+            </a:r>
+            <a:r>
+              <a:rPr lang="ko-KR" altLang="en-US" dirty="0"/>
+              <a:t> 학습용으로 사용</a:t>
+            </a:r>
+            <a:endParaRPr lang="en-US" altLang="ko-KR" dirty="0"/>
+          </a:p>
+          <a:p>
+            <a:pPr marL="285750" indent="-285750">
+              <a:buFontTx/>
+              <a:buChar char="-"/>
+            </a:pPr>
+            <a:r>
+              <a:rPr lang="ko-KR" altLang="en-US" dirty="0"/>
+              <a:t>모든 </a:t>
+            </a:r>
+            <a:r>
+              <a:rPr lang="ko-KR" altLang="en-US" dirty="0" err="1"/>
+              <a:t>폴드는</a:t>
+            </a:r>
+            <a:r>
+              <a:rPr lang="ko-KR" altLang="en-US" dirty="0"/>
+              <a:t> 한번은 검증용으로 사용</a:t>
+            </a:r>
+            <a:endParaRPr lang="en-US" altLang="ko-KR" dirty="0"/>
+          </a:p>
+          <a:p>
+            <a:pPr marL="285750" indent="-285750">
+              <a:buFontTx/>
+              <a:buChar char="-"/>
+            </a:pPr>
+            <a:r>
+              <a:rPr lang="ko-KR" altLang="en-US" dirty="0"/>
+              <a:t>데이터의 수가 적을 때 모델의 성능을 안정적으로 평가 할 수 있는 방법</a:t>
+            </a:r>
+            <a:endParaRPr lang="en-US" altLang="ko-KR" dirty="0"/>
+          </a:p>
+        </p:txBody>
+      </p:sp>
+      <p:sp>
+        <p:nvSpPr>
+          <p:cNvPr id="6" name="TextBox 5"/>
+          <p:cNvSpPr txBox="1"/>
+          <p:nvPr/>
+        </p:nvSpPr>
+        <p:spPr>
+          <a:xfrm>
+            <a:off x="539552" y="1065096"/>
+            <a:ext cx="7992888" cy="461665"/>
+          </a:xfrm>
+          <a:prstGeom prst="rect">
+            <a:avLst/>
+          </a:prstGeom>
+          <a:noFill/>
+        </p:spPr>
+        <p:txBody>
+          <a:bodyPr wrap="square" rtlCol="0">
+            <a:spAutoFit/>
+          </a:bodyPr>
+          <a:lstStyle/>
+          <a:p>
+            <a:r>
+              <a:rPr lang="en-US" altLang="ko-KR" sz="2400" dirty="0"/>
+              <a:t>K-fold</a:t>
+            </a:r>
+            <a:endParaRPr lang="ko-KR" altLang="en-US" sz="2300" dirty="0"/>
+          </a:p>
+        </p:txBody>
+      </p:sp>
+    </p:spTree>
+    <p:extLst>
+      <p:ext uri="{BB962C8B-B14F-4D97-AF65-F5344CB8AC3E}">
+        <p14:creationId xmlns:p14="http://schemas.microsoft.com/office/powerpoint/2010/main" val="2763876966"/>
+      </p:ext>
+    </p:extLst>
+  </p:cSld>
+  <p:clrMapOvr>
+    <a:masterClrMapping/>
+  </p:clrMapOvr>
+</p:sld>
+</file>
+
+<file path=ppt/slides/slide34.xml><?xml version="1.0" encoding="utf-8"?>
+<p:sld xmlns:a="http://schemas.openxmlformats.org/drawingml/2006/main" xmlns:r="http://schemas.openxmlformats.org/officeDocument/2006/relationships" xmlns:p="http://schemas.openxmlformats.org/presentationml/2006/main">
+  <p:cSld>
+    <p:spTree>
+      <p:nvGrpSpPr>
+        <p:cNvPr id="1" name=""/>
+        <p:cNvGrpSpPr/>
+        <p:nvPr/>
+      </p:nvGrpSpPr>
+      <p:grpSpPr>
+        <a:xfrm>
+          <a:off x="0" y="0"/>
+          <a:ext cx="0" cy="0"/>
+          <a:chOff x="0" y="0"/>
+          <a:chExt cx="0" cy="0"/>
+        </a:xfrm>
+      </p:grpSpPr>
+      <p:sp>
+        <p:nvSpPr>
+          <p:cNvPr id="3" name="타원 2"/>
+          <p:cNvSpPr/>
+          <p:nvPr/>
+        </p:nvSpPr>
+        <p:spPr>
+          <a:xfrm>
+            <a:off x="4067944" y="74100"/>
+            <a:ext cx="936104" cy="936104"/>
+          </a:xfrm>
+          <a:prstGeom prst="ellipse">
+            <a:avLst/>
+          </a:prstGeom>
+          <a:solidFill>
+            <a:schemeClr val="tx2">
+              <a:lumMod val="75000"/>
+            </a:schemeClr>
+          </a:solidFill>
+          <a:ln>
+            <a:noFill/>
+          </a:ln>
+        </p:spPr>
+        <p:style>
+          <a:lnRef idx="2">
+            <a:schemeClr val="accent1">
+              <a:shade val="50000"/>
+            </a:schemeClr>
+          </a:lnRef>
+          <a:fillRef idx="1">
+            <a:schemeClr val="accent1"/>
+          </a:fillRef>
+          <a:effectRef idx="0">
+            <a:schemeClr val="accent1"/>
+          </a:effectRef>
+          <a:fontRef idx="minor">
+            <a:schemeClr val="lt1"/>
+          </a:fontRef>
+        </p:style>
+        <p:txBody>
+          <a:bodyPr rtlCol="0" anchor="ctr"/>
+          <a:lstStyle/>
+          <a:p>
+            <a:pPr algn="ctr"/>
+            <a:endParaRPr lang="ko-KR" altLang="en-US"/>
+          </a:p>
+        </p:txBody>
+      </p:sp>
+      <p:sp>
+        <p:nvSpPr>
+          <p:cNvPr id="8" name="직사각형 7"/>
+          <p:cNvSpPr/>
+          <p:nvPr/>
+        </p:nvSpPr>
+        <p:spPr>
+          <a:xfrm>
+            <a:off x="775704" y="271681"/>
+            <a:ext cx="723275" cy="276999"/>
+          </a:xfrm>
+          <a:prstGeom prst="rect">
+            <a:avLst/>
+          </a:prstGeom>
+        </p:spPr>
+        <p:txBody>
+          <a:bodyPr wrap="none">
+            <a:spAutoFit/>
+          </a:bodyPr>
+          <a:lstStyle/>
+          <a:p>
+            <a:pPr algn="ctr"/>
+            <a:r>
+              <a:rPr lang="ko-KR" altLang="en-US" sz="1200" b="1" spc="-150" dirty="0" err="1">
+                <a:solidFill>
+                  <a:schemeClr val="bg1"/>
+                </a:solidFill>
+              </a:rPr>
+              <a:t>머신러닝</a:t>
+            </a:r>
+            <a:endParaRPr lang="ko-KR" altLang="en-US" sz="1200" b="1" spc="-150" dirty="0">
+              <a:solidFill>
+                <a:schemeClr val="bg1"/>
+              </a:solidFill>
+            </a:endParaRPr>
+          </a:p>
+        </p:txBody>
+      </p:sp>
+      <p:sp>
+        <p:nvSpPr>
+          <p:cNvPr id="9" name="TextBox 8"/>
+          <p:cNvSpPr txBox="1"/>
+          <p:nvPr/>
+        </p:nvSpPr>
+        <p:spPr>
+          <a:xfrm>
+            <a:off x="3995936" y="479095"/>
+            <a:ext cx="1080120" cy="461665"/>
+          </a:xfrm>
+          <a:prstGeom prst="rect">
+            <a:avLst/>
+          </a:prstGeom>
+          <a:noFill/>
+        </p:spPr>
+        <p:txBody>
+          <a:bodyPr wrap="square" rtlCol="0">
+            <a:spAutoFit/>
+          </a:bodyPr>
+          <a:lstStyle/>
+          <a:p>
+            <a:pPr algn="ctr"/>
+            <a:r>
+              <a:rPr lang="en-US" altLang="ko-KR" sz="2400" dirty="0">
+                <a:solidFill>
+                  <a:schemeClr val="bg1"/>
+                </a:solidFill>
+                <a:latin typeface="HY헤드라인M" pitchFamily="18" charset="-127"/>
+                <a:ea typeface="HY헤드라인M" pitchFamily="18" charset="-127"/>
+              </a:rPr>
+              <a:t>01</a:t>
+            </a:r>
+            <a:endParaRPr lang="ko-KR" altLang="en-US" sz="2400" dirty="0">
+              <a:solidFill>
+                <a:schemeClr val="bg1"/>
+              </a:solidFill>
+              <a:latin typeface="HY헤드라인M" pitchFamily="18" charset="-127"/>
+              <a:ea typeface="HY헤드라인M" pitchFamily="18" charset="-127"/>
+            </a:endParaRPr>
+          </a:p>
+        </p:txBody>
+      </p:sp>
+      <p:sp>
+        <p:nvSpPr>
+          <p:cNvPr id="4" name="TextBox 3"/>
+          <p:cNvSpPr txBox="1"/>
+          <p:nvPr/>
+        </p:nvSpPr>
+        <p:spPr>
+          <a:xfrm>
+            <a:off x="971600" y="1700955"/>
+            <a:ext cx="7200800" cy="1200329"/>
+          </a:xfrm>
+          <a:prstGeom prst="rect">
+            <a:avLst/>
+          </a:prstGeom>
+          <a:noFill/>
+        </p:spPr>
+        <p:txBody>
+          <a:bodyPr wrap="square" rtlCol="0">
+            <a:spAutoFit/>
+          </a:bodyPr>
+          <a:lstStyle/>
+          <a:p>
+            <a:pPr marL="285750" indent="-285750">
+              <a:buFontTx/>
+              <a:buChar char="-"/>
+            </a:pPr>
+            <a:r>
+              <a:rPr lang="ko-KR" altLang="en-US" dirty="0"/>
+              <a:t>매개변수의 조합을 탐색하여 최적의 조합을 찾는 방법</a:t>
+            </a:r>
+            <a:endParaRPr lang="en-US" altLang="ko-KR" dirty="0"/>
+          </a:p>
+          <a:p>
+            <a:pPr marL="285750" indent="-285750">
+              <a:buFontTx/>
+              <a:buChar char="-"/>
+            </a:pPr>
+            <a:r>
+              <a:rPr lang="ko-KR" altLang="en-US" dirty="0"/>
+              <a:t>각각의 매개변수 조합 별로 학습</a:t>
+            </a:r>
+            <a:r>
+              <a:rPr lang="en-US" altLang="ko-KR" dirty="0"/>
+              <a:t>, </a:t>
+            </a:r>
+            <a:r>
+              <a:rPr lang="ko-KR" altLang="en-US" dirty="0"/>
+              <a:t>검증을 진행</a:t>
+            </a:r>
+            <a:endParaRPr lang="en-US" altLang="ko-KR" dirty="0"/>
+          </a:p>
+          <a:p>
+            <a:pPr marL="285750" indent="-285750">
+              <a:buFontTx/>
+              <a:buChar char="-"/>
+            </a:pPr>
+            <a:r>
+              <a:rPr lang="ko-KR" altLang="en-US" dirty="0"/>
+              <a:t>매개변수 별 성능을 체크하여 최적의 매개변수의 값을 확인하는 교차 검증</a:t>
+            </a:r>
+            <a:endParaRPr lang="en-US" altLang="ko-KR" dirty="0"/>
+          </a:p>
+        </p:txBody>
+      </p:sp>
+      <p:sp>
+        <p:nvSpPr>
+          <p:cNvPr id="6" name="TextBox 5"/>
+          <p:cNvSpPr txBox="1"/>
+          <p:nvPr/>
+        </p:nvSpPr>
+        <p:spPr>
+          <a:xfrm>
+            <a:off x="539552" y="1065096"/>
+            <a:ext cx="7992888" cy="461665"/>
+          </a:xfrm>
+          <a:prstGeom prst="rect">
+            <a:avLst/>
+          </a:prstGeom>
+          <a:noFill/>
+        </p:spPr>
+        <p:txBody>
+          <a:bodyPr wrap="square" rtlCol="0">
+            <a:spAutoFit/>
+          </a:bodyPr>
+          <a:lstStyle/>
+          <a:p>
+            <a:r>
+              <a:rPr lang="en-US" altLang="ko-KR" sz="2400" dirty="0" err="1"/>
+              <a:t>GridSerachCV</a:t>
+            </a:r>
+            <a:endParaRPr lang="ko-KR" altLang="en-US" sz="2300" dirty="0"/>
+          </a:p>
+        </p:txBody>
+      </p:sp>
+    </p:spTree>
+    <p:extLst>
+      <p:ext uri="{BB962C8B-B14F-4D97-AF65-F5344CB8AC3E}">
+        <p14:creationId xmlns:p14="http://schemas.microsoft.com/office/powerpoint/2010/main" val="2956039162"/>
+      </p:ext>
+    </p:extLst>
+  </p:cSld>
+  <p:clrMapOvr>
+    <a:masterClrMapping/>
+  </p:clrMapOvr>
+</p:sld>
+</file>
+
+<file path=ppt/slides/slide35.xml><?xml version="1.0" encoding="utf-8"?>
+<p:sld xmlns:a="http://schemas.openxmlformats.org/drawingml/2006/main" xmlns:r="http://schemas.openxmlformats.org/officeDocument/2006/relationships" xmlns:p="http://schemas.openxmlformats.org/presentationml/2006/main">
+  <p:cSld>
+    <p:spTree>
+      <p:nvGrpSpPr>
+        <p:cNvPr id="1" name=""/>
+        <p:cNvGrpSpPr/>
+        <p:nvPr/>
+      </p:nvGrpSpPr>
+      <p:grpSpPr>
+        <a:xfrm>
+          <a:off x="0" y="0"/>
+          <a:ext cx="0" cy="0"/>
+          <a:chOff x="0" y="0"/>
+          <a:chExt cx="0" cy="0"/>
+        </a:xfrm>
+      </p:grpSpPr>
+      <p:sp>
+        <p:nvSpPr>
+          <p:cNvPr id="3" name="타원 2"/>
+          <p:cNvSpPr/>
+          <p:nvPr/>
+        </p:nvSpPr>
+        <p:spPr>
+          <a:xfrm>
+            <a:off x="4067944" y="74100"/>
+            <a:ext cx="936104" cy="936104"/>
+          </a:xfrm>
+          <a:prstGeom prst="ellipse">
+            <a:avLst/>
+          </a:prstGeom>
+          <a:solidFill>
+            <a:schemeClr val="tx2">
+              <a:lumMod val="75000"/>
+            </a:schemeClr>
+          </a:solidFill>
+          <a:ln>
+            <a:noFill/>
+          </a:ln>
+        </p:spPr>
+        <p:style>
+          <a:lnRef idx="2">
+            <a:schemeClr val="accent1">
+              <a:shade val="50000"/>
+            </a:schemeClr>
+          </a:lnRef>
+          <a:fillRef idx="1">
+            <a:schemeClr val="accent1"/>
+          </a:fillRef>
+          <a:effectRef idx="0">
+            <a:schemeClr val="accent1"/>
+          </a:effectRef>
+          <a:fontRef idx="minor">
+            <a:schemeClr val="lt1"/>
+          </a:fontRef>
+        </p:style>
+        <p:txBody>
+          <a:bodyPr rtlCol="0" anchor="ctr"/>
+          <a:lstStyle/>
+          <a:p>
+            <a:pPr algn="ctr"/>
+            <a:endParaRPr lang="ko-KR" altLang="en-US"/>
+          </a:p>
+        </p:txBody>
+      </p:sp>
+      <p:sp>
+        <p:nvSpPr>
+          <p:cNvPr id="8" name="직사각형 7"/>
+          <p:cNvSpPr/>
+          <p:nvPr/>
+        </p:nvSpPr>
+        <p:spPr>
+          <a:xfrm>
+            <a:off x="775704" y="271681"/>
+            <a:ext cx="723275" cy="276999"/>
+          </a:xfrm>
+          <a:prstGeom prst="rect">
+            <a:avLst/>
+          </a:prstGeom>
+        </p:spPr>
+        <p:txBody>
+          <a:bodyPr wrap="none">
+            <a:spAutoFit/>
+          </a:bodyPr>
+          <a:lstStyle/>
+          <a:p>
+            <a:pPr algn="ctr"/>
+            <a:r>
+              <a:rPr lang="ko-KR" altLang="en-US" sz="1200" b="1" spc="-150" dirty="0" err="1">
+                <a:solidFill>
+                  <a:schemeClr val="bg1"/>
+                </a:solidFill>
+              </a:rPr>
+              <a:t>머신러닝</a:t>
+            </a:r>
+            <a:endParaRPr lang="ko-KR" altLang="en-US" sz="1200" b="1" spc="-150" dirty="0">
+              <a:solidFill>
+                <a:schemeClr val="bg1"/>
+              </a:solidFill>
+            </a:endParaRPr>
+          </a:p>
+        </p:txBody>
+      </p:sp>
+      <p:sp>
+        <p:nvSpPr>
+          <p:cNvPr id="9" name="TextBox 8"/>
+          <p:cNvSpPr txBox="1"/>
+          <p:nvPr/>
+        </p:nvSpPr>
+        <p:spPr>
+          <a:xfrm>
+            <a:off x="3995936" y="479095"/>
+            <a:ext cx="1080120" cy="461665"/>
+          </a:xfrm>
+          <a:prstGeom prst="rect">
+            <a:avLst/>
+          </a:prstGeom>
+          <a:noFill/>
+        </p:spPr>
+        <p:txBody>
+          <a:bodyPr wrap="square" rtlCol="0">
+            <a:spAutoFit/>
+          </a:bodyPr>
+          <a:lstStyle/>
+          <a:p>
+            <a:pPr algn="ctr"/>
+            <a:r>
+              <a:rPr lang="en-US" altLang="ko-KR" sz="2400" dirty="0">
+                <a:solidFill>
+                  <a:schemeClr val="bg1"/>
+                </a:solidFill>
+                <a:latin typeface="HY헤드라인M" pitchFamily="18" charset="-127"/>
+                <a:ea typeface="HY헤드라인M" pitchFamily="18" charset="-127"/>
+              </a:rPr>
+              <a:t>01</a:t>
+            </a:r>
+            <a:endParaRPr lang="ko-KR" altLang="en-US" sz="2400" dirty="0">
+              <a:solidFill>
+                <a:schemeClr val="bg1"/>
+              </a:solidFill>
+              <a:latin typeface="HY헤드라인M" pitchFamily="18" charset="-127"/>
+              <a:ea typeface="HY헤드라인M" pitchFamily="18" charset="-127"/>
+            </a:endParaRPr>
+          </a:p>
+        </p:txBody>
+      </p:sp>
+      <p:sp>
+        <p:nvSpPr>
+          <p:cNvPr id="4" name="TextBox 3"/>
+          <p:cNvSpPr txBox="1"/>
+          <p:nvPr/>
+        </p:nvSpPr>
+        <p:spPr>
+          <a:xfrm>
+            <a:off x="971600" y="1700955"/>
             <a:ext cx="7200800" cy="3693319"/>
           </a:xfrm>
           <a:prstGeom prst="rect">
@@ -14151,7 +18526,7 @@
 </p:sld>
 </file>
 
-<file path=ppt/slides/slide32.xml><?xml version="1.0" encoding="utf-8"?>
+<file path=ppt/slides/slide36.xml><?xml version="1.0" encoding="utf-8"?>
 <p:sld xmlns:a="http://schemas.openxmlformats.org/drawingml/2006/main" xmlns:r="http://schemas.openxmlformats.org/officeDocument/2006/relationships" xmlns:p="http://schemas.openxmlformats.org/presentationml/2006/main">
   <p:cSld>
     <p:spTree>
@@ -15864,210 +20239,864 @@
           </a:p>
         </p:txBody>
       </p:sp>
-      <p:sp>
-        <p:nvSpPr>
-          <p:cNvPr id="4" name="TextBox 3"/>
-          <p:cNvSpPr txBox="1"/>
-          <p:nvPr/>
-        </p:nvSpPr>
-        <p:spPr>
-          <a:xfrm>
-            <a:off x="971600" y="1700955"/>
-            <a:ext cx="7200800" cy="3970318"/>
-          </a:xfrm>
-          <a:prstGeom prst="rect">
-            <a:avLst/>
-          </a:prstGeom>
-          <a:noFill/>
-        </p:spPr>
-        <p:txBody>
-          <a:bodyPr wrap="square" rtlCol="0">
-            <a:spAutoFit/>
-          </a:bodyPr>
-          <a:lstStyle/>
-          <a:p>
-            <a:pPr marL="285750" indent="-285750">
-              <a:buFontTx/>
-              <a:buChar char="-"/>
-            </a:pPr>
-            <a:r>
-              <a:rPr lang="ko-KR" altLang="en-US" dirty="0"/>
-              <a:t>혼동 행렬</a:t>
-            </a:r>
-            <a:endParaRPr lang="en-US" altLang="ko-KR" dirty="0"/>
-          </a:p>
-          <a:p>
-            <a:pPr marL="742950" lvl="1" indent="-285750">
-              <a:buFontTx/>
-              <a:buChar char="-"/>
-            </a:pPr>
-            <a:r>
-              <a:rPr lang="ko-KR" altLang="en-US" dirty="0"/>
-              <a:t>이진 분류에서 예측 오류가 얼마인가 어떠한 유형의 오류가 발생하는지를 나타내는 지표</a:t>
-            </a:r>
-            <a:endParaRPr lang="en-US" altLang="ko-KR" dirty="0"/>
-          </a:p>
-          <a:p>
-            <a:pPr marL="1200150" lvl="2" indent="-285750">
-              <a:buFontTx/>
-              <a:buChar char="-"/>
-            </a:pPr>
-            <a:r>
-              <a:rPr lang="en-US" altLang="ko-KR" dirty="0"/>
-              <a:t>TN : </a:t>
-            </a:r>
-            <a:r>
-              <a:rPr lang="ko-KR" altLang="en-US" dirty="0"/>
-              <a:t>예측이 부정</a:t>
-            </a:r>
-            <a:r>
-              <a:rPr lang="en-US" altLang="ko-KR" dirty="0"/>
-              <a:t>, </a:t>
-            </a:r>
-            <a:r>
-              <a:rPr lang="ko-KR" altLang="en-US" dirty="0"/>
-              <a:t>실제가 부정</a:t>
-            </a:r>
-            <a:endParaRPr lang="en-US" altLang="ko-KR" dirty="0"/>
-          </a:p>
-          <a:p>
-            <a:pPr marL="1200150" lvl="2" indent="-285750">
-              <a:buFontTx/>
-              <a:buChar char="-"/>
-            </a:pPr>
-            <a:r>
-              <a:rPr lang="en-US" altLang="ko-KR" dirty="0"/>
-              <a:t>FP : </a:t>
-            </a:r>
-            <a:r>
-              <a:rPr lang="ko-KR" altLang="en-US" dirty="0"/>
-              <a:t>예측이 긍정</a:t>
-            </a:r>
-            <a:r>
-              <a:rPr lang="en-US" altLang="ko-KR" dirty="0"/>
-              <a:t>, </a:t>
-            </a:r>
-            <a:r>
-              <a:rPr lang="ko-KR" altLang="en-US" dirty="0"/>
-              <a:t>실제가 부정</a:t>
-            </a:r>
-            <a:endParaRPr lang="en-US" altLang="ko-KR" dirty="0"/>
-          </a:p>
-          <a:p>
-            <a:pPr marL="1200150" lvl="2" indent="-285750">
-              <a:buFontTx/>
-              <a:buChar char="-"/>
-            </a:pPr>
-            <a:r>
-              <a:rPr lang="en-US" altLang="ko-KR" dirty="0"/>
-              <a:t>FN : </a:t>
-            </a:r>
-            <a:r>
-              <a:rPr lang="ko-KR" altLang="en-US" dirty="0"/>
-              <a:t>예측이 부정</a:t>
-            </a:r>
-            <a:r>
-              <a:rPr lang="en-US" altLang="ko-KR" dirty="0"/>
-              <a:t>, </a:t>
-            </a:r>
-            <a:r>
-              <a:rPr lang="ko-KR" altLang="en-US" dirty="0"/>
-              <a:t>실제가 긍정</a:t>
-            </a:r>
-            <a:endParaRPr lang="en-US" altLang="ko-KR" dirty="0"/>
-          </a:p>
-          <a:p>
-            <a:pPr marL="1200150" lvl="2" indent="-285750">
-              <a:buFontTx/>
-              <a:buChar char="-"/>
-            </a:pPr>
-            <a:r>
-              <a:rPr lang="en-US" altLang="ko-KR" dirty="0"/>
-              <a:t>TP : </a:t>
-            </a:r>
-            <a:r>
-              <a:rPr lang="ko-KR" altLang="en-US" dirty="0"/>
-              <a:t>예측이 긍정</a:t>
-            </a:r>
-            <a:r>
-              <a:rPr lang="en-US" altLang="ko-KR" dirty="0"/>
-              <a:t>, </a:t>
-            </a:r>
-            <a:r>
-              <a:rPr lang="ko-KR" altLang="en-US" dirty="0"/>
-              <a:t>실제가 긍정</a:t>
-            </a:r>
-            <a:endParaRPr lang="en-US" altLang="ko-KR" dirty="0"/>
-          </a:p>
-          <a:p>
-            <a:pPr marL="285750" indent="-285750">
-              <a:buFontTx/>
-              <a:buChar char="-"/>
-            </a:pPr>
-            <a:r>
-              <a:rPr lang="ko-KR" altLang="en-US" dirty="0"/>
-              <a:t>정확도 </a:t>
-            </a:r>
-            <a:endParaRPr lang="en-US" altLang="ko-KR" dirty="0"/>
-          </a:p>
-          <a:p>
-            <a:pPr marL="742950" lvl="1" indent="-285750">
-              <a:buFontTx/>
-              <a:buChar char="-"/>
-            </a:pPr>
-            <a:r>
-              <a:rPr lang="ko-KR" altLang="en-US" dirty="0"/>
-              <a:t>실제의 데이터에서 예측 데이터가 얼마나 같은가 판단</a:t>
-            </a:r>
-            <a:endParaRPr lang="en-US" altLang="ko-KR" dirty="0"/>
-          </a:p>
-          <a:p>
-            <a:pPr marL="742950" lvl="1" indent="-285750">
-              <a:buFontTx/>
-              <a:buChar char="-"/>
-            </a:pPr>
-            <a:r>
-              <a:rPr lang="en-US" altLang="ko-KR" dirty="0"/>
-              <a:t>TN + TP / TN + TP + FP + FN</a:t>
-            </a:r>
-          </a:p>
-          <a:p>
-            <a:pPr marL="285750" indent="-285750">
-              <a:buFontTx/>
-              <a:buChar char="-"/>
-            </a:pPr>
-            <a:r>
-              <a:rPr lang="ko-KR" altLang="en-US" dirty="0"/>
-              <a:t>정밀도</a:t>
-            </a:r>
-            <a:endParaRPr lang="en-US" altLang="ko-KR" dirty="0"/>
-          </a:p>
-          <a:p>
-            <a:pPr marL="742950" lvl="1" indent="-285750">
-              <a:buFontTx/>
-              <a:buChar char="-"/>
-            </a:pPr>
-            <a:r>
-              <a:rPr lang="ko-KR" altLang="en-US" dirty="0"/>
-              <a:t>긍정으로 예측한 것들 중 실제가 긍정인 비율</a:t>
-            </a:r>
-            <a:endParaRPr lang="en-US" altLang="ko-KR" dirty="0"/>
-          </a:p>
-          <a:p>
-            <a:pPr marL="742950" lvl="1" indent="-285750">
-              <a:buFontTx/>
-              <a:buChar char="-"/>
-            </a:pPr>
-            <a:r>
-              <a:rPr lang="en-US" altLang="ko-KR" dirty="0"/>
-              <a:t>TP / TP + FP</a:t>
-            </a:r>
-          </a:p>
-          <a:p>
-            <a:endParaRPr lang="en-US" altLang="ko-KR" dirty="0"/>
-          </a:p>
-        </p:txBody>
-      </p:sp>
+      <mc:AlternateContent xmlns:mc="http://schemas.openxmlformats.org/markup-compatibility/2006">
+        <mc:Choice xmlns:a14="http://schemas.microsoft.com/office/drawing/2010/main" Requires="a14">
+          <p:sp>
+            <p:nvSpPr>
+              <p:cNvPr id="4" name="TextBox 3"/>
+              <p:cNvSpPr txBox="1"/>
+              <p:nvPr/>
+            </p:nvSpPr>
+            <p:spPr>
+              <a:xfrm>
+                <a:off x="971600" y="1700808"/>
+                <a:ext cx="7200800" cy="3748142"/>
+              </a:xfrm>
+              <a:prstGeom prst="rect">
+                <a:avLst/>
+              </a:prstGeom>
+              <a:noFill/>
+            </p:spPr>
+            <p:txBody>
+              <a:bodyPr wrap="square" rtlCol="0">
+                <a:spAutoFit/>
+              </a:bodyPr>
+              <a:lstStyle/>
+              <a:p>
+                <a:pPr marL="285750" indent="-285750">
+                  <a:buFontTx/>
+                  <a:buChar char="-"/>
+                </a:pPr>
+                <a:r>
+                  <a:rPr lang="en-US" altLang="ko-KR" dirty="0"/>
+                  <a:t>R2</a:t>
+                </a:r>
+                <a:r>
+                  <a:rPr lang="ko-KR" altLang="en-US" dirty="0"/>
+                  <a:t> </a:t>
+                </a:r>
+                <a:r>
+                  <a:rPr lang="en-US" altLang="ko-KR" dirty="0"/>
+                  <a:t>score</a:t>
+                </a:r>
+              </a:p>
+              <a:p>
+                <a:pPr algn="just" latinLnBrk="1">
+                  <a:lnSpc>
+                    <a:spcPct val="107000"/>
+                  </a:lnSpc>
+                  <a:spcAft>
+                    <a:spcPts val="800"/>
+                  </a:spcAft>
+                </a:pPr>
+                <a14:m>
+                  <m:oMathPara xmlns:m="http://schemas.openxmlformats.org/officeDocument/2006/math">
+                    <m:oMathParaPr>
+                      <m:jc m:val="centerGroup"/>
+                    </m:oMathParaPr>
+                    <m:oMath xmlns:m="http://schemas.openxmlformats.org/officeDocument/2006/math">
+                      <m:sSup>
+                        <m:sSupPr>
+                          <m:ctrlPr>
+                            <a:rPr lang="ko-KR" altLang="ko-KR" sz="1800" i="1" kern="100" smtClean="0">
+                              <a:effectLst/>
+                              <a:latin typeface="Cambria Math" panose="02040503050406030204" pitchFamily="18" charset="0"/>
+                              <a:ea typeface="Cambria Math" panose="02040503050406030204" pitchFamily="18" charset="0"/>
+                              <a:cs typeface="Times New Roman" panose="02020603050405020304" pitchFamily="18" charset="0"/>
+                            </a:rPr>
+                          </m:ctrlPr>
+                        </m:sSupPr>
+                        <m:e>
+                          <m:r>
+                            <m:rPr>
+                              <m:sty m:val="p"/>
+                            </m:rPr>
+                            <a:rPr lang="en-US" altLang="ko-KR" sz="1800" kern="100">
+                              <a:effectLst/>
+                              <a:latin typeface="Cambria Math" panose="02040503050406030204" pitchFamily="18" charset="0"/>
+                              <a:ea typeface="맑은 고딕" panose="020B0503020000020004" pitchFamily="50" charset="-127"/>
+                              <a:cs typeface="Times New Roman" panose="02020603050405020304" pitchFamily="18" charset="0"/>
+                            </a:rPr>
+                            <m:t>R</m:t>
+                          </m:r>
+                        </m:e>
+                        <m:sup>
+                          <m:r>
+                            <a:rPr lang="en-US" altLang="ko-KR" sz="1800" kern="100">
+                              <a:effectLst/>
+                              <a:latin typeface="Cambria Math" panose="02040503050406030204" pitchFamily="18" charset="0"/>
+                              <a:ea typeface="맑은 고딕" panose="020B0503020000020004" pitchFamily="50" charset="-127"/>
+                              <a:cs typeface="Times New Roman" panose="02020603050405020304" pitchFamily="18" charset="0"/>
+                            </a:rPr>
+                            <m:t>2</m:t>
+                          </m:r>
+                        </m:sup>
+                      </m:sSup>
+                      <m:r>
+                        <a:rPr lang="en-US" altLang="ko-KR" sz="1800" kern="100">
+                          <a:effectLst/>
+                          <a:latin typeface="Cambria Math" panose="02040503050406030204" pitchFamily="18" charset="0"/>
+                          <a:ea typeface="맑은 고딕" panose="020B0503020000020004" pitchFamily="50" charset="-127"/>
+                          <a:cs typeface="Times New Roman" panose="02020603050405020304" pitchFamily="18" charset="0"/>
+                        </a:rPr>
+                        <m:t>=1</m:t>
+                      </m:r>
+                      <m:r>
+                        <a:rPr lang="en-US" altLang="ko-KR" sz="1800" i="1" kern="100">
+                          <a:effectLst/>
+                          <a:latin typeface="Cambria Math" panose="02040503050406030204" pitchFamily="18" charset="0"/>
+                          <a:ea typeface="맑은 고딕" panose="020B0503020000020004" pitchFamily="50" charset="-127"/>
+                          <a:cs typeface="Times New Roman" panose="02020603050405020304" pitchFamily="18" charset="0"/>
+                        </a:rPr>
+                        <m:t>−</m:t>
+                      </m:r>
+                      <m:f>
+                        <m:fPr>
+                          <m:ctrlPr>
+                            <a:rPr lang="ko-KR" altLang="ko-KR" sz="1800" i="1" kern="100">
+                              <a:effectLst/>
+                              <a:latin typeface="Cambria Math" panose="02040503050406030204" pitchFamily="18" charset="0"/>
+                              <a:ea typeface="Cambria Math" panose="02040503050406030204" pitchFamily="18" charset="0"/>
+                              <a:cs typeface="Times New Roman" panose="02020603050405020304" pitchFamily="18" charset="0"/>
+                            </a:rPr>
+                          </m:ctrlPr>
+                        </m:fPr>
+                        <m:num>
+                          <m:nary>
+                            <m:naryPr>
+                              <m:chr m:val="∑"/>
+                              <m:ctrlPr>
+                                <a:rPr lang="ko-KR" altLang="ko-KR" sz="1800" i="1" kern="100">
+                                  <a:effectLst/>
+                                  <a:latin typeface="Cambria Math" panose="02040503050406030204" pitchFamily="18" charset="0"/>
+                                  <a:ea typeface="Cambria Math" panose="02040503050406030204" pitchFamily="18" charset="0"/>
+                                  <a:cs typeface="Times New Roman" panose="02020603050405020304" pitchFamily="18" charset="0"/>
+                                </a:rPr>
+                              </m:ctrlPr>
+                            </m:naryPr>
+                            <m:sub>
+                              <m:r>
+                                <m:rPr>
+                                  <m:sty m:val="p"/>
+                                </m:rPr>
+                                <a:rPr lang="en-US" altLang="ko-KR" sz="1800" kern="100">
+                                  <a:effectLst/>
+                                  <a:latin typeface="Cambria Math" panose="02040503050406030204" pitchFamily="18" charset="0"/>
+                                  <a:ea typeface="맑은 고딕" panose="020B0503020000020004" pitchFamily="50" charset="-127"/>
+                                  <a:cs typeface="Times New Roman" panose="02020603050405020304" pitchFamily="18" charset="0"/>
+                                </a:rPr>
+                                <m:t>i</m:t>
+                              </m:r>
+                              <m:r>
+                                <a:rPr lang="en-US" altLang="ko-KR" sz="1800" kern="100">
+                                  <a:effectLst/>
+                                  <a:latin typeface="Cambria Math" panose="02040503050406030204" pitchFamily="18" charset="0"/>
+                                  <a:ea typeface="맑은 고딕" panose="020B0503020000020004" pitchFamily="50" charset="-127"/>
+                                  <a:cs typeface="Times New Roman" panose="02020603050405020304" pitchFamily="18" charset="0"/>
+                                </a:rPr>
+                                <m:t>=1</m:t>
+                              </m:r>
+                            </m:sub>
+                            <m:sup>
+                              <m:r>
+                                <m:rPr>
+                                  <m:sty m:val="p"/>
+                                </m:rPr>
+                                <a:rPr lang="en-US" altLang="ko-KR" sz="1800" kern="100">
+                                  <a:effectLst/>
+                                  <a:latin typeface="Cambria Math" panose="02040503050406030204" pitchFamily="18" charset="0"/>
+                                  <a:ea typeface="맑은 고딕" panose="020B0503020000020004" pitchFamily="50" charset="-127"/>
+                                  <a:cs typeface="Times New Roman" panose="02020603050405020304" pitchFamily="18" charset="0"/>
+                                </a:rPr>
+                                <m:t>n</m:t>
+                              </m:r>
+                            </m:sup>
+                            <m:e>
+                              <m:sSup>
+                                <m:sSupPr>
+                                  <m:ctrlPr>
+                                    <a:rPr lang="ko-KR" altLang="ko-KR" sz="1800" i="1" kern="100">
+                                      <a:effectLst/>
+                                      <a:latin typeface="Cambria Math" panose="02040503050406030204" pitchFamily="18" charset="0"/>
+                                      <a:ea typeface="Cambria Math" panose="02040503050406030204" pitchFamily="18" charset="0"/>
+                                      <a:cs typeface="Times New Roman" panose="02020603050405020304" pitchFamily="18" charset="0"/>
+                                    </a:rPr>
+                                  </m:ctrlPr>
+                                </m:sSupPr>
+                                <m:e>
+                                  <m:d>
+                                    <m:dPr>
+                                      <m:ctrlPr>
+                                        <a:rPr lang="ko-KR" altLang="ko-KR" sz="1800" i="1" kern="100">
+                                          <a:effectLst/>
+                                          <a:latin typeface="Cambria Math" panose="02040503050406030204" pitchFamily="18" charset="0"/>
+                                          <a:ea typeface="Cambria Math" panose="02040503050406030204" pitchFamily="18" charset="0"/>
+                                          <a:cs typeface="Times New Roman" panose="02020603050405020304" pitchFamily="18" charset="0"/>
+                                        </a:rPr>
+                                      </m:ctrlPr>
+                                    </m:dPr>
+                                    <m:e>
+                                      <m:sSub>
+                                        <m:sSubPr>
+                                          <m:ctrlPr>
+                                            <a:rPr lang="ko-KR" altLang="ko-KR" sz="1800" i="1" kern="100">
+                                              <a:effectLst/>
+                                              <a:latin typeface="Cambria Math" panose="02040503050406030204" pitchFamily="18" charset="0"/>
+                                              <a:ea typeface="Cambria Math" panose="02040503050406030204" pitchFamily="18" charset="0"/>
+                                              <a:cs typeface="Times New Roman" panose="02020603050405020304" pitchFamily="18" charset="0"/>
+                                            </a:rPr>
+                                          </m:ctrlPr>
+                                        </m:sSubPr>
+                                        <m:e>
+                                          <m:r>
+                                            <m:rPr>
+                                              <m:sty m:val="p"/>
+                                            </m:rPr>
+                                            <a:rPr lang="en-US" altLang="ko-KR" sz="1800" kern="100">
+                                              <a:effectLst/>
+                                              <a:latin typeface="Cambria Math" panose="02040503050406030204" pitchFamily="18" charset="0"/>
+                                              <a:ea typeface="맑은 고딕" panose="020B0503020000020004" pitchFamily="50" charset="-127"/>
+                                              <a:cs typeface="Times New Roman" panose="02020603050405020304" pitchFamily="18" charset="0"/>
+                                            </a:rPr>
+                                            <m:t>y</m:t>
+                                          </m:r>
+                                        </m:e>
+                                        <m:sub>
+                                          <m:r>
+                                            <m:rPr>
+                                              <m:sty m:val="p"/>
+                                            </m:rPr>
+                                            <a:rPr lang="en-US" altLang="ko-KR" sz="1800" kern="100">
+                                              <a:effectLst/>
+                                              <a:latin typeface="Cambria Math" panose="02040503050406030204" pitchFamily="18" charset="0"/>
+                                              <a:ea typeface="맑은 고딕" panose="020B0503020000020004" pitchFamily="50" charset="-127"/>
+                                              <a:cs typeface="Times New Roman" panose="02020603050405020304" pitchFamily="18" charset="0"/>
+                                            </a:rPr>
+                                            <m:t>i</m:t>
+                                          </m:r>
+                                        </m:sub>
+                                      </m:sSub>
+                                      <m:r>
+                                        <a:rPr lang="en-US" altLang="ko-KR" sz="1800" i="1" kern="100">
+                                          <a:effectLst/>
+                                          <a:latin typeface="Cambria Math" panose="02040503050406030204" pitchFamily="18" charset="0"/>
+                                          <a:ea typeface="맑은 고딕" panose="020B0503020000020004" pitchFamily="50" charset="-127"/>
+                                          <a:cs typeface="Times New Roman" panose="02020603050405020304" pitchFamily="18" charset="0"/>
+                                        </a:rPr>
+                                        <m:t>−</m:t>
+                                      </m:r>
+                                      <m:acc>
+                                        <m:accPr>
+                                          <m:chr m:val="̂"/>
+                                          <m:ctrlPr>
+                                            <a:rPr lang="ko-KR" altLang="ko-KR" sz="1800" i="1" kern="100">
+                                              <a:effectLst/>
+                                              <a:latin typeface="Cambria Math" panose="02040503050406030204" pitchFamily="18" charset="0"/>
+                                              <a:ea typeface="Cambria Math" panose="02040503050406030204" pitchFamily="18" charset="0"/>
+                                              <a:cs typeface="Times New Roman" panose="02020603050405020304" pitchFamily="18" charset="0"/>
+                                            </a:rPr>
+                                          </m:ctrlPr>
+                                        </m:accPr>
+                                        <m:e>
+                                          <m:sSub>
+                                            <m:sSubPr>
+                                              <m:ctrlPr>
+                                                <a:rPr lang="ko-KR" altLang="ko-KR" sz="1800" i="1" kern="100">
+                                                  <a:effectLst/>
+                                                  <a:latin typeface="Cambria Math" panose="02040503050406030204" pitchFamily="18" charset="0"/>
+                                                  <a:ea typeface="Cambria Math" panose="02040503050406030204" pitchFamily="18" charset="0"/>
+                                                  <a:cs typeface="Times New Roman" panose="02020603050405020304" pitchFamily="18" charset="0"/>
+                                                </a:rPr>
+                                              </m:ctrlPr>
+                                            </m:sSubPr>
+                                            <m:e>
+                                              <m:r>
+                                                <m:rPr>
+                                                  <m:sty m:val="p"/>
+                                                </m:rPr>
+                                                <a:rPr lang="en-US" altLang="ko-KR" sz="1800" kern="100">
+                                                  <a:effectLst/>
+                                                  <a:latin typeface="Cambria Math" panose="02040503050406030204" pitchFamily="18" charset="0"/>
+                                                  <a:ea typeface="맑은 고딕" panose="020B0503020000020004" pitchFamily="50" charset="-127"/>
+                                                  <a:cs typeface="Times New Roman" panose="02020603050405020304" pitchFamily="18" charset="0"/>
+                                                </a:rPr>
+                                                <m:t>y</m:t>
+                                              </m:r>
+                                            </m:e>
+                                            <m:sub>
+                                              <m:r>
+                                                <m:rPr>
+                                                  <m:sty m:val="p"/>
+                                                </m:rPr>
+                                                <a:rPr lang="en-US" altLang="ko-KR" sz="1800" kern="100">
+                                                  <a:effectLst/>
+                                                  <a:latin typeface="Cambria Math" panose="02040503050406030204" pitchFamily="18" charset="0"/>
+                                                  <a:ea typeface="맑은 고딕" panose="020B0503020000020004" pitchFamily="50" charset="-127"/>
+                                                  <a:cs typeface="Times New Roman" panose="02020603050405020304" pitchFamily="18" charset="0"/>
+                                                </a:rPr>
+                                                <m:t>i</m:t>
+                                              </m:r>
+                                            </m:sub>
+                                          </m:sSub>
+                                        </m:e>
+                                      </m:acc>
+                                    </m:e>
+                                  </m:d>
+                                </m:e>
+                                <m:sup>
+                                  <m:r>
+                                    <a:rPr lang="en-US" altLang="ko-KR" sz="1800" kern="100">
+                                      <a:effectLst/>
+                                      <a:latin typeface="Cambria Math" panose="02040503050406030204" pitchFamily="18" charset="0"/>
+                                      <a:ea typeface="맑은 고딕" panose="020B0503020000020004" pitchFamily="50" charset="-127"/>
+                                      <a:cs typeface="Times New Roman" panose="02020603050405020304" pitchFamily="18" charset="0"/>
+                                    </a:rPr>
+                                    <m:t>2</m:t>
+                                  </m:r>
+                                </m:sup>
+                              </m:sSup>
+                            </m:e>
+                          </m:nary>
+                        </m:num>
+                        <m:den>
+                          <m:nary>
+                            <m:naryPr>
+                              <m:chr m:val="∑"/>
+                              <m:ctrlPr>
+                                <a:rPr lang="ko-KR" altLang="ko-KR" sz="1800" i="1" kern="100">
+                                  <a:effectLst/>
+                                  <a:latin typeface="Cambria Math" panose="02040503050406030204" pitchFamily="18" charset="0"/>
+                                  <a:ea typeface="Cambria Math" panose="02040503050406030204" pitchFamily="18" charset="0"/>
+                                  <a:cs typeface="Times New Roman" panose="02020603050405020304" pitchFamily="18" charset="0"/>
+                                </a:rPr>
+                              </m:ctrlPr>
+                            </m:naryPr>
+                            <m:sub>
+                              <m:r>
+                                <m:rPr>
+                                  <m:sty m:val="p"/>
+                                </m:rPr>
+                                <a:rPr lang="en-US" altLang="ko-KR" sz="1800" kern="100">
+                                  <a:effectLst/>
+                                  <a:latin typeface="Cambria Math" panose="02040503050406030204" pitchFamily="18" charset="0"/>
+                                  <a:ea typeface="맑은 고딕" panose="020B0503020000020004" pitchFamily="50" charset="-127"/>
+                                  <a:cs typeface="Times New Roman" panose="02020603050405020304" pitchFamily="18" charset="0"/>
+                                </a:rPr>
+                                <m:t>i</m:t>
+                              </m:r>
+                              <m:r>
+                                <a:rPr lang="en-US" altLang="ko-KR" sz="1800" kern="100">
+                                  <a:effectLst/>
+                                  <a:latin typeface="Cambria Math" panose="02040503050406030204" pitchFamily="18" charset="0"/>
+                                  <a:ea typeface="맑은 고딕" panose="020B0503020000020004" pitchFamily="50" charset="-127"/>
+                                  <a:cs typeface="Times New Roman" panose="02020603050405020304" pitchFamily="18" charset="0"/>
+                                </a:rPr>
+                                <m:t>=1</m:t>
+                              </m:r>
+                            </m:sub>
+                            <m:sup>
+                              <m:r>
+                                <m:rPr>
+                                  <m:sty m:val="p"/>
+                                </m:rPr>
+                                <a:rPr lang="en-US" altLang="ko-KR" sz="1800" kern="100">
+                                  <a:effectLst/>
+                                  <a:latin typeface="Cambria Math" panose="02040503050406030204" pitchFamily="18" charset="0"/>
+                                  <a:ea typeface="맑은 고딕" panose="020B0503020000020004" pitchFamily="50" charset="-127"/>
+                                  <a:cs typeface="Times New Roman" panose="02020603050405020304" pitchFamily="18" charset="0"/>
+                                </a:rPr>
+                                <m:t>n</m:t>
+                              </m:r>
+                            </m:sup>
+                            <m:e>
+                              <m:sSup>
+                                <m:sSupPr>
+                                  <m:ctrlPr>
+                                    <a:rPr lang="ko-KR" altLang="ko-KR" sz="1800" i="1" kern="100">
+                                      <a:effectLst/>
+                                      <a:latin typeface="Cambria Math" panose="02040503050406030204" pitchFamily="18" charset="0"/>
+                                      <a:ea typeface="Cambria Math" panose="02040503050406030204" pitchFamily="18" charset="0"/>
+                                      <a:cs typeface="Times New Roman" panose="02020603050405020304" pitchFamily="18" charset="0"/>
+                                    </a:rPr>
+                                  </m:ctrlPr>
+                                </m:sSupPr>
+                                <m:e>
+                                  <m:d>
+                                    <m:dPr>
+                                      <m:ctrlPr>
+                                        <a:rPr lang="ko-KR" altLang="ko-KR" sz="1800" i="1" kern="100">
+                                          <a:effectLst/>
+                                          <a:latin typeface="Cambria Math" panose="02040503050406030204" pitchFamily="18" charset="0"/>
+                                          <a:ea typeface="Cambria Math" panose="02040503050406030204" pitchFamily="18" charset="0"/>
+                                          <a:cs typeface="Times New Roman" panose="02020603050405020304" pitchFamily="18" charset="0"/>
+                                        </a:rPr>
+                                      </m:ctrlPr>
+                                    </m:dPr>
+                                    <m:e>
+                                      <m:sSub>
+                                        <m:sSubPr>
+                                          <m:ctrlPr>
+                                            <a:rPr lang="ko-KR" altLang="ko-KR" sz="1800" i="1" kern="100">
+                                              <a:effectLst/>
+                                              <a:latin typeface="Cambria Math" panose="02040503050406030204" pitchFamily="18" charset="0"/>
+                                              <a:ea typeface="Cambria Math" panose="02040503050406030204" pitchFamily="18" charset="0"/>
+                                              <a:cs typeface="Times New Roman" panose="02020603050405020304" pitchFamily="18" charset="0"/>
+                                            </a:rPr>
+                                          </m:ctrlPr>
+                                        </m:sSubPr>
+                                        <m:e>
+                                          <m:r>
+                                            <m:rPr>
+                                              <m:sty m:val="p"/>
+                                            </m:rPr>
+                                            <a:rPr lang="en-US" altLang="ko-KR" sz="1800" kern="100">
+                                              <a:effectLst/>
+                                              <a:latin typeface="Cambria Math" panose="02040503050406030204" pitchFamily="18" charset="0"/>
+                                              <a:ea typeface="맑은 고딕" panose="020B0503020000020004" pitchFamily="50" charset="-127"/>
+                                              <a:cs typeface="Times New Roman" panose="02020603050405020304" pitchFamily="18" charset="0"/>
+                                            </a:rPr>
+                                            <m:t>y</m:t>
+                                          </m:r>
+                                        </m:e>
+                                        <m:sub>
+                                          <m:r>
+                                            <m:rPr>
+                                              <m:sty m:val="p"/>
+                                            </m:rPr>
+                                            <a:rPr lang="en-US" altLang="ko-KR" sz="1800" kern="100">
+                                              <a:effectLst/>
+                                              <a:latin typeface="Cambria Math" panose="02040503050406030204" pitchFamily="18" charset="0"/>
+                                              <a:ea typeface="맑은 고딕" panose="020B0503020000020004" pitchFamily="50" charset="-127"/>
+                                              <a:cs typeface="Times New Roman" panose="02020603050405020304" pitchFamily="18" charset="0"/>
+                                            </a:rPr>
+                                            <m:t>i</m:t>
+                                          </m:r>
+                                        </m:sub>
+                                      </m:sSub>
+                                      <m:r>
+                                        <a:rPr lang="en-US" altLang="ko-KR" sz="1800" i="1" kern="100">
+                                          <a:effectLst/>
+                                          <a:latin typeface="Cambria Math" panose="02040503050406030204" pitchFamily="18" charset="0"/>
+                                          <a:ea typeface="맑은 고딕" panose="020B0503020000020004" pitchFamily="50" charset="-127"/>
+                                          <a:cs typeface="Times New Roman" panose="02020603050405020304" pitchFamily="18" charset="0"/>
+                                        </a:rPr>
+                                        <m:t>−</m:t>
+                                      </m:r>
+                                      <m:acc>
+                                        <m:accPr>
+                                          <m:chr m:val="̅"/>
+                                          <m:ctrlPr>
+                                            <a:rPr lang="ko-KR" altLang="ko-KR" sz="1800" i="1" kern="100">
+                                              <a:effectLst/>
+                                              <a:latin typeface="Cambria Math" panose="02040503050406030204" pitchFamily="18" charset="0"/>
+                                              <a:ea typeface="Cambria Math" panose="02040503050406030204" pitchFamily="18" charset="0"/>
+                                              <a:cs typeface="Times New Roman" panose="02020603050405020304" pitchFamily="18" charset="0"/>
+                                            </a:rPr>
+                                          </m:ctrlPr>
+                                        </m:accPr>
+                                        <m:e>
+                                          <m:r>
+                                            <m:rPr>
+                                              <m:sty m:val="p"/>
+                                            </m:rPr>
+                                            <a:rPr lang="en-US" altLang="ko-KR" sz="1800" kern="100">
+                                              <a:effectLst/>
+                                              <a:latin typeface="Cambria Math" panose="02040503050406030204" pitchFamily="18" charset="0"/>
+                                              <a:ea typeface="맑은 고딕" panose="020B0503020000020004" pitchFamily="50" charset="-127"/>
+                                              <a:cs typeface="Times New Roman" panose="02020603050405020304" pitchFamily="18" charset="0"/>
+                                            </a:rPr>
+                                            <m:t>y</m:t>
+                                          </m:r>
+                                        </m:e>
+                                      </m:acc>
+                                    </m:e>
+                                  </m:d>
+                                </m:e>
+                                <m:sup>
+                                  <m:r>
+                                    <a:rPr lang="en-US" altLang="ko-KR" sz="1800" kern="100">
+                                      <a:effectLst/>
+                                      <a:latin typeface="Cambria Math" panose="02040503050406030204" pitchFamily="18" charset="0"/>
+                                      <a:ea typeface="맑은 고딕" panose="020B0503020000020004" pitchFamily="50" charset="-127"/>
+                                      <a:cs typeface="Times New Roman" panose="02020603050405020304" pitchFamily="18" charset="0"/>
+                                    </a:rPr>
+                                    <m:t>2</m:t>
+                                  </m:r>
+                                </m:sup>
+                              </m:sSup>
+                            </m:e>
+                          </m:nary>
+                        </m:den>
+                      </m:f>
+                      <m:r>
+                        <a:rPr lang="en-US" altLang="ko-KR" sz="1800" kern="100" smtClean="0">
+                          <a:effectLst/>
+                          <a:latin typeface="Cambria Math" panose="02040503050406030204" pitchFamily="18" charset="0"/>
+                          <a:ea typeface="맑은 고딕" panose="020B0503020000020004" pitchFamily="50" charset="-127"/>
+                          <a:cs typeface="Times New Roman" panose="02020603050405020304" pitchFamily="18" charset="0"/>
+                        </a:rPr>
+                        <m:t>=1</m:t>
+                      </m:r>
+                      <m:r>
+                        <a:rPr lang="en-US" altLang="ko-KR" sz="1800" i="1" kern="100">
+                          <a:effectLst/>
+                          <a:latin typeface="Cambria Math" panose="02040503050406030204" pitchFamily="18" charset="0"/>
+                          <a:ea typeface="맑은 고딕" panose="020B0503020000020004" pitchFamily="50" charset="-127"/>
+                          <a:cs typeface="Times New Roman" panose="02020603050405020304" pitchFamily="18" charset="0"/>
+                        </a:rPr>
+                        <m:t>−</m:t>
+                      </m:r>
+                      <m:f>
+                        <m:fPr>
+                          <m:ctrlPr>
+                            <a:rPr lang="ko-KR" altLang="ko-KR" sz="1800" i="1" kern="100">
+                              <a:effectLst/>
+                              <a:latin typeface="Cambria Math" panose="02040503050406030204" pitchFamily="18" charset="0"/>
+                              <a:ea typeface="Cambria Math" panose="02040503050406030204" pitchFamily="18" charset="0"/>
+                              <a:cs typeface="Times New Roman" panose="02020603050405020304" pitchFamily="18" charset="0"/>
+                            </a:rPr>
+                          </m:ctrlPr>
+                        </m:fPr>
+                        <m:num>
+                          <m:r>
+                            <m:rPr>
+                              <m:sty m:val="p"/>
+                            </m:rPr>
+                            <a:rPr lang="en-US" altLang="ko-KR" sz="1800" kern="100">
+                              <a:effectLst/>
+                              <a:latin typeface="Cambria Math" panose="02040503050406030204" pitchFamily="18" charset="0"/>
+                              <a:ea typeface="맑은 고딕" panose="020B0503020000020004" pitchFamily="50" charset="-127"/>
+                              <a:cs typeface="Times New Roman" panose="02020603050405020304" pitchFamily="18" charset="0"/>
+                            </a:rPr>
+                            <m:t>SSE</m:t>
+                          </m:r>
+                        </m:num>
+                        <m:den>
+                          <m:r>
+                            <m:rPr>
+                              <m:sty m:val="p"/>
+                            </m:rPr>
+                            <a:rPr lang="en-US" altLang="ko-KR" sz="1800" kern="100">
+                              <a:effectLst/>
+                              <a:latin typeface="Cambria Math" panose="02040503050406030204" pitchFamily="18" charset="0"/>
+                              <a:ea typeface="맑은 고딕" panose="020B0503020000020004" pitchFamily="50" charset="-127"/>
+                              <a:cs typeface="Times New Roman" panose="02020603050405020304" pitchFamily="18" charset="0"/>
+                            </a:rPr>
+                            <m:t>SST</m:t>
+                          </m:r>
+                        </m:den>
+                      </m:f>
+                    </m:oMath>
+                  </m:oMathPara>
+                </a14:m>
+                <a:endParaRPr lang="ko-KR" altLang="ko-KR" sz="1800" kern="100" dirty="0">
+                  <a:effectLst/>
+                  <a:latin typeface="맑은 고딕" panose="020B0503020000020004" pitchFamily="50" charset="-127"/>
+                  <a:ea typeface="맑은 고딕" panose="020B0503020000020004" pitchFamily="50" charset="-127"/>
+                  <a:cs typeface="Times New Roman" panose="02020603050405020304" pitchFamily="18" charset="0"/>
+                </a:endParaRPr>
+              </a:p>
+              <a:p>
+                <a:pPr algn="just" latinLnBrk="1">
+                  <a:lnSpc>
+                    <a:spcPct val="107000"/>
+                  </a:lnSpc>
+                  <a:spcAft>
+                    <a:spcPts val="800"/>
+                  </a:spcAft>
+                </a:pPr>
+                <a:r>
+                  <a:rPr lang="en-US" altLang="ko-KR" sz="1800" kern="100" dirty="0">
+                    <a:effectLst/>
+                    <a:latin typeface="맑은 고딕" panose="020B0503020000020004" pitchFamily="50" charset="-127"/>
+                    <a:ea typeface="맑은 고딕" panose="020B0503020000020004" pitchFamily="50" charset="-127"/>
+                    <a:cs typeface="Times New Roman" panose="02020603050405020304" pitchFamily="18" charset="0"/>
+                  </a:rPr>
+                  <a:t> </a:t>
+                </a:r>
+                <a:endParaRPr lang="ko-KR" altLang="ko-KR" sz="1800" kern="100" dirty="0">
+                  <a:effectLst/>
+                  <a:latin typeface="맑은 고딕" panose="020B0503020000020004" pitchFamily="50" charset="-127"/>
+                  <a:ea typeface="맑은 고딕" panose="020B0503020000020004" pitchFamily="50" charset="-127"/>
+                  <a:cs typeface="Times New Roman" panose="02020603050405020304" pitchFamily="18" charset="0"/>
+                </a:endParaRPr>
+              </a:p>
+              <a:p>
+                <a:pPr marL="285750" indent="-285750">
+                  <a:buFontTx/>
+                  <a:buChar char="-"/>
+                </a:pPr>
+                <a14:m>
+                  <m:oMath xmlns:m="http://schemas.openxmlformats.org/officeDocument/2006/math">
+                    <m:sSub>
+                      <m:sSubPr>
+                        <m:ctrlPr>
+                          <a:rPr lang="ko-KR" altLang="ko-KR" i="1" smtClean="0">
+                            <a:effectLst/>
+                            <a:latin typeface="Cambria Math" panose="02040503050406030204" pitchFamily="18" charset="0"/>
+                            <a:ea typeface="Cambria Math" panose="02040503050406030204" pitchFamily="18" charset="0"/>
+                          </a:rPr>
+                        </m:ctrlPr>
+                      </m:sSubPr>
+                      <m:e>
+                        <m:r>
+                          <m:rPr>
+                            <m:sty m:val="p"/>
+                          </m:rPr>
+                          <a:rPr lang="en-US" altLang="ko-KR" sz="1800">
+                            <a:effectLst/>
+                            <a:latin typeface="Cambria Math" panose="02040503050406030204" pitchFamily="18" charset="0"/>
+                            <a:ea typeface="맑은 고딕" panose="020B0503020000020004" pitchFamily="50" charset="-127"/>
+                            <a:cs typeface="Times New Roman" panose="02020603050405020304" pitchFamily="18" charset="0"/>
+                          </a:rPr>
+                          <m:t>y</m:t>
+                        </m:r>
+                      </m:e>
+                      <m:sub>
+                        <m:r>
+                          <m:rPr>
+                            <m:sty m:val="p"/>
+                          </m:rPr>
+                          <a:rPr lang="en-US" altLang="ko-KR" sz="1800">
+                            <a:effectLst/>
+                            <a:latin typeface="Cambria Math" panose="02040503050406030204" pitchFamily="18" charset="0"/>
+                            <a:ea typeface="맑은 고딕" panose="020B0503020000020004" pitchFamily="50" charset="-127"/>
+                            <a:cs typeface="Times New Roman" panose="02020603050405020304" pitchFamily="18" charset="0"/>
+                          </a:rPr>
+                          <m:t>i</m:t>
+                        </m:r>
+                      </m:sub>
+                    </m:sSub>
+                  </m:oMath>
+                </a14:m>
+                <a:r>
+                  <a:rPr lang="en-US" altLang="ko-KR" dirty="0"/>
+                  <a:t> : </a:t>
+                </a:r>
+                <a:r>
+                  <a:rPr lang="ko-KR" altLang="en-US" dirty="0"/>
+                  <a:t>실제 정답</a:t>
+                </a:r>
+                <a:endParaRPr lang="en-US" altLang="ko-KR" dirty="0"/>
+              </a:p>
+              <a:p>
+                <a:pPr marL="285750" indent="-285750">
+                  <a:buFontTx/>
+                  <a:buChar char="-"/>
+                </a:pPr>
+                <a14:m>
+                  <m:oMath xmlns:m="http://schemas.openxmlformats.org/officeDocument/2006/math">
+                    <m:acc>
+                      <m:accPr>
+                        <m:chr m:val="̅"/>
+                        <m:ctrlPr>
+                          <a:rPr lang="ko-KR" altLang="ko-KR" i="1" smtClean="0">
+                            <a:effectLst/>
+                            <a:latin typeface="Cambria Math" panose="02040503050406030204" pitchFamily="18" charset="0"/>
+                            <a:ea typeface="Cambria Math" panose="02040503050406030204" pitchFamily="18" charset="0"/>
+                          </a:rPr>
+                        </m:ctrlPr>
+                      </m:accPr>
+                      <m:e>
+                        <m:r>
+                          <m:rPr>
+                            <m:sty m:val="p"/>
+                          </m:rPr>
+                          <a:rPr lang="en-US" altLang="ko-KR" sz="1800">
+                            <a:effectLst/>
+                            <a:latin typeface="Cambria Math" panose="02040503050406030204" pitchFamily="18" charset="0"/>
+                            <a:ea typeface="맑은 고딕" panose="020B0503020000020004" pitchFamily="50" charset="-127"/>
+                            <a:cs typeface="Times New Roman" panose="02020603050405020304" pitchFamily="18" charset="0"/>
+                          </a:rPr>
+                          <m:t>y</m:t>
+                        </m:r>
+                      </m:e>
+                    </m:acc>
+                  </m:oMath>
+                </a14:m>
+                <a:r>
+                  <a:rPr lang="en-US" altLang="ko-KR" dirty="0"/>
+                  <a:t> : </a:t>
+                </a:r>
+                <a:r>
+                  <a:rPr lang="ko-KR" altLang="en-US" dirty="0"/>
+                  <a:t>정답들의 평균값 </a:t>
+                </a:r>
+                <a:endParaRPr lang="en-US" altLang="ko-KR" dirty="0"/>
+              </a:p>
+              <a:p>
+                <a:pPr marL="285750" indent="-285750">
+                  <a:buFontTx/>
+                  <a:buChar char="-"/>
+                </a:pPr>
+                <a14:m>
+                  <m:oMath xmlns:m="http://schemas.openxmlformats.org/officeDocument/2006/math">
+                    <m:acc>
+                      <m:accPr>
+                        <m:chr m:val="̂"/>
+                        <m:ctrlPr>
+                          <a:rPr lang="ko-KR" altLang="ko-KR" i="1" smtClean="0">
+                            <a:effectLst/>
+                            <a:latin typeface="Cambria Math" panose="02040503050406030204" pitchFamily="18" charset="0"/>
+                            <a:ea typeface="Cambria Math" panose="02040503050406030204" pitchFamily="18" charset="0"/>
+                          </a:rPr>
+                        </m:ctrlPr>
+                      </m:accPr>
+                      <m:e>
+                        <m:sSub>
+                          <m:sSubPr>
+                            <m:ctrlPr>
+                              <a:rPr lang="ko-KR" altLang="ko-KR" i="1">
+                                <a:effectLst/>
+                                <a:latin typeface="Cambria Math" panose="02040503050406030204" pitchFamily="18" charset="0"/>
+                                <a:ea typeface="Cambria Math" panose="02040503050406030204" pitchFamily="18" charset="0"/>
+                              </a:rPr>
+                            </m:ctrlPr>
+                          </m:sSubPr>
+                          <m:e>
+                            <m:r>
+                              <m:rPr>
+                                <m:sty m:val="p"/>
+                              </m:rPr>
+                              <a:rPr lang="en-US" altLang="ko-KR" sz="1800">
+                                <a:effectLst/>
+                                <a:latin typeface="Cambria Math" panose="02040503050406030204" pitchFamily="18" charset="0"/>
+                                <a:ea typeface="맑은 고딕" panose="020B0503020000020004" pitchFamily="50" charset="-127"/>
+                                <a:cs typeface="Times New Roman" panose="02020603050405020304" pitchFamily="18" charset="0"/>
+                              </a:rPr>
+                              <m:t>y</m:t>
+                            </m:r>
+                          </m:e>
+                          <m:sub>
+                            <m:r>
+                              <m:rPr>
+                                <m:sty m:val="p"/>
+                              </m:rPr>
+                              <a:rPr lang="en-US" altLang="ko-KR" sz="1800">
+                                <a:effectLst/>
+                                <a:latin typeface="Cambria Math" panose="02040503050406030204" pitchFamily="18" charset="0"/>
+                                <a:ea typeface="맑은 고딕" panose="020B0503020000020004" pitchFamily="50" charset="-127"/>
+                                <a:cs typeface="Times New Roman" panose="02020603050405020304" pitchFamily="18" charset="0"/>
+                              </a:rPr>
+                              <m:t>i</m:t>
+                            </m:r>
+                          </m:sub>
+                        </m:sSub>
+                      </m:e>
+                    </m:acc>
+                  </m:oMath>
+                </a14:m>
+                <a:r>
+                  <a:rPr lang="en-US" altLang="ko-KR" dirty="0"/>
+                  <a:t> : </a:t>
+                </a:r>
+                <a:r>
+                  <a:rPr lang="ko-KR" altLang="en-US" dirty="0"/>
+                  <a:t>모델이 예측한 값</a:t>
+                </a:r>
+                <a:endParaRPr lang="en-US" altLang="ko-KR" dirty="0"/>
+              </a:p>
+              <a:p>
+                <a:pPr marL="285750" indent="-285750">
+                  <a:buFontTx/>
+                  <a:buChar char="-"/>
+                </a:pPr>
+                <a:r>
+                  <a:rPr lang="en-US" altLang="ko-KR" dirty="0"/>
+                  <a:t>SSE</a:t>
+                </a:r>
+                <a:r>
+                  <a:rPr lang="ko-KR" altLang="en-US" dirty="0"/>
+                  <a:t> </a:t>
+                </a:r>
+                <a:r>
+                  <a:rPr lang="en-US" altLang="ko-KR" dirty="0"/>
+                  <a:t>:</a:t>
+                </a:r>
+                <a:r>
+                  <a:rPr lang="ko-KR" altLang="en-US" dirty="0"/>
+                  <a:t> 설명하지 못하고 남은 에러</a:t>
+                </a:r>
+                <a:endParaRPr lang="en-US" altLang="ko-KR" dirty="0"/>
+              </a:p>
+              <a:p>
+                <a:pPr marL="285750" indent="-285750">
+                  <a:buFontTx/>
+                  <a:buChar char="-"/>
+                </a:pPr>
+                <a:r>
+                  <a:rPr lang="en-US" altLang="ko-KR" dirty="0"/>
+                  <a:t>SST : </a:t>
+                </a:r>
+                <a:r>
+                  <a:rPr lang="ko-KR" altLang="en-US" dirty="0"/>
+                  <a:t>전체 분산</a:t>
+                </a:r>
+                <a:endParaRPr lang="en-US" altLang="ko-KR" dirty="0"/>
+              </a:p>
+              <a:p>
+                <a:pPr marL="285750" indent="-285750">
+                  <a:buFontTx/>
+                  <a:buChar char="-"/>
+                </a:pPr>
+                <a:endParaRPr lang="en-US" altLang="ko-KR" dirty="0"/>
+              </a:p>
+              <a:p>
+                <a:pPr marL="285750" indent="-285750">
+                  <a:buFontTx/>
+                  <a:buChar char="-"/>
+                </a:pPr>
+                <a:endParaRPr lang="en-US" altLang="ko-KR" dirty="0"/>
+              </a:p>
+              <a:p>
+                <a:pPr marL="285750" indent="-285750">
+                  <a:buFontTx/>
+                  <a:buChar char="-"/>
+                </a:pPr>
+                <a:endParaRPr lang="en-US" altLang="ko-KR" dirty="0"/>
+              </a:p>
+            </p:txBody>
+          </p:sp>
+        </mc:Choice>
+        <mc:Fallback>
+          <p:sp>
+            <p:nvSpPr>
+              <p:cNvPr id="4" name="TextBox 3"/>
+              <p:cNvSpPr txBox="1">
+                <a:spLocks noRot="1" noChangeAspect="1" noMove="1" noResize="1" noEditPoints="1" noAdjustHandles="1" noChangeArrowheads="1" noChangeShapeType="1" noTextEdit="1"/>
+              </p:cNvSpPr>
+              <p:nvPr/>
+            </p:nvSpPr>
+            <p:spPr>
+              <a:xfrm>
+                <a:off x="971600" y="1700808"/>
+                <a:ext cx="7200800" cy="3748142"/>
+              </a:xfrm>
+              <a:prstGeom prst="rect">
+                <a:avLst/>
+              </a:prstGeom>
+              <a:blipFill>
+                <a:blip r:embed="rId3"/>
+                <a:stretch>
+                  <a:fillRect l="-846" t="-1463"/>
+                </a:stretch>
+              </a:blipFill>
+            </p:spPr>
+            <p:txBody>
+              <a:bodyPr/>
+              <a:lstStyle/>
+              <a:p>
+                <a:r>
+                  <a:rPr lang="ko-KR" altLang="en-US">
+                    <a:noFill/>
+                  </a:rPr>
+                  <a:t> </a:t>
+                </a:r>
+              </a:p>
+            </p:txBody>
+          </p:sp>
+        </mc:Fallback>
+      </mc:AlternateContent>
       <p:sp>
         <p:nvSpPr>
           <p:cNvPr id="6" name="TextBox 5"/>
@@ -16092,7 +21121,7 @@
           <a:p>
             <a:r>
               <a:rPr lang="ko-KR" altLang="en-US" sz="2300" dirty="0"/>
-              <a:t>분류 분석의 성능 평가 지표</a:t>
+              <a:t>회귀 분석의 성능 평가 지표</a:t>
             </a:r>
           </a:p>
         </p:txBody>
@@ -16100,7 +21129,7 @@
     </p:spTree>
     <p:extLst>
       <p:ext uri="{BB962C8B-B14F-4D97-AF65-F5344CB8AC3E}">
-        <p14:creationId xmlns:p14="http://schemas.microsoft.com/office/powerpoint/2010/main" val="826815387"/>
+        <p14:creationId xmlns:p14="http://schemas.microsoft.com/office/powerpoint/2010/main" val="35425043"/>
       </p:ext>
     </p:extLst>
   </p:cSld>
@@ -16265,7 +21294,7 @@
         <p:spPr>
           <a:xfrm>
             <a:off x="971600" y="1700955"/>
-            <a:ext cx="7200800" cy="2308324"/>
+            <a:ext cx="7200800" cy="3970318"/>
           </a:xfrm>
           <a:prstGeom prst="rect">
             <a:avLst/>
@@ -16283,8 +21312,8 @@
               <a:buChar char="-"/>
             </a:pPr>
             <a:r>
-              <a:rPr lang="ko-KR" altLang="en-US" dirty="0" err="1"/>
-              <a:t>재현율</a:t>
+              <a:rPr lang="ko-KR" altLang="en-US" dirty="0"/>
+              <a:t>혼동 행렬</a:t>
             </a:r>
             <a:endParaRPr lang="en-US" altLang="ko-KR" dirty="0"/>
           </a:p>
@@ -16295,7 +21324,110 @@
             </a:pPr>
             <a:r>
               <a:rPr lang="ko-KR" altLang="en-US" dirty="0"/>
-              <a:t>실제 긍정인 것들 중 예측이 긍정인 경우</a:t>
+              <a:t>이진 분류에서 예측 오류가 얼마인가 어떠한 유형의 오류가 발생하는지를 나타내는 지표</a:t>
+            </a:r>
+            <a:endParaRPr lang="en-US" altLang="ko-KR" dirty="0"/>
+          </a:p>
+          <a:p>
+            <a:pPr marL="1200150" lvl="2" indent="-285750">
+              <a:buFontTx/>
+              <a:buChar char="-"/>
+            </a:pPr>
+            <a:r>
+              <a:rPr lang="en-US" altLang="ko-KR" dirty="0"/>
+              <a:t>TN : </a:t>
+            </a:r>
+            <a:r>
+              <a:rPr lang="ko-KR" altLang="en-US" dirty="0"/>
+              <a:t>예측이 부정</a:t>
+            </a:r>
+            <a:r>
+              <a:rPr lang="en-US" altLang="ko-KR" dirty="0"/>
+              <a:t>, </a:t>
+            </a:r>
+            <a:r>
+              <a:rPr lang="ko-KR" altLang="en-US" dirty="0"/>
+              <a:t>실제가 부정</a:t>
+            </a:r>
+            <a:endParaRPr lang="en-US" altLang="ko-KR" dirty="0"/>
+          </a:p>
+          <a:p>
+            <a:pPr marL="1200150" lvl="2" indent="-285750">
+              <a:buFontTx/>
+              <a:buChar char="-"/>
+            </a:pPr>
+            <a:r>
+              <a:rPr lang="en-US" altLang="ko-KR" dirty="0"/>
+              <a:t>FP : </a:t>
+            </a:r>
+            <a:r>
+              <a:rPr lang="ko-KR" altLang="en-US" dirty="0"/>
+              <a:t>예측이 긍정</a:t>
+            </a:r>
+            <a:r>
+              <a:rPr lang="en-US" altLang="ko-KR" dirty="0"/>
+              <a:t>, </a:t>
+            </a:r>
+            <a:r>
+              <a:rPr lang="ko-KR" altLang="en-US" dirty="0"/>
+              <a:t>실제가 부정</a:t>
+            </a:r>
+            <a:endParaRPr lang="en-US" altLang="ko-KR" dirty="0"/>
+          </a:p>
+          <a:p>
+            <a:pPr marL="1200150" lvl="2" indent="-285750">
+              <a:buFontTx/>
+              <a:buChar char="-"/>
+            </a:pPr>
+            <a:r>
+              <a:rPr lang="en-US" altLang="ko-KR" dirty="0"/>
+              <a:t>FN : </a:t>
+            </a:r>
+            <a:r>
+              <a:rPr lang="ko-KR" altLang="en-US" dirty="0"/>
+              <a:t>예측이 부정</a:t>
+            </a:r>
+            <a:r>
+              <a:rPr lang="en-US" altLang="ko-KR" dirty="0"/>
+              <a:t>, </a:t>
+            </a:r>
+            <a:r>
+              <a:rPr lang="ko-KR" altLang="en-US" dirty="0"/>
+              <a:t>실제가 긍정</a:t>
+            </a:r>
+            <a:endParaRPr lang="en-US" altLang="ko-KR" dirty="0"/>
+          </a:p>
+          <a:p>
+            <a:pPr marL="1200150" lvl="2" indent="-285750">
+              <a:buFontTx/>
+              <a:buChar char="-"/>
+            </a:pPr>
+            <a:r>
+              <a:rPr lang="en-US" altLang="ko-KR" dirty="0"/>
+              <a:t>TP : </a:t>
+            </a:r>
+            <a:r>
+              <a:rPr lang="ko-KR" altLang="en-US" dirty="0"/>
+              <a:t>예측이 긍정</a:t>
+            </a:r>
+            <a:r>
+              <a:rPr lang="en-US" altLang="ko-KR" dirty="0"/>
+              <a:t>, </a:t>
+            </a:r>
+            <a:r>
+              <a:rPr lang="ko-KR" altLang="en-US" dirty="0"/>
+              <a:t>실제가 긍정</a:t>
+            </a:r>
+            <a:endParaRPr lang="en-US" altLang="ko-KR" dirty="0"/>
+          </a:p>
+          <a:p>
+            <a:pPr marL="285750" indent="-285750">
+              <a:buFontTx/>
+              <a:buChar char="-"/>
+            </a:pPr>
+            <a:r>
+              <a:rPr lang="ko-KR" altLang="en-US" dirty="0"/>
+              <a:t>정확도 </a:t>
             </a:r>
             <a:endParaRPr lang="en-US" altLang="ko-KR" dirty="0"/>
           </a:p>
@@ -16305,8 +21437,19 @@
               <a:buChar char="-"/>
             </a:pPr>
             <a:r>
+              <a:rPr lang="ko-KR" altLang="en-US" dirty="0"/>
+              <a:t>실제의 데이터에서 예측 데이터가 얼마나 같은가 판단</a:t>
+            </a:r>
+            <a:endParaRPr lang="en-US" altLang="ko-KR" dirty="0"/>
+          </a:p>
+          <a:p>
+            <a:pPr marL="742950" lvl="1" indent="-285750">
+              <a:buFontTx/>
+              <a:buChar char="-"/>
+            </a:pPr>
+            <a:r>
               <a:rPr lang="en-US" altLang="ko-KR" dirty="0"/>
-              <a:t>TP / TP + FN</a:t>
+              <a:t>TN + TP / TN + TP + FP + FN</a:t>
             </a:r>
           </a:p>
           <a:p>
@@ -16315,17 +21458,10 @@
               <a:buChar char="-"/>
             </a:pPr>
             <a:r>
-              <a:rPr lang="en-US" altLang="ko-KR" dirty="0"/>
-              <a:t>F1</a:t>
-            </a:r>
-            <a:r>
               <a:rPr lang="ko-KR" altLang="en-US" dirty="0"/>
-              <a:t> </a:t>
-            </a:r>
-            <a:r>
-              <a:rPr lang="en-US" altLang="ko-KR" dirty="0"/>
-              <a:t>score</a:t>
-            </a:r>
+              <a:t>정밀도</a:t>
+            </a:r>
+            <a:endParaRPr lang="en-US" altLang="ko-KR" dirty="0"/>
           </a:p>
           <a:p>
             <a:pPr marL="742950" lvl="1" indent="-285750">
@@ -16334,7 +21470,7 @@
             </a:pPr>
             <a:r>
               <a:rPr lang="ko-KR" altLang="en-US" dirty="0"/>
-              <a:t>정밀도와 재현율을 결합한 분류 성능 지표</a:t>
+              <a:t>긍정으로 예측한 것들 중 실제가 긍정인 비율</a:t>
             </a:r>
             <a:endParaRPr lang="en-US" altLang="ko-KR" dirty="0"/>
           </a:p>
@@ -16344,28 +21480,12 @@
               <a:buChar char="-"/>
             </a:pPr>
             <a:r>
-              <a:rPr lang="ko-KR" altLang="en-US" dirty="0"/>
-              <a:t>정밀도와 </a:t>
-            </a:r>
-            <a:r>
-              <a:rPr lang="ko-KR" altLang="en-US" dirty="0" err="1"/>
-              <a:t>재현율</a:t>
-            </a:r>
-            <a:r>
-              <a:rPr lang="ko-KR" altLang="en-US" dirty="0"/>
-              <a:t> 어느 한쪽으로 치우치지 않고 적절하게 조화를 이룬 경우 높은 수치를 나타냄</a:t>
-            </a:r>
+              <a:rPr lang="en-US" altLang="ko-KR" dirty="0"/>
+              <a:t>TP / TP + FP</a:t>
+            </a:r>
+          </a:p>
+          <a:p>
             <a:endParaRPr lang="en-US" altLang="ko-KR" dirty="0"/>
-          </a:p>
-          <a:p>
-            <a:pPr marL="742950" lvl="1" indent="-285750">
-              <a:buFontTx/>
-              <a:buChar char="-"/>
-            </a:pPr>
-            <a:r>
-              <a:rPr lang="en-US" altLang="ko-KR" dirty="0"/>
-              <a:t>2 * TP / 2 * TP + FP + FN</a:t>
-            </a:r>
           </a:p>
         </p:txBody>
       </p:sp>
@@ -16401,7 +21521,7 @@
     </p:spTree>
     <p:extLst>
       <p:ext uri="{BB962C8B-B14F-4D97-AF65-F5344CB8AC3E}">
-        <p14:creationId xmlns:p14="http://schemas.microsoft.com/office/powerpoint/2010/main" val="1646978234"/>
+        <p14:creationId xmlns:p14="http://schemas.microsoft.com/office/powerpoint/2010/main" val="826815387"/>
       </p:ext>
     </p:extLst>
   </p:cSld>

--- a/PPT/머신러닝.pptx
+++ b/PPT/머신러닝.pptx
@@ -36,13 +36,13 @@
     <p:sldId id="388" r:id="rId27"/>
     <p:sldId id="389" r:id="rId28"/>
     <p:sldId id="390" r:id="rId29"/>
-    <p:sldId id="391" r:id="rId30"/>
-    <p:sldId id="392" r:id="rId31"/>
-    <p:sldId id="395" r:id="rId32"/>
-    <p:sldId id="396" r:id="rId33"/>
-    <p:sldId id="394" r:id="rId34"/>
-    <p:sldId id="393" r:id="rId35"/>
-    <p:sldId id="397" r:id="rId36"/>
+    <p:sldId id="394" r:id="rId30"/>
+    <p:sldId id="393" r:id="rId31"/>
+    <p:sldId id="397" r:id="rId32"/>
+    <p:sldId id="391" r:id="rId33"/>
+    <p:sldId id="392" r:id="rId34"/>
+    <p:sldId id="395" r:id="rId35"/>
+    <p:sldId id="396" r:id="rId36"/>
     <p:sldId id="321" r:id="rId37"/>
   </p:sldIdLst>
   <p:sldSz cx="9144000" cy="6858000" type="screen4x3"/>
@@ -247,7 +247,7 @@
             <a:fld id="{65771C21-3757-4199-83DE-22960358A2A5}" type="datetimeFigureOut">
               <a:rPr lang="ko-KR" altLang="en-US" smtClean="0"/>
               <a:pPr/>
-              <a:t>2026-05-08</a:t>
+              <a:t>2026-05-10</a:t>
             </a:fld>
             <a:endParaRPr lang="ko-KR" altLang="en-US"/>
           </a:p>
@@ -2838,7 +2838,7 @@
     </p:spTree>
     <p:extLst>
       <p:ext uri="{BB962C8B-B14F-4D97-AF65-F5344CB8AC3E}">
-        <p14:creationId xmlns:p14="http://schemas.microsoft.com/office/powerpoint/2010/main" val="2672299156"/>
+        <p14:creationId xmlns:p14="http://schemas.microsoft.com/office/powerpoint/2010/main" val="3986024064"/>
       </p:ext>
     </p:extLst>
   </p:cSld>
@@ -2949,7 +2949,7 @@
     </p:spTree>
     <p:extLst>
       <p:ext uri="{BB962C8B-B14F-4D97-AF65-F5344CB8AC3E}">
-        <p14:creationId xmlns:p14="http://schemas.microsoft.com/office/powerpoint/2010/main" val="1885565503"/>
+        <p14:creationId xmlns:p14="http://schemas.microsoft.com/office/powerpoint/2010/main" val="260924946"/>
       </p:ext>
     </p:extLst>
   </p:cSld>
@@ -3171,7 +3171,7 @@
     </p:spTree>
     <p:extLst>
       <p:ext uri="{BB962C8B-B14F-4D97-AF65-F5344CB8AC3E}">
-        <p14:creationId xmlns:p14="http://schemas.microsoft.com/office/powerpoint/2010/main" val="1531423014"/>
+        <p14:creationId xmlns:p14="http://schemas.microsoft.com/office/powerpoint/2010/main" val="3875560211"/>
       </p:ext>
     </p:extLst>
   </p:cSld>
@@ -3282,7 +3282,7 @@
     </p:spTree>
     <p:extLst>
       <p:ext uri="{BB962C8B-B14F-4D97-AF65-F5344CB8AC3E}">
-        <p14:creationId xmlns:p14="http://schemas.microsoft.com/office/powerpoint/2010/main" val="3517562983"/>
+        <p14:creationId xmlns:p14="http://schemas.microsoft.com/office/powerpoint/2010/main" val="2672299156"/>
       </p:ext>
     </p:extLst>
   </p:cSld>
@@ -3393,7 +3393,7 @@
     </p:spTree>
     <p:extLst>
       <p:ext uri="{BB962C8B-B14F-4D97-AF65-F5344CB8AC3E}">
-        <p14:creationId xmlns:p14="http://schemas.microsoft.com/office/powerpoint/2010/main" val="524456945"/>
+        <p14:creationId xmlns:p14="http://schemas.microsoft.com/office/powerpoint/2010/main" val="1885565503"/>
       </p:ext>
     </p:extLst>
   </p:cSld>
@@ -3504,7 +3504,7 @@
     </p:spTree>
     <p:extLst>
       <p:ext uri="{BB962C8B-B14F-4D97-AF65-F5344CB8AC3E}">
-        <p14:creationId xmlns:p14="http://schemas.microsoft.com/office/powerpoint/2010/main" val="4187978868"/>
+        <p14:creationId xmlns:p14="http://schemas.microsoft.com/office/powerpoint/2010/main" val="1531423014"/>
       </p:ext>
     </p:extLst>
   </p:cSld>
@@ -3615,7 +3615,7 @@
     </p:spTree>
     <p:extLst>
       <p:ext uri="{BB962C8B-B14F-4D97-AF65-F5344CB8AC3E}">
-        <p14:creationId xmlns:p14="http://schemas.microsoft.com/office/powerpoint/2010/main" val="3214566500"/>
+        <p14:creationId xmlns:p14="http://schemas.microsoft.com/office/powerpoint/2010/main" val="3517562983"/>
       </p:ext>
     </p:extLst>
   </p:cSld>
@@ -4582,7 +4582,7 @@
             <a:fld id="{A22FE722-38C7-4231-8BB5-7A27D4E5977D}" type="datetimeFigureOut">
               <a:rPr lang="ko-KR" altLang="en-US" smtClean="0"/>
               <a:pPr/>
-              <a:t>2026-05-08</a:t>
+              <a:t>2026-05-10</a:t>
             </a:fld>
             <a:endParaRPr lang="ko-KR" altLang="en-US"/>
           </a:p>
@@ -4747,7 +4747,7 @@
             <a:fld id="{A22FE722-38C7-4231-8BB5-7A27D4E5977D}" type="datetimeFigureOut">
               <a:rPr lang="ko-KR" altLang="en-US" smtClean="0"/>
               <a:pPr/>
-              <a:t>2026-05-08</a:t>
+              <a:t>2026-05-10</a:t>
             </a:fld>
             <a:endParaRPr lang="ko-KR" altLang="en-US"/>
           </a:p>
@@ -4922,7 +4922,7 @@
             <a:fld id="{A22FE722-38C7-4231-8BB5-7A27D4E5977D}" type="datetimeFigureOut">
               <a:rPr lang="ko-KR" altLang="en-US" smtClean="0"/>
               <a:pPr/>
-              <a:t>2026-05-08</a:t>
+              <a:t>2026-05-10</a:t>
             </a:fld>
             <a:endParaRPr lang="ko-KR" altLang="en-US"/>
           </a:p>
@@ -5087,7 +5087,7 @@
             <a:fld id="{A22FE722-38C7-4231-8BB5-7A27D4E5977D}" type="datetimeFigureOut">
               <a:rPr lang="ko-KR" altLang="en-US" smtClean="0"/>
               <a:pPr/>
-              <a:t>2026-05-08</a:t>
+              <a:t>2026-05-10</a:t>
             </a:fld>
             <a:endParaRPr lang="ko-KR" altLang="en-US"/>
           </a:p>
@@ -5329,7 +5329,7 @@
             <a:fld id="{A22FE722-38C7-4231-8BB5-7A27D4E5977D}" type="datetimeFigureOut">
               <a:rPr lang="ko-KR" altLang="en-US" smtClean="0"/>
               <a:pPr/>
-              <a:t>2026-05-08</a:t>
+              <a:t>2026-05-10</a:t>
             </a:fld>
             <a:endParaRPr lang="ko-KR" altLang="en-US"/>
           </a:p>
@@ -5611,7 +5611,7 @@
             <a:fld id="{A22FE722-38C7-4231-8BB5-7A27D4E5977D}" type="datetimeFigureOut">
               <a:rPr lang="ko-KR" altLang="en-US" smtClean="0"/>
               <a:pPr/>
-              <a:t>2026-05-08</a:t>
+              <a:t>2026-05-10</a:t>
             </a:fld>
             <a:endParaRPr lang="ko-KR" altLang="en-US"/>
           </a:p>
@@ -6027,7 +6027,7 @@
             <a:fld id="{A22FE722-38C7-4231-8BB5-7A27D4E5977D}" type="datetimeFigureOut">
               <a:rPr lang="ko-KR" altLang="en-US" smtClean="0"/>
               <a:pPr/>
-              <a:t>2026-05-08</a:t>
+              <a:t>2026-05-10</a:t>
             </a:fld>
             <a:endParaRPr lang="ko-KR" altLang="en-US"/>
           </a:p>
@@ -6141,7 +6141,7 @@
             <a:fld id="{A22FE722-38C7-4231-8BB5-7A27D4E5977D}" type="datetimeFigureOut">
               <a:rPr lang="ko-KR" altLang="en-US" smtClean="0"/>
               <a:pPr/>
-              <a:t>2026-05-08</a:t>
+              <a:t>2026-05-10</a:t>
             </a:fld>
             <a:endParaRPr lang="ko-KR" altLang="en-US"/>
           </a:p>
@@ -6532,7 +6532,7 @@
             <a:fld id="{A22FE722-38C7-4231-8BB5-7A27D4E5977D}" type="datetimeFigureOut">
               <a:rPr lang="ko-KR" altLang="en-US" smtClean="0"/>
               <a:pPr/>
-              <a:t>2026-05-08</a:t>
+              <a:t>2026-05-10</a:t>
             </a:fld>
             <a:endParaRPr lang="ko-KR" altLang="en-US"/>
           </a:p>
@@ -6781,7 +6781,7 @@
             <a:fld id="{A22FE722-38C7-4231-8BB5-7A27D4E5977D}" type="datetimeFigureOut">
               <a:rPr lang="ko-KR" altLang="en-US" smtClean="0"/>
               <a:pPr/>
-              <a:t>2026-05-08</a:t>
+              <a:t>2026-05-10</a:t>
             </a:fld>
             <a:endParaRPr lang="ko-KR" altLang="en-US"/>
           </a:p>
@@ -6994,7 +6994,7 @@
             <a:fld id="{A22FE722-38C7-4231-8BB5-7A27D4E5977D}" type="datetimeFigureOut">
               <a:rPr lang="ko-KR" altLang="en-US" smtClean="0"/>
               <a:pPr/>
-              <a:t>2026-05-08</a:t>
+              <a:t>2026-05-10</a:t>
             </a:fld>
             <a:endParaRPr lang="ko-KR" altLang="en-US"/>
           </a:p>
@@ -10784,8 +10784,8 @@
           </a:p>
         </p:txBody>
       </p:sp>
-      <mc:AlternateContent xmlns:mc="http://schemas.openxmlformats.org/markup-compatibility/2006">
-        <mc:Choice xmlns:a14="http://schemas.microsoft.com/office/drawing/2010/main" Requires="a14">
+      <mc:AlternateContent xmlns:mc="http://schemas.openxmlformats.org/markup-compatibility/2006" xmlns:a14="http://schemas.microsoft.com/office/drawing/2010/main">
+        <mc:Choice Requires="a14">
           <p:sp>
             <p:nvSpPr>
               <p:cNvPr id="4" name="TextBox 3"/>
@@ -11348,7 +11348,7 @@
             </p:txBody>
           </p:sp>
         </mc:Choice>
-        <mc:Fallback>
+        <mc:Fallback xmlns="">
           <p:sp>
             <p:nvSpPr>
               <p:cNvPr id="4" name="TextBox 3"/>
@@ -11840,8 +11840,8 @@
           </a:p>
         </p:txBody>
       </p:sp>
-      <mc:AlternateContent xmlns:mc="http://schemas.openxmlformats.org/markup-compatibility/2006">
-        <mc:Choice xmlns:a14="http://schemas.microsoft.com/office/drawing/2010/main" Requires="a14">
+      <mc:AlternateContent xmlns:mc="http://schemas.openxmlformats.org/markup-compatibility/2006" xmlns:a14="http://schemas.microsoft.com/office/drawing/2010/main">
+        <mc:Choice Requires="a14">
           <p:sp>
             <p:nvSpPr>
               <p:cNvPr id="4" name="TextBox 3"/>
@@ -12310,7 +12310,9 @@
                       <m:rPr>
                         <m:sty m:val="p"/>
                       </m:rPr>
-                      <a:rPr lang="en-US" altLang="ko-KR"/>
+                      <a:rPr lang="en-US" altLang="ko-KR">
+                        <a:latin typeface="Cambria Math" panose="02040503050406030204" pitchFamily="18" charset="0"/>
+                      </a:rPr>
                       <m:t>α</m:t>
                     </m:r>
                   </m:oMath>
@@ -12348,7 +12350,7 @@
             </p:txBody>
           </p:sp>
         </mc:Choice>
-        <mc:Fallback>
+        <mc:Fallback xmlns="">
           <p:sp>
             <p:nvSpPr>
               <p:cNvPr id="4" name="TextBox 3"/>
@@ -12747,8 +12749,8 @@
           </a:p>
         </p:txBody>
       </p:sp>
-      <mc:AlternateContent xmlns:mc="http://schemas.openxmlformats.org/markup-compatibility/2006">
-        <mc:Choice xmlns:a14="http://schemas.microsoft.com/office/drawing/2010/main" Requires="a14">
+      <mc:AlternateContent xmlns:mc="http://schemas.openxmlformats.org/markup-compatibility/2006" xmlns:a14="http://schemas.microsoft.com/office/drawing/2010/main">
+        <mc:Choice Requires="a14">
           <p:sp>
             <p:nvSpPr>
               <p:cNvPr id="4" name="TextBox 3"/>
@@ -13319,7 +13321,7 @@
             </p:txBody>
           </p:sp>
         </mc:Choice>
-        <mc:Fallback>
+        <mc:Fallback xmlns="">
           <p:sp>
             <p:nvSpPr>
               <p:cNvPr id="4" name="TextBox 3"/>
@@ -13859,8 +13861,8 @@
           </a:p>
         </p:txBody>
       </p:sp>
-      <mc:AlternateContent xmlns:mc="http://schemas.openxmlformats.org/markup-compatibility/2006">
-        <mc:Choice xmlns:a14="http://schemas.microsoft.com/office/drawing/2010/main" Requires="a14">
+      <mc:AlternateContent xmlns:mc="http://schemas.openxmlformats.org/markup-compatibility/2006" xmlns:a14="http://schemas.microsoft.com/office/drawing/2010/main">
+        <mc:Choice Requires="a14">
           <p:sp>
             <p:nvSpPr>
               <p:cNvPr id="4" name="TextBox 3"/>
@@ -14234,7 +14236,7 @@
             </p:txBody>
           </p:sp>
         </mc:Choice>
-        <mc:Fallback>
+        <mc:Fallback xmlns="">
           <p:sp>
             <p:nvSpPr>
               <p:cNvPr id="4" name="TextBox 3"/>
@@ -16262,7 +16264,7 @@
         <p:spPr>
           <a:xfrm>
             <a:off x="971600" y="1700955"/>
-            <a:ext cx="7200800" cy="2308324"/>
+            <a:ext cx="7200800" cy="1754326"/>
           </a:xfrm>
           <a:prstGeom prst="rect">
             <a:avLst/>
@@ -16280,14 +16282,29 @@
               <a:buChar char="-"/>
             </a:pPr>
             <a:r>
+              <a:rPr lang="ko-KR" altLang="en-US" dirty="0"/>
+              <a:t>데이터를 </a:t>
+            </a:r>
+            <a:r>
               <a:rPr lang="en-US" altLang="ko-KR" dirty="0"/>
               <a:t>K</a:t>
             </a:r>
             <a:r>
               <a:rPr lang="ko-KR" altLang="en-US" dirty="0"/>
-              <a:t>개의 그룹으로 자동 분류하는 비지도 학습 알고리즘</a:t>
-            </a:r>
-            <a:endParaRPr lang="en-US" altLang="ko-KR" dirty="0"/>
+              <a:t>개의 동일 크기로 나눔</a:t>
+            </a:r>
+            <a:r>
+              <a:rPr lang="en-US" altLang="ko-KR" dirty="0"/>
+              <a:t>(</a:t>
+            </a:r>
+            <a:r>
+              <a:rPr lang="ko-KR" altLang="en-US" dirty="0" err="1"/>
+              <a:t>폴드화</a:t>
+            </a:r>
+            <a:r>
+              <a:rPr lang="en-US" altLang="ko-KR" dirty="0"/>
+              <a:t>)</a:t>
+            </a:r>
           </a:p>
           <a:p>
             <a:pPr marL="285750" indent="-285750">
@@ -16295,8 +16312,28 @@
               <a:buChar char="-"/>
             </a:pPr>
             <a:r>
+              <a:rPr lang="en-US" altLang="ko-KR" dirty="0"/>
+              <a:t>K</a:t>
+            </a:r>
+            <a:r>
               <a:rPr lang="ko-KR" altLang="en-US" dirty="0"/>
-              <a:t>서로 가까운 데이터를 같은 그룹으로 묶어서 하나의 그룹을 생성</a:t>
+              <a:t>번 반복하여 하나의 </a:t>
+            </a:r>
+            <a:r>
+              <a:rPr lang="ko-KR" altLang="en-US" dirty="0" err="1"/>
+              <a:t>폴드는</a:t>
+            </a:r>
+            <a:r>
+              <a:rPr lang="ko-KR" altLang="en-US" dirty="0"/>
+              <a:t> 검증용으로 사용하고 나머지 </a:t>
+            </a:r>
+            <a:r>
+              <a:rPr lang="ko-KR" altLang="en-US" dirty="0" err="1"/>
+              <a:t>폴드는</a:t>
+            </a:r>
+            <a:r>
+              <a:rPr lang="ko-KR" altLang="en-US" dirty="0"/>
+              <a:t> 학습용으로 사용</a:t>
             </a:r>
             <a:endParaRPr lang="en-US" altLang="ko-KR" dirty="0"/>
           </a:p>
@@ -16307,7 +16344,15 @@
             </a:pPr>
             <a:r>
               <a:rPr lang="ko-KR" altLang="en-US" dirty="0"/>
-              <a:t>그룹의 중신점을 반복적으로 계산하여 군집을 생성</a:t>
+              <a:t>모든 </a:t>
+            </a:r>
+            <a:r>
+              <a:rPr lang="ko-KR" altLang="en-US" dirty="0" err="1"/>
+              <a:t>폴드는</a:t>
+            </a:r>
+            <a:r>
+              <a:rPr lang="ko-KR" altLang="en-US" dirty="0"/>
+              <a:t> 한번은 검증용으로 사용</a:t>
             </a:r>
             <a:endParaRPr lang="en-US" altLang="ko-KR" dirty="0"/>
           </a:p>
@@ -16318,51 +16363,7 @@
             </a:pPr>
             <a:r>
               <a:rPr lang="ko-KR" altLang="en-US" dirty="0"/>
-              <a:t>장점</a:t>
-            </a:r>
-            <a:endParaRPr lang="en-US" altLang="ko-KR" dirty="0"/>
-          </a:p>
-          <a:p>
-            <a:pPr marL="742950" lvl="1" indent="-285750">
-              <a:buFontTx/>
-              <a:buChar char="-"/>
-            </a:pPr>
-            <a:r>
-              <a:rPr lang="ko-KR" altLang="en-US" dirty="0"/>
-              <a:t>빠르고 단순하여 대용량의 데이터에서 적합</a:t>
-            </a:r>
-            <a:endParaRPr lang="en-US" altLang="ko-KR" dirty="0"/>
-          </a:p>
-          <a:p>
-            <a:pPr marL="285750" indent="-285750">
-              <a:buFontTx/>
-              <a:buChar char="-"/>
-            </a:pPr>
-            <a:r>
-              <a:rPr lang="ko-KR" altLang="en-US" dirty="0"/>
-              <a:t>단점</a:t>
-            </a:r>
-            <a:endParaRPr lang="en-US" altLang="ko-KR" dirty="0"/>
-          </a:p>
-          <a:p>
-            <a:pPr marL="742950" lvl="1" indent="-285750">
-              <a:buFontTx/>
-              <a:buChar char="-"/>
-            </a:pPr>
-            <a:r>
-              <a:rPr lang="ko-KR" altLang="en-US" dirty="0"/>
-              <a:t>군집의 수를 미리 알고 작성</a:t>
-            </a:r>
-            <a:endParaRPr lang="en-US" altLang="ko-KR" dirty="0"/>
-          </a:p>
-          <a:p>
-            <a:pPr marL="742950" lvl="1" indent="-285750">
-              <a:buFontTx/>
-              <a:buChar char="-"/>
-            </a:pPr>
-            <a:r>
-              <a:rPr lang="ko-KR" altLang="en-US" dirty="0"/>
-              <a:t>이상치에 민감</a:t>
+              <a:t>데이터의 수가 적을 때 모델의 성능을 안정적으로 평가 할 수 있는 방법</a:t>
             </a:r>
             <a:endParaRPr lang="en-US" altLang="ko-KR" dirty="0"/>
           </a:p>
@@ -16392,7 +16393,7 @@
           <a:p>
             <a:r>
               <a:rPr lang="en-US" altLang="ko-KR" sz="2400" dirty="0"/>
-              <a:t>K-Means</a:t>
+              <a:t>K-fold</a:t>
             </a:r>
             <a:endParaRPr lang="ko-KR" altLang="en-US" sz="2300" dirty="0"/>
           </a:p>
@@ -16401,7 +16402,7 @@
     </p:spTree>
     <p:extLst>
       <p:ext uri="{BB962C8B-B14F-4D97-AF65-F5344CB8AC3E}">
-        <p14:creationId xmlns:p14="http://schemas.microsoft.com/office/powerpoint/2010/main" val="1054204446"/>
+        <p14:creationId xmlns:p14="http://schemas.microsoft.com/office/powerpoint/2010/main" val="4093018507"/>
       </p:ext>
     </p:extLst>
   </p:cSld>
@@ -16794,7 +16795,7 @@
         <p:spPr>
           <a:xfrm>
             <a:off x="971600" y="1700955"/>
-            <a:ext cx="7200800" cy="2031325"/>
+            <a:ext cx="7200800" cy="1200329"/>
           </a:xfrm>
           <a:prstGeom prst="rect">
             <a:avLst/>
@@ -16813,7 +16814,7 @@
             </a:pPr>
             <a:r>
               <a:rPr lang="ko-KR" altLang="en-US" dirty="0"/>
-              <a:t>밀도 기반의 클러스터링 알고리즘</a:t>
+              <a:t>매개변수의 조합을 탐색하여 최적의 조합을 찾는 방법</a:t>
             </a:r>
             <a:endParaRPr lang="en-US" altLang="ko-KR" dirty="0"/>
           </a:p>
@@ -16824,7 +16825,15 @@
             </a:pPr>
             <a:r>
               <a:rPr lang="ko-KR" altLang="en-US" dirty="0"/>
-              <a:t>데이터의 밀도를 이용하여 군집을 생성</a:t>
+              <a:t>각각의 매개변수 조합 별로 학습</a:t>
+            </a:r>
+            <a:r>
+              <a:rPr lang="en-US" altLang="ko-KR" dirty="0"/>
+              <a:t>, </a:t>
+            </a:r>
+            <a:r>
+              <a:rPr lang="ko-KR" altLang="en-US" dirty="0"/>
+              <a:t>검증을 진행</a:t>
             </a:r>
             <a:endParaRPr lang="en-US" altLang="ko-KR" dirty="0"/>
           </a:p>
@@ -16835,59 +16844,7 @@
             </a:pPr>
             <a:r>
               <a:rPr lang="ko-KR" altLang="en-US" dirty="0"/>
-              <a:t>데이터의 밀도가 높은 지역을 하나의 군집으로 생성</a:t>
-            </a:r>
-            <a:endParaRPr lang="en-US" altLang="ko-KR" dirty="0"/>
-          </a:p>
-          <a:p>
-            <a:pPr marL="285750" indent="-285750">
-              <a:buFontTx/>
-              <a:buChar char="-"/>
-            </a:pPr>
-            <a:r>
-              <a:rPr lang="ko-KR" altLang="en-US" dirty="0"/>
-              <a:t>밀도가 낮은 지역을 노이즈로 판단</a:t>
-            </a:r>
-            <a:endParaRPr lang="en-US" altLang="ko-KR" dirty="0"/>
-          </a:p>
-          <a:p>
-            <a:pPr marL="285750" indent="-285750">
-              <a:buFontTx/>
-              <a:buChar char="-"/>
-            </a:pPr>
-            <a:r>
-              <a:rPr lang="en-US" altLang="ko-KR" dirty="0"/>
-              <a:t>K-</a:t>
-            </a:r>
-            <a:r>
-              <a:rPr lang="en-US" altLang="ko-KR" dirty="0" err="1"/>
-              <a:t>Meas</a:t>
-            </a:r>
-            <a:r>
-              <a:rPr lang="ko-KR" altLang="en-US" dirty="0"/>
-              <a:t>와의 다르게 군집의 개수를 지정 하지 않아도 됨</a:t>
-            </a:r>
-            <a:endParaRPr lang="en-US" altLang="ko-KR" dirty="0"/>
-          </a:p>
-          <a:p>
-            <a:pPr marL="285750" indent="-285750">
-              <a:buFontTx/>
-              <a:buChar char="-"/>
-            </a:pPr>
-            <a:r>
-              <a:rPr lang="ko-KR" altLang="en-US" dirty="0"/>
-              <a:t>비선형 구조의 데이터에서도 군집이 형성이 가능</a:t>
-            </a:r>
-            <a:endParaRPr lang="en-US" altLang="ko-KR" dirty="0"/>
-          </a:p>
-          <a:p>
-            <a:pPr marL="285750" indent="-285750">
-              <a:buFontTx/>
-              <a:buChar char="-"/>
-            </a:pPr>
-            <a:r>
-              <a:rPr lang="ko-KR" altLang="en-US" dirty="0"/>
-              <a:t>노이즈를 판단함으로 이상치 자동 감지</a:t>
+              <a:t>매개변수 별 성능을 체크하여 최적의 매개변수의 값을 확인하는 교차 검증</a:t>
             </a:r>
             <a:endParaRPr lang="en-US" altLang="ko-KR" dirty="0"/>
           </a:p>
@@ -16916,8 +16873,8 @@
           <a:lstStyle/>
           <a:p>
             <a:r>
-              <a:rPr lang="en-US" altLang="ko-KR" sz="2400" dirty="0"/>
-              <a:t>DBSCAN</a:t>
+              <a:rPr lang="en-US" altLang="ko-KR" sz="2400" dirty="0" err="1"/>
+              <a:t>GridSerachCV</a:t>
             </a:r>
             <a:endParaRPr lang="ko-KR" altLang="en-US" sz="2300" dirty="0"/>
           </a:p>
@@ -16926,7 +16883,7 @@
     </p:spTree>
     <p:extLst>
       <p:ext uri="{BB962C8B-B14F-4D97-AF65-F5344CB8AC3E}">
-        <p14:creationId xmlns:p14="http://schemas.microsoft.com/office/powerpoint/2010/main" val="3713074351"/>
+        <p14:creationId xmlns:p14="http://schemas.microsoft.com/office/powerpoint/2010/main" val="1332329457"/>
       </p:ext>
     </p:extLst>
   </p:cSld>
@@ -17091,7 +17048,7 @@
         <p:spPr>
           <a:xfrm>
             <a:off x="971600" y="1700955"/>
-            <a:ext cx="7200800" cy="2862322"/>
+            <a:ext cx="7200800" cy="3693319"/>
           </a:xfrm>
           <a:prstGeom prst="rect">
             <a:avLst/>
@@ -17109,8 +17066,12 @@
               <a:buChar char="-"/>
             </a:pPr>
             <a:r>
+              <a:rPr lang="ko-KR" altLang="en-US" dirty="0" err="1"/>
+              <a:t>머신러닝</a:t>
+            </a:r>
+            <a:r>
               <a:rPr lang="ko-KR" altLang="en-US" dirty="0"/>
-              <a:t>차원 축소 기법</a:t>
+              <a:t> 학습 과정을 하나의 연속된 흐름으로 묶는 도구</a:t>
             </a:r>
             <a:endParaRPr lang="en-US" altLang="ko-KR" dirty="0"/>
           </a:p>
@@ -17121,7 +17082,31 @@
             </a:pPr>
             <a:r>
               <a:rPr lang="ko-KR" altLang="en-US" dirty="0"/>
-              <a:t>고차원의 데이터에서 상관 관계가 없는 새로운 축으로 변환 </a:t>
+              <a:t>데이터의 </a:t>
+            </a:r>
+            <a:r>
+              <a:rPr lang="ko-KR" altLang="en-US" dirty="0" err="1"/>
+              <a:t>전처리</a:t>
+            </a:r>
+            <a:r>
+              <a:rPr lang="ko-KR" altLang="en-US" dirty="0"/>
+              <a:t> 과정</a:t>
+            </a:r>
+            <a:r>
+              <a:rPr lang="en-US" altLang="ko-KR" dirty="0"/>
+              <a:t>, </a:t>
+            </a:r>
+            <a:r>
+              <a:rPr lang="ko-KR" altLang="en-US" dirty="0"/>
+              <a:t>모델의 학습</a:t>
+            </a:r>
+            <a:r>
+              <a:rPr lang="en-US" altLang="ko-KR" dirty="0"/>
+              <a:t>, </a:t>
+            </a:r>
+            <a:r>
+              <a:rPr lang="ko-KR" altLang="en-US" dirty="0"/>
+              <a:t>예측 과 같은 흐름을 하나로 연결하는 기능</a:t>
             </a:r>
             <a:endParaRPr lang="en-US" altLang="ko-KR" dirty="0"/>
           </a:p>
@@ -17132,7 +17117,62 @@
             </a:pPr>
             <a:r>
               <a:rPr lang="ko-KR" altLang="en-US" dirty="0"/>
-              <a:t>데이터의 분산을 최대한 보존하면서 차원을 줄여서 시각화에서 주로 사용</a:t>
+              <a:t>장점</a:t>
+            </a:r>
+            <a:endParaRPr lang="en-US" altLang="ko-KR" dirty="0"/>
+          </a:p>
+          <a:p>
+            <a:pPr marL="742950" lvl="1" indent="-285750">
+              <a:buFontTx/>
+              <a:buChar char="-"/>
+            </a:pPr>
+            <a:r>
+              <a:rPr lang="ko-KR" altLang="en-US" dirty="0"/>
+              <a:t>코드의 간결화 및 자동화</a:t>
+            </a:r>
+            <a:endParaRPr lang="en-US" altLang="ko-KR" dirty="0"/>
+          </a:p>
+          <a:p>
+            <a:pPr marL="742950" lvl="1" indent="-285750">
+              <a:buFontTx/>
+              <a:buChar char="-"/>
+            </a:pPr>
+            <a:r>
+              <a:rPr lang="ko-KR" altLang="en-US" dirty="0"/>
+              <a:t>일관성을 유지하여 반복 실험의 결과가 안정적</a:t>
+            </a:r>
+            <a:endParaRPr lang="en-US" altLang="ko-KR" dirty="0"/>
+          </a:p>
+          <a:p>
+            <a:pPr marL="742950" lvl="1" indent="-285750">
+              <a:buFontTx/>
+              <a:buChar char="-"/>
+            </a:pPr>
+            <a:r>
+              <a:rPr lang="ko-KR" altLang="en-US" dirty="0"/>
+              <a:t>재사용성이 높음</a:t>
+            </a:r>
+            <a:endParaRPr lang="en-US" altLang="ko-KR" dirty="0"/>
+          </a:p>
+          <a:p>
+            <a:pPr marL="742950" lvl="1" indent="-285750">
+              <a:buFontTx/>
+              <a:buChar char="-"/>
+            </a:pPr>
+            <a:r>
+              <a:rPr lang="ko-KR" altLang="en-US" dirty="0"/>
+              <a:t>교차 검증과 연동이 용이</a:t>
+            </a:r>
+            <a:endParaRPr lang="en-US" altLang="ko-KR" dirty="0"/>
+          </a:p>
+          <a:p>
+            <a:pPr marL="742950" lvl="1" indent="-285750">
+              <a:buFontTx/>
+              <a:buChar char="-"/>
+            </a:pPr>
+            <a:r>
+              <a:rPr lang="ko-KR" altLang="en-US" dirty="0"/>
+              <a:t>데이터의 누수 방지</a:t>
             </a:r>
             <a:endParaRPr lang="en-US" altLang="ko-KR" dirty="0"/>
           </a:p>
@@ -17143,7 +17183,7 @@
             </a:pPr>
             <a:r>
               <a:rPr lang="ko-KR" altLang="en-US" dirty="0"/>
-              <a:t>장점</a:t>
+              <a:t>단점</a:t>
             </a:r>
             <a:endParaRPr lang="en-US" altLang="ko-KR" dirty="0"/>
           </a:p>
@@ -17154,7 +17194,7 @@
             </a:pPr>
             <a:r>
               <a:rPr lang="ko-KR" altLang="en-US" dirty="0"/>
-              <a:t>차원 축소로 계산의 속도 향상</a:t>
+              <a:t>오류 추적이 어려움</a:t>
             </a:r>
             <a:endParaRPr lang="en-US" altLang="ko-KR" dirty="0"/>
           </a:p>
@@ -17165,18 +17205,7 @@
             </a:pPr>
             <a:r>
               <a:rPr lang="ko-KR" altLang="en-US" dirty="0"/>
-              <a:t>노이즈 제거 효과</a:t>
-            </a:r>
-            <a:endParaRPr lang="en-US" altLang="ko-KR" dirty="0"/>
-          </a:p>
-          <a:p>
-            <a:pPr marL="285750" indent="-285750">
-              <a:buFontTx/>
-              <a:buChar char="-"/>
-            </a:pPr>
-            <a:r>
-              <a:rPr lang="ko-KR" altLang="en-US" dirty="0"/>
-              <a:t>단점</a:t>
+              <a:t>파이프는 순차적으로 진행됨으로 병렬처리에 제약</a:t>
             </a:r>
             <a:endParaRPr lang="en-US" altLang="ko-KR" dirty="0"/>
           </a:p>
@@ -17186,23 +17215,8 @@
               <a:buChar char="-"/>
             </a:pPr>
             <a:r>
-              <a:rPr lang="ko-KR" altLang="en-US" dirty="0"/>
-              <a:t>해석이 </a:t>
-            </a:r>
-            <a:r>
-              <a:rPr lang="ko-KR" altLang="en-US" dirty="0" err="1"/>
-              <a:t>어려워짐</a:t>
-            </a:r>
-            <a:endParaRPr lang="en-US" altLang="ko-KR" dirty="0"/>
-          </a:p>
-          <a:p>
-            <a:pPr marL="742950" lvl="1" indent="-285750">
-              <a:buFontTx/>
-              <a:buChar char="-"/>
-            </a:pPr>
-            <a:r>
-              <a:rPr lang="ko-KR" altLang="en-US" dirty="0"/>
-              <a:t>비선형 구조에서는 부적합</a:t>
+              <a:rPr lang="ko-KR" altLang="en-US"/>
+              <a:t>학습 시간의 증가 </a:t>
             </a:r>
             <a:endParaRPr lang="en-US" altLang="ko-KR" dirty="0"/>
           </a:p>
@@ -17232,7 +17246,7 @@
           <a:p>
             <a:r>
               <a:rPr lang="en-US" altLang="ko-KR" sz="2400" dirty="0"/>
-              <a:t>PCA</a:t>
+              <a:t>Pipeline</a:t>
             </a:r>
             <a:endParaRPr lang="ko-KR" altLang="en-US" sz="2300" dirty="0"/>
           </a:p>
@@ -17241,7 +17255,7 @@
     </p:spTree>
     <p:extLst>
       <p:ext uri="{BB962C8B-B14F-4D97-AF65-F5344CB8AC3E}">
-        <p14:creationId xmlns:p14="http://schemas.microsoft.com/office/powerpoint/2010/main" val="1106478625"/>
+        <p14:creationId xmlns:p14="http://schemas.microsoft.com/office/powerpoint/2010/main" val="1866752627"/>
       </p:ext>
     </p:extLst>
   </p:cSld>
@@ -17406,7 +17420,7 @@
         <p:spPr>
           <a:xfrm>
             <a:off x="971600" y="1700955"/>
-            <a:ext cx="7200800" cy="3139321"/>
+            <a:ext cx="7200800" cy="2308324"/>
           </a:xfrm>
           <a:prstGeom prst="rect">
             <a:avLst/>
@@ -17424,8 +17438,12 @@
               <a:buChar char="-"/>
             </a:pPr>
             <a:r>
+              <a:rPr lang="en-US" altLang="ko-KR" dirty="0"/>
+              <a:t>K</a:t>
+            </a:r>
+            <a:r>
               <a:rPr lang="ko-KR" altLang="en-US" dirty="0"/>
-              <a:t>차원 축소 기법</a:t>
+              <a:t>개의 그룹으로 자동 분류하는 비지도 학습 알고리즘</a:t>
             </a:r>
             <a:endParaRPr lang="en-US" altLang="ko-KR" dirty="0"/>
           </a:p>
@@ -17436,23 +17454,7 @@
             </a:pPr>
             <a:r>
               <a:rPr lang="ko-KR" altLang="en-US" dirty="0"/>
-              <a:t>고차원의 데이터를</a:t>
-            </a:r>
-            <a:r>
-              <a:rPr lang="en-US" altLang="ko-KR" dirty="0"/>
-              <a:t> 2</a:t>
-            </a:r>
-            <a:r>
-              <a:rPr lang="ko-KR" altLang="en-US" dirty="0"/>
-              <a:t>차원이나 </a:t>
-            </a:r>
-            <a:r>
-              <a:rPr lang="en-US" altLang="ko-KR" dirty="0"/>
-              <a:t>3</a:t>
-            </a:r>
-            <a:r>
-              <a:rPr lang="ko-KR" altLang="en-US" dirty="0"/>
-              <a:t>차원으로 시각화 하기 위한 비선형 차원 축소 기법</a:t>
+              <a:t>서로 가까운 데이터를 같은 그룹으로 묶어서 하나의 그룹을 생성</a:t>
             </a:r>
             <a:endParaRPr lang="en-US" altLang="ko-KR" dirty="0"/>
           </a:p>
@@ -17463,23 +17465,7 @@
             </a:pPr>
             <a:r>
               <a:rPr lang="ko-KR" altLang="en-US" dirty="0"/>
-              <a:t>데이터 간의 거리 유사도를 최대한 유지하면서 </a:t>
-            </a:r>
-            <a:r>
-              <a:rPr lang="en-US" altLang="ko-KR" dirty="0"/>
-              <a:t>2</a:t>
-            </a:r>
-            <a:r>
-              <a:rPr lang="ko-KR" altLang="en-US" dirty="0"/>
-              <a:t>차원이나 </a:t>
-            </a:r>
-            <a:r>
-              <a:rPr lang="en-US" altLang="ko-KR" dirty="0"/>
-              <a:t>3</a:t>
-            </a:r>
-            <a:r>
-              <a:rPr lang="ko-KR" altLang="en-US" dirty="0"/>
-              <a:t>차원 공간으로 표현</a:t>
+              <a:t>그룹의 중신점을 반복적으로 계산하여 군집을 생성</a:t>
             </a:r>
             <a:endParaRPr lang="en-US" altLang="ko-KR" dirty="0"/>
           </a:p>
@@ -17501,7 +17487,18 @@
             </a:pPr>
             <a:r>
               <a:rPr lang="ko-KR" altLang="en-US" dirty="0"/>
-              <a:t>고차원 데이터의 구조를 시각적으로 이해 가능</a:t>
+              <a:t>빠르고 단순하여 대용량의 데이터에서 적합</a:t>
+            </a:r>
+            <a:endParaRPr lang="en-US" altLang="ko-KR" dirty="0"/>
+          </a:p>
+          <a:p>
+            <a:pPr marL="285750" indent="-285750">
+              <a:buFontTx/>
+              <a:buChar char="-"/>
+            </a:pPr>
+            <a:r>
+              <a:rPr lang="ko-KR" altLang="en-US" dirty="0"/>
+              <a:t>단점</a:t>
             </a:r>
             <a:endParaRPr lang="en-US" altLang="ko-KR" dirty="0"/>
           </a:p>
@@ -17512,18 +17509,7 @@
             </a:pPr>
             <a:r>
               <a:rPr lang="ko-KR" altLang="en-US" dirty="0"/>
-              <a:t>비선형 관계 표현력 높음 </a:t>
-            </a:r>
-            <a:endParaRPr lang="en-US" altLang="ko-KR" dirty="0"/>
-          </a:p>
-          <a:p>
-            <a:pPr marL="285750" indent="-285750">
-              <a:buFontTx/>
-              <a:buChar char="-"/>
-            </a:pPr>
-            <a:r>
-              <a:rPr lang="ko-KR" altLang="en-US" dirty="0"/>
-              <a:t>단점</a:t>
+              <a:t>군집의 수를 미리 알고 작성</a:t>
             </a:r>
             <a:endParaRPr lang="en-US" altLang="ko-KR" dirty="0"/>
           </a:p>
@@ -17533,23 +17519,8 @@
               <a:buChar char="-"/>
             </a:pPr>
             <a:r>
-              <a:rPr lang="ko-KR" altLang="en-US" dirty="0" err="1"/>
-              <a:t>계산량이</a:t>
-            </a:r>
-            <a:r>
               <a:rPr lang="ko-KR" altLang="en-US" dirty="0"/>
-              <a:t> 많기 때문에 느림</a:t>
-            </a:r>
-            <a:endParaRPr lang="en-US" altLang="ko-KR" dirty="0"/>
-          </a:p>
-          <a:p>
-            <a:pPr marL="742950" lvl="1" indent="-285750">
-              <a:buFontTx/>
-              <a:buChar char="-"/>
-            </a:pPr>
-            <a:r>
-              <a:rPr lang="ko-KR" altLang="en-US" dirty="0"/>
-              <a:t>축소된 좌표 자체는 해석이 불가능</a:t>
+              <a:t>이상치에 민감</a:t>
             </a:r>
             <a:endParaRPr lang="en-US" altLang="ko-KR" dirty="0"/>
           </a:p>
@@ -17579,7 +17550,7 @@
           <a:p>
             <a:r>
               <a:rPr lang="en-US" altLang="ko-KR" sz="2400" dirty="0"/>
-              <a:t>t-SNE</a:t>
+              <a:t>K-Means</a:t>
             </a:r>
             <a:endParaRPr lang="ko-KR" altLang="en-US" sz="2300" dirty="0"/>
           </a:p>
@@ -17588,7 +17559,7 @@
     </p:spTree>
     <p:extLst>
       <p:ext uri="{BB962C8B-B14F-4D97-AF65-F5344CB8AC3E}">
-        <p14:creationId xmlns:p14="http://schemas.microsoft.com/office/powerpoint/2010/main" val="2741370986"/>
+        <p14:creationId xmlns:p14="http://schemas.microsoft.com/office/powerpoint/2010/main" val="1054204446"/>
       </p:ext>
     </p:extLst>
   </p:cSld>
@@ -17753,7 +17724,7 @@
         <p:spPr>
           <a:xfrm>
             <a:off x="971600" y="1700955"/>
-            <a:ext cx="7200800" cy="1754326"/>
+            <a:ext cx="7200800" cy="2031325"/>
           </a:xfrm>
           <a:prstGeom prst="rect">
             <a:avLst/>
@@ -17772,28 +17743,9 @@
             </a:pPr>
             <a:r>
               <a:rPr lang="ko-KR" altLang="en-US" dirty="0"/>
-              <a:t>데이터를 </a:t>
-            </a:r>
-            <a:r>
-              <a:rPr lang="en-US" altLang="ko-KR" dirty="0"/>
-              <a:t>K</a:t>
-            </a:r>
-            <a:r>
-              <a:rPr lang="ko-KR" altLang="en-US" dirty="0"/>
-              <a:t>개의 동일 크기로 나눔</a:t>
-            </a:r>
-            <a:r>
-              <a:rPr lang="en-US" altLang="ko-KR" dirty="0"/>
-              <a:t>(</a:t>
-            </a:r>
-            <a:r>
-              <a:rPr lang="ko-KR" altLang="en-US" dirty="0" err="1"/>
-              <a:t>폴드화</a:t>
-            </a:r>
-            <a:r>
-              <a:rPr lang="en-US" altLang="ko-KR" dirty="0"/>
-              <a:t>)</a:t>
-            </a:r>
+              <a:t>밀도 기반의 클러스터링 알고리즘</a:t>
+            </a:r>
+            <a:endParaRPr lang="en-US" altLang="ko-KR" dirty="0"/>
           </a:p>
           <a:p>
             <a:pPr marL="285750" indent="-285750">
@@ -17801,28 +17753,8 @@
               <a:buChar char="-"/>
             </a:pPr>
             <a:r>
-              <a:rPr lang="en-US" altLang="ko-KR" dirty="0"/>
-              <a:t>K</a:t>
-            </a:r>
-            <a:r>
               <a:rPr lang="ko-KR" altLang="en-US" dirty="0"/>
-              <a:t>번 반복하여 하나의 </a:t>
-            </a:r>
-            <a:r>
-              <a:rPr lang="ko-KR" altLang="en-US" dirty="0" err="1"/>
-              <a:t>폴드는</a:t>
-            </a:r>
-            <a:r>
-              <a:rPr lang="ko-KR" altLang="en-US" dirty="0"/>
-              <a:t> 검증용으로 사용하고 나머지 </a:t>
-            </a:r>
-            <a:r>
-              <a:rPr lang="ko-KR" altLang="en-US" dirty="0" err="1"/>
-              <a:t>폴드는</a:t>
-            </a:r>
-            <a:r>
-              <a:rPr lang="ko-KR" altLang="en-US" dirty="0"/>
-              <a:t> 학습용으로 사용</a:t>
+              <a:t>데이터의 밀도를 이용하여 군집을 생성</a:t>
             </a:r>
             <a:endParaRPr lang="en-US" altLang="ko-KR" dirty="0"/>
           </a:p>
@@ -17833,15 +17765,7 @@
             </a:pPr>
             <a:r>
               <a:rPr lang="ko-KR" altLang="en-US" dirty="0"/>
-              <a:t>모든 </a:t>
-            </a:r>
-            <a:r>
-              <a:rPr lang="ko-KR" altLang="en-US" dirty="0" err="1"/>
-              <a:t>폴드는</a:t>
-            </a:r>
-            <a:r>
-              <a:rPr lang="ko-KR" altLang="en-US" dirty="0"/>
-              <a:t> 한번은 검증용으로 사용</a:t>
+              <a:t>데이터의 밀도가 높은 지역을 하나의 군집으로 생성</a:t>
             </a:r>
             <a:endParaRPr lang="en-US" altLang="ko-KR" dirty="0"/>
           </a:p>
@@ -17852,7 +17776,48 @@
             </a:pPr>
             <a:r>
               <a:rPr lang="ko-KR" altLang="en-US" dirty="0"/>
-              <a:t>데이터의 수가 적을 때 모델의 성능을 안정적으로 평가 할 수 있는 방법</a:t>
+              <a:t>밀도가 낮은 지역을 노이즈로 판단</a:t>
+            </a:r>
+            <a:endParaRPr lang="en-US" altLang="ko-KR" dirty="0"/>
+          </a:p>
+          <a:p>
+            <a:pPr marL="285750" indent="-285750">
+              <a:buFontTx/>
+              <a:buChar char="-"/>
+            </a:pPr>
+            <a:r>
+              <a:rPr lang="en-US" altLang="ko-KR" dirty="0"/>
+              <a:t>K-</a:t>
+            </a:r>
+            <a:r>
+              <a:rPr lang="en-US" altLang="ko-KR" dirty="0" err="1"/>
+              <a:t>Meas</a:t>
+            </a:r>
+            <a:r>
+              <a:rPr lang="ko-KR" altLang="en-US" dirty="0"/>
+              <a:t>와의 다르게 군집의 개수를 지정 하지 않아도 됨</a:t>
+            </a:r>
+            <a:endParaRPr lang="en-US" altLang="ko-KR" dirty="0"/>
+          </a:p>
+          <a:p>
+            <a:pPr marL="285750" indent="-285750">
+              <a:buFontTx/>
+              <a:buChar char="-"/>
+            </a:pPr>
+            <a:r>
+              <a:rPr lang="ko-KR" altLang="en-US" dirty="0"/>
+              <a:t>비선형 구조의 데이터에서도 군집이 형성이 가능</a:t>
+            </a:r>
+            <a:endParaRPr lang="en-US" altLang="ko-KR" dirty="0"/>
+          </a:p>
+          <a:p>
+            <a:pPr marL="285750" indent="-285750">
+              <a:buFontTx/>
+              <a:buChar char="-"/>
+            </a:pPr>
+            <a:r>
+              <a:rPr lang="ko-KR" altLang="en-US" dirty="0"/>
+              <a:t>노이즈를 판단함으로 이상치 자동 감지</a:t>
             </a:r>
             <a:endParaRPr lang="en-US" altLang="ko-KR" dirty="0"/>
           </a:p>
@@ -17882,7 +17847,7 @@
           <a:p>
             <a:r>
               <a:rPr lang="en-US" altLang="ko-KR" sz="2400" dirty="0"/>
-              <a:t>K-fold</a:t>
+              <a:t>DBSCAN</a:t>
             </a:r>
             <a:endParaRPr lang="ko-KR" altLang="en-US" sz="2300" dirty="0"/>
           </a:p>
@@ -17891,7 +17856,7 @@
     </p:spTree>
     <p:extLst>
       <p:ext uri="{BB962C8B-B14F-4D97-AF65-F5344CB8AC3E}">
-        <p14:creationId xmlns:p14="http://schemas.microsoft.com/office/powerpoint/2010/main" val="2763876966"/>
+        <p14:creationId xmlns:p14="http://schemas.microsoft.com/office/powerpoint/2010/main" val="3713074351"/>
       </p:ext>
     </p:extLst>
   </p:cSld>
@@ -18056,7 +18021,7 @@
         <p:spPr>
           <a:xfrm>
             <a:off x="971600" y="1700955"/>
-            <a:ext cx="7200800" cy="1200329"/>
+            <a:ext cx="7200800" cy="2862322"/>
           </a:xfrm>
           <a:prstGeom prst="rect">
             <a:avLst/>
@@ -18075,7 +18040,7 @@
             </a:pPr>
             <a:r>
               <a:rPr lang="ko-KR" altLang="en-US" dirty="0"/>
-              <a:t>매개변수의 조합을 탐색하여 최적의 조합을 찾는 방법</a:t>
+              <a:t>차원 축소 기법</a:t>
             </a:r>
             <a:endParaRPr lang="en-US" altLang="ko-KR" dirty="0"/>
           </a:p>
@@ -18086,15 +18051,7 @@
             </a:pPr>
             <a:r>
               <a:rPr lang="ko-KR" altLang="en-US" dirty="0"/>
-              <a:t>각각의 매개변수 조합 별로 학습</a:t>
-            </a:r>
-            <a:r>
-              <a:rPr lang="en-US" altLang="ko-KR" dirty="0"/>
-              <a:t>, </a:t>
-            </a:r>
-            <a:r>
-              <a:rPr lang="ko-KR" altLang="en-US" dirty="0"/>
-              <a:t>검증을 진행</a:t>
+              <a:t>고차원의 데이터에서 상관 관계가 없는 새로운 축으로 변환 </a:t>
             </a:r>
             <a:endParaRPr lang="en-US" altLang="ko-KR" dirty="0"/>
           </a:p>
@@ -18105,7 +18062,77 @@
             </a:pPr>
             <a:r>
               <a:rPr lang="ko-KR" altLang="en-US" dirty="0"/>
-              <a:t>매개변수 별 성능을 체크하여 최적의 매개변수의 값을 확인하는 교차 검증</a:t>
+              <a:t>데이터의 분산을 최대한 보존하면서 차원을 줄여서 시각화에서 주로 사용</a:t>
+            </a:r>
+            <a:endParaRPr lang="en-US" altLang="ko-KR" dirty="0"/>
+          </a:p>
+          <a:p>
+            <a:pPr marL="285750" indent="-285750">
+              <a:buFontTx/>
+              <a:buChar char="-"/>
+            </a:pPr>
+            <a:r>
+              <a:rPr lang="ko-KR" altLang="en-US" dirty="0"/>
+              <a:t>장점</a:t>
+            </a:r>
+            <a:endParaRPr lang="en-US" altLang="ko-KR" dirty="0"/>
+          </a:p>
+          <a:p>
+            <a:pPr marL="742950" lvl="1" indent="-285750">
+              <a:buFontTx/>
+              <a:buChar char="-"/>
+            </a:pPr>
+            <a:r>
+              <a:rPr lang="ko-KR" altLang="en-US" dirty="0"/>
+              <a:t>차원 축소로 계산의 속도 향상</a:t>
+            </a:r>
+            <a:endParaRPr lang="en-US" altLang="ko-KR" dirty="0"/>
+          </a:p>
+          <a:p>
+            <a:pPr marL="742950" lvl="1" indent="-285750">
+              <a:buFontTx/>
+              <a:buChar char="-"/>
+            </a:pPr>
+            <a:r>
+              <a:rPr lang="ko-KR" altLang="en-US" dirty="0"/>
+              <a:t>노이즈 제거 효과</a:t>
+            </a:r>
+            <a:endParaRPr lang="en-US" altLang="ko-KR" dirty="0"/>
+          </a:p>
+          <a:p>
+            <a:pPr marL="285750" indent="-285750">
+              <a:buFontTx/>
+              <a:buChar char="-"/>
+            </a:pPr>
+            <a:r>
+              <a:rPr lang="ko-KR" altLang="en-US" dirty="0"/>
+              <a:t>단점</a:t>
+            </a:r>
+            <a:endParaRPr lang="en-US" altLang="ko-KR" dirty="0"/>
+          </a:p>
+          <a:p>
+            <a:pPr marL="742950" lvl="1" indent="-285750">
+              <a:buFontTx/>
+              <a:buChar char="-"/>
+            </a:pPr>
+            <a:r>
+              <a:rPr lang="ko-KR" altLang="en-US" dirty="0"/>
+              <a:t>해석이 </a:t>
+            </a:r>
+            <a:r>
+              <a:rPr lang="ko-KR" altLang="en-US" dirty="0" err="1"/>
+              <a:t>어려워짐</a:t>
+            </a:r>
+            <a:endParaRPr lang="en-US" altLang="ko-KR" dirty="0"/>
+          </a:p>
+          <a:p>
+            <a:pPr marL="742950" lvl="1" indent="-285750">
+              <a:buFontTx/>
+              <a:buChar char="-"/>
+            </a:pPr>
+            <a:r>
+              <a:rPr lang="ko-KR" altLang="en-US" dirty="0"/>
+              <a:t>비선형 구조에서는 부적합</a:t>
             </a:r>
             <a:endParaRPr lang="en-US" altLang="ko-KR" dirty="0"/>
           </a:p>
@@ -18134,8 +18161,8 @@
           <a:lstStyle/>
           <a:p>
             <a:r>
-              <a:rPr lang="en-US" altLang="ko-KR" sz="2400" dirty="0" err="1"/>
-              <a:t>GridSerachCV</a:t>
+              <a:rPr lang="en-US" altLang="ko-KR" sz="2400" dirty="0"/>
+              <a:t>PCA</a:t>
             </a:r>
             <a:endParaRPr lang="ko-KR" altLang="en-US" sz="2300" dirty="0"/>
           </a:p>
@@ -18144,7 +18171,7 @@
     </p:spTree>
     <p:extLst>
       <p:ext uri="{BB962C8B-B14F-4D97-AF65-F5344CB8AC3E}">
-        <p14:creationId xmlns:p14="http://schemas.microsoft.com/office/powerpoint/2010/main" val="2956039162"/>
+        <p14:creationId xmlns:p14="http://schemas.microsoft.com/office/powerpoint/2010/main" val="1106478625"/>
       </p:ext>
     </p:extLst>
   </p:cSld>
@@ -18309,7 +18336,7 @@
         <p:spPr>
           <a:xfrm>
             <a:off x="971600" y="1700955"/>
-            <a:ext cx="7200800" cy="3693319"/>
+            <a:ext cx="7200800" cy="3139321"/>
           </a:xfrm>
           <a:prstGeom prst="rect">
             <a:avLst/>
@@ -18327,12 +18354,8 @@
               <a:buChar char="-"/>
             </a:pPr>
             <a:r>
-              <a:rPr lang="ko-KR" altLang="en-US" dirty="0" err="1"/>
-              <a:t>머신러닝</a:t>
-            </a:r>
-            <a:r>
               <a:rPr lang="ko-KR" altLang="en-US" dirty="0"/>
-              <a:t> 학습 과정을 하나의 연속된 흐름으로 묶는 도구</a:t>
+              <a:t>차원 축소 기법</a:t>
             </a:r>
             <a:endParaRPr lang="en-US" altLang="ko-KR" dirty="0"/>
           </a:p>
@@ -18343,31 +18366,23 @@
             </a:pPr>
             <a:r>
               <a:rPr lang="ko-KR" altLang="en-US" dirty="0"/>
-              <a:t>데이터의 </a:t>
-            </a:r>
-            <a:r>
-              <a:rPr lang="ko-KR" altLang="en-US" dirty="0" err="1"/>
-              <a:t>전처리</a:t>
+              <a:t>고차원의 데이터를</a:t>
+            </a:r>
+            <a:r>
+              <a:rPr lang="en-US" altLang="ko-KR" dirty="0"/>
+              <a:t> 2</a:t>
             </a:r>
             <a:r>
               <a:rPr lang="ko-KR" altLang="en-US" dirty="0"/>
-              <a:t> 과정</a:t>
+              <a:t>차원이나 </a:t>
             </a:r>
             <a:r>
               <a:rPr lang="en-US" altLang="ko-KR" dirty="0"/>
-              <a:t>, </a:t>
+              <a:t>3</a:t>
             </a:r>
             <a:r>
               <a:rPr lang="ko-KR" altLang="en-US" dirty="0"/>
-              <a:t>모델의 학습</a:t>
-            </a:r>
-            <a:r>
-              <a:rPr lang="en-US" altLang="ko-KR" dirty="0"/>
-              <a:t>, </a:t>
-            </a:r>
-            <a:r>
-              <a:rPr lang="ko-KR" altLang="en-US" dirty="0"/>
-              <a:t>예측 과 같은 흐름을 하나로 연결하는 기능</a:t>
+              <a:t>차원으로 시각화 하기 위한 비선형 차원 축소 기법</a:t>
             </a:r>
             <a:endParaRPr lang="en-US" altLang="ko-KR" dirty="0"/>
           </a:p>
@@ -18378,6 +18393,33 @@
             </a:pPr>
             <a:r>
               <a:rPr lang="ko-KR" altLang="en-US" dirty="0"/>
+              <a:t>데이터 간의 거리 유사도를 최대한 유지하면서 </a:t>
+            </a:r>
+            <a:r>
+              <a:rPr lang="en-US" altLang="ko-KR" dirty="0"/>
+              <a:t>2</a:t>
+            </a:r>
+            <a:r>
+              <a:rPr lang="ko-KR" altLang="en-US" dirty="0"/>
+              <a:t>차원이나 </a:t>
+            </a:r>
+            <a:r>
+              <a:rPr lang="en-US" altLang="ko-KR" dirty="0"/>
+              <a:t>3</a:t>
+            </a:r>
+            <a:r>
+              <a:rPr lang="ko-KR" altLang="en-US" dirty="0"/>
+              <a:t>차원 공간으로 표현</a:t>
+            </a:r>
+            <a:endParaRPr lang="en-US" altLang="ko-KR" dirty="0"/>
+          </a:p>
+          <a:p>
+            <a:pPr marL="285750" indent="-285750">
+              <a:buFontTx/>
+              <a:buChar char="-"/>
+            </a:pPr>
+            <a:r>
+              <a:rPr lang="ko-KR" altLang="en-US" dirty="0"/>
               <a:t>장점</a:t>
             </a:r>
             <a:endParaRPr lang="en-US" altLang="ko-KR" dirty="0"/>
@@ -18389,7 +18431,7 @@
             </a:pPr>
             <a:r>
               <a:rPr lang="ko-KR" altLang="en-US" dirty="0"/>
-              <a:t>코드의 간결화 및 자동화</a:t>
+              <a:t>고차원 데이터의 구조를 시각적으로 이해 가능</a:t>
             </a:r>
             <a:endParaRPr lang="en-US" altLang="ko-KR" dirty="0"/>
           </a:p>
@@ -18400,7 +18442,18 @@
             </a:pPr>
             <a:r>
               <a:rPr lang="ko-KR" altLang="en-US" dirty="0"/>
-              <a:t>일관성을 유지하여 반복 실험의 결과가 안정적</a:t>
+              <a:t>비선형 관계 표현력 높음 </a:t>
+            </a:r>
+            <a:endParaRPr lang="en-US" altLang="ko-KR" dirty="0"/>
+          </a:p>
+          <a:p>
+            <a:pPr marL="285750" indent="-285750">
+              <a:buFontTx/>
+              <a:buChar char="-"/>
+            </a:pPr>
+            <a:r>
+              <a:rPr lang="ko-KR" altLang="en-US" dirty="0"/>
+              <a:t>단점</a:t>
             </a:r>
             <a:endParaRPr lang="en-US" altLang="ko-KR" dirty="0"/>
           </a:p>
@@ -18410,8 +18463,12 @@
               <a:buChar char="-"/>
             </a:pPr>
             <a:r>
+              <a:rPr lang="ko-KR" altLang="en-US" dirty="0" err="1"/>
+              <a:t>계산량이</a:t>
+            </a:r>
+            <a:r>
               <a:rPr lang="ko-KR" altLang="en-US" dirty="0"/>
-              <a:t>재사용성이 높음</a:t>
+              <a:t> 많기 때문에 느림</a:t>
             </a:r>
             <a:endParaRPr lang="en-US" altLang="ko-KR" dirty="0"/>
           </a:p>
@@ -18422,62 +18479,7 @@
             </a:pPr>
             <a:r>
               <a:rPr lang="ko-KR" altLang="en-US" dirty="0"/>
-              <a:t>교차 검증과 연동이 용이</a:t>
-            </a:r>
-            <a:endParaRPr lang="en-US" altLang="ko-KR" dirty="0"/>
-          </a:p>
-          <a:p>
-            <a:pPr marL="742950" lvl="1" indent="-285750">
-              <a:buFontTx/>
-              <a:buChar char="-"/>
-            </a:pPr>
-            <a:r>
-              <a:rPr lang="ko-KR" altLang="en-US" dirty="0"/>
-              <a:t>데이터의 누수 방지</a:t>
-            </a:r>
-            <a:endParaRPr lang="en-US" altLang="ko-KR" dirty="0"/>
-          </a:p>
-          <a:p>
-            <a:pPr marL="285750" indent="-285750">
-              <a:buFontTx/>
-              <a:buChar char="-"/>
-            </a:pPr>
-            <a:r>
-              <a:rPr lang="ko-KR" altLang="en-US" dirty="0"/>
-              <a:t>단점</a:t>
-            </a:r>
-            <a:endParaRPr lang="en-US" altLang="ko-KR" dirty="0"/>
-          </a:p>
-          <a:p>
-            <a:pPr marL="742950" lvl="1" indent="-285750">
-              <a:buFontTx/>
-              <a:buChar char="-"/>
-            </a:pPr>
-            <a:r>
-              <a:rPr lang="ko-KR" altLang="en-US" dirty="0"/>
-              <a:t>오류 추적이 어려움</a:t>
-            </a:r>
-            <a:endParaRPr lang="en-US" altLang="ko-KR" dirty="0"/>
-          </a:p>
-          <a:p>
-            <a:pPr marL="742950" lvl="1" indent="-285750">
-              <a:buFontTx/>
-              <a:buChar char="-"/>
-            </a:pPr>
-            <a:r>
-              <a:rPr lang="ko-KR" altLang="en-US" dirty="0"/>
-              <a:t>파이프는 순차적으로 진행됨으로 병렬처리에 제약</a:t>
-            </a:r>
-            <a:endParaRPr lang="en-US" altLang="ko-KR" dirty="0"/>
-          </a:p>
-          <a:p>
-            <a:pPr marL="742950" lvl="1" indent="-285750">
-              <a:buFontTx/>
-              <a:buChar char="-"/>
-            </a:pPr>
-            <a:r>
-              <a:rPr lang="ko-KR" altLang="en-US"/>
-              <a:t>학습 시간의 증가 </a:t>
+              <a:t>축소된 좌표 자체는 해석이 불가능</a:t>
             </a:r>
             <a:endParaRPr lang="en-US" altLang="ko-KR" dirty="0"/>
           </a:p>
@@ -18507,7 +18509,7 @@
           <a:p>
             <a:r>
               <a:rPr lang="en-US" altLang="ko-KR" sz="2400" dirty="0"/>
-              <a:t>Pipeline</a:t>
+              <a:t>t-SNE</a:t>
             </a:r>
             <a:endParaRPr lang="ko-KR" altLang="en-US" sz="2300" dirty="0"/>
           </a:p>
@@ -18516,7 +18518,7 @@
     </p:spTree>
     <p:extLst>
       <p:ext uri="{BB962C8B-B14F-4D97-AF65-F5344CB8AC3E}">
-        <p14:creationId xmlns:p14="http://schemas.microsoft.com/office/powerpoint/2010/main" val="3339269903"/>
+        <p14:creationId xmlns:p14="http://schemas.microsoft.com/office/powerpoint/2010/main" val="2741370986"/>
       </p:ext>
     </p:extLst>
   </p:cSld>
@@ -20239,8 +20241,8 @@
           </a:p>
         </p:txBody>
       </p:sp>
-      <mc:AlternateContent xmlns:mc="http://schemas.openxmlformats.org/markup-compatibility/2006">
-        <mc:Choice xmlns:a14="http://schemas.microsoft.com/office/drawing/2010/main" Requires="a14">
+      <mc:AlternateContent xmlns:mc="http://schemas.openxmlformats.org/markup-compatibility/2006" xmlns:a14="http://schemas.microsoft.com/office/drawing/2010/main">
+        <mc:Choice Requires="a14">
           <p:sp>
             <p:nvSpPr>
               <p:cNvPr id="4" name="TextBox 3"/>
@@ -21058,7 +21060,7 @@
             </p:txBody>
           </p:sp>
         </mc:Choice>
-        <mc:Fallback>
+        <mc:Fallback xmlns="">
           <p:sp>
             <p:nvSpPr>
               <p:cNvPr id="4" name="TextBox 3"/>
